--- a/storytelling/Storytelling.pptx
+++ b/storytelling/Storytelling.pptx
@@ -10,11 +10,13 @@
     <p:sldId id="257" r:id="rId4"/>
     <p:sldId id="261" r:id="rId5"/>
     <p:sldId id="262" r:id="rId6"/>
-    <p:sldId id="260" r:id="rId7"/>
-    <p:sldId id="263" r:id="rId8"/>
-    <p:sldId id="264" r:id="rId9"/>
-    <p:sldId id="265" r:id="rId10"/>
-    <p:sldId id="259" r:id="rId11"/>
+    <p:sldId id="263" r:id="rId7"/>
+    <p:sldId id="264" r:id="rId8"/>
+    <p:sldId id="260" r:id="rId9"/>
+    <p:sldId id="266" r:id="rId10"/>
+    <p:sldId id="267" r:id="rId11"/>
+    <p:sldId id="259" r:id="rId12"/>
+    <p:sldId id="265" r:id="rId13"/>
   </p:sldIdLst>
   <p:sldSz cx="12192000" cy="6858000"/>
   <p:notesSz cx="6858000" cy="9144000"/>
@@ -123,11 +125,13 @@
             <p14:sldId id="257"/>
             <p14:sldId id="261"/>
             <p14:sldId id="262"/>
-            <p14:sldId id="260"/>
             <p14:sldId id="263"/>
             <p14:sldId id="264"/>
+            <p14:sldId id="260"/>
+            <p14:sldId id="266"/>
+            <p14:sldId id="267"/>
+            <p14:sldId id="259"/>
             <p14:sldId id="265"/>
-            <p14:sldId id="259"/>
           </p14:sldIdLst>
         </p14:section>
       </p14:sectionLst>
@@ -171,7 +175,7 @@
             </a:pPr>
             <a:r>
               <a:rPr lang="pl-PL" dirty="0"/>
-              <a:t>Suma wyświetleń w latach 2018 – 2026 [mln]</a:t>
+              <a:t>Suma wyświetleń w latach 2018 – 2026 wg kategorii [mln][6]</a:t>
             </a:r>
             <a:endParaRPr lang="en-US" dirty="0"/>
           </a:p>
@@ -1072,7 +1076,7 @@
               <a:cs typeface="+mn-cs"/>
             </a:defRPr>
           </a:pPr>
-          <a:endParaRPr lang="pl-PL"/>
+          <a:endParaRPr lang="en-US"/>
         </a:p>
       </c:txPr>
     </c:title>
@@ -1785,7 +1789,7 @@
               <a:cs typeface="+mn-cs"/>
             </a:defRPr>
           </a:pPr>
-          <a:endParaRPr lang="pl-PL"/>
+          <a:endParaRPr lang="en-US"/>
         </a:p>
       </c:txPr>
     </c:title>
@@ -1886,6 +1890,9 @@
               <c:extLst>
                 <c:ext xmlns:c15="http://schemas.microsoft.com/office/drawing/2012/chart" uri="{CE6537A1-D6FC-4f65-9D91-7224C49458BB}">
                   <c15:showDataLabelsRange val="0"/>
+                </c:ext>
+                <c:ext xmlns:c16="http://schemas.microsoft.com/office/drawing/2014/chart" uri="{C3380CC4-5D6E-409C-BE32-E72D297353CC}">
+                  <c16:uniqueId val="{00000000-6603-405E-B21C-BFF645A67AEA}"/>
                 </c:ext>
               </c:extLst>
             </c:dLbl>
@@ -1959,16 +1966,13 @@
                       <a:buFontTx/>
                       <a:buNone/>
                       <a:tabLst/>
-                      <a:defRPr sz="1197" b="0" i="0" u="none" strike="noStrike" kern="1200" baseline="0">
+                      <a:defRPr>
                         <a:solidFill>
                           <a:srgbClr val="000000">
                             <a:lumMod val="65000"/>
                             <a:lumOff val="35000"/>
                           </a:srgbClr>
                         </a:solidFill>
-                        <a:latin typeface="+mn-lt"/>
-                        <a:ea typeface="+mn-ea"/>
-                        <a:cs typeface="+mn-cs"/>
                       </a:defRPr>
                     </a:pPr>
                     <a:endParaRPr lang="pl-PL" dirty="0"/>
@@ -2171,16 +2175,13 @@
                       <a:buFontTx/>
                       <a:buNone/>
                       <a:tabLst/>
-                      <a:defRPr sz="1197" b="0" i="0" u="none" strike="noStrike" kern="1200" baseline="0">
+                      <a:defRPr>
                         <a:solidFill>
                           <a:srgbClr val="000000">
                             <a:lumMod val="65000"/>
                             <a:lumOff val="35000"/>
                           </a:srgbClr>
                         </a:solidFill>
-                        <a:latin typeface="+mn-lt"/>
-                        <a:ea typeface="+mn-ea"/>
-                        <a:cs typeface="+mn-cs"/>
                       </a:defRPr>
                     </a:pPr>
                     <a:endParaRPr lang="en-US" dirty="0"/>
@@ -2275,6 +2276,9 @@
                   </c15:spPr>
                   <c15:showDataLabelsRange val="0"/>
                 </c:ext>
+                <c:ext xmlns:c16="http://schemas.microsoft.com/office/drawing/2014/chart" uri="{C3380CC4-5D6E-409C-BE32-E72D297353CC}">
+                  <c16:uniqueId val="{00000001-6603-405E-B21C-BFF645A67AEA}"/>
+                </c:ext>
               </c:extLst>
             </c:dLbl>
             <c:dLbl>
@@ -2319,6 +2323,9 @@
               <c:extLst>
                 <c:ext xmlns:c15="http://schemas.microsoft.com/office/drawing/2012/chart" uri="{CE6537A1-D6FC-4f65-9D91-7224C49458BB}">
                   <c15:showDataLabelsRange val="0"/>
+                </c:ext>
+                <c:ext xmlns:c16="http://schemas.microsoft.com/office/drawing/2014/chart" uri="{C3380CC4-5D6E-409C-BE32-E72D297353CC}">
+                  <c16:uniqueId val="{00000002-6603-405E-B21C-BFF645A67AEA}"/>
                 </c:ext>
               </c:extLst>
             </c:dLbl>
@@ -3221,11 +3228,11 @@
             </a:r>
             <a:r>
               <a:rPr lang="pl-PL" baseline="0" dirty="0"/>
-              <a:t> stron </a:t>
+              <a:t> strony Iga Świątek</a:t>
             </a:r>
             <a:r>
               <a:rPr lang="pl-PL" dirty="0"/>
-              <a:t>Republika Zielonego Przylądka oraz Curaçao [tys.][2][3]</a:t>
+              <a:t> [tys.][2][3]</a:t>
             </a:r>
             <a:endParaRPr lang="en-US" dirty="0"/>
           </a:p>
@@ -3256,7 +3263,7 @@
               <a:cs typeface="+mn-cs"/>
             </a:defRPr>
           </a:pPr>
-          <a:endParaRPr lang="pl-PL"/>
+          <a:endParaRPr lang="en-US"/>
         </a:p>
       </c:txPr>
     </c:title>
@@ -3268,9 +3275,9 @@
           <c:xMode val="edge"/>
           <c:yMode val="edge"/>
           <c:x val="5.3603301286851403E-2"/>
-          <c:y val="0.16926678644591617"/>
+          <c:y val="0.10213800904457435"/>
           <c:w val="0.94418872912625051"/>
-          <c:h val="0.58001194115465171"/>
+          <c:h val="0.64714071855599353"/>
         </c:manualLayout>
       </c:layout>
       <c:lineChart>
@@ -3285,7 +3292,7 @@
               <c:strCache>
                 <c:ptCount val="1"/>
                 <c:pt idx="0">
-                  <c:v>Republika Zielonego Przylądka</c:v>
+                  <c:v>Iga Świątek</c:v>
                 </c:pt>
               </c:strCache>
             </c:strRef>
@@ -3630,316 +3637,316 @@
                 <c:formatCode>General</c:formatCode>
                 <c:ptCount val="104"/>
                 <c:pt idx="0">
-                  <c:v>22551</c:v>
+                  <c:v>653</c:v>
                 </c:pt>
                 <c:pt idx="1">
-                  <c:v>20088</c:v>
+                  <c:v>1014</c:v>
                 </c:pt>
                 <c:pt idx="2">
-                  <c:v>18648</c:v>
+                  <c:v>496</c:v>
                 </c:pt>
                 <c:pt idx="3">
-                  <c:v>15304</c:v>
+                  <c:v>3007</c:v>
                 </c:pt>
                 <c:pt idx="4">
-                  <c:v>16017</c:v>
+                  <c:v>3760</c:v>
                 </c:pt>
                 <c:pt idx="5">
-                  <c:v>20793</c:v>
+                  <c:v>8328</c:v>
                 </c:pt>
                 <c:pt idx="6">
-                  <c:v>24073</c:v>
+                  <c:v>36928</c:v>
                 </c:pt>
                 <c:pt idx="7">
-                  <c:v>20587</c:v>
+                  <c:v>2477</c:v>
                 </c:pt>
                 <c:pt idx="8">
-                  <c:v>21821</c:v>
+                  <c:v>6395</c:v>
                 </c:pt>
                 <c:pt idx="9">
-                  <c:v>20866</c:v>
+                  <c:v>3673</c:v>
                 </c:pt>
                 <c:pt idx="10">
-                  <c:v>20681</c:v>
+                  <c:v>2409</c:v>
                 </c:pt>
                 <c:pt idx="11">
-                  <c:v>20276</c:v>
+                  <c:v>3302</c:v>
                 </c:pt>
                 <c:pt idx="12">
-                  <c:v>22216</c:v>
+                  <c:v>16784</c:v>
                 </c:pt>
                 <c:pt idx="13">
-                  <c:v>20603</c:v>
+                  <c:v>6414</c:v>
                 </c:pt>
                 <c:pt idx="14">
-                  <c:v>19292</c:v>
+                  <c:v>2878</c:v>
                 </c:pt>
                 <c:pt idx="15">
-                  <c:v>11804</c:v>
+                  <c:v>21265</c:v>
                 </c:pt>
                 <c:pt idx="16">
-                  <c:v>12443</c:v>
+                  <c:v>10211</c:v>
                 </c:pt>
                 <c:pt idx="17">
-                  <c:v>15614</c:v>
+                  <c:v>16548</c:v>
                 </c:pt>
                 <c:pt idx="18">
-                  <c:v>18295</c:v>
+                  <c:v>5133</c:v>
                 </c:pt>
                 <c:pt idx="19">
-                  <c:v>34271</c:v>
+                  <c:v>17307</c:v>
                 </c:pt>
                 <c:pt idx="20">
-                  <c:v>32728</c:v>
+                  <c:v>2028</c:v>
                 </c:pt>
                 <c:pt idx="21">
-                  <c:v>16496</c:v>
+                  <c:v>935</c:v>
                 </c:pt>
                 <c:pt idx="22">
-                  <c:v>15918</c:v>
+                  <c:v>1242</c:v>
                 </c:pt>
                 <c:pt idx="23">
-                  <c:v>14647</c:v>
+                  <c:v>874</c:v>
                 </c:pt>
                 <c:pt idx="24">
-                  <c:v>18428</c:v>
+                  <c:v>14186</c:v>
                 </c:pt>
                 <c:pt idx="25">
-                  <c:v>13301</c:v>
+                  <c:v>3070</c:v>
                 </c:pt>
                 <c:pt idx="26">
-                  <c:v>10989</c:v>
+                  <c:v>893</c:v>
                 </c:pt>
                 <c:pt idx="27">
-                  <c:v>7888</c:v>
+                  <c:v>1805</c:v>
                 </c:pt>
                 <c:pt idx="28">
-                  <c:v>7726</c:v>
+                  <c:v>1251</c:v>
                 </c:pt>
                 <c:pt idx="29">
-                  <c:v>5652</c:v>
+                  <c:v>1693</c:v>
                 </c:pt>
                 <c:pt idx="30">
-                  <c:v>7029</c:v>
+                  <c:v>1202</c:v>
                 </c:pt>
                 <c:pt idx="31">
-                  <c:v>6579</c:v>
+                  <c:v>2605</c:v>
                 </c:pt>
                 <c:pt idx="32">
-                  <c:v>6880</c:v>
+                  <c:v>7774</c:v>
                 </c:pt>
                 <c:pt idx="33">
-                  <c:v>6468</c:v>
+                  <c:v>572375</c:v>
                 </c:pt>
                 <c:pt idx="34">
-                  <c:v>7657</c:v>
+                  <c:v>17233</c:v>
                 </c:pt>
                 <c:pt idx="35">
-                  <c:v>8879</c:v>
+                  <c:v>11320</c:v>
                 </c:pt>
                 <c:pt idx="36">
-                  <c:v>14813</c:v>
+                  <c:v>23791</c:v>
                 </c:pt>
                 <c:pt idx="37">
-                  <c:v>10721</c:v>
+                  <c:v>67800</c:v>
                 </c:pt>
                 <c:pt idx="38">
-                  <c:v>15336</c:v>
+                  <c:v>27164</c:v>
                 </c:pt>
                 <c:pt idx="39">
-                  <c:v>15873</c:v>
+                  <c:v>15187</c:v>
                 </c:pt>
                 <c:pt idx="40">
-                  <c:v>13452</c:v>
+                  <c:v>54552</c:v>
                 </c:pt>
                 <c:pt idx="41">
-                  <c:v>18018</c:v>
+                  <c:v>75102</c:v>
                 </c:pt>
                 <c:pt idx="42">
-                  <c:v>18029</c:v>
+                  <c:v>42576</c:v>
                 </c:pt>
                 <c:pt idx="43">
-                  <c:v>17484</c:v>
+                  <c:v>7114</c:v>
                 </c:pt>
                 <c:pt idx="44">
-                  <c:v>18591</c:v>
+                  <c:v>17297</c:v>
                 </c:pt>
                 <c:pt idx="45">
-                  <c:v>20359</c:v>
+                  <c:v>7917</c:v>
                 </c:pt>
                 <c:pt idx="46">
-                  <c:v>17381</c:v>
+                  <c:v>9354</c:v>
                 </c:pt>
                 <c:pt idx="47">
-                  <c:v>14139</c:v>
+                  <c:v>6321</c:v>
                 </c:pt>
                 <c:pt idx="48">
-                  <c:v>21102</c:v>
+                  <c:v>66418</c:v>
                 </c:pt>
                 <c:pt idx="49">
-                  <c:v>13575</c:v>
+                  <c:v>21482</c:v>
                 </c:pt>
                 <c:pt idx="50">
-                  <c:v>16139</c:v>
+                  <c:v>78025</c:v>
                 </c:pt>
                 <c:pt idx="51">
-                  <c:v>12940</c:v>
+                  <c:v>120751</c:v>
                 </c:pt>
                 <c:pt idx="52">
-                  <c:v>12287</c:v>
+                  <c:v>102025</c:v>
                 </c:pt>
                 <c:pt idx="53">
-                  <c:v>11969</c:v>
+                  <c:v>251771</c:v>
                 </c:pt>
                 <c:pt idx="54">
-                  <c:v>15070</c:v>
+                  <c:v>37087</c:v>
                 </c:pt>
                 <c:pt idx="55">
-                  <c:v>14212</c:v>
+                  <c:v>15795</c:v>
                 </c:pt>
                 <c:pt idx="56">
-                  <c:v>12952</c:v>
+                  <c:v>155521</c:v>
                 </c:pt>
                 <c:pt idx="57">
-                  <c:v>13750</c:v>
+                  <c:v>38265</c:v>
                 </c:pt>
                 <c:pt idx="58">
-                  <c:v>15068</c:v>
+                  <c:v>24337</c:v>
                 </c:pt>
                 <c:pt idx="59">
-                  <c:v>16377</c:v>
+                  <c:v>14462</c:v>
                 </c:pt>
                 <c:pt idx="60">
-                  <c:v>20988</c:v>
+                  <c:v>88435</c:v>
                 </c:pt>
                 <c:pt idx="61">
-                  <c:v>16314</c:v>
+                  <c:v>51815</c:v>
                 </c:pt>
                 <c:pt idx="62">
-                  <c:v>16029</c:v>
+                  <c:v>29360</c:v>
                 </c:pt>
                 <c:pt idx="63">
-                  <c:v>15490</c:v>
+                  <c:v>36341</c:v>
                 </c:pt>
                 <c:pt idx="64">
-                  <c:v>16950</c:v>
+                  <c:v>62509</c:v>
                 </c:pt>
                 <c:pt idx="65">
-                  <c:v>16184</c:v>
+                  <c:v>270738</c:v>
                 </c:pt>
                 <c:pt idx="66">
-                  <c:v>16749</c:v>
+                  <c:v>125497</c:v>
                 </c:pt>
                 <c:pt idx="67">
-                  <c:v>19702</c:v>
+                  <c:v>49908</c:v>
                 </c:pt>
                 <c:pt idx="68">
-                  <c:v>18341</c:v>
+                  <c:v>40639</c:v>
                 </c:pt>
                 <c:pt idx="69">
-                  <c:v>20925</c:v>
+                  <c:v>32484</c:v>
                 </c:pt>
                 <c:pt idx="70">
-                  <c:v>22426</c:v>
+                  <c:v>77202</c:v>
                 </c:pt>
                 <c:pt idx="71">
-                  <c:v>24749</c:v>
+                  <c:v>20296</c:v>
                 </c:pt>
                 <c:pt idx="72">
-                  <c:v>36474</c:v>
+                  <c:v>87152</c:v>
                 </c:pt>
                 <c:pt idx="73">
-                  <c:v>26349</c:v>
+                  <c:v>58812</c:v>
                 </c:pt>
                 <c:pt idx="74">
-                  <c:v>23087</c:v>
+                  <c:v>77396</c:v>
                 </c:pt>
                 <c:pt idx="75">
-                  <c:v>19485</c:v>
+                  <c:v>48437</c:v>
                 </c:pt>
                 <c:pt idx="76">
-                  <c:v>18349</c:v>
+                  <c:v>175038</c:v>
                 </c:pt>
                 <c:pt idx="77">
-                  <c:v>15729</c:v>
+                  <c:v>240368</c:v>
                 </c:pt>
                 <c:pt idx="78">
-                  <c:v>20903</c:v>
+                  <c:v>97073</c:v>
                 </c:pt>
                 <c:pt idx="79">
-                  <c:v>18287</c:v>
+                  <c:v>118940</c:v>
                 </c:pt>
                 <c:pt idx="80">
-                  <c:v>19081</c:v>
+                  <c:v>40517</c:v>
                 </c:pt>
                 <c:pt idx="81">
-                  <c:v>20806</c:v>
+                  <c:v>23714</c:v>
                 </c:pt>
                 <c:pt idx="82">
-                  <c:v>23368</c:v>
+                  <c:v>27422</c:v>
                 </c:pt>
                 <c:pt idx="83">
-                  <c:v>24771</c:v>
+                  <c:v>15316</c:v>
                 </c:pt>
                 <c:pt idx="84">
-                  <c:v>29250</c:v>
+                  <c:v>88222</c:v>
                 </c:pt>
                 <c:pt idx="85">
-                  <c:v>24407</c:v>
+                  <c:v>28762</c:v>
                 </c:pt>
                 <c:pt idx="86">
-                  <c:v>26287</c:v>
+                  <c:v>28445</c:v>
                 </c:pt>
                 <c:pt idx="87">
-                  <c:v>18755</c:v>
+                  <c:v>17945</c:v>
                 </c:pt>
                 <c:pt idx="88">
-                  <c:v>17160</c:v>
+                  <c:v>29504</c:v>
                 </c:pt>
                 <c:pt idx="89">
-                  <c:v>18956</c:v>
+                  <c:v>59003</c:v>
                 </c:pt>
                 <c:pt idx="90">
-                  <c:v>22533</c:v>
+                  <c:v>370899</c:v>
                 </c:pt>
                 <c:pt idx="91">
-                  <c:v>26900</c:v>
+                  <c:v>88578</c:v>
                 </c:pt>
                 <c:pt idx="92">
-                  <c:v>31540</c:v>
+                  <c:v>69044</c:v>
                 </c:pt>
                 <c:pt idx="93">
-                  <c:v>42687</c:v>
+                  <c:v>22683</c:v>
                 </c:pt>
                 <c:pt idx="94">
-                  <c:v>27507</c:v>
+                  <c:v>25858</c:v>
                 </c:pt>
                 <c:pt idx="95">
-                  <c:v>25250</c:v>
+                  <c:v>14753</c:v>
                 </c:pt>
                 <c:pt idx="96">
-                  <c:v>28459</c:v>
+                  <c:v>70226</c:v>
                 </c:pt>
                 <c:pt idx="97">
-                  <c:v>23050</c:v>
+                  <c:v>27615</c:v>
                 </c:pt>
                 <c:pt idx="98">
-                  <c:v>23760</c:v>
+                  <c:v>27910</c:v>
                 </c:pt>
                 <c:pt idx="99">
-                  <c:v>21524</c:v>
+                  <c:v>21060</c:v>
                 </c:pt>
                 <c:pt idx="100">
-                  <c:v>24934</c:v>
+                  <c:v>50230</c:v>
                 </c:pt>
                 <c:pt idx="101">
-                  <c:v>338510</c:v>
+                  <c:v>139857</c:v>
                 </c:pt>
                 <c:pt idx="102">
-                  <c:v>176331</c:v>
+                  <c:v>31837</c:v>
                 </c:pt>
                 <c:pt idx="103">
-                  <c:v>19500</c:v>
+                  <c:v>48439</c:v>
                 </c:pt>
               </c:numCache>
             </c:numRef>
@@ -3948,681 +3955,6 @@
           <c:extLst>
             <c:ext xmlns:c16="http://schemas.microsoft.com/office/drawing/2014/chart" uri="{C3380CC4-5D6E-409C-BE32-E72D297353CC}">
               <c16:uniqueId val="{00000000-298A-42B4-BA2C-8AEEEEF9E6BE}"/>
-            </c:ext>
-          </c:extLst>
-        </c:ser>
-        <c:ser>
-          <c:idx val="1"/>
-          <c:order val="1"/>
-          <c:tx>
-            <c:strRef>
-              <c:f>Arkusz1!$C$1</c:f>
-              <c:strCache>
-                <c:ptCount val="1"/>
-                <c:pt idx="0">
-                  <c:v>Curaçao</c:v>
-                </c:pt>
-              </c:strCache>
-            </c:strRef>
-          </c:tx>
-          <c:spPr>
-            <a:ln w="28575" cap="rnd">
-              <a:solidFill>
-                <a:schemeClr val="accent2"/>
-              </a:solidFill>
-              <a:round/>
-            </a:ln>
-            <a:effectLst/>
-          </c:spPr>
-          <c:marker>
-            <c:symbol val="none"/>
-          </c:marker>
-          <c:cat>
-            <c:numRef>
-              <c:f>Arkusz1!$A$2:$A$105</c:f>
-              <c:numCache>
-                <c:formatCode>m/d/yyyy</c:formatCode>
-                <c:ptCount val="104"/>
-                <c:pt idx="0">
-                  <c:v>43101</c:v>
-                </c:pt>
-                <c:pt idx="1">
-                  <c:v>43132</c:v>
-                </c:pt>
-                <c:pt idx="2">
-                  <c:v>43160</c:v>
-                </c:pt>
-                <c:pt idx="3">
-                  <c:v>43191</c:v>
-                </c:pt>
-                <c:pt idx="4">
-                  <c:v>43221</c:v>
-                </c:pt>
-                <c:pt idx="5">
-                  <c:v>43252</c:v>
-                </c:pt>
-                <c:pt idx="6">
-                  <c:v>43282</c:v>
-                </c:pt>
-                <c:pt idx="7">
-                  <c:v>43313</c:v>
-                </c:pt>
-                <c:pt idx="8">
-                  <c:v>43344</c:v>
-                </c:pt>
-                <c:pt idx="9">
-                  <c:v>43374</c:v>
-                </c:pt>
-                <c:pt idx="10">
-                  <c:v>43405</c:v>
-                </c:pt>
-                <c:pt idx="11">
-                  <c:v>43435</c:v>
-                </c:pt>
-                <c:pt idx="12">
-                  <c:v>43466</c:v>
-                </c:pt>
-                <c:pt idx="13">
-                  <c:v>43497</c:v>
-                </c:pt>
-                <c:pt idx="14">
-                  <c:v>43525</c:v>
-                </c:pt>
-                <c:pt idx="15">
-                  <c:v>43556</c:v>
-                </c:pt>
-                <c:pt idx="16">
-                  <c:v>43586</c:v>
-                </c:pt>
-                <c:pt idx="17">
-                  <c:v>43617</c:v>
-                </c:pt>
-                <c:pt idx="18">
-                  <c:v>43647</c:v>
-                </c:pt>
-                <c:pt idx="19">
-                  <c:v>43678</c:v>
-                </c:pt>
-                <c:pt idx="20">
-                  <c:v>43709</c:v>
-                </c:pt>
-                <c:pt idx="21">
-                  <c:v>43739</c:v>
-                </c:pt>
-                <c:pt idx="22">
-                  <c:v>43770</c:v>
-                </c:pt>
-                <c:pt idx="23">
-                  <c:v>43800</c:v>
-                </c:pt>
-                <c:pt idx="24">
-                  <c:v>43831</c:v>
-                </c:pt>
-                <c:pt idx="25">
-                  <c:v>43862</c:v>
-                </c:pt>
-                <c:pt idx="26">
-                  <c:v>43891</c:v>
-                </c:pt>
-                <c:pt idx="27">
-                  <c:v>43922</c:v>
-                </c:pt>
-                <c:pt idx="28">
-                  <c:v>43952</c:v>
-                </c:pt>
-                <c:pt idx="29">
-                  <c:v>43983</c:v>
-                </c:pt>
-                <c:pt idx="30">
-                  <c:v>44013</c:v>
-                </c:pt>
-                <c:pt idx="31">
-                  <c:v>44044</c:v>
-                </c:pt>
-                <c:pt idx="32">
-                  <c:v>44075</c:v>
-                </c:pt>
-                <c:pt idx="33">
-                  <c:v>44105</c:v>
-                </c:pt>
-                <c:pt idx="34">
-                  <c:v>44136</c:v>
-                </c:pt>
-                <c:pt idx="35">
-                  <c:v>44166</c:v>
-                </c:pt>
-                <c:pt idx="36">
-                  <c:v>44197</c:v>
-                </c:pt>
-                <c:pt idx="37">
-                  <c:v>44228</c:v>
-                </c:pt>
-                <c:pt idx="38">
-                  <c:v>44256</c:v>
-                </c:pt>
-                <c:pt idx="39">
-                  <c:v>44287</c:v>
-                </c:pt>
-                <c:pt idx="40">
-                  <c:v>44317</c:v>
-                </c:pt>
-                <c:pt idx="41">
-                  <c:v>44348</c:v>
-                </c:pt>
-                <c:pt idx="42">
-                  <c:v>44378</c:v>
-                </c:pt>
-                <c:pt idx="43">
-                  <c:v>44409</c:v>
-                </c:pt>
-                <c:pt idx="44">
-                  <c:v>44440</c:v>
-                </c:pt>
-                <c:pt idx="45">
-                  <c:v>44470</c:v>
-                </c:pt>
-                <c:pt idx="46">
-                  <c:v>44501</c:v>
-                </c:pt>
-                <c:pt idx="47">
-                  <c:v>44531</c:v>
-                </c:pt>
-                <c:pt idx="48">
-                  <c:v>44562</c:v>
-                </c:pt>
-                <c:pt idx="49">
-                  <c:v>44593</c:v>
-                </c:pt>
-                <c:pt idx="50">
-                  <c:v>44621</c:v>
-                </c:pt>
-                <c:pt idx="51">
-                  <c:v>44652</c:v>
-                </c:pt>
-                <c:pt idx="52">
-                  <c:v>44682</c:v>
-                </c:pt>
-                <c:pt idx="53">
-                  <c:v>44713</c:v>
-                </c:pt>
-                <c:pt idx="54">
-                  <c:v>44743</c:v>
-                </c:pt>
-                <c:pt idx="55">
-                  <c:v>44774</c:v>
-                </c:pt>
-                <c:pt idx="56">
-                  <c:v>44805</c:v>
-                </c:pt>
-                <c:pt idx="57">
-                  <c:v>44835</c:v>
-                </c:pt>
-                <c:pt idx="58">
-                  <c:v>44866</c:v>
-                </c:pt>
-                <c:pt idx="59">
-                  <c:v>44896</c:v>
-                </c:pt>
-                <c:pt idx="60">
-                  <c:v>44927</c:v>
-                </c:pt>
-                <c:pt idx="61">
-                  <c:v>44958</c:v>
-                </c:pt>
-                <c:pt idx="62">
-                  <c:v>44986</c:v>
-                </c:pt>
-                <c:pt idx="63">
-                  <c:v>45017</c:v>
-                </c:pt>
-                <c:pt idx="64">
-                  <c:v>45047</c:v>
-                </c:pt>
-                <c:pt idx="65">
-                  <c:v>45078</c:v>
-                </c:pt>
-                <c:pt idx="66">
-                  <c:v>45108</c:v>
-                </c:pt>
-                <c:pt idx="67">
-                  <c:v>45139</c:v>
-                </c:pt>
-                <c:pt idx="68">
-                  <c:v>45170</c:v>
-                </c:pt>
-                <c:pt idx="69">
-                  <c:v>45200</c:v>
-                </c:pt>
-                <c:pt idx="70">
-                  <c:v>45231</c:v>
-                </c:pt>
-                <c:pt idx="71">
-                  <c:v>45261</c:v>
-                </c:pt>
-                <c:pt idx="72">
-                  <c:v>45292</c:v>
-                </c:pt>
-                <c:pt idx="73">
-                  <c:v>45323</c:v>
-                </c:pt>
-                <c:pt idx="74">
-                  <c:v>45352</c:v>
-                </c:pt>
-                <c:pt idx="75">
-                  <c:v>45383</c:v>
-                </c:pt>
-                <c:pt idx="76">
-                  <c:v>45413</c:v>
-                </c:pt>
-                <c:pt idx="77">
-                  <c:v>45444</c:v>
-                </c:pt>
-                <c:pt idx="78">
-                  <c:v>45474</c:v>
-                </c:pt>
-                <c:pt idx="79">
-                  <c:v>45505</c:v>
-                </c:pt>
-                <c:pt idx="80">
-                  <c:v>45536</c:v>
-                </c:pt>
-                <c:pt idx="81">
-                  <c:v>45566</c:v>
-                </c:pt>
-                <c:pt idx="82">
-                  <c:v>45597</c:v>
-                </c:pt>
-                <c:pt idx="83">
-                  <c:v>45627</c:v>
-                </c:pt>
-                <c:pt idx="84">
-                  <c:v>45658</c:v>
-                </c:pt>
-                <c:pt idx="85">
-                  <c:v>45689</c:v>
-                </c:pt>
-                <c:pt idx="86">
-                  <c:v>45717</c:v>
-                </c:pt>
-                <c:pt idx="87">
-                  <c:v>45748</c:v>
-                </c:pt>
-                <c:pt idx="88">
-                  <c:v>45778</c:v>
-                </c:pt>
-                <c:pt idx="89">
-                  <c:v>45809</c:v>
-                </c:pt>
-                <c:pt idx="90">
-                  <c:v>45839</c:v>
-                </c:pt>
-                <c:pt idx="91">
-                  <c:v>45870</c:v>
-                </c:pt>
-                <c:pt idx="92">
-                  <c:v>45901</c:v>
-                </c:pt>
-                <c:pt idx="93">
-                  <c:v>45931</c:v>
-                </c:pt>
-                <c:pt idx="94">
-                  <c:v>45962</c:v>
-                </c:pt>
-                <c:pt idx="95">
-                  <c:v>45992</c:v>
-                </c:pt>
-                <c:pt idx="96">
-                  <c:v>46023</c:v>
-                </c:pt>
-                <c:pt idx="97">
-                  <c:v>46054</c:v>
-                </c:pt>
-                <c:pt idx="98">
-                  <c:v>46082</c:v>
-                </c:pt>
-                <c:pt idx="99">
-                  <c:v>46113</c:v>
-                </c:pt>
-                <c:pt idx="100">
-                  <c:v>46143</c:v>
-                </c:pt>
-                <c:pt idx="101">
-                  <c:v>46174</c:v>
-                </c:pt>
-                <c:pt idx="102">
-                  <c:v>46204</c:v>
-                </c:pt>
-                <c:pt idx="103">
-                  <c:v>46235</c:v>
-                </c:pt>
-              </c:numCache>
-            </c:numRef>
-          </c:cat>
-          <c:val>
-            <c:numRef>
-              <c:f>Arkusz1!$C$2:$C$105</c:f>
-              <c:numCache>
-                <c:formatCode>General</c:formatCode>
-                <c:ptCount val="104"/>
-                <c:pt idx="0">
-                  <c:v>4960</c:v>
-                </c:pt>
-                <c:pt idx="1">
-                  <c:v>4015</c:v>
-                </c:pt>
-                <c:pt idx="2">
-                  <c:v>6474</c:v>
-                </c:pt>
-                <c:pt idx="3">
-                  <c:v>4131</c:v>
-                </c:pt>
-                <c:pt idx="4">
-                  <c:v>4209</c:v>
-                </c:pt>
-                <c:pt idx="5">
-                  <c:v>4919</c:v>
-                </c:pt>
-                <c:pt idx="6">
-                  <c:v>5130</c:v>
-                </c:pt>
-                <c:pt idx="7">
-                  <c:v>5424</c:v>
-                </c:pt>
-                <c:pt idx="8">
-                  <c:v>4967</c:v>
-                </c:pt>
-                <c:pt idx="9">
-                  <c:v>4789</c:v>
-                </c:pt>
-                <c:pt idx="10">
-                  <c:v>5160</c:v>
-                </c:pt>
-                <c:pt idx="11">
-                  <c:v>5804</c:v>
-                </c:pt>
-                <c:pt idx="12">
-                  <c:v>6412</c:v>
-                </c:pt>
-                <c:pt idx="13">
-                  <c:v>5483</c:v>
-                </c:pt>
-                <c:pt idx="14">
-                  <c:v>5347</c:v>
-                </c:pt>
-                <c:pt idx="15">
-                  <c:v>3877</c:v>
-                </c:pt>
-                <c:pt idx="16">
-                  <c:v>4447</c:v>
-                </c:pt>
-                <c:pt idx="17">
-                  <c:v>7604</c:v>
-                </c:pt>
-                <c:pt idx="18">
-                  <c:v>5939</c:v>
-                </c:pt>
-                <c:pt idx="19">
-                  <c:v>5042</c:v>
-                </c:pt>
-                <c:pt idx="20">
-                  <c:v>6801</c:v>
-                </c:pt>
-                <c:pt idx="21">
-                  <c:v>6864</c:v>
-                </c:pt>
-                <c:pt idx="22">
-                  <c:v>5952</c:v>
-                </c:pt>
-                <c:pt idx="23">
-                  <c:v>5743</c:v>
-                </c:pt>
-                <c:pt idx="24">
-                  <c:v>11412</c:v>
-                </c:pt>
-                <c:pt idx="25">
-                  <c:v>5938</c:v>
-                </c:pt>
-                <c:pt idx="26">
-                  <c:v>6179</c:v>
-                </c:pt>
-                <c:pt idx="27">
-                  <c:v>7535</c:v>
-                </c:pt>
-                <c:pt idx="28">
-                  <c:v>4814</c:v>
-                </c:pt>
-                <c:pt idx="29">
-                  <c:v>4120</c:v>
-                </c:pt>
-                <c:pt idx="30">
-                  <c:v>4437</c:v>
-                </c:pt>
-                <c:pt idx="31">
-                  <c:v>4986</c:v>
-                </c:pt>
-                <c:pt idx="32">
-                  <c:v>5141</c:v>
-                </c:pt>
-                <c:pt idx="33">
-                  <c:v>5343</c:v>
-                </c:pt>
-                <c:pt idx="34">
-                  <c:v>5062</c:v>
-                </c:pt>
-                <c:pt idx="35">
-                  <c:v>5273</c:v>
-                </c:pt>
-                <c:pt idx="36">
-                  <c:v>5441</c:v>
-                </c:pt>
-                <c:pt idx="37">
-                  <c:v>4138</c:v>
-                </c:pt>
-                <c:pt idx="38">
-                  <c:v>6732</c:v>
-                </c:pt>
-                <c:pt idx="39">
-                  <c:v>7821</c:v>
-                </c:pt>
-                <c:pt idx="40">
-                  <c:v>6303</c:v>
-                </c:pt>
-                <c:pt idx="41">
-                  <c:v>7504</c:v>
-                </c:pt>
-                <c:pt idx="42">
-                  <c:v>6409</c:v>
-                </c:pt>
-                <c:pt idx="43">
-                  <c:v>5988</c:v>
-                </c:pt>
-                <c:pt idx="44">
-                  <c:v>5574</c:v>
-                </c:pt>
-                <c:pt idx="45">
-                  <c:v>6041</c:v>
-                </c:pt>
-                <c:pt idx="46">
-                  <c:v>5295</c:v>
-                </c:pt>
-                <c:pt idx="47">
-                  <c:v>5387</c:v>
-                </c:pt>
-                <c:pt idx="48">
-                  <c:v>5831</c:v>
-                </c:pt>
-                <c:pt idx="49">
-                  <c:v>4844</c:v>
-                </c:pt>
-                <c:pt idx="50">
-                  <c:v>5654</c:v>
-                </c:pt>
-                <c:pt idx="51">
-                  <c:v>5115</c:v>
-                </c:pt>
-                <c:pt idx="52">
-                  <c:v>4868</c:v>
-                </c:pt>
-                <c:pt idx="53">
-                  <c:v>6929</c:v>
-                </c:pt>
-                <c:pt idx="54">
-                  <c:v>6460</c:v>
-                </c:pt>
-                <c:pt idx="55">
-                  <c:v>5523</c:v>
-                </c:pt>
-                <c:pt idx="56">
-                  <c:v>5545</c:v>
-                </c:pt>
-                <c:pt idx="57">
-                  <c:v>4835</c:v>
-                </c:pt>
-                <c:pt idx="58">
-                  <c:v>6508</c:v>
-                </c:pt>
-                <c:pt idx="59">
-                  <c:v>6668</c:v>
-                </c:pt>
-                <c:pt idx="60">
-                  <c:v>6183</c:v>
-                </c:pt>
-                <c:pt idx="61">
-                  <c:v>6594</c:v>
-                </c:pt>
-                <c:pt idx="62">
-                  <c:v>10725</c:v>
-                </c:pt>
-                <c:pt idx="63">
-                  <c:v>5583</c:v>
-                </c:pt>
-                <c:pt idx="64">
-                  <c:v>5670</c:v>
-                </c:pt>
-                <c:pt idx="65">
-                  <c:v>5919</c:v>
-                </c:pt>
-                <c:pt idx="66">
-                  <c:v>7305</c:v>
-                </c:pt>
-                <c:pt idx="67">
-                  <c:v>6385</c:v>
-                </c:pt>
-                <c:pt idx="68">
-                  <c:v>5432</c:v>
-                </c:pt>
-                <c:pt idx="69">
-                  <c:v>5156</c:v>
-                </c:pt>
-                <c:pt idx="70">
-                  <c:v>5927</c:v>
-                </c:pt>
-                <c:pt idx="71">
-                  <c:v>6007</c:v>
-                </c:pt>
-                <c:pt idx="72">
-                  <c:v>6957</c:v>
-                </c:pt>
-                <c:pt idx="73">
-                  <c:v>5917</c:v>
-                </c:pt>
-                <c:pt idx="74">
-                  <c:v>5922</c:v>
-                </c:pt>
-                <c:pt idx="75">
-                  <c:v>5516</c:v>
-                </c:pt>
-                <c:pt idx="76">
-                  <c:v>4974</c:v>
-                </c:pt>
-                <c:pt idx="77">
-                  <c:v>5967</c:v>
-                </c:pt>
-                <c:pt idx="78">
-                  <c:v>9441</c:v>
-                </c:pt>
-                <c:pt idx="79">
-                  <c:v>6516</c:v>
-                </c:pt>
-                <c:pt idx="80">
-                  <c:v>4786</c:v>
-                </c:pt>
-                <c:pt idx="81">
-                  <c:v>4976</c:v>
-                </c:pt>
-                <c:pt idx="82">
-                  <c:v>5073</c:v>
-                </c:pt>
-                <c:pt idx="83">
-                  <c:v>7020</c:v>
-                </c:pt>
-                <c:pt idx="84">
-                  <c:v>7384</c:v>
-                </c:pt>
-                <c:pt idx="85">
-                  <c:v>5723</c:v>
-                </c:pt>
-                <c:pt idx="86">
-                  <c:v>5627</c:v>
-                </c:pt>
-                <c:pt idx="87">
-                  <c:v>5559</c:v>
-                </c:pt>
-                <c:pt idx="88">
-                  <c:v>3798</c:v>
-                </c:pt>
-                <c:pt idx="89">
-                  <c:v>8780</c:v>
-                </c:pt>
-                <c:pt idx="90">
-                  <c:v>7324</c:v>
-                </c:pt>
-                <c:pt idx="91">
-                  <c:v>6670</c:v>
-                </c:pt>
-                <c:pt idx="92">
-                  <c:v>6034</c:v>
-                </c:pt>
-                <c:pt idx="93">
-                  <c:v>13600</c:v>
-                </c:pt>
-                <c:pt idx="94">
-                  <c:v>53420</c:v>
-                </c:pt>
-                <c:pt idx="95">
-                  <c:v>20560</c:v>
-                </c:pt>
-                <c:pt idx="96">
-                  <c:v>10172</c:v>
-                </c:pt>
-                <c:pt idx="97">
-                  <c:v>7314</c:v>
-                </c:pt>
-                <c:pt idx="98">
-                  <c:v>11119</c:v>
-                </c:pt>
-                <c:pt idx="99">
-                  <c:v>18778</c:v>
-                </c:pt>
-                <c:pt idx="100">
-                  <c:v>19030</c:v>
-                </c:pt>
-                <c:pt idx="101">
-                  <c:v>703315</c:v>
-                </c:pt>
-                <c:pt idx="102">
-                  <c:v>24281</c:v>
-                </c:pt>
-                <c:pt idx="103">
-                  <c:v>6829</c:v>
-                </c:pt>
-              </c:numCache>
-            </c:numRef>
-          </c:val>
-          <c:smooth val="0"/>
-          <c:extLst>
-            <c:ext xmlns:c16="http://schemas.microsoft.com/office/drawing/2014/chart" uri="{C3380CC4-5D6E-409C-BE32-E72D297353CC}">
-              <c16:uniqueId val="{00000008-298A-42B4-BA2C-8AEEEEF9E6BE}"/>
             </c:ext>
           </c:extLst>
         </c:ser>
@@ -4819,11 +4151,27 @@
             </a:r>
             <a:r>
               <a:rPr lang="pl-PL" baseline="0" dirty="0"/>
-              <a:t> strony Iga Świątek</a:t>
+              <a:t> strony </a:t>
+            </a:r>
+            <a:r>
+              <a:rPr lang="pl-PL" baseline="0" dirty="0" err="1"/>
+              <a:t>Freddie</a:t>
+            </a:r>
+            <a:r>
+              <a:rPr lang="pl-PL" baseline="0" dirty="0"/>
+              <a:t> </a:t>
+            </a:r>
+            <a:r>
+              <a:rPr lang="pl-PL" baseline="0" dirty="0" err="1"/>
+              <a:t>Mercury</a:t>
+            </a:r>
+            <a:r>
+              <a:rPr lang="pl-PL" baseline="0" dirty="0"/>
+              <a:t> </a:t>
             </a:r>
             <a:r>
               <a:rPr lang="pl-PL" dirty="0"/>
-              <a:t> [tys.][2][3]</a:t>
+              <a:t>[tys.][2][3]</a:t>
             </a:r>
             <a:endParaRPr lang="en-US" dirty="0"/>
           </a:p>
@@ -4854,7 +4202,7 @@
               <a:cs typeface="+mn-cs"/>
             </a:defRPr>
           </a:pPr>
-          <a:endParaRPr lang="pl-PL"/>
+          <a:endParaRPr lang="en-US"/>
         </a:p>
       </c:txPr>
     </c:title>
@@ -4866,9 +4214,9 @@
           <c:xMode val="edge"/>
           <c:yMode val="edge"/>
           <c:x val="5.3603301286851403E-2"/>
-          <c:y val="0.10213800904457435"/>
+          <c:y val="0.1663481439502057"/>
           <c:w val="0.94418872912625051"/>
-          <c:h val="0.64714071855599353"/>
+          <c:h val="0.5829305836503621"/>
         </c:manualLayout>
       </c:layout>
       <c:lineChart>
@@ -4883,7 +4231,7 @@
               <c:strCache>
                 <c:ptCount val="1"/>
                 <c:pt idx="0">
-                  <c:v>Iga Świątek</c:v>
+                  <c:v>Freddie Mercury</c:v>
                 </c:pt>
               </c:strCache>
             </c:strRef>
@@ -4900,6 +4248,147 @@
           <c:marker>
             <c:symbol val="none"/>
           </c:marker>
+          <c:dLbls>
+            <c:dLbl>
+              <c:idx val="10"/>
+              <c:layout>
+                <c:manualLayout>
+                  <c:x val="1.0645526866962735E-2"/>
+                  <c:y val="7.8803347384183903E-2"/>
+                </c:manualLayout>
+              </c:layout>
+              <c:tx>
+                <c:rich>
+                  <a:bodyPr/>
+                  <a:lstStyle/>
+                  <a:p>
+                    <a:r>
+                      <a:rPr lang="en-US" dirty="0"/>
+                      <a:t>Premiera filmu Bohemian Rapsody</a:t>
+                    </a:r>
+                  </a:p>
+                </c:rich>
+              </c:tx>
+              <c:showLegendKey val="0"/>
+              <c:showVal val="1"/>
+              <c:showCatName val="1"/>
+              <c:showSerName val="0"/>
+              <c:showPercent val="0"/>
+              <c:showBubbleSize val="0"/>
+              <c:extLst>
+                <c:ext xmlns:c15="http://schemas.microsoft.com/office/drawing/2012/chart" uri="{CE6537A1-D6FC-4f65-9D91-7224C49458BB}">
+                  <c15:showDataLabelsRange val="0"/>
+                </c:ext>
+                <c:ext xmlns:c16="http://schemas.microsoft.com/office/drawing/2014/chart" uri="{C3380CC4-5D6E-409C-BE32-E72D297353CC}">
+                  <c16:uniqueId val="{00000000-D6FE-4D5B-A63F-93FE995277E8}"/>
+                </c:ext>
+              </c:extLst>
+            </c:dLbl>
+            <c:dLbl>
+              <c:idx val="46"/>
+              <c:layout>
+                <c:manualLayout>
+                  <c:x val="1.4194035822617088E-2"/>
+                  <c:y val="-1.1674569982842059E-2"/>
+                </c:manualLayout>
+              </c:layout>
+              <c:tx>
+                <c:rich>
+                  <a:bodyPr/>
+                  <a:lstStyle/>
+                  <a:p>
+                    <a:r>
+                      <a:rPr lang="en-US" dirty="0"/>
+                      <a:t>30-ta </a:t>
+                    </a:r>
+                    <a:r>
+                      <a:rPr lang="en-US" dirty="0" err="1"/>
+                      <a:t>rocznica</a:t>
+                    </a:r>
+                    <a:r>
+                      <a:rPr lang="en-US" baseline="0" dirty="0"/>
+                      <a:t> </a:t>
+                    </a:r>
+                    <a:r>
+                      <a:rPr lang="en-US" baseline="0" dirty="0" err="1"/>
+                      <a:t>śmierci</a:t>
+                    </a:r>
+                    <a:endParaRPr lang="en-US" dirty="0"/>
+                  </a:p>
+                </c:rich>
+              </c:tx>
+              <c:showLegendKey val="0"/>
+              <c:showVal val="1"/>
+              <c:showCatName val="1"/>
+              <c:showSerName val="0"/>
+              <c:showPercent val="0"/>
+              <c:showBubbleSize val="0"/>
+              <c:extLst>
+                <c:ext xmlns:c15="http://schemas.microsoft.com/office/drawing/2012/chart" uri="{CE6537A1-D6FC-4f65-9D91-7224C49458BB}">
+                  <c15:showDataLabelsRange val="0"/>
+                </c:ext>
+                <c:ext xmlns:c16="http://schemas.microsoft.com/office/drawing/2014/chart" uri="{C3380CC4-5D6E-409C-BE32-E72D297353CC}">
+                  <c16:uniqueId val="{00000001-D6FE-4D5B-A63F-93FE995277E8}"/>
+                </c:ext>
+              </c:extLst>
+            </c:dLbl>
+            <c:spPr>
+              <a:solidFill>
+                <a:prstClr val="white"/>
+              </a:solidFill>
+              <a:ln>
+                <a:solidFill>
+                  <a:srgbClr val="000000">
+                    <a:lumMod val="25000"/>
+                    <a:lumOff val="75000"/>
+                  </a:srgbClr>
+                </a:solidFill>
+              </a:ln>
+              <a:effectLst/>
+            </c:spPr>
+            <c:txPr>
+              <a:bodyPr rot="0" spcFirstLastPara="1" vertOverflow="clip" horzOverflow="clip" vert="horz" wrap="square" lIns="38100" tIns="19050" rIns="38100" bIns="19050" anchor="ctr" anchorCtr="1">
+                <a:spAutoFit/>
+              </a:bodyPr>
+              <a:lstStyle/>
+              <a:p>
+                <a:pPr>
+                  <a:defRPr sz="1197" b="0" i="0" u="none" strike="noStrike" kern="1200" baseline="0">
+                    <a:solidFill>
+                      <a:schemeClr val="dk1">
+                        <a:lumMod val="65000"/>
+                        <a:lumOff val="35000"/>
+                      </a:schemeClr>
+                    </a:solidFill>
+                    <a:latin typeface="+mn-lt"/>
+                    <a:ea typeface="+mn-ea"/>
+                    <a:cs typeface="+mn-cs"/>
+                  </a:defRPr>
+                </a:pPr>
+                <a:endParaRPr lang="pl-PL"/>
+              </a:p>
+            </c:txPr>
+            <c:showLegendKey val="0"/>
+            <c:showVal val="0"/>
+            <c:showCatName val="0"/>
+            <c:showSerName val="0"/>
+            <c:showPercent val="0"/>
+            <c:showBubbleSize val="0"/>
+            <c:extLst>
+              <c:ext xmlns:c15="http://schemas.microsoft.com/office/drawing/2012/chart" uri="{CE6537A1-D6FC-4f65-9D91-7224C49458BB}">
+                <c15:spPr xmlns:c15="http://schemas.microsoft.com/office/drawing/2012/chart">
+                  <a:prstGeom prst="wedgeRectCallout">
+                    <a:avLst/>
+                  </a:prstGeom>
+                  <a:noFill/>
+                  <a:ln>
+                    <a:noFill/>
+                  </a:ln>
+                </c15:spPr>
+                <c15:showLeaderLines val="0"/>
+              </c:ext>
+            </c:extLst>
+          </c:dLbls>
           <c:cat>
             <c:numRef>
               <c:f>Arkusz1!$A$2:$A$105</c:f>
@@ -5228,316 +4717,316 @@
                 <c:formatCode>General</c:formatCode>
                 <c:ptCount val="104"/>
                 <c:pt idx="0">
-                  <c:v>653</c:v>
+                  <c:v>32919</c:v>
                 </c:pt>
                 <c:pt idx="1">
-                  <c:v>1014</c:v>
+                  <c:v>25397</c:v>
                 </c:pt>
                 <c:pt idx="2">
-                  <c:v>496</c:v>
+                  <c:v>28423</c:v>
                 </c:pt>
                 <c:pt idx="3">
-                  <c:v>3007</c:v>
+                  <c:v>30273</c:v>
                 </c:pt>
                 <c:pt idx="4">
-                  <c:v>3760</c:v>
+                  <c:v>37553</c:v>
                 </c:pt>
                 <c:pt idx="5">
-                  <c:v>8328</c:v>
+                  <c:v>25038</c:v>
                 </c:pt>
                 <c:pt idx="6">
-                  <c:v>36928</c:v>
+                  <c:v>44352</c:v>
                 </c:pt>
                 <c:pt idx="7">
-                  <c:v>2477</c:v>
+                  <c:v>30343</c:v>
                 </c:pt>
                 <c:pt idx="8">
-                  <c:v>6395</c:v>
+                  <c:v>37061</c:v>
                 </c:pt>
                 <c:pt idx="9">
-                  <c:v>3673</c:v>
+                  <c:v>78271</c:v>
                 </c:pt>
                 <c:pt idx="10">
-                  <c:v>2409</c:v>
+                  <c:v>449113</c:v>
                 </c:pt>
                 <c:pt idx="11">
-                  <c:v>3302</c:v>
+                  <c:v>211198</c:v>
                 </c:pt>
                 <c:pt idx="12">
-                  <c:v>16784</c:v>
+                  <c:v>194916</c:v>
                 </c:pt>
                 <c:pt idx="13">
-                  <c:v>6414</c:v>
+                  <c:v>214954</c:v>
                 </c:pt>
                 <c:pt idx="14">
-                  <c:v>2878</c:v>
+                  <c:v>165365</c:v>
                 </c:pt>
                 <c:pt idx="15">
-                  <c:v>21265</c:v>
+                  <c:v>75085</c:v>
                 </c:pt>
                 <c:pt idx="16">
-                  <c:v>10211</c:v>
+                  <c:v>58533</c:v>
                 </c:pt>
                 <c:pt idx="17">
-                  <c:v>16548</c:v>
+                  <c:v>50277</c:v>
                 </c:pt>
                 <c:pt idx="18">
-                  <c:v>5133</c:v>
+                  <c:v>52872</c:v>
                 </c:pt>
                 <c:pt idx="19">
-                  <c:v>17307</c:v>
+                  <c:v>45240</c:v>
                 </c:pt>
                 <c:pt idx="20">
-                  <c:v>2028</c:v>
+                  <c:v>131260</c:v>
                 </c:pt>
                 <c:pt idx="21">
-                  <c:v>935</c:v>
+                  <c:v>85430</c:v>
                 </c:pt>
                 <c:pt idx="22">
-                  <c:v>1242</c:v>
+                  <c:v>87686</c:v>
                 </c:pt>
                 <c:pt idx="23">
-                  <c:v>874</c:v>
+                  <c:v>67782</c:v>
                 </c:pt>
                 <c:pt idx="24">
-                  <c:v>14186</c:v>
+                  <c:v>52818</c:v>
                 </c:pt>
                 <c:pt idx="25">
-                  <c:v>3070</c:v>
+                  <c:v>44863</c:v>
                 </c:pt>
                 <c:pt idx="26">
-                  <c:v>893</c:v>
+                  <c:v>51769</c:v>
                 </c:pt>
                 <c:pt idx="27">
-                  <c:v>1805</c:v>
+                  <c:v>50207</c:v>
                 </c:pt>
                 <c:pt idx="28">
-                  <c:v>1251</c:v>
+                  <c:v>43144</c:v>
                 </c:pt>
                 <c:pt idx="29">
-                  <c:v>1693</c:v>
+                  <c:v>37022</c:v>
                 </c:pt>
                 <c:pt idx="30">
-                  <c:v>1202</c:v>
+                  <c:v>30423</c:v>
                 </c:pt>
                 <c:pt idx="31">
-                  <c:v>2605</c:v>
+                  <c:v>32078</c:v>
                 </c:pt>
                 <c:pt idx="32">
-                  <c:v>7774</c:v>
+                  <c:v>36980</c:v>
                 </c:pt>
                 <c:pt idx="33">
-                  <c:v>572375</c:v>
+                  <c:v>33182</c:v>
                 </c:pt>
                 <c:pt idx="34">
-                  <c:v>17233</c:v>
+                  <c:v>48119</c:v>
                 </c:pt>
                 <c:pt idx="35">
-                  <c:v>11320</c:v>
+                  <c:v>44213</c:v>
                 </c:pt>
                 <c:pt idx="36">
-                  <c:v>23791</c:v>
+                  <c:v>51776</c:v>
                 </c:pt>
                 <c:pt idx="37">
-                  <c:v>67800</c:v>
+                  <c:v>34205</c:v>
                 </c:pt>
                 <c:pt idx="38">
-                  <c:v>27164</c:v>
+                  <c:v>39312</c:v>
                 </c:pt>
                 <c:pt idx="39">
-                  <c:v>15187</c:v>
+                  <c:v>37064</c:v>
                 </c:pt>
                 <c:pt idx="40">
-                  <c:v>54552</c:v>
+                  <c:v>40983</c:v>
                 </c:pt>
                 <c:pt idx="41">
-                  <c:v>75102</c:v>
+                  <c:v>28222</c:v>
                 </c:pt>
                 <c:pt idx="42">
-                  <c:v>42576</c:v>
+                  <c:v>28539</c:v>
                 </c:pt>
                 <c:pt idx="43">
-                  <c:v>7114</c:v>
+                  <c:v>29883</c:v>
                 </c:pt>
                 <c:pt idx="44">
-                  <c:v>17297</c:v>
+                  <c:v>149854</c:v>
                 </c:pt>
                 <c:pt idx="45">
-                  <c:v>7917</c:v>
+                  <c:v>93633</c:v>
                 </c:pt>
                 <c:pt idx="46">
-                  <c:v>9354</c:v>
+                  <c:v>267298</c:v>
                 </c:pt>
                 <c:pt idx="47">
-                  <c:v>6321</c:v>
+                  <c:v>95078</c:v>
                 </c:pt>
                 <c:pt idx="48">
-                  <c:v>66418</c:v>
+                  <c:v>89223</c:v>
                 </c:pt>
                 <c:pt idx="49">
-                  <c:v>21482</c:v>
+                  <c:v>44844</c:v>
                 </c:pt>
                 <c:pt idx="50">
-                  <c:v>78025</c:v>
+                  <c:v>25220</c:v>
                 </c:pt>
                 <c:pt idx="51">
-                  <c:v>120751</c:v>
+                  <c:v>30878</c:v>
                 </c:pt>
                 <c:pt idx="52">
-                  <c:v>102025</c:v>
+                  <c:v>85157</c:v>
                 </c:pt>
                 <c:pt idx="53">
-                  <c:v>251771</c:v>
+                  <c:v>33930</c:v>
                 </c:pt>
                 <c:pt idx="54">
-                  <c:v>37087</c:v>
+                  <c:v>40443</c:v>
                 </c:pt>
                 <c:pt idx="55">
-                  <c:v>15795</c:v>
+                  <c:v>24178</c:v>
                 </c:pt>
                 <c:pt idx="56">
-                  <c:v>155521</c:v>
+                  <c:v>23694</c:v>
                 </c:pt>
                 <c:pt idx="57">
-                  <c:v>38265</c:v>
+                  <c:v>24345</c:v>
                 </c:pt>
                 <c:pt idx="58">
-                  <c:v>24337</c:v>
+                  <c:v>31850</c:v>
                 </c:pt>
                 <c:pt idx="59">
-                  <c:v>14462</c:v>
+                  <c:v>23008</c:v>
                 </c:pt>
                 <c:pt idx="60">
-                  <c:v>88435</c:v>
+                  <c:v>47372</c:v>
                 </c:pt>
                 <c:pt idx="61">
-                  <c:v>51815</c:v>
+                  <c:v>25496</c:v>
                 </c:pt>
                 <c:pt idx="62">
-                  <c:v>29360</c:v>
+                  <c:v>29122</c:v>
                 </c:pt>
                 <c:pt idx="63">
-                  <c:v>36341</c:v>
+                  <c:v>29761</c:v>
                 </c:pt>
                 <c:pt idx="64">
-                  <c:v>62509</c:v>
+                  <c:v>100721</c:v>
                 </c:pt>
                 <c:pt idx="65">
-                  <c:v>270738</c:v>
+                  <c:v>26820</c:v>
                 </c:pt>
                 <c:pt idx="66">
-                  <c:v>125497</c:v>
+                  <c:v>36048</c:v>
                 </c:pt>
                 <c:pt idx="67">
-                  <c:v>49908</c:v>
+                  <c:v>34590</c:v>
                 </c:pt>
                 <c:pt idx="68">
-                  <c:v>40639</c:v>
+                  <c:v>41269</c:v>
                 </c:pt>
                 <c:pt idx="69">
-                  <c:v>32484</c:v>
+                  <c:v>25151</c:v>
                 </c:pt>
                 <c:pt idx="70">
-                  <c:v>77202</c:v>
+                  <c:v>73888</c:v>
                 </c:pt>
                 <c:pt idx="71">
-                  <c:v>20296</c:v>
+                  <c:v>36627</c:v>
                 </c:pt>
                 <c:pt idx="72">
-                  <c:v>87152</c:v>
+                  <c:v>39646</c:v>
                 </c:pt>
                 <c:pt idx="73">
-                  <c:v>58812</c:v>
+                  <c:v>22182</c:v>
                 </c:pt>
                 <c:pt idx="74">
-                  <c:v>77396</c:v>
+                  <c:v>23681</c:v>
                 </c:pt>
                 <c:pt idx="75">
-                  <c:v>48437</c:v>
+                  <c:v>77313</c:v>
                 </c:pt>
                 <c:pt idx="76">
-                  <c:v>175038</c:v>
+                  <c:v>22061</c:v>
                 </c:pt>
                 <c:pt idx="77">
-                  <c:v>240368</c:v>
+                  <c:v>19112</c:v>
                 </c:pt>
                 <c:pt idx="78">
-                  <c:v>97073</c:v>
+                  <c:v>16485</c:v>
                 </c:pt>
                 <c:pt idx="79">
-                  <c:v>118940</c:v>
+                  <c:v>18593</c:v>
                 </c:pt>
                 <c:pt idx="80">
-                  <c:v>40517</c:v>
+                  <c:v>22637</c:v>
                 </c:pt>
                 <c:pt idx="81">
-                  <c:v>23714</c:v>
+                  <c:v>19053</c:v>
                 </c:pt>
                 <c:pt idx="82">
-                  <c:v>27422</c:v>
+                  <c:v>26886</c:v>
                 </c:pt>
                 <c:pt idx="83">
-                  <c:v>15316</c:v>
+                  <c:v>23867</c:v>
                 </c:pt>
                 <c:pt idx="84">
-                  <c:v>88222</c:v>
+                  <c:v>23190</c:v>
                 </c:pt>
                 <c:pt idx="85">
-                  <c:v>28762</c:v>
+                  <c:v>28138</c:v>
                 </c:pt>
                 <c:pt idx="86">
-                  <c:v>28445</c:v>
+                  <c:v>60700</c:v>
                 </c:pt>
                 <c:pt idx="87">
-                  <c:v>17945</c:v>
+                  <c:v>19013</c:v>
                 </c:pt>
                 <c:pt idx="88">
-                  <c:v>29504</c:v>
+                  <c:v>14599</c:v>
                 </c:pt>
                 <c:pt idx="89">
-                  <c:v>59003</c:v>
+                  <c:v>15262</c:v>
                 </c:pt>
                 <c:pt idx="90">
-                  <c:v>370899</c:v>
+                  <c:v>18648</c:v>
                 </c:pt>
                 <c:pt idx="91">
-                  <c:v>88578</c:v>
+                  <c:v>16869</c:v>
                 </c:pt>
                 <c:pt idx="92">
-                  <c:v>69044</c:v>
+                  <c:v>22743</c:v>
                 </c:pt>
                 <c:pt idx="93">
-                  <c:v>22683</c:v>
+                  <c:v>22633</c:v>
                 </c:pt>
                 <c:pt idx="94">
-                  <c:v>25858</c:v>
+                  <c:v>22206</c:v>
                 </c:pt>
                 <c:pt idx="95">
-                  <c:v>14753</c:v>
+                  <c:v>22621</c:v>
                 </c:pt>
                 <c:pt idx="96">
-                  <c:v>70226</c:v>
+                  <c:v>19715</c:v>
                 </c:pt>
                 <c:pt idx="97">
-                  <c:v>27615</c:v>
+                  <c:v>13823</c:v>
                 </c:pt>
                 <c:pt idx="98">
-                  <c:v>27910</c:v>
+                  <c:v>44827</c:v>
                 </c:pt>
                 <c:pt idx="99">
-                  <c:v>21060</c:v>
+                  <c:v>14635</c:v>
                 </c:pt>
                 <c:pt idx="100">
-                  <c:v>50230</c:v>
+                  <c:v>20408</c:v>
                 </c:pt>
                 <c:pt idx="101">
-                  <c:v>139857</c:v>
+                  <c:v>18121</c:v>
                 </c:pt>
                 <c:pt idx="102">
-                  <c:v>31837</c:v>
+                  <c:v>14827</c:v>
                 </c:pt>
                 <c:pt idx="103">
-                  <c:v>48439</c:v>
+                  <c:v>20686</c:v>
                 </c:pt>
               </c:numCache>
             </c:numRef>
@@ -5742,27 +5231,11 @@
             </a:r>
             <a:r>
               <a:rPr lang="pl-PL" baseline="0" dirty="0"/>
-              <a:t> strony </a:t>
-            </a:r>
-            <a:r>
-              <a:rPr lang="pl-PL" baseline="0" dirty="0" err="1"/>
-              <a:t>Freddie</a:t>
-            </a:r>
-            <a:r>
-              <a:rPr lang="pl-PL" baseline="0" dirty="0"/>
-              <a:t> </a:t>
-            </a:r>
-            <a:r>
-              <a:rPr lang="pl-PL" baseline="0" dirty="0" err="1"/>
-              <a:t>Mercury</a:t>
-            </a:r>
-            <a:r>
-              <a:rPr lang="pl-PL" baseline="0" dirty="0"/>
-              <a:t> </a:t>
+              <a:t> stron </a:t>
             </a:r>
             <a:r>
               <a:rPr lang="pl-PL" dirty="0"/>
-              <a:t>[tys.][2][3]</a:t>
+              <a:t>Republika Zielonego Przylądka oraz Curaçao [tys.][2][3]</a:t>
             </a:r>
             <a:endParaRPr lang="en-US" dirty="0"/>
           </a:p>
@@ -5793,7 +5266,7 @@
               <a:cs typeface="+mn-cs"/>
             </a:defRPr>
           </a:pPr>
-          <a:endParaRPr lang="pl-PL"/>
+          <a:endParaRPr lang="en-US"/>
         </a:p>
       </c:txPr>
     </c:title>
@@ -5805,9 +5278,9 @@
           <c:xMode val="edge"/>
           <c:yMode val="edge"/>
           <c:x val="5.3603301286851403E-2"/>
-          <c:y val="0.1663481439502057"/>
+          <c:y val="0.16926678644591617"/>
           <c:w val="0.94418872912625051"/>
-          <c:h val="0.5829305836503621"/>
+          <c:h val="0.58001194115465171"/>
         </c:manualLayout>
       </c:layout>
       <c:lineChart>
@@ -5822,7 +5295,7 @@
               <c:strCache>
                 <c:ptCount val="1"/>
                 <c:pt idx="0">
-                  <c:v>Freddie Mercury</c:v>
+                  <c:v>Republika Zielonego Przylądka</c:v>
                 </c:pt>
               </c:strCache>
             </c:strRef>
@@ -5839,147 +5312,6 @@
           <c:marker>
             <c:symbol val="none"/>
           </c:marker>
-          <c:dLbls>
-            <c:dLbl>
-              <c:idx val="10"/>
-              <c:layout>
-                <c:manualLayout>
-                  <c:x val="1.0645526866962735E-2"/>
-                  <c:y val="7.8803347384183903E-2"/>
-                </c:manualLayout>
-              </c:layout>
-              <c:tx>
-                <c:rich>
-                  <a:bodyPr/>
-                  <a:lstStyle/>
-                  <a:p>
-                    <a:r>
-                      <a:rPr lang="en-US" dirty="0"/>
-                      <a:t>Premiera filmu Bohemian Rapsody</a:t>
-                    </a:r>
-                  </a:p>
-                </c:rich>
-              </c:tx>
-              <c:showLegendKey val="0"/>
-              <c:showVal val="1"/>
-              <c:showCatName val="1"/>
-              <c:showSerName val="0"/>
-              <c:showPercent val="0"/>
-              <c:showBubbleSize val="0"/>
-              <c:extLst>
-                <c:ext xmlns:c15="http://schemas.microsoft.com/office/drawing/2012/chart" uri="{CE6537A1-D6FC-4f65-9D91-7224C49458BB}">
-                  <c15:showDataLabelsRange val="0"/>
-                </c:ext>
-                <c:ext xmlns:c16="http://schemas.microsoft.com/office/drawing/2014/chart" uri="{C3380CC4-5D6E-409C-BE32-E72D297353CC}">
-                  <c16:uniqueId val="{00000000-D6FE-4D5B-A63F-93FE995277E8}"/>
-                </c:ext>
-              </c:extLst>
-            </c:dLbl>
-            <c:dLbl>
-              <c:idx val="46"/>
-              <c:layout>
-                <c:manualLayout>
-                  <c:x val="1.4194035822617088E-2"/>
-                  <c:y val="-1.1674569982842059E-2"/>
-                </c:manualLayout>
-              </c:layout>
-              <c:tx>
-                <c:rich>
-                  <a:bodyPr/>
-                  <a:lstStyle/>
-                  <a:p>
-                    <a:r>
-                      <a:rPr lang="en-US" dirty="0"/>
-                      <a:t>30-ta </a:t>
-                    </a:r>
-                    <a:r>
-                      <a:rPr lang="en-US" dirty="0" err="1"/>
-                      <a:t>rocznica</a:t>
-                    </a:r>
-                    <a:r>
-                      <a:rPr lang="en-US" baseline="0" dirty="0"/>
-                      <a:t> </a:t>
-                    </a:r>
-                    <a:r>
-                      <a:rPr lang="en-US" baseline="0" dirty="0" err="1"/>
-                      <a:t>śmierci</a:t>
-                    </a:r>
-                    <a:endParaRPr lang="en-US" dirty="0"/>
-                  </a:p>
-                </c:rich>
-              </c:tx>
-              <c:showLegendKey val="0"/>
-              <c:showVal val="1"/>
-              <c:showCatName val="1"/>
-              <c:showSerName val="0"/>
-              <c:showPercent val="0"/>
-              <c:showBubbleSize val="0"/>
-              <c:extLst>
-                <c:ext xmlns:c15="http://schemas.microsoft.com/office/drawing/2012/chart" uri="{CE6537A1-D6FC-4f65-9D91-7224C49458BB}">
-                  <c15:showDataLabelsRange val="0"/>
-                </c:ext>
-                <c:ext xmlns:c16="http://schemas.microsoft.com/office/drawing/2014/chart" uri="{C3380CC4-5D6E-409C-BE32-E72D297353CC}">
-                  <c16:uniqueId val="{00000001-D6FE-4D5B-A63F-93FE995277E8}"/>
-                </c:ext>
-              </c:extLst>
-            </c:dLbl>
-            <c:spPr>
-              <a:solidFill>
-                <a:prstClr val="white"/>
-              </a:solidFill>
-              <a:ln>
-                <a:solidFill>
-                  <a:srgbClr val="000000">
-                    <a:lumMod val="25000"/>
-                    <a:lumOff val="75000"/>
-                  </a:srgbClr>
-                </a:solidFill>
-              </a:ln>
-              <a:effectLst/>
-            </c:spPr>
-            <c:txPr>
-              <a:bodyPr rot="0" spcFirstLastPara="1" vertOverflow="clip" horzOverflow="clip" vert="horz" wrap="square" lIns="38100" tIns="19050" rIns="38100" bIns="19050" anchor="ctr" anchorCtr="1">
-                <a:spAutoFit/>
-              </a:bodyPr>
-              <a:lstStyle/>
-              <a:p>
-                <a:pPr>
-                  <a:defRPr sz="1197" b="0" i="0" u="none" strike="noStrike" kern="1200" baseline="0">
-                    <a:solidFill>
-                      <a:schemeClr val="dk1">
-                        <a:lumMod val="65000"/>
-                        <a:lumOff val="35000"/>
-                      </a:schemeClr>
-                    </a:solidFill>
-                    <a:latin typeface="+mn-lt"/>
-                    <a:ea typeface="+mn-ea"/>
-                    <a:cs typeface="+mn-cs"/>
-                  </a:defRPr>
-                </a:pPr>
-                <a:endParaRPr lang="pl-PL"/>
-              </a:p>
-            </c:txPr>
-            <c:showLegendKey val="0"/>
-            <c:showVal val="0"/>
-            <c:showCatName val="0"/>
-            <c:showSerName val="0"/>
-            <c:showPercent val="0"/>
-            <c:showBubbleSize val="0"/>
-            <c:extLst>
-              <c:ext xmlns:c15="http://schemas.microsoft.com/office/drawing/2012/chart" uri="{CE6537A1-D6FC-4f65-9D91-7224C49458BB}">
-                <c15:spPr xmlns:c15="http://schemas.microsoft.com/office/drawing/2012/chart">
-                  <a:prstGeom prst="wedgeRectCallout">
-                    <a:avLst/>
-                  </a:prstGeom>
-                  <a:noFill/>
-                  <a:ln>
-                    <a:noFill/>
-                  </a:ln>
-                </c15:spPr>
-                <c15:showLeaderLines val="0"/>
-              </c:ext>
-            </c:extLst>
-          </c:dLbls>
           <c:cat>
             <c:numRef>
               <c:f>Arkusz1!$A$2:$A$105</c:f>
@@ -6308,316 +5640,316 @@
                 <c:formatCode>General</c:formatCode>
                 <c:ptCount val="104"/>
                 <c:pt idx="0">
-                  <c:v>32919</c:v>
+                  <c:v>22551</c:v>
                 </c:pt>
                 <c:pt idx="1">
-                  <c:v>25397</c:v>
+                  <c:v>20088</c:v>
                 </c:pt>
                 <c:pt idx="2">
-                  <c:v>28423</c:v>
+                  <c:v>18648</c:v>
                 </c:pt>
                 <c:pt idx="3">
-                  <c:v>30273</c:v>
+                  <c:v>15304</c:v>
                 </c:pt>
                 <c:pt idx="4">
-                  <c:v>37553</c:v>
+                  <c:v>16017</c:v>
                 </c:pt>
                 <c:pt idx="5">
-                  <c:v>25038</c:v>
+                  <c:v>20793</c:v>
                 </c:pt>
                 <c:pt idx="6">
-                  <c:v>44352</c:v>
+                  <c:v>24073</c:v>
                 </c:pt>
                 <c:pt idx="7">
-                  <c:v>30343</c:v>
+                  <c:v>20587</c:v>
                 </c:pt>
                 <c:pt idx="8">
-                  <c:v>37061</c:v>
+                  <c:v>21821</c:v>
                 </c:pt>
                 <c:pt idx="9">
-                  <c:v>78271</c:v>
+                  <c:v>20866</c:v>
                 </c:pt>
                 <c:pt idx="10">
-                  <c:v>449113</c:v>
+                  <c:v>20681</c:v>
                 </c:pt>
                 <c:pt idx="11">
-                  <c:v>211198</c:v>
+                  <c:v>20276</c:v>
                 </c:pt>
                 <c:pt idx="12">
-                  <c:v>194916</c:v>
+                  <c:v>22216</c:v>
                 </c:pt>
                 <c:pt idx="13">
-                  <c:v>214954</c:v>
+                  <c:v>20603</c:v>
                 </c:pt>
                 <c:pt idx="14">
-                  <c:v>165365</c:v>
+                  <c:v>19292</c:v>
                 </c:pt>
                 <c:pt idx="15">
-                  <c:v>75085</c:v>
+                  <c:v>11804</c:v>
                 </c:pt>
                 <c:pt idx="16">
-                  <c:v>58533</c:v>
+                  <c:v>12443</c:v>
                 </c:pt>
                 <c:pt idx="17">
-                  <c:v>50277</c:v>
+                  <c:v>15614</c:v>
                 </c:pt>
                 <c:pt idx="18">
-                  <c:v>52872</c:v>
+                  <c:v>18295</c:v>
                 </c:pt>
                 <c:pt idx="19">
-                  <c:v>45240</c:v>
+                  <c:v>34271</c:v>
                 </c:pt>
                 <c:pt idx="20">
-                  <c:v>131260</c:v>
+                  <c:v>32728</c:v>
                 </c:pt>
                 <c:pt idx="21">
-                  <c:v>85430</c:v>
+                  <c:v>16496</c:v>
                 </c:pt>
                 <c:pt idx="22">
-                  <c:v>87686</c:v>
+                  <c:v>15918</c:v>
                 </c:pt>
                 <c:pt idx="23">
-                  <c:v>67782</c:v>
+                  <c:v>14647</c:v>
                 </c:pt>
                 <c:pt idx="24">
-                  <c:v>52818</c:v>
+                  <c:v>18428</c:v>
                 </c:pt>
                 <c:pt idx="25">
-                  <c:v>44863</c:v>
+                  <c:v>13301</c:v>
                 </c:pt>
                 <c:pt idx="26">
-                  <c:v>51769</c:v>
+                  <c:v>10989</c:v>
                 </c:pt>
                 <c:pt idx="27">
-                  <c:v>50207</c:v>
+                  <c:v>7888</c:v>
                 </c:pt>
                 <c:pt idx="28">
-                  <c:v>43144</c:v>
+                  <c:v>7726</c:v>
                 </c:pt>
                 <c:pt idx="29">
-                  <c:v>37022</c:v>
+                  <c:v>5652</c:v>
                 </c:pt>
                 <c:pt idx="30">
-                  <c:v>30423</c:v>
+                  <c:v>7029</c:v>
                 </c:pt>
                 <c:pt idx="31">
-                  <c:v>32078</c:v>
+                  <c:v>6579</c:v>
                 </c:pt>
                 <c:pt idx="32">
-                  <c:v>36980</c:v>
+                  <c:v>6880</c:v>
                 </c:pt>
                 <c:pt idx="33">
-                  <c:v>33182</c:v>
+                  <c:v>6468</c:v>
                 </c:pt>
                 <c:pt idx="34">
-                  <c:v>48119</c:v>
+                  <c:v>7657</c:v>
                 </c:pt>
                 <c:pt idx="35">
-                  <c:v>44213</c:v>
+                  <c:v>8879</c:v>
                 </c:pt>
                 <c:pt idx="36">
-                  <c:v>51776</c:v>
+                  <c:v>14813</c:v>
                 </c:pt>
                 <c:pt idx="37">
-                  <c:v>34205</c:v>
+                  <c:v>10721</c:v>
                 </c:pt>
                 <c:pt idx="38">
-                  <c:v>39312</c:v>
+                  <c:v>15336</c:v>
                 </c:pt>
                 <c:pt idx="39">
-                  <c:v>37064</c:v>
+                  <c:v>15873</c:v>
                 </c:pt>
                 <c:pt idx="40">
-                  <c:v>40983</c:v>
+                  <c:v>13452</c:v>
                 </c:pt>
                 <c:pt idx="41">
-                  <c:v>28222</c:v>
+                  <c:v>18018</c:v>
                 </c:pt>
                 <c:pt idx="42">
-                  <c:v>28539</c:v>
+                  <c:v>18029</c:v>
                 </c:pt>
                 <c:pt idx="43">
-                  <c:v>29883</c:v>
+                  <c:v>17484</c:v>
                 </c:pt>
                 <c:pt idx="44">
-                  <c:v>149854</c:v>
+                  <c:v>18591</c:v>
                 </c:pt>
                 <c:pt idx="45">
-                  <c:v>93633</c:v>
+                  <c:v>20359</c:v>
                 </c:pt>
                 <c:pt idx="46">
-                  <c:v>267298</c:v>
+                  <c:v>17381</c:v>
                 </c:pt>
                 <c:pt idx="47">
-                  <c:v>95078</c:v>
+                  <c:v>14139</c:v>
                 </c:pt>
                 <c:pt idx="48">
-                  <c:v>89223</c:v>
+                  <c:v>21102</c:v>
                 </c:pt>
                 <c:pt idx="49">
-                  <c:v>44844</c:v>
+                  <c:v>13575</c:v>
                 </c:pt>
                 <c:pt idx="50">
-                  <c:v>25220</c:v>
+                  <c:v>16139</c:v>
                 </c:pt>
                 <c:pt idx="51">
-                  <c:v>30878</c:v>
+                  <c:v>12940</c:v>
                 </c:pt>
                 <c:pt idx="52">
-                  <c:v>85157</c:v>
+                  <c:v>12287</c:v>
                 </c:pt>
                 <c:pt idx="53">
-                  <c:v>33930</c:v>
+                  <c:v>11969</c:v>
                 </c:pt>
                 <c:pt idx="54">
-                  <c:v>40443</c:v>
+                  <c:v>15070</c:v>
                 </c:pt>
                 <c:pt idx="55">
-                  <c:v>24178</c:v>
+                  <c:v>14212</c:v>
                 </c:pt>
                 <c:pt idx="56">
-                  <c:v>23694</c:v>
+                  <c:v>12952</c:v>
                 </c:pt>
                 <c:pt idx="57">
-                  <c:v>24345</c:v>
+                  <c:v>13750</c:v>
                 </c:pt>
                 <c:pt idx="58">
-                  <c:v>31850</c:v>
+                  <c:v>15068</c:v>
                 </c:pt>
                 <c:pt idx="59">
-                  <c:v>23008</c:v>
+                  <c:v>16377</c:v>
                 </c:pt>
                 <c:pt idx="60">
-                  <c:v>47372</c:v>
+                  <c:v>20988</c:v>
                 </c:pt>
                 <c:pt idx="61">
-                  <c:v>25496</c:v>
+                  <c:v>16314</c:v>
                 </c:pt>
                 <c:pt idx="62">
-                  <c:v>29122</c:v>
+                  <c:v>16029</c:v>
                 </c:pt>
                 <c:pt idx="63">
-                  <c:v>29761</c:v>
+                  <c:v>15490</c:v>
                 </c:pt>
                 <c:pt idx="64">
-                  <c:v>100721</c:v>
+                  <c:v>16950</c:v>
                 </c:pt>
                 <c:pt idx="65">
-                  <c:v>26820</c:v>
+                  <c:v>16184</c:v>
                 </c:pt>
                 <c:pt idx="66">
-                  <c:v>36048</c:v>
+                  <c:v>16749</c:v>
                 </c:pt>
                 <c:pt idx="67">
-                  <c:v>34590</c:v>
+                  <c:v>19702</c:v>
                 </c:pt>
                 <c:pt idx="68">
-                  <c:v>41269</c:v>
+                  <c:v>18341</c:v>
                 </c:pt>
                 <c:pt idx="69">
-                  <c:v>25151</c:v>
+                  <c:v>20925</c:v>
                 </c:pt>
                 <c:pt idx="70">
-                  <c:v>73888</c:v>
+                  <c:v>22426</c:v>
                 </c:pt>
                 <c:pt idx="71">
-                  <c:v>36627</c:v>
+                  <c:v>24749</c:v>
                 </c:pt>
                 <c:pt idx="72">
-                  <c:v>39646</c:v>
+                  <c:v>36474</c:v>
                 </c:pt>
                 <c:pt idx="73">
-                  <c:v>22182</c:v>
+                  <c:v>26349</c:v>
                 </c:pt>
                 <c:pt idx="74">
-                  <c:v>23681</c:v>
+                  <c:v>23087</c:v>
                 </c:pt>
                 <c:pt idx="75">
-                  <c:v>77313</c:v>
+                  <c:v>19485</c:v>
                 </c:pt>
                 <c:pt idx="76">
-                  <c:v>22061</c:v>
+                  <c:v>18349</c:v>
                 </c:pt>
                 <c:pt idx="77">
-                  <c:v>19112</c:v>
+                  <c:v>15729</c:v>
                 </c:pt>
                 <c:pt idx="78">
-                  <c:v>16485</c:v>
+                  <c:v>20903</c:v>
                 </c:pt>
                 <c:pt idx="79">
-                  <c:v>18593</c:v>
+                  <c:v>18287</c:v>
                 </c:pt>
                 <c:pt idx="80">
-                  <c:v>22637</c:v>
+                  <c:v>19081</c:v>
                 </c:pt>
                 <c:pt idx="81">
-                  <c:v>19053</c:v>
+                  <c:v>20806</c:v>
                 </c:pt>
                 <c:pt idx="82">
-                  <c:v>26886</c:v>
+                  <c:v>23368</c:v>
                 </c:pt>
                 <c:pt idx="83">
-                  <c:v>23867</c:v>
+                  <c:v>24771</c:v>
                 </c:pt>
                 <c:pt idx="84">
-                  <c:v>23190</c:v>
+                  <c:v>29250</c:v>
                 </c:pt>
                 <c:pt idx="85">
-                  <c:v>28138</c:v>
+                  <c:v>24407</c:v>
                 </c:pt>
                 <c:pt idx="86">
-                  <c:v>60700</c:v>
+                  <c:v>26287</c:v>
                 </c:pt>
                 <c:pt idx="87">
-                  <c:v>19013</c:v>
+                  <c:v>18755</c:v>
                 </c:pt>
                 <c:pt idx="88">
-                  <c:v>14599</c:v>
+                  <c:v>17160</c:v>
                 </c:pt>
                 <c:pt idx="89">
-                  <c:v>15262</c:v>
+                  <c:v>18956</c:v>
                 </c:pt>
                 <c:pt idx="90">
-                  <c:v>18648</c:v>
+                  <c:v>22533</c:v>
                 </c:pt>
                 <c:pt idx="91">
-                  <c:v>16869</c:v>
+                  <c:v>26900</c:v>
                 </c:pt>
                 <c:pt idx="92">
-                  <c:v>22743</c:v>
+                  <c:v>31540</c:v>
                 </c:pt>
                 <c:pt idx="93">
-                  <c:v>22633</c:v>
+                  <c:v>42687</c:v>
                 </c:pt>
                 <c:pt idx="94">
-                  <c:v>22206</c:v>
+                  <c:v>27507</c:v>
                 </c:pt>
                 <c:pt idx="95">
-                  <c:v>22621</c:v>
+                  <c:v>25250</c:v>
                 </c:pt>
                 <c:pt idx="96">
-                  <c:v>19715</c:v>
+                  <c:v>28459</c:v>
                 </c:pt>
                 <c:pt idx="97">
-                  <c:v>13823</c:v>
+                  <c:v>23050</c:v>
                 </c:pt>
                 <c:pt idx="98">
-                  <c:v>44827</c:v>
+                  <c:v>23760</c:v>
                 </c:pt>
                 <c:pt idx="99">
-                  <c:v>14635</c:v>
+                  <c:v>21524</c:v>
                 </c:pt>
                 <c:pt idx="100">
-                  <c:v>20408</c:v>
+                  <c:v>24934</c:v>
                 </c:pt>
                 <c:pt idx="101">
-                  <c:v>18121</c:v>
+                  <c:v>338510</c:v>
                 </c:pt>
                 <c:pt idx="102">
-                  <c:v>14827</c:v>
+                  <c:v>176331</c:v>
                 </c:pt>
                 <c:pt idx="103">
-                  <c:v>20686</c:v>
+                  <c:v>19500</c:v>
                 </c:pt>
               </c:numCache>
             </c:numRef>
@@ -6626,6 +5958,681 @@
           <c:extLst>
             <c:ext xmlns:c16="http://schemas.microsoft.com/office/drawing/2014/chart" uri="{C3380CC4-5D6E-409C-BE32-E72D297353CC}">
               <c16:uniqueId val="{00000000-298A-42B4-BA2C-8AEEEEF9E6BE}"/>
+            </c:ext>
+          </c:extLst>
+        </c:ser>
+        <c:ser>
+          <c:idx val="1"/>
+          <c:order val="1"/>
+          <c:tx>
+            <c:strRef>
+              <c:f>Arkusz1!$C$1</c:f>
+              <c:strCache>
+                <c:ptCount val="1"/>
+                <c:pt idx="0">
+                  <c:v>Curaçao</c:v>
+                </c:pt>
+              </c:strCache>
+            </c:strRef>
+          </c:tx>
+          <c:spPr>
+            <a:ln w="28575" cap="rnd">
+              <a:solidFill>
+                <a:schemeClr val="accent2"/>
+              </a:solidFill>
+              <a:round/>
+            </a:ln>
+            <a:effectLst/>
+          </c:spPr>
+          <c:marker>
+            <c:symbol val="none"/>
+          </c:marker>
+          <c:cat>
+            <c:numRef>
+              <c:f>Arkusz1!$A$2:$A$105</c:f>
+              <c:numCache>
+                <c:formatCode>m/d/yyyy</c:formatCode>
+                <c:ptCount val="104"/>
+                <c:pt idx="0">
+                  <c:v>43101</c:v>
+                </c:pt>
+                <c:pt idx="1">
+                  <c:v>43132</c:v>
+                </c:pt>
+                <c:pt idx="2">
+                  <c:v>43160</c:v>
+                </c:pt>
+                <c:pt idx="3">
+                  <c:v>43191</c:v>
+                </c:pt>
+                <c:pt idx="4">
+                  <c:v>43221</c:v>
+                </c:pt>
+                <c:pt idx="5">
+                  <c:v>43252</c:v>
+                </c:pt>
+                <c:pt idx="6">
+                  <c:v>43282</c:v>
+                </c:pt>
+                <c:pt idx="7">
+                  <c:v>43313</c:v>
+                </c:pt>
+                <c:pt idx="8">
+                  <c:v>43344</c:v>
+                </c:pt>
+                <c:pt idx="9">
+                  <c:v>43374</c:v>
+                </c:pt>
+                <c:pt idx="10">
+                  <c:v>43405</c:v>
+                </c:pt>
+                <c:pt idx="11">
+                  <c:v>43435</c:v>
+                </c:pt>
+                <c:pt idx="12">
+                  <c:v>43466</c:v>
+                </c:pt>
+                <c:pt idx="13">
+                  <c:v>43497</c:v>
+                </c:pt>
+                <c:pt idx="14">
+                  <c:v>43525</c:v>
+                </c:pt>
+                <c:pt idx="15">
+                  <c:v>43556</c:v>
+                </c:pt>
+                <c:pt idx="16">
+                  <c:v>43586</c:v>
+                </c:pt>
+                <c:pt idx="17">
+                  <c:v>43617</c:v>
+                </c:pt>
+                <c:pt idx="18">
+                  <c:v>43647</c:v>
+                </c:pt>
+                <c:pt idx="19">
+                  <c:v>43678</c:v>
+                </c:pt>
+                <c:pt idx="20">
+                  <c:v>43709</c:v>
+                </c:pt>
+                <c:pt idx="21">
+                  <c:v>43739</c:v>
+                </c:pt>
+                <c:pt idx="22">
+                  <c:v>43770</c:v>
+                </c:pt>
+                <c:pt idx="23">
+                  <c:v>43800</c:v>
+                </c:pt>
+                <c:pt idx="24">
+                  <c:v>43831</c:v>
+                </c:pt>
+                <c:pt idx="25">
+                  <c:v>43862</c:v>
+                </c:pt>
+                <c:pt idx="26">
+                  <c:v>43891</c:v>
+                </c:pt>
+                <c:pt idx="27">
+                  <c:v>43922</c:v>
+                </c:pt>
+                <c:pt idx="28">
+                  <c:v>43952</c:v>
+                </c:pt>
+                <c:pt idx="29">
+                  <c:v>43983</c:v>
+                </c:pt>
+                <c:pt idx="30">
+                  <c:v>44013</c:v>
+                </c:pt>
+                <c:pt idx="31">
+                  <c:v>44044</c:v>
+                </c:pt>
+                <c:pt idx="32">
+                  <c:v>44075</c:v>
+                </c:pt>
+                <c:pt idx="33">
+                  <c:v>44105</c:v>
+                </c:pt>
+                <c:pt idx="34">
+                  <c:v>44136</c:v>
+                </c:pt>
+                <c:pt idx="35">
+                  <c:v>44166</c:v>
+                </c:pt>
+                <c:pt idx="36">
+                  <c:v>44197</c:v>
+                </c:pt>
+                <c:pt idx="37">
+                  <c:v>44228</c:v>
+                </c:pt>
+                <c:pt idx="38">
+                  <c:v>44256</c:v>
+                </c:pt>
+                <c:pt idx="39">
+                  <c:v>44287</c:v>
+                </c:pt>
+                <c:pt idx="40">
+                  <c:v>44317</c:v>
+                </c:pt>
+                <c:pt idx="41">
+                  <c:v>44348</c:v>
+                </c:pt>
+                <c:pt idx="42">
+                  <c:v>44378</c:v>
+                </c:pt>
+                <c:pt idx="43">
+                  <c:v>44409</c:v>
+                </c:pt>
+                <c:pt idx="44">
+                  <c:v>44440</c:v>
+                </c:pt>
+                <c:pt idx="45">
+                  <c:v>44470</c:v>
+                </c:pt>
+                <c:pt idx="46">
+                  <c:v>44501</c:v>
+                </c:pt>
+                <c:pt idx="47">
+                  <c:v>44531</c:v>
+                </c:pt>
+                <c:pt idx="48">
+                  <c:v>44562</c:v>
+                </c:pt>
+                <c:pt idx="49">
+                  <c:v>44593</c:v>
+                </c:pt>
+                <c:pt idx="50">
+                  <c:v>44621</c:v>
+                </c:pt>
+                <c:pt idx="51">
+                  <c:v>44652</c:v>
+                </c:pt>
+                <c:pt idx="52">
+                  <c:v>44682</c:v>
+                </c:pt>
+                <c:pt idx="53">
+                  <c:v>44713</c:v>
+                </c:pt>
+                <c:pt idx="54">
+                  <c:v>44743</c:v>
+                </c:pt>
+                <c:pt idx="55">
+                  <c:v>44774</c:v>
+                </c:pt>
+                <c:pt idx="56">
+                  <c:v>44805</c:v>
+                </c:pt>
+                <c:pt idx="57">
+                  <c:v>44835</c:v>
+                </c:pt>
+                <c:pt idx="58">
+                  <c:v>44866</c:v>
+                </c:pt>
+                <c:pt idx="59">
+                  <c:v>44896</c:v>
+                </c:pt>
+                <c:pt idx="60">
+                  <c:v>44927</c:v>
+                </c:pt>
+                <c:pt idx="61">
+                  <c:v>44958</c:v>
+                </c:pt>
+                <c:pt idx="62">
+                  <c:v>44986</c:v>
+                </c:pt>
+                <c:pt idx="63">
+                  <c:v>45017</c:v>
+                </c:pt>
+                <c:pt idx="64">
+                  <c:v>45047</c:v>
+                </c:pt>
+                <c:pt idx="65">
+                  <c:v>45078</c:v>
+                </c:pt>
+                <c:pt idx="66">
+                  <c:v>45108</c:v>
+                </c:pt>
+                <c:pt idx="67">
+                  <c:v>45139</c:v>
+                </c:pt>
+                <c:pt idx="68">
+                  <c:v>45170</c:v>
+                </c:pt>
+                <c:pt idx="69">
+                  <c:v>45200</c:v>
+                </c:pt>
+                <c:pt idx="70">
+                  <c:v>45231</c:v>
+                </c:pt>
+                <c:pt idx="71">
+                  <c:v>45261</c:v>
+                </c:pt>
+                <c:pt idx="72">
+                  <c:v>45292</c:v>
+                </c:pt>
+                <c:pt idx="73">
+                  <c:v>45323</c:v>
+                </c:pt>
+                <c:pt idx="74">
+                  <c:v>45352</c:v>
+                </c:pt>
+                <c:pt idx="75">
+                  <c:v>45383</c:v>
+                </c:pt>
+                <c:pt idx="76">
+                  <c:v>45413</c:v>
+                </c:pt>
+                <c:pt idx="77">
+                  <c:v>45444</c:v>
+                </c:pt>
+                <c:pt idx="78">
+                  <c:v>45474</c:v>
+                </c:pt>
+                <c:pt idx="79">
+                  <c:v>45505</c:v>
+                </c:pt>
+                <c:pt idx="80">
+                  <c:v>45536</c:v>
+                </c:pt>
+                <c:pt idx="81">
+                  <c:v>45566</c:v>
+                </c:pt>
+                <c:pt idx="82">
+                  <c:v>45597</c:v>
+                </c:pt>
+                <c:pt idx="83">
+                  <c:v>45627</c:v>
+                </c:pt>
+                <c:pt idx="84">
+                  <c:v>45658</c:v>
+                </c:pt>
+                <c:pt idx="85">
+                  <c:v>45689</c:v>
+                </c:pt>
+                <c:pt idx="86">
+                  <c:v>45717</c:v>
+                </c:pt>
+                <c:pt idx="87">
+                  <c:v>45748</c:v>
+                </c:pt>
+                <c:pt idx="88">
+                  <c:v>45778</c:v>
+                </c:pt>
+                <c:pt idx="89">
+                  <c:v>45809</c:v>
+                </c:pt>
+                <c:pt idx="90">
+                  <c:v>45839</c:v>
+                </c:pt>
+                <c:pt idx="91">
+                  <c:v>45870</c:v>
+                </c:pt>
+                <c:pt idx="92">
+                  <c:v>45901</c:v>
+                </c:pt>
+                <c:pt idx="93">
+                  <c:v>45931</c:v>
+                </c:pt>
+                <c:pt idx="94">
+                  <c:v>45962</c:v>
+                </c:pt>
+                <c:pt idx="95">
+                  <c:v>45992</c:v>
+                </c:pt>
+                <c:pt idx="96">
+                  <c:v>46023</c:v>
+                </c:pt>
+                <c:pt idx="97">
+                  <c:v>46054</c:v>
+                </c:pt>
+                <c:pt idx="98">
+                  <c:v>46082</c:v>
+                </c:pt>
+                <c:pt idx="99">
+                  <c:v>46113</c:v>
+                </c:pt>
+                <c:pt idx="100">
+                  <c:v>46143</c:v>
+                </c:pt>
+                <c:pt idx="101">
+                  <c:v>46174</c:v>
+                </c:pt>
+                <c:pt idx="102">
+                  <c:v>46204</c:v>
+                </c:pt>
+                <c:pt idx="103">
+                  <c:v>46235</c:v>
+                </c:pt>
+              </c:numCache>
+            </c:numRef>
+          </c:cat>
+          <c:val>
+            <c:numRef>
+              <c:f>Arkusz1!$C$2:$C$105</c:f>
+              <c:numCache>
+                <c:formatCode>General</c:formatCode>
+                <c:ptCount val="104"/>
+                <c:pt idx="0">
+                  <c:v>4960</c:v>
+                </c:pt>
+                <c:pt idx="1">
+                  <c:v>4015</c:v>
+                </c:pt>
+                <c:pt idx="2">
+                  <c:v>6474</c:v>
+                </c:pt>
+                <c:pt idx="3">
+                  <c:v>4131</c:v>
+                </c:pt>
+                <c:pt idx="4">
+                  <c:v>4209</c:v>
+                </c:pt>
+                <c:pt idx="5">
+                  <c:v>4919</c:v>
+                </c:pt>
+                <c:pt idx="6">
+                  <c:v>5130</c:v>
+                </c:pt>
+                <c:pt idx="7">
+                  <c:v>5424</c:v>
+                </c:pt>
+                <c:pt idx="8">
+                  <c:v>4967</c:v>
+                </c:pt>
+                <c:pt idx="9">
+                  <c:v>4789</c:v>
+                </c:pt>
+                <c:pt idx="10">
+                  <c:v>5160</c:v>
+                </c:pt>
+                <c:pt idx="11">
+                  <c:v>5804</c:v>
+                </c:pt>
+                <c:pt idx="12">
+                  <c:v>6412</c:v>
+                </c:pt>
+                <c:pt idx="13">
+                  <c:v>5483</c:v>
+                </c:pt>
+                <c:pt idx="14">
+                  <c:v>5347</c:v>
+                </c:pt>
+                <c:pt idx="15">
+                  <c:v>3877</c:v>
+                </c:pt>
+                <c:pt idx="16">
+                  <c:v>4447</c:v>
+                </c:pt>
+                <c:pt idx="17">
+                  <c:v>7604</c:v>
+                </c:pt>
+                <c:pt idx="18">
+                  <c:v>5939</c:v>
+                </c:pt>
+                <c:pt idx="19">
+                  <c:v>5042</c:v>
+                </c:pt>
+                <c:pt idx="20">
+                  <c:v>6801</c:v>
+                </c:pt>
+                <c:pt idx="21">
+                  <c:v>6864</c:v>
+                </c:pt>
+                <c:pt idx="22">
+                  <c:v>5952</c:v>
+                </c:pt>
+                <c:pt idx="23">
+                  <c:v>5743</c:v>
+                </c:pt>
+                <c:pt idx="24">
+                  <c:v>11412</c:v>
+                </c:pt>
+                <c:pt idx="25">
+                  <c:v>5938</c:v>
+                </c:pt>
+                <c:pt idx="26">
+                  <c:v>6179</c:v>
+                </c:pt>
+                <c:pt idx="27">
+                  <c:v>7535</c:v>
+                </c:pt>
+                <c:pt idx="28">
+                  <c:v>4814</c:v>
+                </c:pt>
+                <c:pt idx="29">
+                  <c:v>4120</c:v>
+                </c:pt>
+                <c:pt idx="30">
+                  <c:v>4437</c:v>
+                </c:pt>
+                <c:pt idx="31">
+                  <c:v>4986</c:v>
+                </c:pt>
+                <c:pt idx="32">
+                  <c:v>5141</c:v>
+                </c:pt>
+                <c:pt idx="33">
+                  <c:v>5343</c:v>
+                </c:pt>
+                <c:pt idx="34">
+                  <c:v>5062</c:v>
+                </c:pt>
+                <c:pt idx="35">
+                  <c:v>5273</c:v>
+                </c:pt>
+                <c:pt idx="36">
+                  <c:v>5441</c:v>
+                </c:pt>
+                <c:pt idx="37">
+                  <c:v>4138</c:v>
+                </c:pt>
+                <c:pt idx="38">
+                  <c:v>6732</c:v>
+                </c:pt>
+                <c:pt idx="39">
+                  <c:v>7821</c:v>
+                </c:pt>
+                <c:pt idx="40">
+                  <c:v>6303</c:v>
+                </c:pt>
+                <c:pt idx="41">
+                  <c:v>7504</c:v>
+                </c:pt>
+                <c:pt idx="42">
+                  <c:v>6409</c:v>
+                </c:pt>
+                <c:pt idx="43">
+                  <c:v>5988</c:v>
+                </c:pt>
+                <c:pt idx="44">
+                  <c:v>5574</c:v>
+                </c:pt>
+                <c:pt idx="45">
+                  <c:v>6041</c:v>
+                </c:pt>
+                <c:pt idx="46">
+                  <c:v>5295</c:v>
+                </c:pt>
+                <c:pt idx="47">
+                  <c:v>5387</c:v>
+                </c:pt>
+                <c:pt idx="48">
+                  <c:v>5831</c:v>
+                </c:pt>
+                <c:pt idx="49">
+                  <c:v>4844</c:v>
+                </c:pt>
+                <c:pt idx="50">
+                  <c:v>5654</c:v>
+                </c:pt>
+                <c:pt idx="51">
+                  <c:v>5115</c:v>
+                </c:pt>
+                <c:pt idx="52">
+                  <c:v>4868</c:v>
+                </c:pt>
+                <c:pt idx="53">
+                  <c:v>6929</c:v>
+                </c:pt>
+                <c:pt idx="54">
+                  <c:v>6460</c:v>
+                </c:pt>
+                <c:pt idx="55">
+                  <c:v>5523</c:v>
+                </c:pt>
+                <c:pt idx="56">
+                  <c:v>5545</c:v>
+                </c:pt>
+                <c:pt idx="57">
+                  <c:v>4835</c:v>
+                </c:pt>
+                <c:pt idx="58">
+                  <c:v>6508</c:v>
+                </c:pt>
+                <c:pt idx="59">
+                  <c:v>6668</c:v>
+                </c:pt>
+                <c:pt idx="60">
+                  <c:v>6183</c:v>
+                </c:pt>
+                <c:pt idx="61">
+                  <c:v>6594</c:v>
+                </c:pt>
+                <c:pt idx="62">
+                  <c:v>10725</c:v>
+                </c:pt>
+                <c:pt idx="63">
+                  <c:v>5583</c:v>
+                </c:pt>
+                <c:pt idx="64">
+                  <c:v>5670</c:v>
+                </c:pt>
+                <c:pt idx="65">
+                  <c:v>5919</c:v>
+                </c:pt>
+                <c:pt idx="66">
+                  <c:v>7305</c:v>
+                </c:pt>
+                <c:pt idx="67">
+                  <c:v>6385</c:v>
+                </c:pt>
+                <c:pt idx="68">
+                  <c:v>5432</c:v>
+                </c:pt>
+                <c:pt idx="69">
+                  <c:v>5156</c:v>
+                </c:pt>
+                <c:pt idx="70">
+                  <c:v>5927</c:v>
+                </c:pt>
+                <c:pt idx="71">
+                  <c:v>6007</c:v>
+                </c:pt>
+                <c:pt idx="72">
+                  <c:v>6957</c:v>
+                </c:pt>
+                <c:pt idx="73">
+                  <c:v>5917</c:v>
+                </c:pt>
+                <c:pt idx="74">
+                  <c:v>5922</c:v>
+                </c:pt>
+                <c:pt idx="75">
+                  <c:v>5516</c:v>
+                </c:pt>
+                <c:pt idx="76">
+                  <c:v>4974</c:v>
+                </c:pt>
+                <c:pt idx="77">
+                  <c:v>5967</c:v>
+                </c:pt>
+                <c:pt idx="78">
+                  <c:v>9441</c:v>
+                </c:pt>
+                <c:pt idx="79">
+                  <c:v>6516</c:v>
+                </c:pt>
+                <c:pt idx="80">
+                  <c:v>4786</c:v>
+                </c:pt>
+                <c:pt idx="81">
+                  <c:v>4976</c:v>
+                </c:pt>
+                <c:pt idx="82">
+                  <c:v>5073</c:v>
+                </c:pt>
+                <c:pt idx="83">
+                  <c:v>7020</c:v>
+                </c:pt>
+                <c:pt idx="84">
+                  <c:v>7384</c:v>
+                </c:pt>
+                <c:pt idx="85">
+                  <c:v>5723</c:v>
+                </c:pt>
+                <c:pt idx="86">
+                  <c:v>5627</c:v>
+                </c:pt>
+                <c:pt idx="87">
+                  <c:v>5559</c:v>
+                </c:pt>
+                <c:pt idx="88">
+                  <c:v>3798</c:v>
+                </c:pt>
+                <c:pt idx="89">
+                  <c:v>8780</c:v>
+                </c:pt>
+                <c:pt idx="90">
+                  <c:v>7324</c:v>
+                </c:pt>
+                <c:pt idx="91">
+                  <c:v>6670</c:v>
+                </c:pt>
+                <c:pt idx="92">
+                  <c:v>6034</c:v>
+                </c:pt>
+                <c:pt idx="93">
+                  <c:v>13600</c:v>
+                </c:pt>
+                <c:pt idx="94">
+                  <c:v>53420</c:v>
+                </c:pt>
+                <c:pt idx="95">
+                  <c:v>20560</c:v>
+                </c:pt>
+                <c:pt idx="96">
+                  <c:v>10172</c:v>
+                </c:pt>
+                <c:pt idx="97">
+                  <c:v>7314</c:v>
+                </c:pt>
+                <c:pt idx="98">
+                  <c:v>11119</c:v>
+                </c:pt>
+                <c:pt idx="99">
+                  <c:v>18778</c:v>
+                </c:pt>
+                <c:pt idx="100">
+                  <c:v>19030</c:v>
+                </c:pt>
+                <c:pt idx="101">
+                  <c:v>703315</c:v>
+                </c:pt>
+                <c:pt idx="102">
+                  <c:v>24281</c:v>
+                </c:pt>
+                <c:pt idx="103">
+                  <c:v>6829</c:v>
+                </c:pt>
+              </c:numCache>
+            </c:numRef>
+          </c:val>
+          <c:smooth val="0"/>
+          <c:extLst>
+            <c:ext xmlns:c16="http://schemas.microsoft.com/office/drawing/2014/chart" uri="{C3380CC4-5D6E-409C-BE32-E72D297353CC}">
+              <c16:uniqueId val="{00000008-298A-42B4-BA2C-8AEEEEF9E6BE}"/>
             </c:ext>
           </c:extLst>
         </c:ser>
@@ -6857,7 +6864,7 @@
               <a:cs typeface="+mn-cs"/>
             </a:defRPr>
           </a:pPr>
-          <a:endParaRPr lang="pl-PL"/>
+          <a:endParaRPr lang="en-US"/>
         </a:p>
       </c:txPr>
     </c:title>
@@ -12232,7 +12239,7 @@
           <a:p>
             <a:fld id="{395FEE27-536F-479E-B304-98213E6B58CC}" type="datetimeFigureOut">
               <a:rPr lang="pl-PL" smtClean="0"/>
-              <a:t>24.09.2026</a:t>
+              <a:t>25.09.2026</a:t>
             </a:fld>
             <a:endParaRPr lang="pl-PL"/>
           </a:p>
@@ -12430,7 +12437,7 @@
           <a:p>
             <a:fld id="{395FEE27-536F-479E-B304-98213E6B58CC}" type="datetimeFigureOut">
               <a:rPr lang="pl-PL" smtClean="0"/>
-              <a:t>24.09.2026</a:t>
+              <a:t>25.09.2026</a:t>
             </a:fld>
             <a:endParaRPr lang="pl-PL"/>
           </a:p>
@@ -12638,7 +12645,7 @@
           <a:p>
             <a:fld id="{395FEE27-536F-479E-B304-98213E6B58CC}" type="datetimeFigureOut">
               <a:rPr lang="pl-PL" smtClean="0"/>
-              <a:t>24.09.2026</a:t>
+              <a:t>25.09.2026</a:t>
             </a:fld>
             <a:endParaRPr lang="pl-PL"/>
           </a:p>
@@ -12836,7 +12843,7 @@
           <a:p>
             <a:fld id="{395FEE27-536F-479E-B304-98213E6B58CC}" type="datetimeFigureOut">
               <a:rPr lang="pl-PL" smtClean="0"/>
-              <a:t>24.09.2026</a:t>
+              <a:t>25.09.2026</a:t>
             </a:fld>
             <a:endParaRPr lang="pl-PL"/>
           </a:p>
@@ -13111,7 +13118,7 @@
           <a:p>
             <a:fld id="{395FEE27-536F-479E-B304-98213E6B58CC}" type="datetimeFigureOut">
               <a:rPr lang="pl-PL" smtClean="0"/>
-              <a:t>24.09.2026</a:t>
+              <a:t>25.09.2026</a:t>
             </a:fld>
             <a:endParaRPr lang="pl-PL"/>
           </a:p>
@@ -13376,7 +13383,7 @@
           <a:p>
             <a:fld id="{395FEE27-536F-479E-B304-98213E6B58CC}" type="datetimeFigureOut">
               <a:rPr lang="pl-PL" smtClean="0"/>
-              <a:t>24.09.2026</a:t>
+              <a:t>25.09.2026</a:t>
             </a:fld>
             <a:endParaRPr lang="pl-PL"/>
           </a:p>
@@ -13788,7 +13795,7 @@
           <a:p>
             <a:fld id="{395FEE27-536F-479E-B304-98213E6B58CC}" type="datetimeFigureOut">
               <a:rPr lang="pl-PL" smtClean="0"/>
-              <a:t>24.09.2026</a:t>
+              <a:t>25.09.2026</a:t>
             </a:fld>
             <a:endParaRPr lang="pl-PL"/>
           </a:p>
@@ -13929,7 +13936,7 @@
           <a:p>
             <a:fld id="{395FEE27-536F-479E-B304-98213E6B58CC}" type="datetimeFigureOut">
               <a:rPr lang="pl-PL" smtClean="0"/>
-              <a:t>24.09.2026</a:t>
+              <a:t>25.09.2026</a:t>
             </a:fld>
             <a:endParaRPr lang="pl-PL"/>
           </a:p>
@@ -14042,7 +14049,7 @@
           <a:p>
             <a:fld id="{395FEE27-536F-479E-B304-98213E6B58CC}" type="datetimeFigureOut">
               <a:rPr lang="pl-PL" smtClean="0"/>
-              <a:t>24.09.2026</a:t>
+              <a:t>25.09.2026</a:t>
             </a:fld>
             <a:endParaRPr lang="pl-PL"/>
           </a:p>
@@ -14353,7 +14360,7 @@
           <a:p>
             <a:fld id="{395FEE27-536F-479E-B304-98213E6B58CC}" type="datetimeFigureOut">
               <a:rPr lang="pl-PL" smtClean="0"/>
-              <a:t>24.09.2026</a:t>
+              <a:t>25.09.2026</a:t>
             </a:fld>
             <a:endParaRPr lang="pl-PL"/>
           </a:p>
@@ -14641,7 +14648,7 @@
           <a:p>
             <a:fld id="{395FEE27-536F-479E-B304-98213E6B58CC}" type="datetimeFigureOut">
               <a:rPr lang="pl-PL" smtClean="0"/>
-              <a:t>24.09.2026</a:t>
+              <a:t>25.09.2026</a:t>
             </a:fld>
             <a:endParaRPr lang="pl-PL"/>
           </a:p>
@@ -14885,7 +14892,7 @@
           <a:p>
             <a:fld id="{395FEE27-536F-479E-B304-98213E6B58CC}" type="datetimeFigureOut">
               <a:rPr lang="pl-PL" smtClean="0"/>
-              <a:t>24.09.2026</a:t>
+              <a:t>25.09.2026</a:t>
             </a:fld>
             <a:endParaRPr lang="pl-PL"/>
           </a:p>
@@ -15684,7 +15691,7 @@
             </a:br>
             <a:r>
               <a:rPr lang="pl-PL" sz="2400" dirty="0"/>
-              <a:t>i otaczającym nas świecie. Dowiedzmy się więcej o tym co nas interesuje i po co sięgamy.</a:t>
+              <a:t>i otaczającym nas świecie. Dowiedzmy się więcej o tym co nas interesuje, kiedy po to sięgamy i dlaczego.</a:t>
             </a:r>
           </a:p>
         </p:txBody>
@@ -15754,6 +15761,72 @@
           <a:chExt cx="0" cy="0"/>
         </a:xfrm>
       </p:grpSpPr>
+      <p:pic>
+        <p:nvPicPr>
+          <p:cNvPr id="5" name="Obraz 4">
+            <a:extLst>
+              <a:ext uri="{FF2B5EF4-FFF2-40B4-BE49-F238E27FC236}">
+                <a16:creationId xmlns:a16="http://schemas.microsoft.com/office/drawing/2014/main" id="{7687F5BB-8301-DFD8-9EDB-3655C22572DF}"/>
+              </a:ext>
+            </a:extLst>
+          </p:cNvPr>
+          <p:cNvPicPr>
+            <a:picLocks noChangeAspect="1"/>
+          </p:cNvPicPr>
+          <p:nvPr/>
+        </p:nvPicPr>
+        <p:blipFill>
+          <a:blip r:embed="rId2">
+            <a:extLst>
+              <a:ext uri="{28A0092B-C50C-407E-A947-70E740481C1C}">
+                <a14:useLocalDpi xmlns:a14="http://schemas.microsoft.com/office/drawing/2010/main" val="0"/>
+              </a:ext>
+            </a:extLst>
+          </a:blip>
+          <a:stretch>
+            <a:fillRect/>
+          </a:stretch>
+        </p:blipFill>
+        <p:spPr>
+          <a:xfrm>
+            <a:off x="481794" y="2572213"/>
+            <a:ext cx="11228412" cy="1713573"/>
+          </a:xfrm>
+          <a:prstGeom prst="rect">
+            <a:avLst/>
+          </a:prstGeom>
+        </p:spPr>
+      </p:pic>
+    </p:spTree>
+    <p:extLst>
+      <p:ext uri="{BB962C8B-B14F-4D97-AF65-F5344CB8AC3E}">
+        <p14:creationId xmlns:p14="http://schemas.microsoft.com/office/powerpoint/2010/main" val="2325017849"/>
+      </p:ext>
+    </p:extLst>
+  </p:cSld>
+  <p:clrMapOvr>
+    <a:masterClrMapping/>
+  </p:clrMapOvr>
+</p:sld>
+</file>
+
+<file path=ppt/slides/slide11.xml><?xml version="1.0" encoding="utf-8"?>
+<p:sld xmlns:a="http://schemas.openxmlformats.org/drawingml/2006/main" xmlns:r="http://schemas.openxmlformats.org/officeDocument/2006/relationships" xmlns:p="http://schemas.openxmlformats.org/presentationml/2006/main">
+  <p:cSld>
+    <p:spTree>
+      <p:nvGrpSpPr>
+        <p:cNvPr id="1" name=""/>
+        <p:cNvGrpSpPr/>
+        <p:nvPr/>
+      </p:nvGrpSpPr>
+      <p:grpSpPr>
+        <a:xfrm>
+          <a:off x="0" y="0"/>
+          <a:ext cx="0" cy="0"/>
+          <a:chOff x="0" y="0"/>
+          <a:chExt cx="0" cy="0"/>
+        </a:xfrm>
+      </p:grpSpPr>
       <p:sp>
         <p:nvSpPr>
           <p:cNvPr id="2" name="Tytuł 1">
@@ -15801,85 +15874,134 @@
         <p:spPr/>
         <p:txBody>
           <a:bodyPr>
-            <a:normAutofit fontScale="85000" lnSpcReduction="20000"/>
+            <a:normAutofit fontScale="92500" lnSpcReduction="10000"/>
           </a:bodyPr>
           <a:lstStyle/>
           <a:p>
+            <a:pPr>
+              <a:spcAft>
+                <a:spcPts val="600"/>
+              </a:spcAft>
+            </a:pPr>
             <a:r>
-              <a:rPr lang="pl-PL" dirty="0"/>
+              <a:rPr lang="pl-PL" sz="1800" dirty="0"/>
               <a:t>[1] </a:t>
             </a:r>
             <a:r>
-              <a:rPr lang="pl-PL" dirty="0" err="1"/>
+              <a:rPr lang="pl-PL" sz="1800" dirty="0" err="1"/>
               <a:t>Wikistats</a:t>
             </a:r>
             <a:r>
-              <a:rPr lang="pl-PL" dirty="0"/>
+              <a:rPr lang="pl-PL" sz="1800" dirty="0"/>
               <a:t> 2 / </a:t>
             </a:r>
             <a:r>
-              <a:rPr lang="pl-PL" dirty="0" err="1"/>
+              <a:rPr lang="pl-PL" sz="1800" dirty="0" err="1"/>
               <a:t>Wikimedia</a:t>
             </a:r>
             <a:r>
-              <a:rPr lang="pl-PL" dirty="0"/>
+              <a:rPr lang="pl-PL" sz="1800" dirty="0"/>
               <a:t> Analytics API (AQS) | CC0 1.0 </a:t>
             </a:r>
           </a:p>
           <a:p>
+            <a:pPr>
+              <a:spcAft>
+                <a:spcPts val="600"/>
+              </a:spcAft>
+            </a:pPr>
             <a:r>
-              <a:rPr lang="pl-PL" dirty="0"/>
+              <a:rPr lang="pl-PL" sz="1800" dirty="0"/>
               <a:t>[2] </a:t>
             </a:r>
             <a:r>
-              <a:rPr lang="pl-PL" dirty="0">
+              <a:rPr lang="pl-PL" sz="1800" dirty="0">
                 <a:hlinkClick r:id="rId2"/>
               </a:rPr>
               <a:t>https://pageviews.wmcloud.org/</a:t>
             </a:r>
             <a:r>
-              <a:rPr lang="pl-PL" dirty="0"/>
+              <a:rPr lang="pl-PL" sz="1800" dirty="0"/>
               <a:t>  </a:t>
             </a:r>
           </a:p>
           <a:p>
+            <a:pPr>
+              <a:spcAft>
+                <a:spcPts val="600"/>
+              </a:spcAft>
+            </a:pPr>
             <a:r>
-              <a:rPr lang="pl-PL" dirty="0"/>
+              <a:rPr lang="pl-PL" sz="1800" dirty="0"/>
               <a:t>[3] </a:t>
             </a:r>
             <a:r>
-              <a:rPr lang="pl-PL" dirty="0">
+              <a:rPr lang="pl-PL" sz="1800" dirty="0">
                 <a:hlinkClick r:id="rId3"/>
               </a:rPr>
               <a:t>https://pl.wikipedia.org/wiki/El%C5%BCbieta_II</a:t>
             </a:r>
             <a:r>
-              <a:rPr lang="pl-PL" dirty="0"/>
+              <a:rPr lang="pl-PL" sz="1800" dirty="0"/>
               <a:t> </a:t>
             </a:r>
           </a:p>
           <a:p>
+            <a:pPr>
+              <a:spcAft>
+                <a:spcPts val="600"/>
+              </a:spcAft>
+            </a:pPr>
             <a:r>
-              <a:rPr lang="pl-PL" dirty="0"/>
+              <a:rPr lang="pl-PL" sz="1800" dirty="0"/>
               <a:t>[4] Kategorie dopasowane przez model językowy, a następnie ręcznie zweryfikowane, „Śmierć osoby” może dotyczyć osoby z artykułu lub osoby powiązanej. Suma zwiększonych wyświetleń została obliczona jako różnica między liczbą wyświetleń w danym miesiącu danego artykułu, a średnią jego wyświetleń. Dane na podstawie liczby wyświetleń top 1000 artykułów każdego miesiąca [5]. Na potrzeby wykresu zsumowano 200 </a:t>
             </a:r>
           </a:p>
           <a:p>
+            <a:pPr>
+              <a:spcAft>
+                <a:spcPts val="600"/>
+              </a:spcAft>
+            </a:pPr>
             <a:r>
-              <a:rPr lang="pl-PL" dirty="0"/>
+              <a:rPr lang="pl-PL" sz="1800" dirty="0"/>
               <a:t>[5] Zrzuty „</a:t>
             </a:r>
             <a:r>
-              <a:rPr lang="pl-PL" dirty="0" err="1"/>
+              <a:rPr lang="pl-PL" sz="1800" dirty="0" err="1"/>
               <a:t>pageview_complete</a:t>
             </a:r>
             <a:r>
-              <a:rPr lang="pl-PL" dirty="0"/>
+              <a:rPr lang="pl-PL" sz="1800" dirty="0"/>
               <a:t>” (dumps.wikimedia.org), uzupełnione o metadane stron polskojęzycznej Wikipedii | CC0 1.0 |</a:t>
             </a:r>
           </a:p>
           <a:p>
-            <a:endParaRPr lang="pl-PL" dirty="0"/>
+            <a:pPr>
+              <a:spcAft>
+                <a:spcPts val="600"/>
+              </a:spcAft>
+            </a:pPr>
+            <a:r>
+              <a:rPr lang="pl-PL" sz="1800" dirty="0"/>
+              <a:t>[6] Kategoryzacja w oparciu o model językowy, który przypisał jedną z głównych kategorii Wikipedii do top 100 artykułów i zweryfikowane ręcznie. Najpopularniejszą kategorią polskiej Wikipedii są biografie, pozostałe zdecydowanie odbiegają. Nie sumuję kategorii geografia z Polską, gdyż zawiera ona cały przekrój kategorii.</a:t>
+            </a:r>
+          </a:p>
+          <a:p>
+            <a:pPr>
+              <a:spcAft>
+                <a:spcPts val="600"/>
+              </a:spcAft>
+            </a:pPr>
+            <a:endParaRPr lang="pl-PL" sz="1800" dirty="0"/>
+          </a:p>
+          <a:p>
+            <a:pPr>
+              <a:spcAft>
+                <a:spcPts val="600"/>
+              </a:spcAft>
+            </a:pPr>
+            <a:endParaRPr lang="pl-PL" sz="1800" dirty="0"/>
           </a:p>
         </p:txBody>
       </p:sp>
@@ -15887,6 +16009,331 @@
     <p:extLst>
       <p:ext uri="{BB962C8B-B14F-4D97-AF65-F5344CB8AC3E}">
         <p14:creationId xmlns:p14="http://schemas.microsoft.com/office/powerpoint/2010/main" val="3564356946"/>
+      </p:ext>
+    </p:extLst>
+  </p:cSld>
+  <p:clrMapOvr>
+    <a:masterClrMapping/>
+  </p:clrMapOvr>
+</p:sld>
+</file>
+
+<file path=ppt/slides/slide12.xml><?xml version="1.0" encoding="utf-8"?>
+<p:sld xmlns:a="http://schemas.openxmlformats.org/drawingml/2006/main" xmlns:r="http://schemas.openxmlformats.org/officeDocument/2006/relationships" xmlns:p="http://schemas.openxmlformats.org/presentationml/2006/main">
+  <p:cSld>
+    <p:spTree>
+      <p:nvGrpSpPr>
+        <p:cNvPr id="1" name="">
+          <a:extLst>
+            <a:ext uri="{FF2B5EF4-FFF2-40B4-BE49-F238E27FC236}">
+              <a16:creationId xmlns:a16="http://schemas.microsoft.com/office/drawing/2014/main" id="{234382BA-BDE6-C715-5C7A-A641072AFD9B}"/>
+            </a:ext>
+          </a:extLst>
+        </p:cNvPr>
+        <p:cNvGrpSpPr/>
+        <p:nvPr/>
+      </p:nvGrpSpPr>
+      <p:grpSpPr>
+        <a:xfrm>
+          <a:off x="0" y="0"/>
+          <a:ext cx="0" cy="0"/>
+          <a:chOff x="0" y="0"/>
+          <a:chExt cx="0" cy="0"/>
+        </a:xfrm>
+      </p:grpSpPr>
+      <p:sp>
+        <p:nvSpPr>
+          <p:cNvPr id="2" name="Tytuł 1">
+            <a:extLst>
+              <a:ext uri="{FF2B5EF4-FFF2-40B4-BE49-F238E27FC236}">
+                <a16:creationId xmlns:a16="http://schemas.microsoft.com/office/drawing/2014/main" id="{C4D42B59-DCF6-4896-2960-FC277C0227BD}"/>
+              </a:ext>
+            </a:extLst>
+          </p:cNvPr>
+          <p:cNvSpPr>
+            <a:spLocks noGrp="1"/>
+          </p:cNvSpPr>
+          <p:nvPr>
+            <p:ph type="title"/>
+          </p:nvPr>
+        </p:nvSpPr>
+        <p:spPr/>
+        <p:txBody>
+          <a:bodyPr>
+            <a:normAutofit/>
+          </a:bodyPr>
+          <a:lstStyle/>
+          <a:p>
+            <a:r>
+              <a:rPr lang="pl-PL" dirty="0"/>
+              <a:t>Slajd po napisach: A to ki czort?</a:t>
+            </a:r>
+          </a:p>
+        </p:txBody>
+      </p:sp>
+      <p:graphicFrame>
+        <p:nvGraphicFramePr>
+          <p:cNvPr id="6" name="Symbol zastępczy zawartości 5">
+            <a:extLst>
+              <a:ext uri="{FF2B5EF4-FFF2-40B4-BE49-F238E27FC236}">
+                <a16:creationId xmlns:a16="http://schemas.microsoft.com/office/drawing/2014/main" id="{B5B9341C-F4A6-EF18-93EF-81A1EE233B74}"/>
+              </a:ext>
+            </a:extLst>
+          </p:cNvPr>
+          <p:cNvGraphicFramePr>
+            <a:graphicFrameLocks noGrp="1"/>
+          </p:cNvGraphicFramePr>
+          <p:nvPr>
+            <p:ph idx="1"/>
+            <p:extLst>
+              <p:ext uri="{D42A27DB-BD31-4B8C-83A1-F6EECF244321}">
+                <p14:modId xmlns:p14="http://schemas.microsoft.com/office/powerpoint/2010/main" val="1630636911"/>
+              </p:ext>
+            </p:extLst>
+          </p:nvPr>
+        </p:nvGraphicFramePr>
+        <p:xfrm>
+          <a:off x="838200" y="1825625"/>
+          <a:ext cx="7157936" cy="4351338"/>
+        </p:xfrm>
+        <a:graphic>
+          <a:graphicData uri="http://schemas.openxmlformats.org/drawingml/2006/chart">
+            <c:chart xmlns:c="http://schemas.openxmlformats.org/drawingml/2006/chart" xmlns:r="http://schemas.openxmlformats.org/officeDocument/2006/relationships" r:id="rId2"/>
+          </a:graphicData>
+        </a:graphic>
+      </p:graphicFrame>
+      <p:sp>
+        <p:nvSpPr>
+          <p:cNvPr id="8" name="Symbol zastępczy zawartości 4">
+            <a:extLst>
+              <a:ext uri="{FF2B5EF4-FFF2-40B4-BE49-F238E27FC236}">
+                <a16:creationId xmlns:a16="http://schemas.microsoft.com/office/drawing/2014/main" id="{53B82AA8-5108-9A9F-A76E-ACFC5CFEEE10}"/>
+              </a:ext>
+            </a:extLst>
+          </p:cNvPr>
+          <p:cNvSpPr txBox="1">
+            <a:spLocks/>
+          </p:cNvSpPr>
+          <p:nvPr/>
+        </p:nvSpPr>
+        <p:spPr>
+          <a:xfrm>
+            <a:off x="8180961" y="1825626"/>
+            <a:ext cx="3453319" cy="4008982"/>
+          </a:xfrm>
+          <a:prstGeom prst="rect">
+            <a:avLst/>
+          </a:prstGeom>
+        </p:spPr>
+        <p:txBody>
+          <a:bodyPr vert="horz" lIns="91440" tIns="45720" rIns="91440" bIns="45720" rtlCol="0">
+            <a:normAutofit/>
+          </a:bodyPr>
+          <a:lstStyle>
+            <a:lvl1pPr marL="228600" indent="-228600" algn="l" defTabSz="914400" rtl="0" eaLnBrk="1" latinLnBrk="0" hangingPunct="1">
+              <a:lnSpc>
+                <a:spcPct val="90000"/>
+              </a:lnSpc>
+              <a:spcBef>
+                <a:spcPts val="1000"/>
+              </a:spcBef>
+              <a:buFont typeface="Arial" panose="020B0604020202020204" pitchFamily="34" charset="0"/>
+              <a:buChar char="•"/>
+              <a:defRPr sz="2800" kern="1200">
+                <a:solidFill>
+                  <a:schemeClr val="tx1"/>
+                </a:solidFill>
+                <a:latin typeface="+mn-lt"/>
+                <a:ea typeface="+mn-ea"/>
+                <a:cs typeface="+mn-cs"/>
+              </a:defRPr>
+            </a:lvl1pPr>
+            <a:lvl2pPr marL="685800" indent="-228600" algn="l" defTabSz="914400" rtl="0" eaLnBrk="1" latinLnBrk="0" hangingPunct="1">
+              <a:lnSpc>
+                <a:spcPct val="90000"/>
+              </a:lnSpc>
+              <a:spcBef>
+                <a:spcPts val="500"/>
+              </a:spcBef>
+              <a:buFont typeface="Arial" panose="020B0604020202020204" pitchFamily="34" charset="0"/>
+              <a:buChar char="•"/>
+              <a:defRPr sz="2400" kern="1200">
+                <a:solidFill>
+                  <a:schemeClr val="tx1"/>
+                </a:solidFill>
+                <a:latin typeface="+mn-lt"/>
+                <a:ea typeface="+mn-ea"/>
+                <a:cs typeface="+mn-cs"/>
+              </a:defRPr>
+            </a:lvl2pPr>
+            <a:lvl3pPr marL="1143000" indent="-228600" algn="l" defTabSz="914400" rtl="0" eaLnBrk="1" latinLnBrk="0" hangingPunct="1">
+              <a:lnSpc>
+                <a:spcPct val="90000"/>
+              </a:lnSpc>
+              <a:spcBef>
+                <a:spcPts val="500"/>
+              </a:spcBef>
+              <a:buFont typeface="Arial" panose="020B0604020202020204" pitchFamily="34" charset="0"/>
+              <a:buChar char="•"/>
+              <a:defRPr sz="2000" kern="1200">
+                <a:solidFill>
+                  <a:schemeClr val="tx1"/>
+                </a:solidFill>
+                <a:latin typeface="+mn-lt"/>
+                <a:ea typeface="+mn-ea"/>
+                <a:cs typeface="+mn-cs"/>
+              </a:defRPr>
+            </a:lvl3pPr>
+            <a:lvl4pPr marL="1600200" indent="-228600" algn="l" defTabSz="914400" rtl="0" eaLnBrk="1" latinLnBrk="0" hangingPunct="1">
+              <a:lnSpc>
+                <a:spcPct val="90000"/>
+              </a:lnSpc>
+              <a:spcBef>
+                <a:spcPts val="500"/>
+              </a:spcBef>
+              <a:buFont typeface="Arial" panose="020B0604020202020204" pitchFamily="34" charset="0"/>
+              <a:buChar char="•"/>
+              <a:defRPr sz="1800" kern="1200">
+                <a:solidFill>
+                  <a:schemeClr val="tx1"/>
+                </a:solidFill>
+                <a:latin typeface="+mn-lt"/>
+                <a:ea typeface="+mn-ea"/>
+                <a:cs typeface="+mn-cs"/>
+              </a:defRPr>
+            </a:lvl4pPr>
+            <a:lvl5pPr marL="2057400" indent="-228600" algn="l" defTabSz="914400" rtl="0" eaLnBrk="1" latinLnBrk="0" hangingPunct="1">
+              <a:lnSpc>
+                <a:spcPct val="90000"/>
+              </a:lnSpc>
+              <a:spcBef>
+                <a:spcPts val="500"/>
+              </a:spcBef>
+              <a:buFont typeface="Arial" panose="020B0604020202020204" pitchFamily="34" charset="0"/>
+              <a:buChar char="•"/>
+              <a:defRPr sz="1800" kern="1200">
+                <a:solidFill>
+                  <a:schemeClr val="tx1"/>
+                </a:solidFill>
+                <a:latin typeface="+mn-lt"/>
+                <a:ea typeface="+mn-ea"/>
+                <a:cs typeface="+mn-cs"/>
+              </a:defRPr>
+            </a:lvl5pPr>
+            <a:lvl6pPr marL="2514600" indent="-228600" algn="l" defTabSz="914400" rtl="0" eaLnBrk="1" latinLnBrk="0" hangingPunct="1">
+              <a:lnSpc>
+                <a:spcPct val="90000"/>
+              </a:lnSpc>
+              <a:spcBef>
+                <a:spcPts val="500"/>
+              </a:spcBef>
+              <a:buFont typeface="Arial" panose="020B0604020202020204" pitchFamily="34" charset="0"/>
+              <a:buChar char="•"/>
+              <a:defRPr sz="1800" kern="1200">
+                <a:solidFill>
+                  <a:schemeClr val="tx1"/>
+                </a:solidFill>
+                <a:latin typeface="+mn-lt"/>
+                <a:ea typeface="+mn-ea"/>
+                <a:cs typeface="+mn-cs"/>
+              </a:defRPr>
+            </a:lvl6pPr>
+            <a:lvl7pPr marL="2971800" indent="-228600" algn="l" defTabSz="914400" rtl="0" eaLnBrk="1" latinLnBrk="0" hangingPunct="1">
+              <a:lnSpc>
+                <a:spcPct val="90000"/>
+              </a:lnSpc>
+              <a:spcBef>
+                <a:spcPts val="500"/>
+              </a:spcBef>
+              <a:buFont typeface="Arial" panose="020B0604020202020204" pitchFamily="34" charset="0"/>
+              <a:buChar char="•"/>
+              <a:defRPr sz="1800" kern="1200">
+                <a:solidFill>
+                  <a:schemeClr val="tx1"/>
+                </a:solidFill>
+                <a:latin typeface="+mn-lt"/>
+                <a:ea typeface="+mn-ea"/>
+                <a:cs typeface="+mn-cs"/>
+              </a:defRPr>
+            </a:lvl7pPr>
+            <a:lvl8pPr marL="3429000" indent="-228600" algn="l" defTabSz="914400" rtl="0" eaLnBrk="1" latinLnBrk="0" hangingPunct="1">
+              <a:lnSpc>
+                <a:spcPct val="90000"/>
+              </a:lnSpc>
+              <a:spcBef>
+                <a:spcPts val="500"/>
+              </a:spcBef>
+              <a:buFont typeface="Arial" panose="020B0604020202020204" pitchFamily="34" charset="0"/>
+              <a:buChar char="•"/>
+              <a:defRPr sz="1800" kern="1200">
+                <a:solidFill>
+                  <a:schemeClr val="tx1"/>
+                </a:solidFill>
+                <a:latin typeface="+mn-lt"/>
+                <a:ea typeface="+mn-ea"/>
+                <a:cs typeface="+mn-cs"/>
+              </a:defRPr>
+            </a:lvl8pPr>
+            <a:lvl9pPr marL="3886200" indent="-228600" algn="l" defTabSz="914400" rtl="0" eaLnBrk="1" latinLnBrk="0" hangingPunct="1">
+              <a:lnSpc>
+                <a:spcPct val="90000"/>
+              </a:lnSpc>
+              <a:spcBef>
+                <a:spcPts val="500"/>
+              </a:spcBef>
+              <a:buFont typeface="Arial" panose="020B0604020202020204" pitchFamily="34" charset="0"/>
+              <a:buChar char="•"/>
+              <a:defRPr sz="1800" kern="1200">
+                <a:solidFill>
+                  <a:schemeClr val="tx1"/>
+                </a:solidFill>
+                <a:latin typeface="+mn-lt"/>
+                <a:ea typeface="+mn-ea"/>
+                <a:cs typeface="+mn-cs"/>
+              </a:defRPr>
+            </a:lvl9pPr>
+          </a:lstStyle>
+          <a:p>
+            <a:pPr marL="0" indent="0" algn="ctr">
+              <a:buNone/>
+            </a:pPr>
+            <a:r>
+              <a:rPr lang="pl-PL" sz="1800" dirty="0"/>
+              <a:t>Mediana miesięcznych wyświetleń strony Przedłużanie życia wynosi </a:t>
+            </a:r>
+            <a:r>
+              <a:rPr lang="pl-PL" sz="1800" b="1" u="sng" dirty="0"/>
+              <a:t>455</a:t>
+            </a:r>
+            <a:r>
+              <a:rPr lang="pl-PL" sz="1800" dirty="0"/>
+              <a:t>. </a:t>
+            </a:r>
+          </a:p>
+          <a:p>
+            <a:pPr marL="0" indent="0" algn="ctr">
+              <a:buNone/>
+            </a:pPr>
+            <a:r>
+              <a:rPr lang="pl-PL" sz="1800" dirty="0"/>
+              <a:t>Jak to się stało, że w lipcu 2019 osiągnęła oglądalność większą niż strona Królowej Elżbiety w miesiącu Jej śmierci?</a:t>
+            </a:r>
+          </a:p>
+          <a:p>
+            <a:pPr marL="0" indent="0" algn="ctr">
+              <a:buNone/>
+            </a:pPr>
+            <a:r>
+              <a:rPr lang="pl-PL" sz="1800" dirty="0"/>
+              <a:t>Cholera wie</a:t>
+            </a:r>
+          </a:p>
+        </p:txBody>
+      </p:sp>
+    </p:spTree>
+    <p:extLst>
+      <p:ext uri="{BB962C8B-B14F-4D97-AF65-F5344CB8AC3E}">
+        <p14:creationId xmlns:p14="http://schemas.microsoft.com/office/powerpoint/2010/main" val="4287588000"/>
       </p:ext>
     </p:extLst>
   </p:cSld>
@@ -15936,7 +16383,7 @@
           <a:p>
             <a:r>
               <a:rPr lang="pl-PL" dirty="0"/>
-              <a:t>Nasze ulubione kategorie</a:t>
+              <a:t>Ludzie interesują się ludźmi</a:t>
             </a:r>
           </a:p>
         </p:txBody>
@@ -15957,7 +16404,7 @@
             <p:ph idx="1"/>
             <p:extLst>
               <p:ext uri="{D42A27DB-BD31-4B8C-83A1-F6EECF244321}">
-                <p14:modId xmlns:p14="http://schemas.microsoft.com/office/powerpoint/2010/main" val="3195606745"/>
+                <p14:modId xmlns:p14="http://schemas.microsoft.com/office/powerpoint/2010/main" val="2485637000"/>
               </p:ext>
             </p:extLst>
           </p:nvPr>
@@ -16205,7 +16652,7 @@
             </a:pPr>
             <a:r>
               <a:rPr lang="pl-PL" sz="1800" dirty="0"/>
-              <a:t>Najpopularniejszą kategorią polskiej Wikipedii są biografie, pozostałe zdecydowanie odbiegają. Nie sumuję kategorii geografia z Polską, gdyż zawiera ona cały przekrój kategorii.</a:t>
+              <a:t>Najpopularniejszą kategorią polskiej Wikipedii są biografie, pozostałe zdecydowanie odbiegają. </a:t>
             </a:r>
           </a:p>
         </p:txBody>
@@ -16462,13 +16909,13 @@
           <p:nvPr>
             <p:extLst>
               <p:ext uri="{D42A27DB-BD31-4B8C-83A1-F6EECF244321}">
-                <p14:modId xmlns:p14="http://schemas.microsoft.com/office/powerpoint/2010/main" val="1445726506"/>
+                <p14:modId xmlns:p14="http://schemas.microsoft.com/office/powerpoint/2010/main" val="2680172190"/>
               </p:ext>
             </p:extLst>
           </p:nvPr>
         </p:nvGraphicFramePr>
         <p:xfrm>
-          <a:off x="838200" y="1945640"/>
+          <a:off x="838200" y="1753616"/>
           <a:ext cx="7187119" cy="4260607"/>
         </p:xfrm>
         <a:graphic>
@@ -16491,8 +16938,8 @@
         </p:nvSpPr>
         <p:spPr>
           <a:xfrm>
-            <a:off x="8341468" y="1945640"/>
-            <a:ext cx="3536004" cy="2585323"/>
+            <a:off x="8341468" y="1753616"/>
+            <a:ext cx="3536004" cy="2062103"/>
           </a:xfrm>
           <a:prstGeom prst="rect">
             <a:avLst/>
@@ -16509,7 +16956,7 @@
           <a:p>
             <a:pPr algn="ctr"/>
             <a:r>
-              <a:rPr lang="pl-PL" dirty="0">
+              <a:rPr lang="pl-PL" sz="1600" dirty="0">
                 <a:solidFill>
                   <a:schemeClr val="bg1"/>
                 </a:solidFill>
@@ -16533,8 +16980,8 @@
         </p:nvSpPr>
         <p:spPr>
           <a:xfrm>
-            <a:off x="8341468" y="4638605"/>
-            <a:ext cx="3536004" cy="1477328"/>
+            <a:off x="8341468" y="3961949"/>
+            <a:ext cx="3536004" cy="1323439"/>
           </a:xfrm>
           <a:prstGeom prst="rect">
             <a:avLst/>
@@ -16551,7 +16998,7 @@
           <a:p>
             <a:pPr algn="ctr"/>
             <a:r>
-              <a:rPr lang="pl-PL" dirty="0">
+              <a:rPr lang="pl-PL" sz="1600" dirty="0">
                 <a:solidFill>
                   <a:schemeClr val="bg1"/>
                 </a:solidFill>
@@ -16559,7 +17006,7 @@
               <a:t>Na wzrost wyświetleń wpływa również szum medialny – relacjonowane ważne wydarzenia, czy nowe produkcje </a:t>
             </a:r>
             <a:r>
-              <a:rPr lang="pl-PL" dirty="0" err="1">
+              <a:rPr lang="pl-PL" sz="1600" dirty="0" err="1">
                 <a:solidFill>
                   <a:schemeClr val="bg1"/>
                 </a:solidFill>
@@ -16567,12 +17014,53 @@
               <a:t>popkulutry</a:t>
             </a:r>
             <a:r>
-              <a:rPr lang="pl-PL" dirty="0">
+              <a:rPr lang="pl-PL" sz="1600" dirty="0">
                 <a:solidFill>
                   <a:schemeClr val="bg1"/>
                 </a:solidFill>
               </a:rPr>
               <a:t>.</a:t>
+            </a:r>
+          </a:p>
+        </p:txBody>
+      </p:sp>
+      <p:sp>
+        <p:nvSpPr>
+          <p:cNvPr id="4" name="pole tekstowe 3">
+            <a:extLst>
+              <a:ext uri="{FF2B5EF4-FFF2-40B4-BE49-F238E27FC236}">
+                <a16:creationId xmlns:a16="http://schemas.microsoft.com/office/drawing/2014/main" id="{FF2E79AD-B041-5ADB-B7D6-BE50C8AFBB59}"/>
+              </a:ext>
+            </a:extLst>
+          </p:cNvPr>
+          <p:cNvSpPr txBox="1"/>
+          <p:nvPr/>
+        </p:nvSpPr>
+        <p:spPr>
+          <a:xfrm>
+            <a:off x="8341468" y="5431618"/>
+            <a:ext cx="3536004" cy="584775"/>
+          </a:xfrm>
+          <a:prstGeom prst="rect">
+            <a:avLst/>
+          </a:prstGeom>
+          <a:solidFill>
+            <a:schemeClr val="accent1">
+              <a:lumMod val="60000"/>
+              <a:lumOff val="40000"/>
+            </a:schemeClr>
+          </a:solidFill>
+        </p:spPr>
+        <p:txBody>
+          <a:bodyPr wrap="square" rtlCol="0">
+            <a:spAutoFit/>
+          </a:bodyPr>
+          <a:lstStyle/>
+          <a:p>
+            <a:pPr algn="ctr"/>
+            <a:r>
+              <a:rPr lang="pl-PL" sz="1600" dirty="0"/>
+              <a:t>Za każdą kategorią kryją się konkretne historie.</a:t>
             </a:r>
           </a:p>
         </p:txBody>
@@ -16912,299 +17400,6 @@
   <p:cSld>
     <p:spTree>
       <p:nvGrpSpPr>
-        <p:cNvPr id="1" name=""/>
-        <p:cNvGrpSpPr/>
-        <p:nvPr/>
-      </p:nvGrpSpPr>
-      <p:grpSpPr>
-        <a:xfrm>
-          <a:off x="0" y="0"/>
-          <a:ext cx="0" cy="0"/>
-          <a:chOff x="0" y="0"/>
-          <a:chExt cx="0" cy="0"/>
-        </a:xfrm>
-      </p:grpSpPr>
-      <p:sp>
-        <p:nvSpPr>
-          <p:cNvPr id="2" name="Tytuł 1">
-            <a:extLst>
-              <a:ext uri="{FF2B5EF4-FFF2-40B4-BE49-F238E27FC236}">
-                <a16:creationId xmlns:a16="http://schemas.microsoft.com/office/drawing/2014/main" id="{DB22C4A2-1B90-4E31-AB1C-E2D45B1E1A94}"/>
-              </a:ext>
-            </a:extLst>
-          </p:cNvPr>
-          <p:cNvSpPr>
-            <a:spLocks noGrp="1"/>
-          </p:cNvSpPr>
-          <p:nvPr>
-            <p:ph type="title"/>
-          </p:nvPr>
-        </p:nvSpPr>
-        <p:spPr/>
-        <p:txBody>
-          <a:bodyPr>
-            <a:normAutofit/>
-          </a:bodyPr>
-          <a:lstStyle/>
-          <a:p>
-            <a:r>
-              <a:rPr lang="pl-PL" dirty="0"/>
-              <a:t>Piłka nożna a znajomość geografii</a:t>
-            </a:r>
-          </a:p>
-        </p:txBody>
-      </p:sp>
-      <p:graphicFrame>
-        <p:nvGraphicFramePr>
-          <p:cNvPr id="6" name="Symbol zastępczy zawartości 5">
-            <a:extLst>
-              <a:ext uri="{FF2B5EF4-FFF2-40B4-BE49-F238E27FC236}">
-                <a16:creationId xmlns:a16="http://schemas.microsoft.com/office/drawing/2014/main" id="{4B65AB7F-448F-7A38-A170-C9008F7743E3}"/>
-              </a:ext>
-            </a:extLst>
-          </p:cNvPr>
-          <p:cNvGraphicFramePr>
-            <a:graphicFrameLocks noGrp="1"/>
-          </p:cNvGraphicFramePr>
-          <p:nvPr>
-            <p:ph idx="1"/>
-            <p:extLst>
-              <p:ext uri="{D42A27DB-BD31-4B8C-83A1-F6EECF244321}">
-                <p14:modId xmlns:p14="http://schemas.microsoft.com/office/powerpoint/2010/main" val="534436697"/>
-              </p:ext>
-            </p:extLst>
-          </p:nvPr>
-        </p:nvGraphicFramePr>
-        <p:xfrm>
-          <a:off x="838200" y="1825625"/>
-          <a:ext cx="7157936" cy="4351338"/>
-        </p:xfrm>
-        <a:graphic>
-          <a:graphicData uri="http://schemas.openxmlformats.org/drawingml/2006/chart">
-            <c:chart xmlns:c="http://schemas.openxmlformats.org/drawingml/2006/chart" xmlns:r="http://schemas.openxmlformats.org/officeDocument/2006/relationships" r:id="rId2"/>
-          </a:graphicData>
-        </a:graphic>
-      </p:graphicFrame>
-      <p:sp>
-        <p:nvSpPr>
-          <p:cNvPr id="8" name="Symbol zastępczy zawartości 4">
-            <a:extLst>
-              <a:ext uri="{FF2B5EF4-FFF2-40B4-BE49-F238E27FC236}">
-                <a16:creationId xmlns:a16="http://schemas.microsoft.com/office/drawing/2014/main" id="{2FF7C437-CEDE-316F-788D-277332313050}"/>
-              </a:ext>
-            </a:extLst>
-          </p:cNvPr>
-          <p:cNvSpPr txBox="1">
-            <a:spLocks/>
-          </p:cNvSpPr>
-          <p:nvPr/>
-        </p:nvSpPr>
-        <p:spPr>
-          <a:xfrm>
-            <a:off x="8180961" y="1825626"/>
-            <a:ext cx="3453319" cy="4008982"/>
-          </a:xfrm>
-          <a:prstGeom prst="rect">
-            <a:avLst/>
-          </a:prstGeom>
-        </p:spPr>
-        <p:txBody>
-          <a:bodyPr vert="horz" lIns="91440" tIns="45720" rIns="91440" bIns="45720" rtlCol="0">
-            <a:normAutofit/>
-          </a:bodyPr>
-          <a:lstStyle>
-            <a:lvl1pPr marL="228600" indent="-228600" algn="l" defTabSz="914400" rtl="0" eaLnBrk="1" latinLnBrk="0" hangingPunct="1">
-              <a:lnSpc>
-                <a:spcPct val="90000"/>
-              </a:lnSpc>
-              <a:spcBef>
-                <a:spcPts val="1000"/>
-              </a:spcBef>
-              <a:buFont typeface="Arial" panose="020B0604020202020204" pitchFamily="34" charset="0"/>
-              <a:buChar char="•"/>
-              <a:defRPr sz="2800" kern="1200">
-                <a:solidFill>
-                  <a:schemeClr val="tx1"/>
-                </a:solidFill>
-                <a:latin typeface="+mn-lt"/>
-                <a:ea typeface="+mn-ea"/>
-                <a:cs typeface="+mn-cs"/>
-              </a:defRPr>
-            </a:lvl1pPr>
-            <a:lvl2pPr marL="685800" indent="-228600" algn="l" defTabSz="914400" rtl="0" eaLnBrk="1" latinLnBrk="0" hangingPunct="1">
-              <a:lnSpc>
-                <a:spcPct val="90000"/>
-              </a:lnSpc>
-              <a:spcBef>
-                <a:spcPts val="500"/>
-              </a:spcBef>
-              <a:buFont typeface="Arial" panose="020B0604020202020204" pitchFamily="34" charset="0"/>
-              <a:buChar char="•"/>
-              <a:defRPr sz="2400" kern="1200">
-                <a:solidFill>
-                  <a:schemeClr val="tx1"/>
-                </a:solidFill>
-                <a:latin typeface="+mn-lt"/>
-                <a:ea typeface="+mn-ea"/>
-                <a:cs typeface="+mn-cs"/>
-              </a:defRPr>
-            </a:lvl2pPr>
-            <a:lvl3pPr marL="1143000" indent="-228600" algn="l" defTabSz="914400" rtl="0" eaLnBrk="1" latinLnBrk="0" hangingPunct="1">
-              <a:lnSpc>
-                <a:spcPct val="90000"/>
-              </a:lnSpc>
-              <a:spcBef>
-                <a:spcPts val="500"/>
-              </a:spcBef>
-              <a:buFont typeface="Arial" panose="020B0604020202020204" pitchFamily="34" charset="0"/>
-              <a:buChar char="•"/>
-              <a:defRPr sz="2000" kern="1200">
-                <a:solidFill>
-                  <a:schemeClr val="tx1"/>
-                </a:solidFill>
-                <a:latin typeface="+mn-lt"/>
-                <a:ea typeface="+mn-ea"/>
-                <a:cs typeface="+mn-cs"/>
-              </a:defRPr>
-            </a:lvl3pPr>
-            <a:lvl4pPr marL="1600200" indent="-228600" algn="l" defTabSz="914400" rtl="0" eaLnBrk="1" latinLnBrk="0" hangingPunct="1">
-              <a:lnSpc>
-                <a:spcPct val="90000"/>
-              </a:lnSpc>
-              <a:spcBef>
-                <a:spcPts val="500"/>
-              </a:spcBef>
-              <a:buFont typeface="Arial" panose="020B0604020202020204" pitchFamily="34" charset="0"/>
-              <a:buChar char="•"/>
-              <a:defRPr sz="1800" kern="1200">
-                <a:solidFill>
-                  <a:schemeClr val="tx1"/>
-                </a:solidFill>
-                <a:latin typeface="+mn-lt"/>
-                <a:ea typeface="+mn-ea"/>
-                <a:cs typeface="+mn-cs"/>
-              </a:defRPr>
-            </a:lvl4pPr>
-            <a:lvl5pPr marL="2057400" indent="-228600" algn="l" defTabSz="914400" rtl="0" eaLnBrk="1" latinLnBrk="0" hangingPunct="1">
-              <a:lnSpc>
-                <a:spcPct val="90000"/>
-              </a:lnSpc>
-              <a:spcBef>
-                <a:spcPts val="500"/>
-              </a:spcBef>
-              <a:buFont typeface="Arial" panose="020B0604020202020204" pitchFamily="34" charset="0"/>
-              <a:buChar char="•"/>
-              <a:defRPr sz="1800" kern="1200">
-                <a:solidFill>
-                  <a:schemeClr val="tx1"/>
-                </a:solidFill>
-                <a:latin typeface="+mn-lt"/>
-                <a:ea typeface="+mn-ea"/>
-                <a:cs typeface="+mn-cs"/>
-              </a:defRPr>
-            </a:lvl5pPr>
-            <a:lvl6pPr marL="2514600" indent="-228600" algn="l" defTabSz="914400" rtl="0" eaLnBrk="1" latinLnBrk="0" hangingPunct="1">
-              <a:lnSpc>
-                <a:spcPct val="90000"/>
-              </a:lnSpc>
-              <a:spcBef>
-                <a:spcPts val="500"/>
-              </a:spcBef>
-              <a:buFont typeface="Arial" panose="020B0604020202020204" pitchFamily="34" charset="0"/>
-              <a:buChar char="•"/>
-              <a:defRPr sz="1800" kern="1200">
-                <a:solidFill>
-                  <a:schemeClr val="tx1"/>
-                </a:solidFill>
-                <a:latin typeface="+mn-lt"/>
-                <a:ea typeface="+mn-ea"/>
-                <a:cs typeface="+mn-cs"/>
-              </a:defRPr>
-            </a:lvl6pPr>
-            <a:lvl7pPr marL="2971800" indent="-228600" algn="l" defTabSz="914400" rtl="0" eaLnBrk="1" latinLnBrk="0" hangingPunct="1">
-              <a:lnSpc>
-                <a:spcPct val="90000"/>
-              </a:lnSpc>
-              <a:spcBef>
-                <a:spcPts val="500"/>
-              </a:spcBef>
-              <a:buFont typeface="Arial" panose="020B0604020202020204" pitchFamily="34" charset="0"/>
-              <a:buChar char="•"/>
-              <a:defRPr sz="1800" kern="1200">
-                <a:solidFill>
-                  <a:schemeClr val="tx1"/>
-                </a:solidFill>
-                <a:latin typeface="+mn-lt"/>
-                <a:ea typeface="+mn-ea"/>
-                <a:cs typeface="+mn-cs"/>
-              </a:defRPr>
-            </a:lvl7pPr>
-            <a:lvl8pPr marL="3429000" indent="-228600" algn="l" defTabSz="914400" rtl="0" eaLnBrk="1" latinLnBrk="0" hangingPunct="1">
-              <a:lnSpc>
-                <a:spcPct val="90000"/>
-              </a:lnSpc>
-              <a:spcBef>
-                <a:spcPts val="500"/>
-              </a:spcBef>
-              <a:buFont typeface="Arial" panose="020B0604020202020204" pitchFamily="34" charset="0"/>
-              <a:buChar char="•"/>
-              <a:defRPr sz="1800" kern="1200">
-                <a:solidFill>
-                  <a:schemeClr val="tx1"/>
-                </a:solidFill>
-                <a:latin typeface="+mn-lt"/>
-                <a:ea typeface="+mn-ea"/>
-                <a:cs typeface="+mn-cs"/>
-              </a:defRPr>
-            </a:lvl8pPr>
-            <a:lvl9pPr marL="3886200" indent="-228600" algn="l" defTabSz="914400" rtl="0" eaLnBrk="1" latinLnBrk="0" hangingPunct="1">
-              <a:lnSpc>
-                <a:spcPct val="90000"/>
-              </a:lnSpc>
-              <a:spcBef>
-                <a:spcPts val="500"/>
-              </a:spcBef>
-              <a:buFont typeface="Arial" panose="020B0604020202020204" pitchFamily="34" charset="0"/>
-              <a:buChar char="•"/>
-              <a:defRPr sz="1800" kern="1200">
-                <a:solidFill>
-                  <a:schemeClr val="tx1"/>
-                </a:solidFill>
-                <a:latin typeface="+mn-lt"/>
-                <a:ea typeface="+mn-ea"/>
-                <a:cs typeface="+mn-cs"/>
-              </a:defRPr>
-            </a:lvl9pPr>
-          </a:lstStyle>
-          <a:p>
-            <a:pPr marL="0" indent="0" algn="ctr">
-              <a:buNone/>
-            </a:pPr>
-            <a:r>
-              <a:rPr lang="pl-PL" sz="1800" dirty="0"/>
-              <a:t>Wiele osób odkryło kraje takie jak Republika Zielonego Przylądka czy Curaçao dzięki ich pierwszemu udziałowi w Mistrzostwach Świata w Piłce Nożnej.</a:t>
-            </a:r>
-          </a:p>
-        </p:txBody>
-      </p:sp>
-    </p:spTree>
-    <p:extLst>
-      <p:ext uri="{BB962C8B-B14F-4D97-AF65-F5344CB8AC3E}">
-        <p14:creationId xmlns:p14="http://schemas.microsoft.com/office/powerpoint/2010/main" val="408702331"/>
-      </p:ext>
-    </p:extLst>
-  </p:cSld>
-  <p:clrMapOvr>
-    <a:masterClrMapping/>
-  </p:clrMapOvr>
-</p:sld>
-</file>
-
-<file path=ppt/slides/slide7.xml><?xml version="1.0" encoding="utf-8"?>
-<p:sld xmlns:a="http://schemas.openxmlformats.org/drawingml/2006/main" xmlns:r="http://schemas.openxmlformats.org/officeDocument/2006/relationships" xmlns:p="http://schemas.openxmlformats.org/presentationml/2006/main">
-  <p:cSld>
-    <p:spTree>
-      <p:nvGrpSpPr>
         <p:cNvPr id="1" name="">
           <a:extLst>
             <a:ext uri="{FF2B5EF4-FFF2-40B4-BE49-F238E27FC236}">
@@ -17499,7 +17694,7 @@
 </p:sld>
 </file>
 
-<file path=ppt/slides/slide8.xml><?xml version="1.0" encoding="utf-8"?>
+<file path=ppt/slides/slide7.xml><?xml version="1.0" encoding="utf-8"?>
 <p:sld xmlns:a="http://schemas.openxmlformats.org/drawingml/2006/main" xmlns:r="http://schemas.openxmlformats.org/officeDocument/2006/relationships" xmlns:p="http://schemas.openxmlformats.org/presentationml/2006/main">
   <p:cSld>
     <p:spTree>
@@ -17835,18 +18030,12 @@
 </p:sld>
 </file>
 
-<file path=ppt/slides/slide9.xml><?xml version="1.0" encoding="utf-8"?>
+<file path=ppt/slides/slide8.xml><?xml version="1.0" encoding="utf-8"?>
 <p:sld xmlns:a="http://schemas.openxmlformats.org/drawingml/2006/main" xmlns:r="http://schemas.openxmlformats.org/officeDocument/2006/relationships" xmlns:p="http://schemas.openxmlformats.org/presentationml/2006/main">
   <p:cSld>
     <p:spTree>
       <p:nvGrpSpPr>
-        <p:cNvPr id="1" name="">
-          <a:extLst>
-            <a:ext uri="{FF2B5EF4-FFF2-40B4-BE49-F238E27FC236}">
-              <a16:creationId xmlns:a16="http://schemas.microsoft.com/office/drawing/2014/main" id="{234382BA-BDE6-C715-5C7A-A641072AFD9B}"/>
-            </a:ext>
-          </a:extLst>
-        </p:cNvPr>
+        <p:cNvPr id="1" name=""/>
         <p:cNvGrpSpPr/>
         <p:nvPr/>
       </p:nvGrpSpPr>
@@ -17863,7 +18052,7 @@
           <p:cNvPr id="2" name="Tytuł 1">
             <a:extLst>
               <a:ext uri="{FF2B5EF4-FFF2-40B4-BE49-F238E27FC236}">
-                <a16:creationId xmlns:a16="http://schemas.microsoft.com/office/drawing/2014/main" id="{C4D42B59-DCF6-4896-2960-FC277C0227BD}"/>
+                <a16:creationId xmlns:a16="http://schemas.microsoft.com/office/drawing/2014/main" id="{DB22C4A2-1B90-4E31-AB1C-E2D45B1E1A94}"/>
               </a:ext>
             </a:extLst>
           </p:cNvPr>
@@ -17883,7 +18072,7 @@
           <a:p>
             <a:r>
               <a:rPr lang="pl-PL" dirty="0"/>
-              <a:t>A to ki czort?</a:t>
+              <a:t>Piłka nożna a znajomość geografii</a:t>
             </a:r>
           </a:p>
         </p:txBody>
@@ -17893,7 +18082,7 @@
           <p:cNvPr id="6" name="Symbol zastępczy zawartości 5">
             <a:extLst>
               <a:ext uri="{FF2B5EF4-FFF2-40B4-BE49-F238E27FC236}">
-                <a16:creationId xmlns:a16="http://schemas.microsoft.com/office/drawing/2014/main" id="{B5B9341C-F4A6-EF18-93EF-81A1EE233B74}"/>
+                <a16:creationId xmlns:a16="http://schemas.microsoft.com/office/drawing/2014/main" id="{4B65AB7F-448F-7A38-A170-C9008F7743E3}"/>
               </a:ext>
             </a:extLst>
           </p:cNvPr>
@@ -17904,7 +18093,7 @@
             <p:ph idx="1"/>
             <p:extLst>
               <p:ext uri="{D42A27DB-BD31-4B8C-83A1-F6EECF244321}">
-                <p14:modId xmlns:p14="http://schemas.microsoft.com/office/powerpoint/2010/main" val="1630636911"/>
+                <p14:modId xmlns:p14="http://schemas.microsoft.com/office/powerpoint/2010/main" val="534436697"/>
               </p:ext>
             </p:extLst>
           </p:nvPr>
@@ -17924,7 +18113,7 @@
           <p:cNvPr id="8" name="Symbol zastępczy zawartości 4">
             <a:extLst>
               <a:ext uri="{FF2B5EF4-FFF2-40B4-BE49-F238E27FC236}">
-                <a16:creationId xmlns:a16="http://schemas.microsoft.com/office/drawing/2014/main" id="{53B82AA8-5108-9A9F-A76E-ACFC5CFEEE10}"/>
+                <a16:creationId xmlns:a16="http://schemas.microsoft.com/office/drawing/2014/main" id="{2FF7C437-CEDE-316F-788D-277332313050}"/>
               </a:ext>
             </a:extLst>
           </p:cNvPr>
@@ -18116,16 +18305,7 @@
             </a:pPr>
             <a:r>
               <a:rPr lang="pl-PL" sz="1800" dirty="0"/>
-              <a:t>Mediana miesięcznych wyświetleń strony Przedłużanie życia wynosi 455. Jak to się stało, że w lipcu 2019 osiągnęła oglądalność większą niż strona Królowej Elżbiety w miesiącu Jej śmierci?</a:t>
-            </a:r>
-          </a:p>
-          <a:p>
-            <a:pPr marL="0" indent="0" algn="ctr">
-              <a:buNone/>
-            </a:pPr>
-            <a:r>
-              <a:rPr lang="pl-PL" sz="1800" dirty="0"/>
-              <a:t>Cholera wie</a:t>
+              <a:t>Wiele osób odkryło kraje takie jak Republika Zielonego Przylądka czy Curaçao dzięki ich pierwszemu udziałowi w Mistrzostwach Świata w Piłce Nożnej.</a:t>
             </a:r>
           </a:p>
         </p:txBody>
@@ -18133,7 +18313,120 @@
     </p:spTree>
     <p:extLst>
       <p:ext uri="{BB962C8B-B14F-4D97-AF65-F5344CB8AC3E}">
-        <p14:creationId xmlns:p14="http://schemas.microsoft.com/office/powerpoint/2010/main" val="4287588000"/>
+        <p14:creationId xmlns:p14="http://schemas.microsoft.com/office/powerpoint/2010/main" val="408702331"/>
+      </p:ext>
+    </p:extLst>
+  </p:cSld>
+  <p:clrMapOvr>
+    <a:masterClrMapping/>
+  </p:clrMapOvr>
+</p:sld>
+</file>
+
+<file path=ppt/slides/slide9.xml><?xml version="1.0" encoding="utf-8"?>
+<p:sld xmlns:a="http://schemas.openxmlformats.org/drawingml/2006/main" xmlns:r="http://schemas.openxmlformats.org/officeDocument/2006/relationships" xmlns:p="http://schemas.openxmlformats.org/presentationml/2006/main">
+  <p:cSld>
+    <p:spTree>
+      <p:nvGrpSpPr>
+        <p:cNvPr id="1" name=""/>
+        <p:cNvGrpSpPr/>
+        <p:nvPr/>
+      </p:nvGrpSpPr>
+      <p:grpSpPr>
+        <a:xfrm>
+          <a:off x="0" y="0"/>
+          <a:ext cx="0" cy="0"/>
+          <a:chOff x="0" y="0"/>
+          <a:chExt cx="0" cy="0"/>
+        </a:xfrm>
+      </p:grpSpPr>
+      <p:sp>
+        <p:nvSpPr>
+          <p:cNvPr id="2" name="Tytuł 1">
+            <a:extLst>
+              <a:ext uri="{FF2B5EF4-FFF2-40B4-BE49-F238E27FC236}">
+                <a16:creationId xmlns:a16="http://schemas.microsoft.com/office/drawing/2014/main" id="{9B06FA26-7517-0D14-088B-3B65931650DB}"/>
+              </a:ext>
+            </a:extLst>
+          </p:cNvPr>
+          <p:cNvSpPr>
+            <a:spLocks noGrp="1"/>
+          </p:cNvSpPr>
+          <p:nvPr>
+            <p:ph type="title"/>
+          </p:nvPr>
+        </p:nvSpPr>
+        <p:spPr/>
+        <p:txBody>
+          <a:bodyPr/>
+          <a:lstStyle/>
+          <a:p>
+            <a:r>
+              <a:rPr lang="pl-PL" dirty="0"/>
+              <a:t>Dlaczego otwieramy Wikipedię?</a:t>
+            </a:r>
+          </a:p>
+        </p:txBody>
+      </p:sp>
+      <p:sp>
+        <p:nvSpPr>
+          <p:cNvPr id="3" name="Symbol zastępczy zawartości 2">
+            <a:extLst>
+              <a:ext uri="{FF2B5EF4-FFF2-40B4-BE49-F238E27FC236}">
+                <a16:creationId xmlns:a16="http://schemas.microsoft.com/office/drawing/2014/main" id="{3F912FD5-44F1-B5A4-DB1C-68AEC4C7DD9A}"/>
+              </a:ext>
+            </a:extLst>
+          </p:cNvPr>
+          <p:cNvSpPr>
+            <a:spLocks noGrp="1"/>
+          </p:cNvSpPr>
+          <p:nvPr>
+            <p:ph idx="1"/>
+          </p:nvPr>
+        </p:nvSpPr>
+        <p:spPr/>
+        <p:txBody>
+          <a:bodyPr/>
+          <a:lstStyle/>
+          <a:p>
+            <a:pPr marL="0" indent="0">
+              <a:buNone/>
+            </a:pPr>
+            <a:r>
+              <a:rPr lang="pl-PL" dirty="0"/>
+              <a:t>Analiza powyższych przykładów pokazuje, że Wikipedia nie jest tylko encyklopedią. </a:t>
+            </a:r>
+          </a:p>
+          <a:p>
+            <a:pPr marL="0" indent="0">
+              <a:buNone/>
+            </a:pPr>
+            <a:r>
+              <a:rPr lang="pl-PL" dirty="0"/>
+              <a:t>Jest miejscem do którego udajemy się, by zrozumieć świat wokół nas. By zgłębić wydarzenia wywołujące smutek, strach, ciekawość czy ekscytację.</a:t>
+            </a:r>
+          </a:p>
+          <a:p>
+            <a:pPr marL="0" indent="0">
+              <a:buNone/>
+            </a:pPr>
+            <a:endParaRPr lang="pl-PL" dirty="0"/>
+          </a:p>
+          <a:p>
+            <a:pPr marL="0" indent="0">
+              <a:buNone/>
+            </a:pPr>
+            <a:r>
+              <a:rPr lang="pl-PL" b="1" dirty="0"/>
+              <a:t>Wikipedia odpowiada na nasze emocje. Od 25 lat.</a:t>
+            </a:r>
+          </a:p>
+        </p:txBody>
+      </p:sp>
+    </p:spTree>
+    <p:extLst>
+      <p:ext uri="{BB962C8B-B14F-4D97-AF65-F5344CB8AC3E}">
+        <p14:creationId xmlns:p14="http://schemas.microsoft.com/office/powerpoint/2010/main" val="1392380390"/>
       </p:ext>
     </p:extLst>
   </p:cSld>

--- a/storytelling/Storytelling.pptx
+++ b/storytelling/Storytelling.pptx
@@ -4,6 +4,9 @@
   <p:sldMasterIdLst>
     <p:sldMasterId id="2147483648" r:id="rId1"/>
   </p:sldMasterIdLst>
+  <p:notesMasterIdLst>
+    <p:notesMasterId r:id="rId14"/>
+  </p:notesMasterIdLst>
   <p:sldIdLst>
     <p:sldId id="256" r:id="rId2"/>
     <p:sldId id="258" r:id="rId3"/>
@@ -3232,7 +3235,7 @@
             </a:r>
             <a:r>
               <a:rPr lang="pl-PL" dirty="0"/>
-              <a:t> [tys.][2][3]</a:t>
+              <a:t> [tys.][2]</a:t>
             </a:r>
             <a:endParaRPr lang="en-US" dirty="0"/>
           </a:p>
@@ -4171,7 +4174,7 @@
             </a:r>
             <a:r>
               <a:rPr lang="pl-PL" dirty="0"/>
-              <a:t>[tys.][2][3]</a:t>
+              <a:t>[tys.][2]</a:t>
             </a:r>
             <a:endParaRPr lang="en-US" dirty="0"/>
           </a:p>
@@ -5235,7 +5238,7 @@
             </a:r>
             <a:r>
               <a:rPr lang="pl-PL" dirty="0"/>
-              <a:t>Republika Zielonego Przylądka oraz Curaçao [tys.][2][3]</a:t>
+              <a:t>Republika Zielonego Przylądka oraz Curaçao [tys.][2]</a:t>
             </a:r>
             <a:endParaRPr lang="en-US" dirty="0"/>
           </a:p>
@@ -6833,7 +6836,7 @@
             </a:r>
             <a:r>
               <a:rPr lang="pl-PL" dirty="0"/>
-              <a:t>[mln][2][3]</a:t>
+              <a:t>[mln][2]</a:t>
             </a:r>
             <a:endParaRPr lang="en-US" dirty="0"/>
           </a:p>
@@ -12090,6 +12093,462 @@
     </cs:spPr>
   </cs:wall>
 </cs:chartStyle>
+</file>
+
+<file path=ppt/notesMasters/notesMaster1.xml><?xml version="1.0" encoding="utf-8"?>
+<p:notesMaster xmlns:a="http://schemas.openxmlformats.org/drawingml/2006/main" xmlns:r="http://schemas.openxmlformats.org/officeDocument/2006/relationships" xmlns:p="http://schemas.openxmlformats.org/presentationml/2006/main">
+  <p:cSld>
+    <p:bg>
+      <p:bgRef idx="1001">
+        <a:schemeClr val="bg1"/>
+      </p:bgRef>
+    </p:bg>
+    <p:spTree>
+      <p:nvGrpSpPr>
+        <p:cNvPr id="1" name=""/>
+        <p:cNvGrpSpPr/>
+        <p:nvPr/>
+      </p:nvGrpSpPr>
+      <p:grpSpPr>
+        <a:xfrm>
+          <a:off x="0" y="0"/>
+          <a:ext cx="0" cy="0"/>
+          <a:chOff x="0" y="0"/>
+          <a:chExt cx="0" cy="0"/>
+        </a:xfrm>
+      </p:grpSpPr>
+      <p:sp>
+        <p:nvSpPr>
+          <p:cNvPr id="2" name="Symbol zastępczy nagłówka 1"/>
+          <p:cNvSpPr>
+            <a:spLocks noGrp="1"/>
+          </p:cNvSpPr>
+          <p:nvPr>
+            <p:ph type="hdr" sz="quarter"/>
+          </p:nvPr>
+        </p:nvSpPr>
+        <p:spPr>
+          <a:xfrm>
+            <a:off x="0" y="0"/>
+            <a:ext cx="2971800" cy="458788"/>
+          </a:xfrm>
+          <a:prstGeom prst="rect">
+            <a:avLst/>
+          </a:prstGeom>
+        </p:spPr>
+        <p:txBody>
+          <a:bodyPr vert="horz" lIns="91440" tIns="45720" rIns="91440" bIns="45720" rtlCol="0"/>
+          <a:lstStyle>
+            <a:lvl1pPr algn="l">
+              <a:defRPr sz="1200"/>
+            </a:lvl1pPr>
+          </a:lstStyle>
+          <a:p>
+            <a:endParaRPr lang="pl-PL"/>
+          </a:p>
+        </p:txBody>
+      </p:sp>
+      <p:sp>
+        <p:nvSpPr>
+          <p:cNvPr id="3" name="Symbol zastępczy daty 2"/>
+          <p:cNvSpPr>
+            <a:spLocks noGrp="1"/>
+          </p:cNvSpPr>
+          <p:nvPr>
+            <p:ph type="dt" idx="1"/>
+          </p:nvPr>
+        </p:nvSpPr>
+        <p:spPr>
+          <a:xfrm>
+            <a:off x="3884613" y="0"/>
+            <a:ext cx="2971800" cy="458788"/>
+          </a:xfrm>
+          <a:prstGeom prst="rect">
+            <a:avLst/>
+          </a:prstGeom>
+        </p:spPr>
+        <p:txBody>
+          <a:bodyPr vert="horz" lIns="91440" tIns="45720" rIns="91440" bIns="45720" rtlCol="0"/>
+          <a:lstStyle>
+            <a:lvl1pPr algn="r">
+              <a:defRPr sz="1200"/>
+            </a:lvl1pPr>
+          </a:lstStyle>
+          <a:p>
+            <a:fld id="{E5935C60-06B4-43D2-8FB6-7E8AA44FCC6B}" type="datetimeFigureOut">
+              <a:rPr lang="pl-PL" smtClean="0"/>
+              <a:t>25.09.2026</a:t>
+            </a:fld>
+            <a:endParaRPr lang="pl-PL"/>
+          </a:p>
+        </p:txBody>
+      </p:sp>
+      <p:sp>
+        <p:nvSpPr>
+          <p:cNvPr id="4" name="Symbol zastępczy obrazu slajdu 3"/>
+          <p:cNvSpPr>
+            <a:spLocks noGrp="1" noRot="1" noChangeAspect="1"/>
+          </p:cNvSpPr>
+          <p:nvPr>
+            <p:ph type="sldImg" idx="2"/>
+          </p:nvPr>
+        </p:nvSpPr>
+        <p:spPr>
+          <a:xfrm>
+            <a:off x="685800" y="1143000"/>
+            <a:ext cx="5486400" cy="3086100"/>
+          </a:xfrm>
+          <a:prstGeom prst="rect">
+            <a:avLst/>
+          </a:prstGeom>
+          <a:noFill/>
+          <a:ln w="12700">
+            <a:solidFill>
+              <a:prstClr val="black"/>
+            </a:solidFill>
+          </a:ln>
+        </p:spPr>
+        <p:txBody>
+          <a:bodyPr vert="horz" lIns="91440" tIns="45720" rIns="91440" bIns="45720" rtlCol="0" anchor="ctr"/>
+          <a:lstStyle/>
+          <a:p>
+            <a:endParaRPr lang="pl-PL"/>
+          </a:p>
+        </p:txBody>
+      </p:sp>
+      <p:sp>
+        <p:nvSpPr>
+          <p:cNvPr id="5" name="Symbol zastępczy notatek 4"/>
+          <p:cNvSpPr>
+            <a:spLocks noGrp="1"/>
+          </p:cNvSpPr>
+          <p:nvPr>
+            <p:ph type="body" sz="quarter" idx="3"/>
+          </p:nvPr>
+        </p:nvSpPr>
+        <p:spPr>
+          <a:xfrm>
+            <a:off x="685800" y="4400550"/>
+            <a:ext cx="5486400" cy="3600450"/>
+          </a:xfrm>
+          <a:prstGeom prst="rect">
+            <a:avLst/>
+          </a:prstGeom>
+        </p:spPr>
+        <p:txBody>
+          <a:bodyPr vert="horz" lIns="91440" tIns="45720" rIns="91440" bIns="45720" rtlCol="0"/>
+          <a:lstStyle/>
+          <a:p>
+            <a:pPr lvl="0"/>
+            <a:r>
+              <a:rPr lang="pl-PL"/>
+              <a:t>Kliknij, aby edytować style wzorca tekstu</a:t>
+            </a:r>
+          </a:p>
+          <a:p>
+            <a:pPr lvl="1"/>
+            <a:r>
+              <a:rPr lang="pl-PL"/>
+              <a:t>Drugi poziom</a:t>
+            </a:r>
+          </a:p>
+          <a:p>
+            <a:pPr lvl="2"/>
+            <a:r>
+              <a:rPr lang="pl-PL"/>
+              <a:t>Trzeci poziom</a:t>
+            </a:r>
+          </a:p>
+          <a:p>
+            <a:pPr lvl="3"/>
+            <a:r>
+              <a:rPr lang="pl-PL"/>
+              <a:t>Czwarty poziom</a:t>
+            </a:r>
+          </a:p>
+          <a:p>
+            <a:pPr lvl="4"/>
+            <a:r>
+              <a:rPr lang="pl-PL"/>
+              <a:t>Piąty poziom</a:t>
+            </a:r>
+          </a:p>
+        </p:txBody>
+      </p:sp>
+      <p:sp>
+        <p:nvSpPr>
+          <p:cNvPr id="6" name="Symbol zastępczy stopki 5"/>
+          <p:cNvSpPr>
+            <a:spLocks noGrp="1"/>
+          </p:cNvSpPr>
+          <p:nvPr>
+            <p:ph type="ftr" sz="quarter" idx="4"/>
+          </p:nvPr>
+        </p:nvSpPr>
+        <p:spPr>
+          <a:xfrm>
+            <a:off x="0" y="8685213"/>
+            <a:ext cx="2971800" cy="458787"/>
+          </a:xfrm>
+          <a:prstGeom prst="rect">
+            <a:avLst/>
+          </a:prstGeom>
+        </p:spPr>
+        <p:txBody>
+          <a:bodyPr vert="horz" lIns="91440" tIns="45720" rIns="91440" bIns="45720" rtlCol="0" anchor="b"/>
+          <a:lstStyle>
+            <a:lvl1pPr algn="l">
+              <a:defRPr sz="1200"/>
+            </a:lvl1pPr>
+          </a:lstStyle>
+          <a:p>
+            <a:endParaRPr lang="pl-PL"/>
+          </a:p>
+        </p:txBody>
+      </p:sp>
+      <p:sp>
+        <p:nvSpPr>
+          <p:cNvPr id="7" name="Symbol zastępczy numeru slajdu 6"/>
+          <p:cNvSpPr>
+            <a:spLocks noGrp="1"/>
+          </p:cNvSpPr>
+          <p:nvPr>
+            <p:ph type="sldNum" sz="quarter" idx="5"/>
+          </p:nvPr>
+        </p:nvSpPr>
+        <p:spPr>
+          <a:xfrm>
+            <a:off x="3884613" y="8685213"/>
+            <a:ext cx="2971800" cy="458787"/>
+          </a:xfrm>
+          <a:prstGeom prst="rect">
+            <a:avLst/>
+          </a:prstGeom>
+        </p:spPr>
+        <p:txBody>
+          <a:bodyPr vert="horz" lIns="91440" tIns="45720" rIns="91440" bIns="45720" rtlCol="0" anchor="b"/>
+          <a:lstStyle>
+            <a:lvl1pPr algn="r">
+              <a:defRPr sz="1200"/>
+            </a:lvl1pPr>
+          </a:lstStyle>
+          <a:p>
+            <a:fld id="{1795FADB-00C8-4FB2-BB50-76DE30578D93}" type="slidenum">
+              <a:rPr lang="pl-PL" smtClean="0"/>
+              <a:t>‹#›</a:t>
+            </a:fld>
+            <a:endParaRPr lang="pl-PL"/>
+          </a:p>
+        </p:txBody>
+      </p:sp>
+    </p:spTree>
+    <p:extLst>
+      <p:ext uri="{BB962C8B-B14F-4D97-AF65-F5344CB8AC3E}">
+        <p14:creationId xmlns:p14="http://schemas.microsoft.com/office/powerpoint/2010/main" val="903346635"/>
+      </p:ext>
+    </p:extLst>
+  </p:cSld>
+  <p:clrMap bg1="lt1" tx1="dk1" bg2="lt2" tx2="dk2" accent1="accent1" accent2="accent2" accent3="accent3" accent4="accent4" accent5="accent5" accent6="accent6" hlink="hlink" folHlink="folHlink"/>
+  <p:notesStyle>
+    <a:lvl1pPr marL="0" algn="l" defTabSz="914400" rtl="0" eaLnBrk="1" latinLnBrk="0" hangingPunct="1">
+      <a:defRPr sz="1200" kern="1200">
+        <a:solidFill>
+          <a:schemeClr val="tx1"/>
+        </a:solidFill>
+        <a:latin typeface="+mn-lt"/>
+        <a:ea typeface="+mn-ea"/>
+        <a:cs typeface="+mn-cs"/>
+      </a:defRPr>
+    </a:lvl1pPr>
+    <a:lvl2pPr marL="457200" algn="l" defTabSz="914400" rtl="0" eaLnBrk="1" latinLnBrk="0" hangingPunct="1">
+      <a:defRPr sz="1200" kern="1200">
+        <a:solidFill>
+          <a:schemeClr val="tx1"/>
+        </a:solidFill>
+        <a:latin typeface="+mn-lt"/>
+        <a:ea typeface="+mn-ea"/>
+        <a:cs typeface="+mn-cs"/>
+      </a:defRPr>
+    </a:lvl2pPr>
+    <a:lvl3pPr marL="914400" algn="l" defTabSz="914400" rtl="0" eaLnBrk="1" latinLnBrk="0" hangingPunct="1">
+      <a:defRPr sz="1200" kern="1200">
+        <a:solidFill>
+          <a:schemeClr val="tx1"/>
+        </a:solidFill>
+        <a:latin typeface="+mn-lt"/>
+        <a:ea typeface="+mn-ea"/>
+        <a:cs typeface="+mn-cs"/>
+      </a:defRPr>
+    </a:lvl3pPr>
+    <a:lvl4pPr marL="1371600" algn="l" defTabSz="914400" rtl="0" eaLnBrk="1" latinLnBrk="0" hangingPunct="1">
+      <a:defRPr sz="1200" kern="1200">
+        <a:solidFill>
+          <a:schemeClr val="tx1"/>
+        </a:solidFill>
+        <a:latin typeface="+mn-lt"/>
+        <a:ea typeface="+mn-ea"/>
+        <a:cs typeface="+mn-cs"/>
+      </a:defRPr>
+    </a:lvl4pPr>
+    <a:lvl5pPr marL="1828800" algn="l" defTabSz="914400" rtl="0" eaLnBrk="1" latinLnBrk="0" hangingPunct="1">
+      <a:defRPr sz="1200" kern="1200">
+        <a:solidFill>
+          <a:schemeClr val="tx1"/>
+        </a:solidFill>
+        <a:latin typeface="+mn-lt"/>
+        <a:ea typeface="+mn-ea"/>
+        <a:cs typeface="+mn-cs"/>
+      </a:defRPr>
+    </a:lvl5pPr>
+    <a:lvl6pPr marL="2286000" algn="l" defTabSz="914400" rtl="0" eaLnBrk="1" latinLnBrk="0" hangingPunct="1">
+      <a:defRPr sz="1200" kern="1200">
+        <a:solidFill>
+          <a:schemeClr val="tx1"/>
+        </a:solidFill>
+        <a:latin typeface="+mn-lt"/>
+        <a:ea typeface="+mn-ea"/>
+        <a:cs typeface="+mn-cs"/>
+      </a:defRPr>
+    </a:lvl6pPr>
+    <a:lvl7pPr marL="2743200" algn="l" defTabSz="914400" rtl="0" eaLnBrk="1" latinLnBrk="0" hangingPunct="1">
+      <a:defRPr sz="1200" kern="1200">
+        <a:solidFill>
+          <a:schemeClr val="tx1"/>
+        </a:solidFill>
+        <a:latin typeface="+mn-lt"/>
+        <a:ea typeface="+mn-ea"/>
+        <a:cs typeface="+mn-cs"/>
+      </a:defRPr>
+    </a:lvl7pPr>
+    <a:lvl8pPr marL="3200400" algn="l" defTabSz="914400" rtl="0" eaLnBrk="1" latinLnBrk="0" hangingPunct="1">
+      <a:defRPr sz="1200" kern="1200">
+        <a:solidFill>
+          <a:schemeClr val="tx1"/>
+        </a:solidFill>
+        <a:latin typeface="+mn-lt"/>
+        <a:ea typeface="+mn-ea"/>
+        <a:cs typeface="+mn-cs"/>
+      </a:defRPr>
+    </a:lvl8pPr>
+    <a:lvl9pPr marL="3657600" algn="l" defTabSz="914400" rtl="0" eaLnBrk="1" latinLnBrk="0" hangingPunct="1">
+      <a:defRPr sz="1200" kern="1200">
+        <a:solidFill>
+          <a:schemeClr val="tx1"/>
+        </a:solidFill>
+        <a:latin typeface="+mn-lt"/>
+        <a:ea typeface="+mn-ea"/>
+        <a:cs typeface="+mn-cs"/>
+      </a:defRPr>
+    </a:lvl9pPr>
+  </p:notesStyle>
+</p:notesMaster>
+</file>
+
+<file path=ppt/notesSlides/notesSlide1.xml><?xml version="1.0" encoding="utf-8"?>
+<p:notes xmlns:a="http://schemas.openxmlformats.org/drawingml/2006/main" xmlns:r="http://schemas.openxmlformats.org/officeDocument/2006/relationships" xmlns:p="http://schemas.openxmlformats.org/presentationml/2006/main">
+  <p:cSld>
+    <p:spTree>
+      <p:nvGrpSpPr>
+        <p:cNvPr id="1" name=""/>
+        <p:cNvGrpSpPr/>
+        <p:nvPr/>
+      </p:nvGrpSpPr>
+      <p:grpSpPr>
+        <a:xfrm>
+          <a:off x="0" y="0"/>
+          <a:ext cx="0" cy="0"/>
+          <a:chOff x="0" y="0"/>
+          <a:chExt cx="0" cy="0"/>
+        </a:xfrm>
+      </p:grpSpPr>
+      <p:sp>
+        <p:nvSpPr>
+          <p:cNvPr id="2" name="Symbol zastępczy obrazu slajdu 1"/>
+          <p:cNvSpPr>
+            <a:spLocks noGrp="1" noRot="1" noChangeAspect="1"/>
+          </p:cNvSpPr>
+          <p:nvPr>
+            <p:ph type="sldImg"/>
+          </p:nvPr>
+        </p:nvSpPr>
+        <p:spPr/>
+      </p:sp>
+      <p:sp>
+        <p:nvSpPr>
+          <p:cNvPr id="3" name="Symbol zastępczy notatek 2"/>
+          <p:cNvSpPr>
+            <a:spLocks noGrp="1"/>
+          </p:cNvSpPr>
+          <p:nvPr>
+            <p:ph type="body" idx="1"/>
+          </p:nvPr>
+        </p:nvSpPr>
+        <p:spPr/>
+        <p:txBody>
+          <a:bodyPr/>
+          <a:lstStyle/>
+          <a:p>
+            <a:pPr marL="0" marR="0" lvl="0" indent="0" algn="l" defTabSz="914400" rtl="0" eaLnBrk="1" fontAlgn="auto" latinLnBrk="0" hangingPunct="1">
+              <a:lnSpc>
+                <a:spcPct val="100000"/>
+              </a:lnSpc>
+              <a:spcBef>
+                <a:spcPts val="0"/>
+              </a:spcBef>
+              <a:spcAft>
+                <a:spcPts val="0"/>
+              </a:spcAft>
+              <a:buClrTx/>
+              <a:buSzTx/>
+              <a:buFontTx/>
+              <a:buNone/>
+              <a:tabLst/>
+              <a:defRPr/>
+            </a:pPr>
+            <a:r>
+              <a:rPr lang="pl-PL" sz="1200" dirty="0"/>
+              <a:t> Dostępne są dane dotyczące wyświetleń od 2008 r, natomiast dane od 2016 roku zawierają podział na ludzi i boty. W latach 2016-17 odnotowano incydenty wzmożonego ruchu botów zaklasyfikowanych jako użytkownicy, dlatego zdecydowałem się pokazać ostatnie 8 lat.</a:t>
+            </a:r>
+          </a:p>
+          <a:p>
+            <a:endParaRPr lang="pl-PL" dirty="0"/>
+          </a:p>
+        </p:txBody>
+      </p:sp>
+      <p:sp>
+        <p:nvSpPr>
+          <p:cNvPr id="4" name="Symbol zastępczy numeru slajdu 3"/>
+          <p:cNvSpPr>
+            <a:spLocks noGrp="1"/>
+          </p:cNvSpPr>
+          <p:nvPr>
+            <p:ph type="sldNum" sz="quarter" idx="5"/>
+          </p:nvPr>
+        </p:nvSpPr>
+        <p:spPr/>
+        <p:txBody>
+          <a:bodyPr/>
+          <a:lstStyle/>
+          <a:p>
+            <a:fld id="{1795FADB-00C8-4FB2-BB50-76DE30578D93}" type="slidenum">
+              <a:rPr lang="pl-PL" smtClean="0"/>
+              <a:t>1</a:t>
+            </a:fld>
+            <a:endParaRPr lang="pl-PL"/>
+          </a:p>
+        </p:txBody>
+      </p:sp>
+    </p:spTree>
+    <p:extLst>
+      <p:ext uri="{BB962C8B-B14F-4D97-AF65-F5344CB8AC3E}">
+        <p14:creationId xmlns:p14="http://schemas.microsoft.com/office/powerpoint/2010/main" val="2108392676"/>
+      </p:ext>
+    </p:extLst>
+  </p:cSld>
+  <p:clrMapOvr>
+    <a:masterClrMapping/>
+  </p:clrMapOvr>
+</p:notes>
 </file>
 
 <file path=ppt/slideLayouts/slideLayout1.xml><?xml version="1.0" encoding="utf-8"?>
@@ -15363,8 +15822,8 @@
         </p:nvSpPr>
         <p:spPr>
           <a:xfrm>
-            <a:off x="762000" y="1866796"/>
-            <a:ext cx="5181600" cy="2453767"/>
+            <a:off x="762000" y="2058821"/>
+            <a:ext cx="5181600" cy="2119988"/>
           </a:xfrm>
         </p:spPr>
         <p:txBody>
@@ -15380,7 +15839,7 @@
               <a:rPr lang="pl-PL" sz="7200" dirty="0">
                 <a:latin typeface="Montserrat SemiBold" pitchFamily="2" charset="-18"/>
               </a:rPr>
-              <a:t>2 mln</a:t>
+              <a:t>1,7 mln</a:t>
             </a:r>
           </a:p>
           <a:p>
@@ -15389,7 +15848,7 @@
             </a:pPr>
             <a:r>
               <a:rPr lang="pl-PL" sz="1600" dirty="0"/>
-              <a:t>Suma stworzonych artykułów przez polską Wikipedię przez ostatnie 25 lat</a:t>
+              <a:t>Liczba artykułów w polskiej Wikipedii [7]</a:t>
             </a:r>
           </a:p>
         </p:txBody>
@@ -15412,8 +15871,8 @@
         </p:nvSpPr>
         <p:spPr>
           <a:xfrm>
-            <a:off x="6096000" y="1866796"/>
-            <a:ext cx="5181600" cy="2453767"/>
+            <a:off x="6096000" y="2058821"/>
+            <a:ext cx="5181600" cy="2119988"/>
           </a:xfrm>
         </p:spPr>
         <p:txBody>
@@ -15465,7 +15924,7 @@
           <p:nvPr/>
         </p:nvPicPr>
         <p:blipFill>
-          <a:blip r:embed="rId2">
+          <a:blip r:embed="rId3">
             <a:extLst>
               <a:ext uri="{28A0092B-C50C-407E-A947-70E740481C1C}">
                 <a14:useLocalDpi xmlns:a14="http://schemas.microsoft.com/office/drawing/2010/main" val="0"/>
@@ -15503,7 +15962,7 @@
         <p:spPr>
           <a:xfrm>
             <a:off x="838200" y="4320563"/>
-            <a:ext cx="10515600" cy="1300035"/>
+            <a:ext cx="10515600" cy="937237"/>
           </a:xfrm>
           <a:prstGeom prst="rect">
             <a:avLst/>
@@ -15679,19 +16138,15 @@
           </a:lstStyle>
           <a:p>
             <a:pPr marL="0" indent="0" algn="ctr">
+              <a:lnSpc>
+                <a:spcPct val="100000"/>
+              </a:lnSpc>
               <a:buFont typeface="Arial" panose="020B0604020202020204" pitchFamily="34" charset="0"/>
               <a:buNone/>
             </a:pPr>
             <a:r>
               <a:rPr lang="pl-PL" sz="2400" dirty="0"/>
-              <a:t>Od 25 lat Polska Wikipedia dostarcza nam wiedzy o nas </a:t>
-            </a:r>
-            <a:br>
-              <a:rPr lang="pl-PL" sz="2400" dirty="0"/>
-            </a:br>
-            <a:r>
-              <a:rPr lang="pl-PL" sz="2400" dirty="0"/>
-              <a:t>i otaczającym nas świecie. Dowiedzmy się więcej o tym co nas interesuje, kiedy po to sięgamy i dlaczego.</a:t>
+              <a:t>Przez ostatnie 25 lat zadaliśmy miliardy pytań w polskiej Wikipedii. Sprawdźmy czego dotyczą, kiedy się pojawiają i dlaczego.</a:t>
             </a:r>
           </a:p>
         </p:txBody>
@@ -15710,8 +16165,8 @@
         </p:nvSpPr>
         <p:spPr>
           <a:xfrm>
-            <a:off x="953310" y="6035666"/>
-            <a:ext cx="9426102" cy="738664"/>
+            <a:off x="838200" y="6251110"/>
+            <a:ext cx="9426102" cy="276999"/>
           </a:xfrm>
           <a:prstGeom prst="rect">
             <a:avLst/>
@@ -15725,8 +16180,8 @@
           <a:lstStyle/>
           <a:p>
             <a:r>
-              <a:rPr lang="pl-PL" sz="1400" dirty="0"/>
-              <a:t> * Dostępne są dane dotyczące wyświetleń od 2008 r, natomiast dane od 2016 roku zawierają podział na ludzi i boty. W latach 2016-17 odnotowano incydenty wzmożonego ruchu botów zaklasyfikowanych jako użytkownicy, dlatego zdecydowałem się pokazać ostatnie 8 lat.</a:t>
+              <a:rPr lang="pl-PL" sz="1200" dirty="0"/>
+              <a:t> Dane o wyświetleniach przedstawiono dla lat 2018-2025 ze względu na jakość danych historycznych.</a:t>
             </a:r>
           </a:p>
         </p:txBody>
@@ -15874,7 +16329,7 @@
         <p:spPr/>
         <p:txBody>
           <a:bodyPr>
-            <a:normAutofit fontScale="92500" lnSpcReduction="10000"/>
+            <a:noAutofit/>
           </a:bodyPr>
           <a:lstStyle/>
           <a:p>
@@ -15884,23 +16339,33 @@
               </a:spcAft>
             </a:pPr>
             <a:r>
-              <a:rPr lang="pl-PL" sz="1800" dirty="0"/>
+              <a:rPr lang="pl-PL" sz="1200" dirty="0">
+                <a:latin typeface="Aptos" panose="020B0004020202020204" pitchFamily="34" charset="0"/>
+              </a:rPr>
               <a:t>[1] </a:t>
             </a:r>
             <a:r>
-              <a:rPr lang="pl-PL" sz="1800" dirty="0" err="1"/>
+              <a:rPr lang="pl-PL" sz="1200" dirty="0" err="1">
+                <a:latin typeface="Aptos" panose="020B0004020202020204" pitchFamily="34" charset="0"/>
+              </a:rPr>
               <a:t>Wikistats</a:t>
             </a:r>
             <a:r>
-              <a:rPr lang="pl-PL" sz="1800" dirty="0"/>
+              <a:rPr lang="pl-PL" sz="1200" dirty="0">
+                <a:latin typeface="Aptos" panose="020B0004020202020204" pitchFamily="34" charset="0"/>
+              </a:rPr>
               <a:t> 2 / </a:t>
             </a:r>
             <a:r>
-              <a:rPr lang="pl-PL" sz="1800" dirty="0" err="1"/>
+              <a:rPr lang="pl-PL" sz="1200" dirty="0" err="1">
+                <a:latin typeface="Aptos" panose="020B0004020202020204" pitchFamily="34" charset="0"/>
+              </a:rPr>
               <a:t>Wikimedia</a:t>
             </a:r>
             <a:r>
-              <a:rPr lang="pl-PL" sz="1800" dirty="0"/>
+              <a:rPr lang="pl-PL" sz="1200" dirty="0">
+                <a:latin typeface="Aptos" panose="020B0004020202020204" pitchFamily="34" charset="0"/>
+              </a:rPr>
               <a:t> Analytics API (AQS) | CC0 1.0 </a:t>
             </a:r>
           </a:p>
@@ -15911,17 +16376,22 @@
               </a:spcAft>
             </a:pPr>
             <a:r>
-              <a:rPr lang="pl-PL" sz="1800" dirty="0"/>
+              <a:rPr lang="pl-PL" sz="1200" dirty="0">
+                <a:latin typeface="Aptos" panose="020B0004020202020204" pitchFamily="34" charset="0"/>
+              </a:rPr>
               <a:t>[2] </a:t>
             </a:r>
             <a:r>
-              <a:rPr lang="pl-PL" sz="1800" dirty="0">
+              <a:rPr lang="pl-PL" sz="1200" dirty="0">
+                <a:latin typeface="Aptos" panose="020B0004020202020204" pitchFamily="34" charset="0"/>
                 <a:hlinkClick r:id="rId2"/>
               </a:rPr>
               <a:t>https://pageviews.wmcloud.org/</a:t>
             </a:r>
             <a:r>
-              <a:rPr lang="pl-PL" sz="1800" dirty="0"/>
+              <a:rPr lang="pl-PL" sz="1200" dirty="0">
+                <a:latin typeface="Aptos" panose="020B0004020202020204" pitchFamily="34" charset="0"/>
+              </a:rPr>
               <a:t>  </a:t>
             </a:r>
           </a:p>
@@ -15932,18 +16402,23 @@
               </a:spcAft>
             </a:pPr>
             <a:r>
-              <a:rPr lang="pl-PL" sz="1800" dirty="0"/>
+              <a:rPr lang="pl-PL" sz="1200" dirty="0">
+                <a:latin typeface="Aptos" panose="020B0004020202020204" pitchFamily="34" charset="0"/>
+              </a:rPr>
               <a:t>[3] </a:t>
             </a:r>
             <a:r>
-              <a:rPr lang="pl-PL" sz="1800" dirty="0">
+              <a:rPr lang="pl-PL" sz="1200" dirty="0">
+                <a:latin typeface="Aptos" panose="020B0004020202020204" pitchFamily="34" charset="0"/>
                 <a:hlinkClick r:id="rId3"/>
               </a:rPr>
               <a:t>https://pl.wikipedia.org/wiki/El%C5%BCbieta_II</a:t>
             </a:r>
             <a:r>
-              <a:rPr lang="pl-PL" sz="1800" dirty="0"/>
-              <a:t> </a:t>
+              <a:rPr lang="pl-PL" sz="1200" dirty="0">
+                <a:latin typeface="Aptos" panose="020B0004020202020204" pitchFamily="34" charset="0"/>
+              </a:rPr>
+              <a:t> – data pobrania 24.09.2026</a:t>
             </a:r>
           </a:p>
           <a:p>
@@ -15953,7 +16428,9 @@
               </a:spcAft>
             </a:pPr>
             <a:r>
-              <a:rPr lang="pl-PL" sz="1800" dirty="0"/>
+              <a:rPr lang="pl-PL" sz="1200" dirty="0">
+                <a:latin typeface="Aptos" panose="020B0004020202020204" pitchFamily="34" charset="0"/>
+              </a:rPr>
               <a:t>[4] Kategorie dopasowane przez model językowy, a następnie ręcznie zweryfikowane, „Śmierć osoby” może dotyczyć osoby z artykułu lub osoby powiązanej. Suma zwiększonych wyświetleń została obliczona jako różnica między liczbą wyświetleń w danym miesiącu danego artykułu, a średnią jego wyświetleń. Dane na podstawie liczby wyświetleń top 1000 artykułów każdego miesiąca [5]. Na potrzeby wykresu zsumowano 200 </a:t>
             </a:r>
           </a:p>
@@ -15964,15 +16441,21 @@
               </a:spcAft>
             </a:pPr>
             <a:r>
-              <a:rPr lang="pl-PL" sz="1800" dirty="0"/>
+              <a:rPr lang="pl-PL" sz="1200" dirty="0">
+                <a:latin typeface="Aptos" panose="020B0004020202020204" pitchFamily="34" charset="0"/>
+              </a:rPr>
               <a:t>[5] Zrzuty „</a:t>
             </a:r>
             <a:r>
-              <a:rPr lang="pl-PL" sz="1800" dirty="0" err="1"/>
+              <a:rPr lang="pl-PL" sz="1200" dirty="0" err="1">
+                <a:latin typeface="Aptos" panose="020B0004020202020204" pitchFamily="34" charset="0"/>
+              </a:rPr>
               <a:t>pageview_complete</a:t>
             </a:r>
             <a:r>
-              <a:rPr lang="pl-PL" sz="1800" dirty="0"/>
+              <a:rPr lang="pl-PL" sz="1200" dirty="0">
+                <a:latin typeface="Aptos" panose="020B0004020202020204" pitchFamily="34" charset="0"/>
+              </a:rPr>
               <a:t>” (dumps.wikimedia.org), uzupełnione o metadane stron polskojęzycznej Wikipedii | CC0 1.0 |</a:t>
             </a:r>
           </a:p>
@@ -15983,7 +16466,9 @@
               </a:spcAft>
             </a:pPr>
             <a:r>
-              <a:rPr lang="pl-PL" sz="1800" dirty="0"/>
+              <a:rPr lang="pl-PL" sz="1200" dirty="0">
+                <a:latin typeface="Aptos" panose="020B0004020202020204" pitchFamily="34" charset="0"/>
+              </a:rPr>
               <a:t>[6] Kategoryzacja w oparciu o model językowy, który przypisał jedną z głównych kategorii Wikipedii do top 100 artykułów i zweryfikowane ręcznie. Najpopularniejszą kategorią polskiej Wikipedii są biografie, pozostałe zdecydowanie odbiegają. Nie sumuję kategorii geografia z Polską, gdyż zawiera ona cały przekrój kategorii.</a:t>
             </a:r>
           </a:p>
@@ -15993,7 +16478,204 @@
                 <a:spcPts val="600"/>
               </a:spcAft>
             </a:pPr>
-            <a:endParaRPr lang="pl-PL" sz="1800" dirty="0"/>
+            <a:r>
+              <a:rPr lang="pl-PL" sz="1200" dirty="0">
+                <a:latin typeface="Aptos" panose="020B0004020202020204" pitchFamily="34" charset="0"/>
+              </a:rPr>
+              <a:t>[7] </a:t>
+            </a:r>
+            <a:r>
+              <a:rPr lang="pl-PL" sz="1200" dirty="0">
+                <a:latin typeface="Aptos" panose="020B0004020202020204" pitchFamily="34" charset="0"/>
+                <a:hlinkClick r:id="rId4"/>
+              </a:rPr>
+              <a:t>https://pl.wikipedia.org/wiki/Wikipedia:Liczba_artyku%C5%82%C3%B3w_w_polskoj%C4%99zycznej_Wikipedii</a:t>
+            </a:r>
+            <a:r>
+              <a:rPr lang="pl-PL" sz="1200" dirty="0">
+                <a:latin typeface="Aptos" panose="020B0004020202020204" pitchFamily="34" charset="0"/>
+              </a:rPr>
+              <a:t> – data pobrania: 25.09.2026</a:t>
+            </a:r>
+          </a:p>
+          <a:p>
+            <a:pPr lvl="0"/>
+            <a:r>
+              <a:rPr lang="pl-PL" sz="1200" dirty="0">
+                <a:latin typeface="Aptos" panose="020B0004020202020204" pitchFamily="34" charset="0"/>
+              </a:rPr>
+              <a:t>[8] Użyte zdjęcia: Robert </a:t>
+            </a:r>
+            <a:r>
+              <a:rPr lang="pl-PL" sz="1200" dirty="0" err="1">
+                <a:latin typeface="Aptos" panose="020B0004020202020204" pitchFamily="34" charset="0"/>
+              </a:rPr>
+              <a:t>Lewadowski</a:t>
+            </a:r>
+            <a:r>
+              <a:rPr lang="pl-PL" sz="1200" dirty="0">
+                <a:latin typeface="Aptos" panose="020B0004020202020204" pitchFamily="34" charset="0"/>
+              </a:rPr>
+              <a:t>: </a:t>
+            </a:r>
+            <a:r>
+              <a:rPr lang="pl-PL" sz="1200" dirty="0">
+                <a:latin typeface="Aptos" panose="020B0004020202020204" pitchFamily="34" charset="0"/>
+                <a:hlinkClick r:id="rId5"/>
+              </a:rPr>
+              <a:t>CC BY-SA 4.0</a:t>
+            </a:r>
+            <a:r>
+              <a:rPr lang="pl-PL" sz="1200" dirty="0">
+                <a:latin typeface="Aptos" panose="020B0004020202020204" pitchFamily="34" charset="0"/>
+              </a:rPr>
+              <a:t>, Plik:2019147183134 2019-05-27 </a:t>
+            </a:r>
+            <a:r>
+              <a:rPr lang="pl-PL" sz="1200" dirty="0" err="1">
+                <a:latin typeface="Aptos" panose="020B0004020202020204" pitchFamily="34" charset="0"/>
+              </a:rPr>
+              <a:t>Fussball</a:t>
+            </a:r>
+            <a:r>
+              <a:rPr lang="pl-PL" sz="1200" dirty="0">
+                <a:latin typeface="Aptos" panose="020B0004020202020204" pitchFamily="34" charset="0"/>
+              </a:rPr>
+              <a:t> 1.FC </a:t>
+            </a:r>
+            <a:r>
+              <a:rPr lang="pl-PL" sz="1200" dirty="0" err="1">
+                <a:latin typeface="Aptos" panose="020B0004020202020204" pitchFamily="34" charset="0"/>
+              </a:rPr>
+              <a:t>Kaiserslautern</a:t>
+            </a:r>
+            <a:r>
+              <a:rPr lang="pl-PL" sz="1200" dirty="0">
+                <a:latin typeface="Aptos" panose="020B0004020202020204" pitchFamily="34" charset="0"/>
+              </a:rPr>
+              <a:t> vs FC Bayern </a:t>
+            </a:r>
+            <a:r>
+              <a:rPr lang="pl-PL" sz="1200" dirty="0" err="1">
+                <a:latin typeface="Aptos" panose="020B0004020202020204" pitchFamily="34" charset="0"/>
+              </a:rPr>
+              <a:t>München</a:t>
+            </a:r>
+            <a:r>
+              <a:rPr lang="pl-PL" sz="1200" dirty="0">
+                <a:latin typeface="Aptos" panose="020B0004020202020204" pitchFamily="34" charset="0"/>
+              </a:rPr>
+              <a:t> - Sven - 1D X MK II - 0228 - B70I8527 (</a:t>
+            </a:r>
+            <a:r>
+              <a:rPr lang="pl-PL" sz="1200" dirty="0" err="1">
+                <a:latin typeface="Aptos" panose="020B0004020202020204" pitchFamily="34" charset="0"/>
+              </a:rPr>
+              <a:t>cropped</a:t>
+            </a:r>
+            <a:r>
+              <a:rPr lang="pl-PL" sz="1200" dirty="0">
+                <a:latin typeface="Aptos" panose="020B0004020202020204" pitchFamily="34" charset="0"/>
+              </a:rPr>
+              <a:t> </a:t>
+            </a:r>
+            <a:r>
+              <a:rPr lang="pl-PL" sz="1200" dirty="0" err="1">
+                <a:latin typeface="Aptos" panose="020B0004020202020204" pitchFamily="34" charset="0"/>
+              </a:rPr>
+              <a:t>wider</a:t>
+            </a:r>
+            <a:r>
+              <a:rPr lang="pl-PL" sz="1200" dirty="0">
+                <a:latin typeface="Aptos" panose="020B0004020202020204" pitchFamily="34" charset="0"/>
+              </a:rPr>
+              <a:t>).jpg, Utworzony: 27 maja 2019, Przesłany: 31 marca 2026; </a:t>
+            </a:r>
+            <a:br>
+              <a:rPr lang="pl-PL" sz="1200" dirty="0">
+                <a:latin typeface="Aptos" panose="020B0004020202020204" pitchFamily="34" charset="0"/>
+              </a:rPr>
+            </a:br>
+            <a:r>
+              <a:rPr lang="pl-PL" sz="1200" dirty="0">
+                <a:latin typeface="Aptos" panose="020B0004020202020204" pitchFamily="34" charset="0"/>
+              </a:rPr>
+              <a:t>Elżbieta II – </a:t>
+            </a:r>
+            <a:r>
+              <a:rPr lang="pl-PL" sz="1200" dirty="0" err="1">
+                <a:latin typeface="Aptos" panose="020B0004020202020204" pitchFamily="34" charset="0"/>
+              </a:rPr>
+              <a:t>domenda</a:t>
+            </a:r>
+            <a:r>
+              <a:rPr lang="pl-PL" sz="1200" dirty="0">
+                <a:latin typeface="Aptos" panose="020B0004020202020204" pitchFamily="34" charset="0"/>
+              </a:rPr>
+              <a:t> publiczna, z </a:t>
+            </a:r>
+            <a:r>
+              <a:rPr lang="pl-PL" sz="1200" dirty="0" err="1">
+                <a:latin typeface="Aptos" panose="020B0004020202020204" pitchFamily="34" charset="0"/>
+              </a:rPr>
+              <a:t>Wikimedia</a:t>
+            </a:r>
+            <a:r>
+              <a:rPr lang="pl-PL" sz="1200" dirty="0">
+                <a:latin typeface="Aptos" panose="020B0004020202020204" pitchFamily="34" charset="0"/>
+              </a:rPr>
+              <a:t> </a:t>
+            </a:r>
+            <a:r>
+              <a:rPr lang="pl-PL" sz="1200" dirty="0" err="1">
+                <a:latin typeface="Aptos" panose="020B0004020202020204" pitchFamily="34" charset="0"/>
+              </a:rPr>
+              <a:t>Commons</a:t>
+            </a:r>
+            <a:br>
+              <a:rPr lang="pl-PL" sz="1200" dirty="0">
+                <a:latin typeface="Aptos" panose="020B0004020202020204" pitchFamily="34" charset="0"/>
+              </a:rPr>
+            </a:br>
+            <a:r>
+              <a:rPr lang="pl-PL" sz="1200" dirty="0">
+                <a:latin typeface="Aptos" panose="020B0004020202020204" pitchFamily="34" charset="0"/>
+              </a:rPr>
+              <a:t>Polska – </a:t>
+            </a:r>
+            <a:r>
+              <a:rPr lang="pl-PL" sz="1200" dirty="0" err="1">
+                <a:latin typeface="Aptos" panose="020B0004020202020204" pitchFamily="34" charset="0"/>
+              </a:rPr>
+              <a:t>domenda</a:t>
+            </a:r>
+            <a:r>
+              <a:rPr lang="pl-PL" sz="1200" dirty="0">
+                <a:latin typeface="Aptos" panose="020B0004020202020204" pitchFamily="34" charset="0"/>
+              </a:rPr>
+              <a:t> publiczna, z </a:t>
+            </a:r>
+            <a:r>
+              <a:rPr lang="pl-PL" sz="1200" dirty="0" err="1">
+                <a:latin typeface="Aptos" panose="020B0004020202020204" pitchFamily="34" charset="0"/>
+              </a:rPr>
+              <a:t>Wikimedia</a:t>
+            </a:r>
+            <a:r>
+              <a:rPr lang="pl-PL" sz="1200" dirty="0">
+                <a:latin typeface="Aptos" panose="020B0004020202020204" pitchFamily="34" charset="0"/>
+              </a:rPr>
+              <a:t> </a:t>
+            </a:r>
+            <a:r>
+              <a:rPr lang="pl-PL" sz="1200" dirty="0" err="1">
+                <a:latin typeface="Aptos" panose="020B0004020202020204" pitchFamily="34" charset="0"/>
+              </a:rPr>
+              <a:t>Commons</a:t>
+            </a:r>
+            <a:endParaRPr lang="pl-PL" sz="1200" dirty="0">
+              <a:latin typeface="Aptos" panose="020B0004020202020204" pitchFamily="34" charset="0"/>
+            </a:endParaRPr>
           </a:p>
           <a:p>
             <a:pPr>
@@ -16001,7 +16683,19 @@
                 <a:spcPts val="600"/>
               </a:spcAft>
             </a:pPr>
-            <a:endParaRPr lang="pl-PL" sz="1800" dirty="0"/>
+            <a:endParaRPr lang="pl-PL" sz="1200" dirty="0">
+              <a:latin typeface="Aptos" panose="020B0004020202020204" pitchFamily="34" charset="0"/>
+            </a:endParaRPr>
+          </a:p>
+          <a:p>
+            <a:pPr>
+              <a:spcAft>
+                <a:spcPts val="600"/>
+              </a:spcAft>
+            </a:pPr>
+            <a:endParaRPr lang="pl-PL" sz="1200" dirty="0">
+              <a:latin typeface="Aptos" panose="020B0004020202020204" pitchFamily="34" charset="0"/>
+            </a:endParaRPr>
           </a:p>
         </p:txBody>
       </p:sp>
@@ -16087,7 +16781,7 @@
             <p:ph idx="1"/>
             <p:extLst>
               <p:ext uri="{D42A27DB-BD31-4B8C-83A1-F6EECF244321}">
-                <p14:modId xmlns:p14="http://schemas.microsoft.com/office/powerpoint/2010/main" val="1630636911"/>
+                <p14:modId xmlns:p14="http://schemas.microsoft.com/office/powerpoint/2010/main" val="2493646543"/>
               </p:ext>
             </p:extLst>
           </p:nvPr>
@@ -16295,6 +16989,9 @@
           </a:lstStyle>
           <a:p>
             <a:pPr marL="0" indent="0" algn="ctr">
+              <a:lnSpc>
+                <a:spcPct val="100000"/>
+              </a:lnSpc>
               <a:buNone/>
             </a:pPr>
             <a:r>
@@ -16312,6 +17009,9 @@
           </a:p>
           <a:p>
             <a:pPr marL="0" indent="0" algn="ctr">
+              <a:lnSpc>
+                <a:spcPct val="100000"/>
+              </a:lnSpc>
               <a:buNone/>
             </a:pPr>
             <a:r>
@@ -16321,6 +17021,9 @@
           </a:p>
           <a:p>
             <a:pPr marL="0" indent="0" algn="ctr">
+              <a:lnSpc>
+                <a:spcPct val="100000"/>
+              </a:lnSpc>
               <a:buNone/>
             </a:pPr>
             <a:r>
@@ -16433,8 +17136,8 @@
         </p:nvSpPr>
         <p:spPr>
           <a:xfrm>
-            <a:off x="963038" y="6079788"/>
-            <a:ext cx="9426102" cy="523220"/>
+            <a:off x="953894" y="6215876"/>
+            <a:ext cx="9426102" cy="276999"/>
           </a:xfrm>
           <a:prstGeom prst="rect">
             <a:avLst/>
@@ -16448,7 +17151,7 @@
           <a:lstStyle/>
           <a:p>
             <a:r>
-              <a:rPr lang="pl-PL" sz="1400" dirty="0"/>
+              <a:rPr lang="pl-PL" sz="1200" dirty="0"/>
               <a:t>Kategoryzacja w oparciu o model językowy, który przypisał jedną z głównych kategorii Wikipedii do top 100 artykułów.</a:t>
             </a:r>
           </a:p>
@@ -16647,12 +17350,14 @@
           </a:lstStyle>
           <a:p>
             <a:pPr marL="0" indent="0" algn="ctr">
-              <a:buFont typeface="Arial" panose="020B0604020202020204" pitchFamily="34" charset="0"/>
+              <a:lnSpc>
+                <a:spcPct val="100000"/>
+              </a:lnSpc>
               <a:buNone/>
             </a:pPr>
             <a:r>
               <a:rPr lang="pl-PL" sz="1800" dirty="0"/>
-              <a:t>Najpopularniejszą kategorią polskiej Wikipedii są biografie, pozostałe zdecydowanie odbiegają. </a:t>
+              <a:t>Choć Wikipedia zawiera informacje o niemal każdym aspekcie świata, najbardziej interesują nas inni ludzie. Biografie wyraźnie dominują nad wszystkimi pozostałymi kategoriami, zostawiając daleko w tyle historię, geografię czy kulturę.</a:t>
             </a:r>
           </a:p>
         </p:txBody>
@@ -16731,14 +17436,14 @@
             <p:ph idx="1"/>
             <p:extLst>
               <p:ext uri="{D42A27DB-BD31-4B8C-83A1-F6EECF244321}">
-                <p14:modId xmlns:p14="http://schemas.microsoft.com/office/powerpoint/2010/main" val="3379108908"/>
+                <p14:modId xmlns:p14="http://schemas.microsoft.com/office/powerpoint/2010/main" val="743188763"/>
               </p:ext>
             </p:extLst>
           </p:nvPr>
         </p:nvGraphicFramePr>
         <p:xfrm>
-          <a:off x="838200" y="1825625"/>
-          <a:ext cx="7731868" cy="4082342"/>
+          <a:off x="838200" y="1690687"/>
+          <a:ext cx="7731868" cy="3320225"/>
         </p:xfrm>
         <a:graphic>
           <a:graphicData uri="http://schemas.openxmlformats.org/drawingml/2006/chart">
@@ -16748,10 +17453,10 @@
       </p:graphicFrame>
       <p:pic>
         <p:nvPicPr>
-          <p:cNvPr id="19" name="Obraz 18" descr="Mapa opisywanego kraju">
+          <p:cNvPr id="2" name="Obraz 1" descr="Ilustracja">
             <a:extLst>
               <a:ext uri="{FF2B5EF4-FFF2-40B4-BE49-F238E27FC236}">
-                <a16:creationId xmlns:a16="http://schemas.microsoft.com/office/drawing/2014/main" id="{619B8E3E-16F0-0004-5A2C-28B6697D9C66}"/>
+                <a16:creationId xmlns:a16="http://schemas.microsoft.com/office/drawing/2014/main" id="{442588CC-D45D-0187-38D5-7C1E4AE77A68}"/>
               </a:ext>
             </a:extLst>
           </p:cNvPr>
@@ -16768,38 +17473,8 @@
         </p:blipFill>
         <p:spPr>
           <a:xfrm>
-            <a:off x="10024351" y="1959199"/>
-            <a:ext cx="1536971" cy="1653781"/>
-          </a:xfrm>
-          <a:prstGeom prst="rect">
-            <a:avLst/>
-          </a:prstGeom>
-        </p:spPr>
-      </p:pic>
-      <p:pic>
-        <p:nvPicPr>
-          <p:cNvPr id="2" name="Obraz 1" descr="Ilustracja">
-            <a:extLst>
-              <a:ext uri="{FF2B5EF4-FFF2-40B4-BE49-F238E27FC236}">
-                <a16:creationId xmlns:a16="http://schemas.microsoft.com/office/drawing/2014/main" id="{442588CC-D45D-0187-38D5-7C1E4AE77A68}"/>
-              </a:ext>
-            </a:extLst>
-          </p:cNvPr>
-          <p:cNvPicPr>
-            <a:picLocks noChangeAspect="1"/>
-          </p:cNvPicPr>
-          <p:nvPr/>
-        </p:nvPicPr>
-        <p:blipFill>
-          <a:blip r:embed="rId4"/>
-          <a:stretch>
-            <a:fillRect/>
-          </a:stretch>
-        </p:blipFill>
-        <p:spPr>
-          <a:xfrm>
             <a:off x="9602212" y="4254476"/>
-            <a:ext cx="2381250" cy="1581150"/>
+            <a:ext cx="2194547" cy="1457179"/>
           </a:xfrm>
           <a:prstGeom prst="rect">
             <a:avLst/>
@@ -16821,6 +17496,241 @@
           <p:nvPr/>
         </p:nvPicPr>
         <p:blipFill>
+          <a:blip r:embed="rId4"/>
+          <a:stretch>
+            <a:fillRect/>
+          </a:stretch>
+        </p:blipFill>
+        <p:spPr>
+          <a:xfrm>
+            <a:off x="8891904" y="2835581"/>
+            <a:ext cx="1397343" cy="1861261"/>
+          </a:xfrm>
+          <a:prstGeom prst="rect">
+            <a:avLst/>
+          </a:prstGeom>
+        </p:spPr>
+      </p:pic>
+      <p:sp>
+        <p:nvSpPr>
+          <p:cNvPr id="4" name="Symbol zastępczy zawartości 4">
+            <a:extLst>
+              <a:ext uri="{FF2B5EF4-FFF2-40B4-BE49-F238E27FC236}">
+                <a16:creationId xmlns:a16="http://schemas.microsoft.com/office/drawing/2014/main" id="{6DBC4545-96B9-73B4-24E4-8DE4515B03DA}"/>
+              </a:ext>
+            </a:extLst>
+          </p:cNvPr>
+          <p:cNvSpPr txBox="1">
+            <a:spLocks/>
+          </p:cNvSpPr>
+          <p:nvPr/>
+        </p:nvSpPr>
+        <p:spPr>
+          <a:xfrm>
+            <a:off x="838200" y="5010912"/>
+            <a:ext cx="7731868" cy="1033271"/>
+          </a:xfrm>
+          <a:prstGeom prst="rect">
+            <a:avLst/>
+          </a:prstGeom>
+        </p:spPr>
+        <p:txBody>
+          <a:bodyPr vert="horz" lIns="91440" tIns="45720" rIns="91440" bIns="45720" rtlCol="0">
+            <a:normAutofit/>
+          </a:bodyPr>
+          <a:lstStyle>
+            <a:lvl1pPr marL="228600" indent="-228600" algn="l" defTabSz="914400" rtl="0" eaLnBrk="1" latinLnBrk="0" hangingPunct="1">
+              <a:lnSpc>
+                <a:spcPct val="90000"/>
+              </a:lnSpc>
+              <a:spcBef>
+                <a:spcPts val="1000"/>
+              </a:spcBef>
+              <a:buFont typeface="Arial" panose="020B0604020202020204" pitchFamily="34" charset="0"/>
+              <a:buChar char="•"/>
+              <a:defRPr sz="2800" kern="1200">
+                <a:solidFill>
+                  <a:schemeClr val="tx1"/>
+                </a:solidFill>
+                <a:latin typeface="+mn-lt"/>
+                <a:ea typeface="+mn-ea"/>
+                <a:cs typeface="+mn-cs"/>
+              </a:defRPr>
+            </a:lvl1pPr>
+            <a:lvl2pPr marL="685800" indent="-228600" algn="l" defTabSz="914400" rtl="0" eaLnBrk="1" latinLnBrk="0" hangingPunct="1">
+              <a:lnSpc>
+                <a:spcPct val="90000"/>
+              </a:lnSpc>
+              <a:spcBef>
+                <a:spcPts val="500"/>
+              </a:spcBef>
+              <a:buFont typeface="Arial" panose="020B0604020202020204" pitchFamily="34" charset="0"/>
+              <a:buChar char="•"/>
+              <a:defRPr sz="2400" kern="1200">
+                <a:solidFill>
+                  <a:schemeClr val="tx1"/>
+                </a:solidFill>
+                <a:latin typeface="+mn-lt"/>
+                <a:ea typeface="+mn-ea"/>
+                <a:cs typeface="+mn-cs"/>
+              </a:defRPr>
+            </a:lvl2pPr>
+            <a:lvl3pPr marL="1143000" indent="-228600" algn="l" defTabSz="914400" rtl="0" eaLnBrk="1" latinLnBrk="0" hangingPunct="1">
+              <a:lnSpc>
+                <a:spcPct val="90000"/>
+              </a:lnSpc>
+              <a:spcBef>
+                <a:spcPts val="500"/>
+              </a:spcBef>
+              <a:buFont typeface="Arial" panose="020B0604020202020204" pitchFamily="34" charset="0"/>
+              <a:buChar char="•"/>
+              <a:defRPr sz="2000" kern="1200">
+                <a:solidFill>
+                  <a:schemeClr val="tx1"/>
+                </a:solidFill>
+                <a:latin typeface="+mn-lt"/>
+                <a:ea typeface="+mn-ea"/>
+                <a:cs typeface="+mn-cs"/>
+              </a:defRPr>
+            </a:lvl3pPr>
+            <a:lvl4pPr marL="1600200" indent="-228600" algn="l" defTabSz="914400" rtl="0" eaLnBrk="1" latinLnBrk="0" hangingPunct="1">
+              <a:lnSpc>
+                <a:spcPct val="90000"/>
+              </a:lnSpc>
+              <a:spcBef>
+                <a:spcPts val="500"/>
+              </a:spcBef>
+              <a:buFont typeface="Arial" panose="020B0604020202020204" pitchFamily="34" charset="0"/>
+              <a:buChar char="•"/>
+              <a:defRPr sz="1800" kern="1200">
+                <a:solidFill>
+                  <a:schemeClr val="tx1"/>
+                </a:solidFill>
+                <a:latin typeface="+mn-lt"/>
+                <a:ea typeface="+mn-ea"/>
+                <a:cs typeface="+mn-cs"/>
+              </a:defRPr>
+            </a:lvl4pPr>
+            <a:lvl5pPr marL="2057400" indent="-228600" algn="l" defTabSz="914400" rtl="0" eaLnBrk="1" latinLnBrk="0" hangingPunct="1">
+              <a:lnSpc>
+                <a:spcPct val="90000"/>
+              </a:lnSpc>
+              <a:spcBef>
+                <a:spcPts val="500"/>
+              </a:spcBef>
+              <a:buFont typeface="Arial" panose="020B0604020202020204" pitchFamily="34" charset="0"/>
+              <a:buChar char="•"/>
+              <a:defRPr sz="1800" kern="1200">
+                <a:solidFill>
+                  <a:schemeClr val="tx1"/>
+                </a:solidFill>
+                <a:latin typeface="+mn-lt"/>
+                <a:ea typeface="+mn-ea"/>
+                <a:cs typeface="+mn-cs"/>
+              </a:defRPr>
+            </a:lvl5pPr>
+            <a:lvl6pPr marL="2514600" indent="-228600" algn="l" defTabSz="914400" rtl="0" eaLnBrk="1" latinLnBrk="0" hangingPunct="1">
+              <a:lnSpc>
+                <a:spcPct val="90000"/>
+              </a:lnSpc>
+              <a:spcBef>
+                <a:spcPts val="500"/>
+              </a:spcBef>
+              <a:buFont typeface="Arial" panose="020B0604020202020204" pitchFamily="34" charset="0"/>
+              <a:buChar char="•"/>
+              <a:defRPr sz="1800" kern="1200">
+                <a:solidFill>
+                  <a:schemeClr val="tx1"/>
+                </a:solidFill>
+                <a:latin typeface="+mn-lt"/>
+                <a:ea typeface="+mn-ea"/>
+                <a:cs typeface="+mn-cs"/>
+              </a:defRPr>
+            </a:lvl6pPr>
+            <a:lvl7pPr marL="2971800" indent="-228600" algn="l" defTabSz="914400" rtl="0" eaLnBrk="1" latinLnBrk="0" hangingPunct="1">
+              <a:lnSpc>
+                <a:spcPct val="90000"/>
+              </a:lnSpc>
+              <a:spcBef>
+                <a:spcPts val="500"/>
+              </a:spcBef>
+              <a:buFont typeface="Arial" panose="020B0604020202020204" pitchFamily="34" charset="0"/>
+              <a:buChar char="•"/>
+              <a:defRPr sz="1800" kern="1200">
+                <a:solidFill>
+                  <a:schemeClr val="tx1"/>
+                </a:solidFill>
+                <a:latin typeface="+mn-lt"/>
+                <a:ea typeface="+mn-ea"/>
+                <a:cs typeface="+mn-cs"/>
+              </a:defRPr>
+            </a:lvl7pPr>
+            <a:lvl8pPr marL="3429000" indent="-228600" algn="l" defTabSz="914400" rtl="0" eaLnBrk="1" latinLnBrk="0" hangingPunct="1">
+              <a:lnSpc>
+                <a:spcPct val="90000"/>
+              </a:lnSpc>
+              <a:spcBef>
+                <a:spcPts val="500"/>
+              </a:spcBef>
+              <a:buFont typeface="Arial" panose="020B0604020202020204" pitchFamily="34" charset="0"/>
+              <a:buChar char="•"/>
+              <a:defRPr sz="1800" kern="1200">
+                <a:solidFill>
+                  <a:schemeClr val="tx1"/>
+                </a:solidFill>
+                <a:latin typeface="+mn-lt"/>
+                <a:ea typeface="+mn-ea"/>
+                <a:cs typeface="+mn-cs"/>
+              </a:defRPr>
+            </a:lvl8pPr>
+            <a:lvl9pPr marL="3886200" indent="-228600" algn="l" defTabSz="914400" rtl="0" eaLnBrk="1" latinLnBrk="0" hangingPunct="1">
+              <a:lnSpc>
+                <a:spcPct val="90000"/>
+              </a:lnSpc>
+              <a:spcBef>
+                <a:spcPts val="500"/>
+              </a:spcBef>
+              <a:buFont typeface="Arial" panose="020B0604020202020204" pitchFamily="34" charset="0"/>
+              <a:buChar char="•"/>
+              <a:defRPr sz="1800" kern="1200">
+                <a:solidFill>
+                  <a:schemeClr val="tx1"/>
+                </a:solidFill>
+                <a:latin typeface="+mn-lt"/>
+                <a:ea typeface="+mn-ea"/>
+                <a:cs typeface="+mn-cs"/>
+              </a:defRPr>
+            </a:lvl9pPr>
+          </a:lstStyle>
+          <a:p>
+            <a:pPr marL="0" indent="0" algn="ctr">
+              <a:lnSpc>
+                <a:spcPct val="110000"/>
+              </a:lnSpc>
+              <a:buNone/>
+            </a:pPr>
+            <a:r>
+              <a:rPr lang="pl-PL" sz="1800" dirty="0"/>
+              <a:t>Wśród najpopularniejszych artykułów trudno znaleźć przypadkowe tematy. Dotyczą osób, państw lub wydarzeń, które regularnie pojawiają się w przestrzeni publicznej. [8]</a:t>
+            </a:r>
+          </a:p>
+        </p:txBody>
+      </p:sp>
+      <p:pic>
+        <p:nvPicPr>
+          <p:cNvPr id="19" name="Obraz 18" descr="Mapa opisywanego kraju">
+            <a:extLst>
+              <a:ext uri="{FF2B5EF4-FFF2-40B4-BE49-F238E27FC236}">
+                <a16:creationId xmlns:a16="http://schemas.microsoft.com/office/drawing/2014/main" id="{619B8E3E-16F0-0004-5A2C-28B6697D9C66}"/>
+              </a:ext>
+            </a:extLst>
+          </p:cNvPr>
+          <p:cNvPicPr>
+            <a:picLocks noChangeAspect="1"/>
+          </p:cNvPicPr>
+          <p:nvPr/>
+        </p:nvPicPr>
+        <p:blipFill>
           <a:blip r:embed="rId5"/>
           <a:stretch>
             <a:fillRect/>
@@ -16828,8 +17738,8 @@
         </p:blipFill>
         <p:spPr>
           <a:xfrm>
-            <a:off x="8903540" y="2936165"/>
-            <a:ext cx="1397343" cy="1861261"/>
+            <a:off x="10034210" y="1820768"/>
+            <a:ext cx="1729796" cy="1861261"/>
           </a:xfrm>
           <a:prstGeom prst="rect">
             <a:avLst/>
@@ -16939,7 +17849,7 @@
         <p:spPr>
           <a:xfrm>
             <a:off x="8341468" y="1753616"/>
-            <a:ext cx="3536004" cy="2062103"/>
+            <a:ext cx="3536004" cy="1815882"/>
           </a:xfrm>
           <a:prstGeom prst="rect">
             <a:avLst/>
@@ -16961,7 +17871,22 @@
                   <a:schemeClr val="bg1"/>
                 </a:solidFill>
               </a:rPr>
-              <a:t>Zwiększenie ruchu na stronach Wikipedii powodują wydarzenia wywołujące różne emocje. Są to zarówno wydarzenia smutne, jak śmierć danej osoby, straszne typu wojny, pandemie i katastrofy, jak i emocje pozytywne jak sport.</a:t>
+              <a:t>Zwiększenie ruchu na stronach Wikipedii powodują wydarzenia wywołujące różne emocje. Są to zarówno tragedie, jak śmierć, wojna czy katastrofa, jak </a:t>
+            </a:r>
+            <a:br>
+              <a:rPr lang="pl-PL" sz="1600" dirty="0">
+                <a:solidFill>
+                  <a:schemeClr val="bg1"/>
+                </a:solidFill>
+              </a:rPr>
+            </a:br>
+            <a:r>
+              <a:rPr lang="pl-PL" sz="1600" dirty="0">
+                <a:solidFill>
+                  <a:schemeClr val="bg1"/>
+                </a:solidFill>
+              </a:rPr>
+              <a:t>i pozytywne jak sukcesy sportowe.</a:t>
             </a:r>
           </a:p>
         </p:txBody>
@@ -16981,7 +17906,7 @@
         <p:spPr>
           <a:xfrm>
             <a:off x="8341468" y="3961949"/>
-            <a:ext cx="3536004" cy="1323439"/>
+            <a:ext cx="3536004" cy="1077218"/>
           </a:xfrm>
           <a:prstGeom prst="rect">
             <a:avLst/>
@@ -17003,23 +17928,7 @@
                   <a:schemeClr val="bg1"/>
                 </a:solidFill>
               </a:rPr>
-              <a:t>Na wzrost wyświetleń wpływa również szum medialny – relacjonowane ważne wydarzenia, czy nowe produkcje </a:t>
-            </a:r>
-            <a:r>
-              <a:rPr lang="pl-PL" sz="1600" dirty="0" err="1">
-                <a:solidFill>
-                  <a:schemeClr val="bg1"/>
-                </a:solidFill>
-              </a:rPr>
-              <a:t>popkulutry</a:t>
-            </a:r>
-            <a:r>
-              <a:rPr lang="pl-PL" sz="1600" dirty="0">
-                <a:solidFill>
-                  <a:schemeClr val="bg1"/>
-                </a:solidFill>
-              </a:rPr>
-              <a:t>.</a:t>
+              <a:t>Na wzrost wyświetleń wpływają również szeroko komentowane doniesienia medialne oraz nowe produkcje popkultury.</a:t>
             </a:r>
           </a:p>
         </p:txBody>
@@ -17348,20 +18257,15 @@
           </a:lstStyle>
           <a:p>
             <a:pPr marL="0" indent="0" algn="ctr">
+              <a:lnSpc>
+                <a:spcPct val="100000"/>
+              </a:lnSpc>
               <a:buFont typeface="Arial" panose="020B0604020202020204" pitchFamily="34" charset="0"/>
               <a:buNone/>
             </a:pPr>
             <a:r>
               <a:rPr lang="pl-PL" sz="1800" dirty="0"/>
-              <a:t>Największe skoki oglądalności strony Elżbiety II wynikają ze śmierci Jej samej, jak i Jej męża Księcia Filipa. Mniejsze, acz znaczące skoki w ruchu generowane są przez wydarzenia medialne jak obchody rocznicy ślubu czy ślub Księcia </a:t>
-            </a:r>
-            <a:r>
-              <a:rPr lang="pl-PL" sz="1800" dirty="0" err="1"/>
-              <a:t>Harrego</a:t>
-            </a:r>
-            <a:r>
-              <a:rPr lang="pl-PL" sz="1800" dirty="0"/>
-              <a:t> z </a:t>
+              <a:t>Największe zainteresowanie stroną Elżbiety II wynika z Jej śmierci oraz śmierci Jej męża – Księcia Filipa. Mniejsze, acz znaczące skoki w ruchu generowane są przez tematy medialne, jak obchody rocznicy ślubu czy ślub Księcia Harry’ego z </a:t>
             </a:r>
             <a:r>
               <a:rPr lang="pl-PL" sz="1800" dirty="0" err="1"/>
@@ -17464,7 +18368,7 @@
             <p:ph idx="1"/>
             <p:extLst>
               <p:ext uri="{D42A27DB-BD31-4B8C-83A1-F6EECF244321}">
-                <p14:modId xmlns:p14="http://schemas.microsoft.com/office/powerpoint/2010/main" val="1537780283"/>
+                <p14:modId xmlns:p14="http://schemas.microsoft.com/office/powerpoint/2010/main" val="195582739"/>
               </p:ext>
             </p:extLst>
           </p:nvPr>
@@ -17672,11 +18576,35 @@
           </a:lstStyle>
           <a:p>
             <a:pPr marL="0" indent="0" algn="ctr">
+              <a:lnSpc>
+                <a:spcPct val="100000"/>
+              </a:lnSpc>
               <a:buNone/>
             </a:pPr>
             <a:r>
               <a:rPr lang="pl-PL" sz="1800" dirty="0"/>
-              <a:t>Pięć największych szczytów wyświetleń strony Igi Świątek pochodzi z Jej wygranych turniejów wielkoszlemowych – czterech Rolanda Garrosa i Wimbledonu. Ani spadek z pierwszego miejsca klasyfikacji WTA, ani pozytywny wynik kontroli antydopingowej nie spowodowały takiego zainteresowania, jak spektakularne wygrane.</a:t>
+              <a:t>Pięć największych szczytów wyświetleń strony Igi Świątek pochodzi </a:t>
+            </a:r>
+            <a:br>
+              <a:rPr lang="pl-PL" sz="1800" dirty="0"/>
+            </a:br>
+            <a:r>
+              <a:rPr lang="pl-PL" sz="1800" dirty="0"/>
+              <a:t>z wygranych turniejów wielkoszlemowych – czterech Rolanda Garrosa </a:t>
+            </a:r>
+            <a:br>
+              <a:rPr lang="pl-PL" sz="1800" dirty="0"/>
+            </a:br>
+            <a:r>
+              <a:rPr lang="pl-PL" sz="1800" dirty="0"/>
+              <a:t>i Wimbledonu. Ani spadek </a:t>
+            </a:r>
+            <a:br>
+              <a:rPr lang="pl-PL" sz="1800" dirty="0"/>
+            </a:br>
+            <a:r>
+              <a:rPr lang="pl-PL" sz="1800" dirty="0"/>
+              <a:t>z pierwszego miejsca klasyfikacji WTA, ani pozytywny wynik kontroli antydopingowej nie spowodowały takiego zainteresowania, jak spektakularne wygrane.</a:t>
             </a:r>
           </a:p>
         </p:txBody>
@@ -17775,7 +18703,7 @@
             <p:ph idx="1"/>
             <p:extLst>
               <p:ext uri="{D42A27DB-BD31-4B8C-83A1-F6EECF244321}">
-                <p14:modId xmlns:p14="http://schemas.microsoft.com/office/powerpoint/2010/main" val="3630987200"/>
+                <p14:modId xmlns:p14="http://schemas.microsoft.com/office/powerpoint/2010/main" val="2410929887"/>
               </p:ext>
             </p:extLst>
           </p:nvPr>
@@ -17983,15 +18911,18 @@
           </a:lstStyle>
           <a:p>
             <a:pPr marL="0" indent="0" algn="ctr">
+              <a:lnSpc>
+                <a:spcPct val="100000"/>
+              </a:lnSpc>
               <a:buNone/>
             </a:pPr>
             <a:r>
               <a:rPr lang="pl-PL" sz="1800" dirty="0"/>
-              <a:t>Strona </a:t>
+              <a:t>Historia </a:t>
             </a:r>
             <a:r>
               <a:rPr lang="pl-PL" sz="1800" dirty="0" err="1"/>
-              <a:t>Frediego</a:t>
+              <a:t>Freddiego</a:t>
             </a:r>
             <a:r>
               <a:rPr lang="pl-PL" sz="1800" dirty="0"/>
@@ -17999,20 +18930,18 @@
             </a:r>
             <a:r>
               <a:rPr lang="pl-PL" sz="1800" dirty="0" err="1"/>
-              <a:t>Mercury</a:t>
+              <a:t>Mercury'ego</a:t>
             </a:r>
             <a:r>
               <a:rPr lang="pl-PL" sz="1800" dirty="0"/>
-              <a:t> jest jednym z przykładów ruchu powodowanego przez premierę filmu czy serialu o danym temacie.</a:t>
+              <a:t> pokazuje, </a:t>
             </a:r>
-          </a:p>
-          <a:p>
-            <a:pPr marL="0" indent="0" algn="ctr">
-              <a:buNone/>
-            </a:pPr>
+            <a:br>
+              <a:rPr lang="pl-PL" sz="1800" dirty="0"/>
+            </a:br>
             <a:r>
               <a:rPr lang="pl-PL" sz="1800" dirty="0"/>
-              <a:t>Drugim powodem zwiększonego ruchu są wydarzenia medialne – w tym przypadku szeroko komentowana 30-ta rocznica śmierci artysty. </a:t>
+              <a:t>że media potrafią nadać drugie życie znanym postaciom. Premierze filmu i okrągłej rocznicy śmierci towarzyszył wyraźny wzrost zainteresowania jego biografią.</a:t>
             </a:r>
           </a:p>
         </p:txBody>
@@ -18093,7 +19022,7 @@
             <p:ph idx="1"/>
             <p:extLst>
               <p:ext uri="{D42A27DB-BD31-4B8C-83A1-F6EECF244321}">
-                <p14:modId xmlns:p14="http://schemas.microsoft.com/office/powerpoint/2010/main" val="534436697"/>
+                <p14:modId xmlns:p14="http://schemas.microsoft.com/office/powerpoint/2010/main" val="3024158751"/>
               </p:ext>
             </p:extLst>
           </p:nvPr>
@@ -18301,11 +19230,28 @@
           </a:lstStyle>
           <a:p>
             <a:pPr marL="0" indent="0" algn="ctr">
+              <a:lnSpc>
+                <a:spcPct val="100000"/>
+              </a:lnSpc>
               <a:buNone/>
             </a:pPr>
             <a:r>
               <a:rPr lang="pl-PL" sz="1800" dirty="0"/>
-              <a:t>Wiele osób odkryło kraje takie jak Republika Zielonego Przylądka czy Curaçao dzięki ich pierwszemu udziałowi w Mistrzostwach Świata w Piłce Nożnej.</a:t>
+              <a:t>Duże imprezy sportowe sprawiają również, że chcemy lepiej poznać państwa, o których na co dzień wiemy niewiele. Sporo osób odkryło Curaçao i Republika Zielonego Przylądka dzięki ich pierwszemu udziałowi </a:t>
+            </a:r>
+            <a:br>
+              <a:rPr lang="pl-PL" sz="1800" dirty="0"/>
+            </a:br>
+            <a:r>
+              <a:rPr lang="pl-PL" sz="1800" dirty="0"/>
+              <a:t>w Mistrzostwach Świata </a:t>
+            </a:r>
+            <a:br>
+              <a:rPr lang="pl-PL" sz="1800" dirty="0"/>
+            </a:br>
+            <a:r>
+              <a:rPr lang="pl-PL" sz="1800" dirty="0"/>
+              <a:t>w Piłce Nożnej.</a:t>
             </a:r>
           </a:p>
         </p:txBody>
@@ -18655,4 +19601,319 @@
     </a:ext>
   </a:extLst>
 </a:theme>
+</file>
+
+<file path=ppt/theme/theme2.xml><?xml version="1.0" encoding="utf-8"?>
+<a:theme xmlns:a="http://schemas.openxmlformats.org/drawingml/2006/main" name="Motyw pakietu Office">
+  <a:themeElements>
+    <a:clrScheme name="Pakiet Office">
+      <a:dk1>
+        <a:sysClr val="windowText" lastClr="000000"/>
+      </a:dk1>
+      <a:lt1>
+        <a:sysClr val="window" lastClr="FFFFFF"/>
+      </a:lt1>
+      <a:dk2>
+        <a:srgbClr val="0E2841"/>
+      </a:dk2>
+      <a:lt2>
+        <a:srgbClr val="E8E8E8"/>
+      </a:lt2>
+      <a:accent1>
+        <a:srgbClr val="156082"/>
+      </a:accent1>
+      <a:accent2>
+        <a:srgbClr val="E97132"/>
+      </a:accent2>
+      <a:accent3>
+        <a:srgbClr val="196B24"/>
+      </a:accent3>
+      <a:accent4>
+        <a:srgbClr val="0F9ED5"/>
+      </a:accent4>
+      <a:accent5>
+        <a:srgbClr val="A02B93"/>
+      </a:accent5>
+      <a:accent6>
+        <a:srgbClr val="4EA72E"/>
+      </a:accent6>
+      <a:hlink>
+        <a:srgbClr val="467886"/>
+      </a:hlink>
+      <a:folHlink>
+        <a:srgbClr val="96607D"/>
+      </a:folHlink>
+    </a:clrScheme>
+    <a:fontScheme name="Pakiet Office">
+      <a:majorFont>
+        <a:latin typeface="Aptos Display" panose="02110004020202020204"/>
+        <a:ea typeface=""/>
+        <a:cs typeface=""/>
+        <a:font script="Jpan" typeface="游ゴシック Light"/>
+        <a:font script="Hang" typeface="맑은 고딕"/>
+        <a:font script="Hans" typeface="等线 Light"/>
+        <a:font script="Hant" typeface="新細明體"/>
+        <a:font script="Arab" typeface="Times New Roman"/>
+        <a:font script="Hebr" typeface="Times New Roman"/>
+        <a:font script="Thai" typeface="Angsana New"/>
+        <a:font script="Ethi" typeface="Nyala"/>
+        <a:font script="Beng" typeface="Vrinda"/>
+        <a:font script="Gujr" typeface="Shruti"/>
+        <a:font script="Khmr" typeface="MoolBoran"/>
+        <a:font script="Knda" typeface="Tunga"/>
+        <a:font script="Guru" typeface="Raavi"/>
+        <a:font script="Cans" typeface="Euphemia"/>
+        <a:font script="Cher" typeface="Plantagenet Cherokee"/>
+        <a:font script="Yiii" typeface="Microsoft Yi Baiti"/>
+        <a:font script="Tibt" typeface="Microsoft Himalaya"/>
+        <a:font script="Thaa" typeface="MV Boli"/>
+        <a:font script="Deva" typeface="Mangal"/>
+        <a:font script="Telu" typeface="Gautami"/>
+        <a:font script="Taml" typeface="Latha"/>
+        <a:font script="Syrc" typeface="Estrangelo Edessa"/>
+        <a:font script="Orya" typeface="Kalinga"/>
+        <a:font script="Mlym" typeface="Kartika"/>
+        <a:font script="Laoo" typeface="DokChampa"/>
+        <a:font script="Sinh" typeface="Iskoola Pota"/>
+        <a:font script="Mong" typeface="Mongolian Baiti"/>
+        <a:font script="Viet" typeface="Times New Roman"/>
+        <a:font script="Uigh" typeface="Microsoft Uighur"/>
+        <a:font script="Geor" typeface="Sylfaen"/>
+        <a:font script="Armn" typeface="Arial"/>
+        <a:font script="Bugi" typeface="Leelawadee UI"/>
+        <a:font script="Bopo" typeface="Microsoft JhengHei"/>
+        <a:font script="Java" typeface="Javanese Text"/>
+        <a:font script="Lisu" typeface="Segoe UI"/>
+        <a:font script="Mymr" typeface="Myanmar Text"/>
+        <a:font script="Nkoo" typeface="Ebrima"/>
+        <a:font script="Olck" typeface="Nirmala UI"/>
+        <a:font script="Osma" typeface="Ebrima"/>
+        <a:font script="Phag" typeface="Phagspa"/>
+        <a:font script="Syrn" typeface="Estrangelo Edessa"/>
+        <a:font script="Syrj" typeface="Estrangelo Edessa"/>
+        <a:font script="Syre" typeface="Estrangelo Edessa"/>
+        <a:font script="Sora" typeface="Nirmala UI"/>
+        <a:font script="Tale" typeface="Microsoft Tai Le"/>
+        <a:font script="Talu" typeface="Microsoft New Tai Lue"/>
+        <a:font script="Tfng" typeface="Ebrima"/>
+      </a:majorFont>
+      <a:minorFont>
+        <a:latin typeface="Aptos" panose="02110004020202020204"/>
+        <a:ea typeface=""/>
+        <a:cs typeface=""/>
+        <a:font script="Jpan" typeface="游ゴシック"/>
+        <a:font script="Hang" typeface="맑은 고딕"/>
+        <a:font script="Hans" typeface="等线"/>
+        <a:font script="Hant" typeface="新細明體"/>
+        <a:font script="Arab" typeface="Arial"/>
+        <a:font script="Hebr" typeface="Arial"/>
+        <a:font script="Thai" typeface="Cordia New"/>
+        <a:font script="Ethi" typeface="Nyala"/>
+        <a:font script="Beng" typeface="Vrinda"/>
+        <a:font script="Gujr" typeface="Shruti"/>
+        <a:font script="Khmr" typeface="DaunPenh"/>
+        <a:font script="Knda" typeface="Tunga"/>
+        <a:font script="Guru" typeface="Raavi"/>
+        <a:font script="Cans" typeface="Euphemia"/>
+        <a:font script="Cher" typeface="Plantagenet Cherokee"/>
+        <a:font script="Yiii" typeface="Microsoft Yi Baiti"/>
+        <a:font script="Tibt" typeface="Microsoft Himalaya"/>
+        <a:font script="Thaa" typeface="MV Boli"/>
+        <a:font script="Deva" typeface="Mangal"/>
+        <a:font script="Telu" typeface="Gautami"/>
+        <a:font script="Taml" typeface="Latha"/>
+        <a:font script="Syrc" typeface="Estrangelo Edessa"/>
+        <a:font script="Orya" typeface="Kalinga"/>
+        <a:font script="Mlym" typeface="Kartika"/>
+        <a:font script="Laoo" typeface="DokChampa"/>
+        <a:font script="Sinh" typeface="Iskoola Pota"/>
+        <a:font script="Mong" typeface="Mongolian Baiti"/>
+        <a:font script="Viet" typeface="Arial"/>
+        <a:font script="Uigh" typeface="Microsoft Uighur"/>
+        <a:font script="Geor" typeface="Sylfaen"/>
+        <a:font script="Armn" typeface="Arial"/>
+        <a:font script="Bugi" typeface="Leelawadee UI"/>
+        <a:font script="Bopo" typeface="Microsoft JhengHei"/>
+        <a:font script="Java" typeface="Javanese Text"/>
+        <a:font script="Lisu" typeface="Segoe UI"/>
+        <a:font script="Mymr" typeface="Myanmar Text"/>
+        <a:font script="Nkoo" typeface="Ebrima"/>
+        <a:font script="Olck" typeface="Nirmala UI"/>
+        <a:font script="Osma" typeface="Ebrima"/>
+        <a:font script="Phag" typeface="Phagspa"/>
+        <a:font script="Syrn" typeface="Estrangelo Edessa"/>
+        <a:font script="Syrj" typeface="Estrangelo Edessa"/>
+        <a:font script="Syre" typeface="Estrangelo Edessa"/>
+        <a:font script="Sora" typeface="Nirmala UI"/>
+        <a:font script="Tale" typeface="Microsoft Tai Le"/>
+        <a:font script="Talu" typeface="Microsoft New Tai Lue"/>
+        <a:font script="Tfng" typeface="Ebrima"/>
+      </a:minorFont>
+    </a:fontScheme>
+    <a:fmtScheme name="Pakiet Office">
+      <a:fillStyleLst>
+        <a:solidFill>
+          <a:schemeClr val="phClr"/>
+        </a:solidFill>
+        <a:gradFill rotWithShape="1">
+          <a:gsLst>
+            <a:gs pos="0">
+              <a:schemeClr val="phClr">
+                <a:lumMod val="110000"/>
+                <a:satMod val="105000"/>
+                <a:tint val="67000"/>
+              </a:schemeClr>
+            </a:gs>
+            <a:gs pos="50000">
+              <a:schemeClr val="phClr">
+                <a:lumMod val="105000"/>
+                <a:satMod val="103000"/>
+                <a:tint val="73000"/>
+              </a:schemeClr>
+            </a:gs>
+            <a:gs pos="100000">
+              <a:schemeClr val="phClr">
+                <a:lumMod val="105000"/>
+                <a:satMod val="109000"/>
+                <a:tint val="81000"/>
+              </a:schemeClr>
+            </a:gs>
+          </a:gsLst>
+          <a:lin ang="5400000" scaled="0"/>
+        </a:gradFill>
+        <a:gradFill rotWithShape="1">
+          <a:gsLst>
+            <a:gs pos="0">
+              <a:schemeClr val="phClr">
+                <a:satMod val="103000"/>
+                <a:lumMod val="102000"/>
+                <a:tint val="94000"/>
+              </a:schemeClr>
+            </a:gs>
+            <a:gs pos="50000">
+              <a:schemeClr val="phClr">
+                <a:satMod val="110000"/>
+                <a:lumMod val="100000"/>
+                <a:shade val="100000"/>
+              </a:schemeClr>
+            </a:gs>
+            <a:gs pos="100000">
+              <a:schemeClr val="phClr">
+                <a:lumMod val="99000"/>
+                <a:satMod val="120000"/>
+                <a:shade val="78000"/>
+              </a:schemeClr>
+            </a:gs>
+          </a:gsLst>
+          <a:lin ang="5400000" scaled="0"/>
+        </a:gradFill>
+      </a:fillStyleLst>
+      <a:lnStyleLst>
+        <a:ln w="12700" cap="flat" cmpd="sng" algn="ctr">
+          <a:solidFill>
+            <a:schemeClr val="phClr"/>
+          </a:solidFill>
+          <a:prstDash val="solid"/>
+          <a:miter lim="800000"/>
+        </a:ln>
+        <a:ln w="19050" cap="flat" cmpd="sng" algn="ctr">
+          <a:solidFill>
+            <a:schemeClr val="phClr"/>
+          </a:solidFill>
+          <a:prstDash val="solid"/>
+          <a:miter lim="800000"/>
+        </a:ln>
+        <a:ln w="25400" cap="flat" cmpd="sng" algn="ctr">
+          <a:solidFill>
+            <a:schemeClr val="phClr"/>
+          </a:solidFill>
+          <a:prstDash val="solid"/>
+          <a:miter lim="800000"/>
+        </a:ln>
+      </a:lnStyleLst>
+      <a:effectStyleLst>
+        <a:effectStyle>
+          <a:effectLst/>
+        </a:effectStyle>
+        <a:effectStyle>
+          <a:effectLst/>
+        </a:effectStyle>
+        <a:effectStyle>
+          <a:effectLst>
+            <a:outerShdw blurRad="57150" dist="19050" dir="5400000" algn="ctr" rotWithShape="0">
+              <a:srgbClr val="000000">
+                <a:alpha val="63000"/>
+              </a:srgbClr>
+            </a:outerShdw>
+          </a:effectLst>
+        </a:effectStyle>
+      </a:effectStyleLst>
+      <a:bgFillStyleLst>
+        <a:solidFill>
+          <a:schemeClr val="phClr"/>
+        </a:solidFill>
+        <a:solidFill>
+          <a:schemeClr val="phClr">
+            <a:tint val="95000"/>
+            <a:satMod val="170000"/>
+          </a:schemeClr>
+        </a:solidFill>
+        <a:gradFill rotWithShape="1">
+          <a:gsLst>
+            <a:gs pos="0">
+              <a:schemeClr val="phClr">
+                <a:tint val="93000"/>
+                <a:satMod val="150000"/>
+                <a:shade val="98000"/>
+                <a:lumMod val="102000"/>
+              </a:schemeClr>
+            </a:gs>
+            <a:gs pos="50000">
+              <a:schemeClr val="phClr">
+                <a:tint val="98000"/>
+                <a:satMod val="130000"/>
+                <a:shade val="90000"/>
+                <a:lumMod val="103000"/>
+              </a:schemeClr>
+            </a:gs>
+            <a:gs pos="100000">
+              <a:schemeClr val="phClr">
+                <a:shade val="63000"/>
+                <a:satMod val="120000"/>
+              </a:schemeClr>
+            </a:gs>
+          </a:gsLst>
+          <a:lin ang="5400000" scaled="0"/>
+        </a:gradFill>
+      </a:bgFillStyleLst>
+    </a:fmtScheme>
+  </a:themeElements>
+  <a:objectDefaults>
+    <a:lnDef>
+      <a:spPr/>
+      <a:bodyPr/>
+      <a:lstStyle/>
+      <a:style>
+        <a:lnRef idx="2">
+          <a:schemeClr val="accent1"/>
+        </a:lnRef>
+        <a:fillRef idx="0">
+          <a:schemeClr val="accent1"/>
+        </a:fillRef>
+        <a:effectRef idx="1">
+          <a:schemeClr val="accent1"/>
+        </a:effectRef>
+        <a:fontRef idx="minor">
+          <a:schemeClr val="tx1"/>
+        </a:fontRef>
+      </a:style>
+    </a:lnDef>
+  </a:objectDefaults>
+  <a:extraClrSchemeLst/>
+  <a:extLst>
+    <a:ext uri="{05A4C25C-085E-4340-85A3-A5531E510DB2}">
+      <thm15:themeFamily xmlns:thm15="http://schemas.microsoft.com/office/thememl/2012/main" name="Office Theme" id="{2E142A2C-CD16-42D6-873A-C26D2A0506FA}" vid="{1BDDFF52-6CD6-40A5-AB3C-68EB2F1E4D0A}"/>
+    </a:ext>
+  </a:extLst>
+</a:theme>
 </file>
--- a/storytelling/Storytelling.pptx
+++ b/storytelling/Storytelling.pptx
@@ -5,21 +5,22 @@
     <p:sldMasterId id="2147483648" r:id="rId1"/>
   </p:sldMasterIdLst>
   <p:notesMasterIdLst>
-    <p:notesMasterId r:id="rId14"/>
+    <p:notesMasterId r:id="rId15"/>
   </p:notesMasterIdLst>
   <p:sldIdLst>
     <p:sldId id="256" r:id="rId2"/>
     <p:sldId id="258" r:id="rId3"/>
     <p:sldId id="257" r:id="rId4"/>
-    <p:sldId id="261" r:id="rId5"/>
-    <p:sldId id="262" r:id="rId6"/>
-    <p:sldId id="263" r:id="rId7"/>
-    <p:sldId id="264" r:id="rId8"/>
-    <p:sldId id="260" r:id="rId9"/>
-    <p:sldId id="266" r:id="rId10"/>
-    <p:sldId id="267" r:id="rId11"/>
-    <p:sldId id="259" r:id="rId12"/>
-    <p:sldId id="265" r:id="rId13"/>
+    <p:sldId id="268" r:id="rId5"/>
+    <p:sldId id="261" r:id="rId6"/>
+    <p:sldId id="262" r:id="rId7"/>
+    <p:sldId id="263" r:id="rId8"/>
+    <p:sldId id="264" r:id="rId9"/>
+    <p:sldId id="260" r:id="rId10"/>
+    <p:sldId id="266" r:id="rId11"/>
+    <p:sldId id="267" r:id="rId12"/>
+    <p:sldId id="259" r:id="rId13"/>
+    <p:sldId id="265" r:id="rId14"/>
   </p:sldIdLst>
   <p:sldSz cx="12192000" cy="6858000"/>
   <p:notesSz cx="6858000" cy="9144000"/>
@@ -126,6 +127,7 @@
             <p14:sldId id="256"/>
             <p14:sldId id="258"/>
             <p14:sldId id="257"/>
+            <p14:sldId id="268"/>
             <p14:sldId id="261"/>
             <p14:sldId id="262"/>
             <p14:sldId id="263"/>
@@ -243,9 +245,7 @@
           </c:tx>
           <c:spPr>
             <a:solidFill>
-              <a:schemeClr val="bg1">
-                <a:lumMod val="65000"/>
-              </a:schemeClr>
+              <a:schemeClr val="accent1"/>
             </a:solidFill>
             <a:ln>
               <a:noFill/>
@@ -380,7 +380,7 @@
             <a:pPr>
               <a:defRPr sz="1197" b="0" i="0" u="none" strike="noStrike" kern="1200" baseline="0">
                 <a:solidFill>
-                  <a:schemeClr val="tx1"/>
+                  <a:schemeClr val="tx2"/>
                 </a:solidFill>
                 <a:latin typeface="+mn-lt"/>
                 <a:ea typeface="+mn-ea"/>
@@ -422,7 +422,7 @@
             <a:pPr>
               <a:defRPr sz="1197" b="0" i="0" u="none" strike="noStrike" kern="1200" baseline="0">
                 <a:solidFill>
-                  <a:schemeClr val="tx1"/>
+                  <a:schemeClr val="tx2"/>
                 </a:solidFill>
                 <a:latin typeface="+mn-lt"/>
                 <a:ea typeface="+mn-ea"/>
@@ -460,10 +460,7 @@
   </c:chart>
   <c:spPr>
     <a:solidFill>
-      <a:schemeClr val="accent1">
-        <a:lumMod val="60000"/>
-        <a:lumOff val="40000"/>
-      </a:schemeClr>
+      <a:schemeClr val="bg2"/>
     </a:solidFill>
     <a:ln>
       <a:noFill/>
@@ -521,10 +518,18 @@
               </a:defRPr>
             </a:pPr>
             <a:r>
-              <a:rPr lang="pl-PL" dirty="0"/>
+              <a:rPr lang="pl-PL" dirty="0">
+                <a:solidFill>
+                  <a:schemeClr val="tx1"/>
+                </a:solidFill>
+              </a:rPr>
               <a:t>Suma wyświetleń w latach 2018 – 2026 [mln] [2]</a:t>
             </a:r>
-            <a:endParaRPr lang="en-US" dirty="0"/>
+            <a:endParaRPr lang="en-US" dirty="0">
+              <a:solidFill>
+                <a:schemeClr val="tx1"/>
+              </a:solidFill>
+            </a:endParaRPr>
           </a:p>
         </c:rich>
       </c:tx>
@@ -587,7 +592,7 @@
           </c:tx>
           <c:spPr>
             <a:solidFill>
-              <a:schemeClr val="accent2"/>
+              <a:schemeClr val="accent1"/>
             </a:solidFill>
             <a:ln>
               <a:noFill/>
@@ -601,9 +606,7 @@
             <c:bubble3D val="0"/>
             <c:spPr>
               <a:solidFill>
-                <a:schemeClr val="bg1">
-                  <a:lumMod val="65000"/>
-                </a:schemeClr>
+                <a:schemeClr val="accent1"/>
               </a:solidFill>
               <a:ln>
                 <a:noFill/>
@@ -622,9 +625,7 @@
             <c:bubble3D val="0"/>
             <c:spPr>
               <a:solidFill>
-                <a:schemeClr val="bg1">
-                  <a:lumMod val="65000"/>
-                </a:schemeClr>
+                <a:schemeClr val="accent1"/>
               </a:solidFill>
               <a:ln>
                 <a:noFill/>
@@ -643,9 +644,7 @@
             <c:bubble3D val="0"/>
             <c:spPr>
               <a:solidFill>
-                <a:schemeClr val="bg1">
-                  <a:lumMod val="65000"/>
-                </a:schemeClr>
+                <a:schemeClr val="accent1"/>
               </a:solidFill>
               <a:ln>
                 <a:noFill/>
@@ -664,9 +663,7 @@
             <c:bubble3D val="0"/>
             <c:spPr>
               <a:solidFill>
-                <a:schemeClr val="bg1">
-                  <a:lumMod val="65000"/>
-                </a:schemeClr>
+                <a:schemeClr val="accent1"/>
               </a:solidFill>
               <a:ln>
                 <a:noFill/>
@@ -685,9 +682,7 @@
             <c:bubble3D val="0"/>
             <c:spPr>
               <a:solidFill>
-                <a:schemeClr val="bg1">
-                  <a:lumMod val="65000"/>
-                </a:schemeClr>
+                <a:schemeClr val="accent1"/>
               </a:solidFill>
               <a:ln>
                 <a:noFill/>
@@ -706,9 +701,7 @@
             <c:bubble3D val="0"/>
             <c:spPr>
               <a:solidFill>
-                <a:schemeClr val="bg1">
-                  <a:lumMod val="65000"/>
-                </a:schemeClr>
+                <a:schemeClr val="accent1"/>
               </a:solidFill>
               <a:ln>
                 <a:noFill/>
@@ -727,9 +720,7 @@
             <c:bubble3D val="0"/>
             <c:spPr>
               <a:solidFill>
-                <a:schemeClr val="bg1">
-                  <a:lumMod val="65000"/>
-                </a:schemeClr>
+                <a:schemeClr val="accent1"/>
               </a:solidFill>
               <a:ln>
                 <a:noFill/>
@@ -739,6 +730,63 @@
             <c:extLst>
               <c:ext xmlns:c16="http://schemas.microsoft.com/office/drawing/2014/chart" uri="{C3380CC4-5D6E-409C-BE32-E72D297353CC}">
                 <c16:uniqueId val="{00000005-7093-46BE-9319-5B9CB374ED5E}"/>
+              </c:ext>
+            </c:extLst>
+          </c:dPt>
+          <c:dPt>
+            <c:idx val="7"/>
+            <c:invertIfNegative val="0"/>
+            <c:bubble3D val="0"/>
+            <c:spPr>
+              <a:solidFill>
+                <a:schemeClr val="accent2"/>
+              </a:solidFill>
+              <a:ln>
+                <a:noFill/>
+              </a:ln>
+              <a:effectLst/>
+            </c:spPr>
+            <c:extLst>
+              <c:ext xmlns:c16="http://schemas.microsoft.com/office/drawing/2014/chart" uri="{C3380CC4-5D6E-409C-BE32-E72D297353CC}">
+                <c16:uniqueId val="{0000000E-A1CA-4071-B42E-24A59EF21E94}"/>
+              </c:ext>
+            </c:extLst>
+          </c:dPt>
+          <c:dPt>
+            <c:idx val="8"/>
+            <c:invertIfNegative val="0"/>
+            <c:bubble3D val="0"/>
+            <c:spPr>
+              <a:solidFill>
+                <a:schemeClr val="accent2"/>
+              </a:solidFill>
+              <a:ln>
+                <a:noFill/>
+              </a:ln>
+              <a:effectLst/>
+            </c:spPr>
+            <c:extLst>
+              <c:ext xmlns:c16="http://schemas.microsoft.com/office/drawing/2014/chart" uri="{C3380CC4-5D6E-409C-BE32-E72D297353CC}">
+                <c16:uniqueId val="{0000000F-A1CA-4071-B42E-24A59EF21E94}"/>
+              </c:ext>
+            </c:extLst>
+          </c:dPt>
+          <c:dPt>
+            <c:idx val="9"/>
+            <c:invertIfNegative val="0"/>
+            <c:bubble3D val="0"/>
+            <c:spPr>
+              <a:solidFill>
+                <a:schemeClr val="accent2"/>
+              </a:solidFill>
+              <a:ln>
+                <a:noFill/>
+              </a:ln>
+              <a:effectLst/>
+            </c:spPr>
+            <c:extLst>
+              <c:ext xmlns:c16="http://schemas.microsoft.com/office/drawing/2014/chart" uri="{C3380CC4-5D6E-409C-BE32-E72D297353CC}">
+                <c16:uniqueId val="{00000010-A1CA-4071-B42E-24A59EF21E94}"/>
               </c:ext>
             </c:extLst>
           </c:dPt>
@@ -868,7 +916,7 @@
             <a:pPr>
               <a:defRPr sz="1197" b="0" i="0" u="none" strike="noStrike" kern="1200" baseline="0">
                 <a:solidFill>
-                  <a:schemeClr val="tx1"/>
+                  <a:schemeClr val="tx2"/>
                 </a:solidFill>
                 <a:latin typeface="+mn-lt"/>
                 <a:ea typeface="+mn-ea"/>
@@ -921,7 +969,7 @@
             <a:pPr>
               <a:defRPr sz="1197" b="0" i="0" u="none" strike="noStrike" kern="1200" baseline="0">
                 <a:solidFill>
-                  <a:schemeClr val="tx1"/>
+                  <a:schemeClr val="tx2"/>
                 </a:solidFill>
                 <a:latin typeface="+mn-lt"/>
                 <a:ea typeface="+mn-ea"/>
@@ -959,10 +1007,7 @@
   </c:chart>
   <c:spPr>
     <a:solidFill>
-      <a:schemeClr val="accent1">
-        <a:lumMod val="60000"/>
-        <a:lumOff val="40000"/>
-      </a:schemeClr>
+      <a:schemeClr val="bg2"/>
     </a:solidFill>
     <a:ln>
       <a:noFill/>
@@ -1016,10 +1061,7 @@
             <a:pPr>
               <a:defRPr sz="1400" b="0" i="0" u="none" strike="noStrike" kern="1200" spc="0" baseline="0">
                 <a:solidFill>
-                  <a:schemeClr val="tx1">
-                    <a:lumMod val="65000"/>
-                    <a:lumOff val="35000"/>
-                  </a:schemeClr>
+                  <a:schemeClr val="tx1"/>
                 </a:solidFill>
                 <a:latin typeface="+mn-lt"/>
                 <a:ea typeface="+mn-ea"/>
@@ -1027,30 +1069,58 @@
               </a:defRPr>
             </a:pPr>
             <a:r>
-              <a:rPr lang="en-US" dirty="0"/>
+              <a:rPr lang="en-US" dirty="0">
+                <a:solidFill>
+                  <a:schemeClr val="tx1"/>
+                </a:solidFill>
+              </a:rPr>
               <a:t>Suma</a:t>
             </a:r>
             <a:r>
-              <a:rPr lang="pl-PL" dirty="0"/>
+              <a:rPr lang="pl-PL" dirty="0">
+                <a:solidFill>
+                  <a:schemeClr val="tx1"/>
+                </a:solidFill>
+              </a:rPr>
               <a:t> wzrostów</a:t>
             </a:r>
             <a:r>
-              <a:rPr lang="pl-PL" baseline="0" dirty="0"/>
+              <a:rPr lang="pl-PL" baseline="0" dirty="0">
+                <a:solidFill>
+                  <a:schemeClr val="tx1"/>
+                </a:solidFill>
+              </a:rPr>
               <a:t> odwiedzin stron wg kategorii przyczyn</a:t>
             </a:r>
             <a:r>
-              <a:rPr lang="pl-PL" dirty="0"/>
+              <a:rPr lang="pl-PL" dirty="0">
+                <a:solidFill>
+                  <a:schemeClr val="tx1"/>
+                </a:solidFill>
+              </a:rPr>
               <a:t> zwiększonego</a:t>
             </a:r>
             <a:r>
-              <a:rPr lang="pl-PL" baseline="0" dirty="0"/>
-              <a:t> ruchu</a:t>
+              <a:rPr lang="pl-PL" baseline="0" dirty="0">
+                <a:solidFill>
+                  <a:schemeClr val="tx1"/>
+                </a:solidFill>
+              </a:rPr>
+              <a:t> ruchu[mln] </a:t>
             </a:r>
             <a:r>
-              <a:rPr lang="pl-PL" dirty="0"/>
+              <a:rPr lang="pl-PL" dirty="0">
+                <a:solidFill>
+                  <a:schemeClr val="tx1"/>
+                </a:solidFill>
+              </a:rPr>
               <a:t>[4]</a:t>
             </a:r>
-            <a:endParaRPr lang="en-US" dirty="0"/>
+            <a:endParaRPr lang="en-US" dirty="0">
+              <a:solidFill>
+                <a:schemeClr val="tx1"/>
+              </a:solidFill>
+            </a:endParaRPr>
           </a:p>
         </c:rich>
       </c:tx>
@@ -1069,10 +1139,7 @@
           <a:pPr>
             <a:defRPr sz="1400" b="0" i="0" u="none" strike="noStrike" kern="1200" spc="0" baseline="0">
               <a:solidFill>
-                <a:schemeClr val="tx1">
-                  <a:lumMod val="65000"/>
-                  <a:lumOff val="35000"/>
-                </a:schemeClr>
+                <a:schemeClr val="tx1"/>
               </a:solidFill>
               <a:latin typeface="+mn-lt"/>
               <a:ea typeface="+mn-ea"/>
@@ -1276,9 +1343,7 @@
           </c:tx>
           <c:spPr>
             <a:solidFill>
-              <a:schemeClr val="bg1">
-                <a:lumMod val="65000"/>
-              </a:schemeClr>
+              <a:schemeClr val="accent1"/>
             </a:solidFill>
             <a:ln>
               <a:noFill/>
@@ -1292,7 +1357,7 @@
             <c:bubble3D val="0"/>
             <c:spPr>
               <a:solidFill>
-                <a:schemeClr val="accent2"/>
+                <a:schemeClr val="accent5"/>
               </a:solidFill>
               <a:ln>
                 <a:noFill/>
@@ -1311,7 +1376,7 @@
             <c:bubble3D val="0"/>
             <c:spPr>
               <a:solidFill>
-                <a:schemeClr val="accent2"/>
+                <a:schemeClr val="accent5"/>
               </a:solidFill>
               <a:ln>
                 <a:noFill/>
@@ -1330,7 +1395,7 @@
             <c:bubble3D val="0"/>
             <c:spPr>
               <a:solidFill>
-                <a:schemeClr val="accent5"/>
+                <a:schemeClr val="accent2"/>
               </a:solidFill>
               <a:ln>
                 <a:noFill/>
@@ -1349,7 +1414,7 @@
             <c:bubble3D val="0"/>
             <c:spPr>
               <a:solidFill>
-                <a:schemeClr val="accent2"/>
+                <a:schemeClr val="accent5"/>
               </a:solidFill>
               <a:ln>
                 <a:noFill/>
@@ -1368,7 +1433,7 @@
             <c:bubble3D val="0"/>
             <c:spPr>
               <a:solidFill>
-                <a:schemeClr val="accent5"/>
+                <a:schemeClr val="accent2"/>
               </a:solidFill>
               <a:ln>
                 <a:noFill/>
@@ -1387,7 +1452,7 @@
             <c:bubble3D val="0"/>
             <c:spPr>
               <a:solidFill>
-                <a:schemeClr val="accent5"/>
+                <a:schemeClr val="accent2"/>
               </a:solidFill>
               <a:ln>
                 <a:noFill/>
@@ -1406,7 +1471,7 @@
             <c:bubble3D val="0"/>
             <c:spPr>
               <a:solidFill>
-                <a:schemeClr val="accent2"/>
+                <a:schemeClr val="accent5"/>
               </a:solidFill>
               <a:ln>
                 <a:noFill/>
@@ -1425,7 +1490,7 @@
             <c:bubble3D val="0"/>
             <c:spPr>
               <a:solidFill>
-                <a:schemeClr val="accent2"/>
+                <a:schemeClr val="accent5"/>
               </a:solidFill>
               <a:ln>
                 <a:noFill/>
@@ -1558,10 +1623,7 @@
             <a:pPr>
               <a:defRPr sz="900" b="0" i="0" u="none" strike="noStrike" kern="1200" baseline="0">
                 <a:solidFill>
-                  <a:schemeClr val="tx1">
-                    <a:lumMod val="65000"/>
-                    <a:lumOff val="35000"/>
-                  </a:schemeClr>
+                  <a:schemeClr val="tx2"/>
                 </a:solidFill>
                 <a:latin typeface="+mn-lt"/>
                 <a:ea typeface="+mn-ea"/>
@@ -1588,7 +1650,7 @@
         <c:numFmt formatCode="General" sourceLinked="1"/>
         <c:majorTickMark val="none"/>
         <c:minorTickMark val="none"/>
-        <c:tickLblPos val="nextTo"/>
+        <c:tickLblPos val="high"/>
         <c:spPr>
           <a:noFill/>
           <a:ln>
@@ -1603,10 +1665,7 @@
             <a:pPr>
               <a:defRPr sz="900" b="0" i="0" u="none" strike="noStrike" kern="1200" baseline="0">
                 <a:solidFill>
-                  <a:schemeClr val="tx1">
-                    <a:lumMod val="65000"/>
-                    <a:lumOff val="35000"/>
-                  </a:schemeClr>
+                  <a:schemeClr val="tx2"/>
                 </a:solidFill>
                 <a:latin typeface="+mn-lt"/>
                 <a:ea typeface="+mn-ea"/>
@@ -1621,35 +1680,6 @@
         <c:crossBetween val="between"/>
         <c:dispUnits>
           <c:builtInUnit val="millions"/>
-          <c:dispUnitsLbl>
-            <c:spPr>
-              <a:noFill/>
-              <a:ln>
-                <a:noFill/>
-              </a:ln>
-              <a:effectLst/>
-            </c:spPr>
-            <c:txPr>
-              <a:bodyPr rot="0" spcFirstLastPara="1" vertOverflow="ellipsis" vert="horz" wrap="square" anchor="ctr" anchorCtr="1"/>
-              <a:lstStyle/>
-              <a:p>
-                <a:pPr>
-                  <a:defRPr sz="1000" b="0" i="0" u="none" strike="noStrike" kern="1200" baseline="0">
-                    <a:solidFill>
-                      <a:schemeClr val="tx1">
-                        <a:lumMod val="65000"/>
-                        <a:lumOff val="35000"/>
-                      </a:schemeClr>
-                    </a:solidFill>
-                    <a:latin typeface="+mn-lt"/>
-                    <a:ea typeface="+mn-ea"/>
-                    <a:cs typeface="+mn-cs"/>
-                  </a:defRPr>
-                </a:pPr>
-                <a:endParaRPr lang="pl-PL"/>
-              </a:p>
-            </c:txPr>
-          </c:dispUnitsLbl>
         </c:dispUnits>
       </c:valAx>
       <c:spPr>
@@ -1673,10 +1703,7 @@
   </c:chart>
   <c:spPr>
     <a:solidFill>
-      <a:schemeClr val="accent1">
-        <a:lumMod val="60000"/>
-        <a:lumOff val="40000"/>
-      </a:schemeClr>
+      <a:schemeClr val="bg2"/>
     </a:solidFill>
     <a:ln>
       <a:noFill/>
@@ -1737,10 +1764,7 @@
             <a:pPr>
               <a:defRPr sz="1862" b="0" i="0" u="none" strike="noStrike" kern="1200" spc="0" baseline="0">
                 <a:solidFill>
-                  <a:schemeClr val="tx1">
-                    <a:lumMod val="65000"/>
-                    <a:lumOff val="35000"/>
-                  </a:schemeClr>
+                  <a:schemeClr val="tx1"/>
                 </a:solidFill>
                 <a:latin typeface="+mn-lt"/>
                 <a:ea typeface="+mn-ea"/>
@@ -1748,22 +1772,42 @@
               </a:defRPr>
             </a:pPr>
             <a:r>
-              <a:rPr lang="pl-PL" dirty="0"/>
+              <a:rPr lang="pl-PL" dirty="0">
+                <a:solidFill>
+                  <a:schemeClr val="tx1"/>
+                </a:solidFill>
+              </a:rPr>
               <a:t>Suma wyświetleń</a:t>
             </a:r>
             <a:r>
-              <a:rPr lang="pl-PL" baseline="0" dirty="0"/>
+              <a:rPr lang="pl-PL" baseline="0" dirty="0">
+                <a:solidFill>
+                  <a:schemeClr val="tx1"/>
+                </a:solidFill>
+              </a:rPr>
               <a:t> strony </a:t>
             </a:r>
             <a:r>
-              <a:rPr lang="en-US" dirty="0"/>
+              <a:rPr lang="en-US" dirty="0">
+                <a:solidFill>
+                  <a:schemeClr val="tx1"/>
+                </a:solidFill>
+              </a:rPr>
               <a:t>Elżbieta II</a:t>
             </a:r>
             <a:r>
-              <a:rPr lang="pl-PL" dirty="0"/>
+              <a:rPr lang="pl-PL" dirty="0">
+                <a:solidFill>
+                  <a:schemeClr val="tx1"/>
+                </a:solidFill>
+              </a:rPr>
               <a:t> [mln][2][3]</a:t>
             </a:r>
-            <a:endParaRPr lang="en-US" dirty="0"/>
+            <a:endParaRPr lang="en-US" dirty="0">
+              <a:solidFill>
+                <a:schemeClr val="tx1"/>
+              </a:solidFill>
+            </a:endParaRPr>
           </a:p>
         </c:rich>
       </c:tx>
@@ -1782,10 +1826,7 @@
           <a:pPr>
             <a:defRPr sz="1862" b="0" i="0" u="none" strike="noStrike" kern="1200" spc="0" baseline="0">
               <a:solidFill>
-                <a:schemeClr val="tx1">
-                  <a:lumMod val="65000"/>
-                  <a:lumOff val="35000"/>
-                </a:schemeClr>
+                <a:schemeClr val="tx1"/>
               </a:solidFill>
               <a:latin typeface="+mn-lt"/>
               <a:ea typeface="+mn-ea"/>
@@ -1829,7 +1870,7 @@
           <c:spPr>
             <a:ln w="28575" cap="rnd">
               <a:solidFill>
-                <a:schemeClr val="accent1"/>
+                <a:schemeClr val="accent2"/>
               </a:solidFill>
               <a:round/>
             </a:ln>
@@ -1931,10 +1972,7 @@
                       <a:tabLst/>
                       <a:defRPr sz="1197" b="0" i="0" u="none" strike="noStrike" kern="1200" baseline="0">
                         <a:solidFill>
-                          <a:srgbClr val="000000">
-                            <a:lumMod val="65000"/>
-                            <a:lumOff val="35000"/>
-                          </a:srgbClr>
+                          <a:schemeClr val="tx2"/>
                         </a:solidFill>
                         <a:latin typeface="+mn-lt"/>
                         <a:ea typeface="+mn-ea"/>
@@ -1944,10 +1982,7 @@
                     <a:r>
                       <a:rPr lang="pl-PL" sz="1197" b="0" i="0" u="none" strike="noStrike" kern="1200" baseline="0" dirty="0">
                         <a:solidFill>
-                          <a:srgbClr val="000000">
-                            <a:lumMod val="65000"/>
-                            <a:lumOff val="35000"/>
-                          </a:srgbClr>
+                          <a:schemeClr val="tx2"/>
                         </a:solidFill>
                       </a:rPr>
                       <a:t>Obchody 73 rocznicy ślubu z Księciem Filipem</a:t>
@@ -1971,14 +2006,15 @@
                       <a:tabLst/>
                       <a:defRPr>
                         <a:solidFill>
-                          <a:srgbClr val="000000">
-                            <a:lumMod val="65000"/>
-                            <a:lumOff val="35000"/>
-                          </a:srgbClr>
+                          <a:schemeClr val="tx2"/>
                         </a:solidFill>
                       </a:defRPr>
                     </a:pPr>
-                    <a:endParaRPr lang="pl-PL" dirty="0"/>
+                    <a:endParaRPr lang="pl-PL" dirty="0">
+                      <a:solidFill>
+                        <a:schemeClr val="tx2"/>
+                      </a:solidFill>
+                    </a:endParaRPr>
                   </a:p>
                 </c:rich>
               </c:tx>
@@ -2038,10 +2074,7 @@
                     <a:tabLst/>
                     <a:defRPr sz="1197" b="0" i="0" u="none" strike="noStrike" kern="1200" baseline="0">
                       <a:solidFill>
-                        <a:srgbClr val="000000">
-                          <a:lumMod val="65000"/>
-                          <a:lumOff val="35000"/>
-                        </a:srgbClr>
+                        <a:schemeClr val="tx2"/>
                       </a:solidFill>
                       <a:latin typeface="+mn-lt"/>
                       <a:ea typeface="+mn-ea"/>
@@ -2107,10 +2140,7 @@
                       <a:tabLst/>
                       <a:defRPr sz="1197" b="0" i="0" u="none" strike="noStrike" kern="1200" baseline="0">
                         <a:solidFill>
-                          <a:srgbClr val="000000">
-                            <a:lumMod val="65000"/>
-                            <a:lumOff val="35000"/>
-                          </a:srgbClr>
+                          <a:schemeClr val="tx2"/>
                         </a:solidFill>
                         <a:latin typeface="+mn-lt"/>
                         <a:ea typeface="+mn-ea"/>
@@ -2120,10 +2150,7 @@
                     <a:r>
                       <a:rPr lang="en-US" sz="1197" b="0" i="0" u="none" strike="noStrike" kern="1200" baseline="0" dirty="0" err="1">
                         <a:solidFill>
-                          <a:srgbClr val="000000">
-                            <a:lumMod val="65000"/>
-                            <a:lumOff val="35000"/>
-                          </a:srgbClr>
+                          <a:schemeClr val="tx2"/>
                         </a:solidFill>
                       </a:rPr>
                       <a:t>Śmierć</a:t>
@@ -2131,10 +2158,7 @@
                     <a:r>
                       <a:rPr lang="en-US" sz="1197" b="0" i="0" u="none" strike="noStrike" kern="1200" baseline="0" dirty="0">
                         <a:solidFill>
-                          <a:srgbClr val="000000">
-                            <a:lumMod val="65000"/>
-                            <a:lumOff val="35000"/>
-                          </a:srgbClr>
+                          <a:schemeClr val="tx2"/>
                         </a:solidFill>
                       </a:rPr>
                       <a:t> </a:t>
@@ -2142,10 +2166,7 @@
                     <a:r>
                       <a:rPr lang="en-US" sz="1197" b="0" i="0" u="none" strike="noStrike" kern="1200" baseline="0" dirty="0" err="1">
                         <a:solidFill>
-                          <a:srgbClr val="000000">
-                            <a:lumMod val="65000"/>
-                            <a:lumOff val="35000"/>
-                          </a:srgbClr>
+                          <a:schemeClr val="tx2"/>
                         </a:solidFill>
                       </a:rPr>
                       <a:t>Księcia</a:t>
@@ -2153,10 +2174,7 @@
                     <a:r>
                       <a:rPr lang="en-US" sz="1197" b="0" i="0" u="none" strike="noStrike" kern="1200" baseline="0" dirty="0">
                         <a:solidFill>
-                          <a:srgbClr val="000000">
-                            <a:lumMod val="65000"/>
-                            <a:lumOff val="35000"/>
-                          </a:srgbClr>
+                          <a:schemeClr val="tx2"/>
                         </a:solidFill>
                       </a:rPr>
                       <a:t> Filipa</a:t>
@@ -2180,14 +2198,15 @@
                       <a:tabLst/>
                       <a:defRPr>
                         <a:solidFill>
-                          <a:srgbClr val="000000">
-                            <a:lumMod val="65000"/>
-                            <a:lumOff val="35000"/>
-                          </a:srgbClr>
+                          <a:schemeClr val="tx2"/>
                         </a:solidFill>
                       </a:defRPr>
                     </a:pPr>
-                    <a:endParaRPr lang="en-US" dirty="0"/>
+                    <a:endParaRPr lang="en-US" dirty="0">
+                      <a:solidFill>
+                        <a:schemeClr val="tx2"/>
+                      </a:solidFill>
+                    </a:endParaRPr>
                   </a:p>
                 </c:rich>
               </c:tx>
@@ -2247,10 +2266,7 @@
                     <a:tabLst/>
                     <a:defRPr sz="1197" b="0" i="0" u="none" strike="noStrike" kern="1200" baseline="0">
                       <a:solidFill>
-                        <a:srgbClr val="000000">
-                          <a:lumMod val="65000"/>
-                          <a:lumOff val="35000"/>
-                        </a:srgbClr>
+                        <a:schemeClr val="tx2"/>
                       </a:solidFill>
                       <a:latin typeface="+mn-lt"/>
                       <a:ea typeface="+mn-ea"/>
@@ -2355,10 +2371,7 @@
                 <a:pPr>
                   <a:defRPr sz="1197" b="0" i="0" u="none" strike="noStrike" kern="1200" baseline="0">
                     <a:solidFill>
-                      <a:schemeClr val="dk1">
-                        <a:lumMod val="65000"/>
-                        <a:lumOff val="35000"/>
-                      </a:schemeClr>
+                      <a:schemeClr val="tx2"/>
                     </a:solidFill>
                     <a:latin typeface="+mn-lt"/>
                     <a:ea typeface="+mn-ea"/>
@@ -3057,7 +3070,7 @@
         </c:scaling>
         <c:delete val="0"/>
         <c:axPos val="b"/>
-        <c:numFmt formatCode="m/d/yyyy" sourceLinked="1"/>
+        <c:numFmt formatCode="yyyy" sourceLinked="0"/>
         <c:majorTickMark val="in"/>
         <c:minorTickMark val="none"/>
         <c:tickLblPos val="nextTo"/>
@@ -3081,10 +3094,7 @@
             <a:pPr>
               <a:defRPr sz="1197" b="0" i="0" u="none" strike="noStrike" kern="1200" baseline="0">
                 <a:solidFill>
-                  <a:schemeClr val="tx1">
-                    <a:lumMod val="65000"/>
-                    <a:lumOff val="35000"/>
-                  </a:schemeClr>
+                  <a:schemeClr val="tx2"/>
                 </a:solidFill>
                 <a:latin typeface="+mn-lt"/>
                 <a:ea typeface="+mn-ea"/>
@@ -3099,6 +3109,8 @@
         <c:auto val="1"/>
         <c:lblOffset val="100"/>
         <c:baseTimeUnit val="months"/>
+        <c:majorUnit val="12"/>
+        <c:majorTimeUnit val="months"/>
       </c:dateAx>
       <c:valAx>
         <c:axId val="1473956560"/>
@@ -3125,10 +3137,7 @@
             <a:pPr>
               <a:defRPr sz="1197" b="0" i="0" u="none" strike="noStrike" kern="1200" baseline="0">
                 <a:solidFill>
-                  <a:schemeClr val="tx1">
-                    <a:lumMod val="65000"/>
-                    <a:lumOff val="35000"/>
-                  </a:schemeClr>
+                  <a:schemeClr val="tx2"/>
                 </a:solidFill>
                 <a:latin typeface="+mn-lt"/>
                 <a:ea typeface="+mn-ea"/>
@@ -3166,10 +3175,7 @@
   </c:chart>
   <c:spPr>
     <a:solidFill>
-      <a:schemeClr val="accent1">
-        <a:lumMod val="60000"/>
-        <a:lumOff val="40000"/>
-      </a:schemeClr>
+      <a:schemeClr val="bg2"/>
     </a:solidFill>
     <a:ln>
       <a:noFill/>
@@ -3215,10 +3221,7 @@
             <a:pPr>
               <a:defRPr sz="1862" b="0" i="0" u="none" strike="noStrike" kern="1200" spc="0" baseline="0">
                 <a:solidFill>
-                  <a:schemeClr val="tx1">
-                    <a:lumMod val="65000"/>
-                    <a:lumOff val="35000"/>
-                  </a:schemeClr>
+                  <a:schemeClr val="tx1"/>
                 </a:solidFill>
                 <a:latin typeface="+mn-lt"/>
                 <a:ea typeface="+mn-ea"/>
@@ -3226,18 +3229,34 @@
               </a:defRPr>
             </a:pPr>
             <a:r>
-              <a:rPr lang="pl-PL" dirty="0"/>
+              <a:rPr lang="pl-PL" dirty="0">
+                <a:solidFill>
+                  <a:schemeClr val="tx1"/>
+                </a:solidFill>
+              </a:rPr>
               <a:t>Suma wyświetleń</a:t>
             </a:r>
             <a:r>
-              <a:rPr lang="pl-PL" baseline="0" dirty="0"/>
+              <a:rPr lang="pl-PL" baseline="0" dirty="0">
+                <a:solidFill>
+                  <a:schemeClr val="tx1"/>
+                </a:solidFill>
+              </a:rPr>
               <a:t> strony Iga Świątek</a:t>
             </a:r>
             <a:r>
-              <a:rPr lang="pl-PL" dirty="0"/>
+              <a:rPr lang="pl-PL" dirty="0">
+                <a:solidFill>
+                  <a:schemeClr val="tx1"/>
+                </a:solidFill>
+              </a:rPr>
               <a:t> [tys.][2]</a:t>
             </a:r>
-            <a:endParaRPr lang="en-US" dirty="0"/>
+            <a:endParaRPr lang="en-US" dirty="0">
+              <a:solidFill>
+                <a:schemeClr val="tx1"/>
+              </a:solidFill>
+            </a:endParaRPr>
           </a:p>
         </c:rich>
       </c:tx>
@@ -3256,10 +3275,7 @@
           <a:pPr>
             <a:defRPr sz="1862" b="0" i="0" u="none" strike="noStrike" kern="1200" spc="0" baseline="0">
               <a:solidFill>
-                <a:schemeClr val="tx1">
-                  <a:lumMod val="65000"/>
-                  <a:lumOff val="35000"/>
-                </a:schemeClr>
+                <a:schemeClr val="tx1"/>
               </a:solidFill>
               <a:latin typeface="+mn-lt"/>
               <a:ea typeface="+mn-ea"/>
@@ -3303,7 +3319,7 @@
           <c:spPr>
             <a:ln w="28575" cap="rnd">
               <a:solidFill>
-                <a:schemeClr val="accent1"/>
+                <a:schemeClr val="accent2"/>
               </a:solidFill>
               <a:round/>
             </a:ln>
@@ -3980,7 +3996,7 @@
         </c:scaling>
         <c:delete val="0"/>
         <c:axPos val="b"/>
-        <c:numFmt formatCode="m/d/yyyy" sourceLinked="1"/>
+        <c:numFmt formatCode="yyyy" sourceLinked="0"/>
         <c:majorTickMark val="in"/>
         <c:minorTickMark val="none"/>
         <c:tickLblPos val="nextTo"/>
@@ -4004,10 +4020,7 @@
             <a:pPr>
               <a:defRPr sz="1197" b="0" i="0" u="none" strike="noStrike" kern="1200" baseline="0">
                 <a:solidFill>
-                  <a:schemeClr val="tx1">
-                    <a:lumMod val="65000"/>
-                    <a:lumOff val="35000"/>
-                  </a:schemeClr>
+                  <a:schemeClr val="tx2"/>
                 </a:solidFill>
                 <a:latin typeface="+mn-lt"/>
                 <a:ea typeface="+mn-ea"/>
@@ -4022,6 +4035,8 @@
         <c:auto val="1"/>
         <c:lblOffset val="100"/>
         <c:baseTimeUnit val="months"/>
+        <c:majorUnit val="12"/>
+        <c:majorTimeUnit val="months"/>
       </c:dateAx>
       <c:valAx>
         <c:axId val="1473956560"/>
@@ -4048,10 +4063,7 @@
             <a:pPr>
               <a:defRPr sz="1197" b="0" i="0" u="none" strike="noStrike" kern="1200" baseline="0">
                 <a:solidFill>
-                  <a:schemeClr val="tx1">
-                    <a:lumMod val="65000"/>
-                    <a:lumOff val="35000"/>
-                  </a:schemeClr>
+                  <a:schemeClr val="tx2"/>
                 </a:solidFill>
                 <a:latin typeface="+mn-lt"/>
                 <a:ea typeface="+mn-ea"/>
@@ -4089,10 +4101,7 @@
   </c:chart>
   <c:spPr>
     <a:solidFill>
-      <a:schemeClr val="accent1">
-        <a:lumMod val="60000"/>
-        <a:lumOff val="40000"/>
-      </a:schemeClr>
+      <a:schemeClr val="bg2"/>
     </a:solidFill>
     <a:ln>
       <a:noFill/>
@@ -4138,10 +4147,7 @@
             <a:pPr>
               <a:defRPr sz="1862" b="0" i="0" u="none" strike="noStrike" kern="1200" spc="0" baseline="0">
                 <a:solidFill>
-                  <a:schemeClr val="tx1">
-                    <a:lumMod val="65000"/>
-                    <a:lumOff val="35000"/>
-                  </a:schemeClr>
+                  <a:schemeClr val="tx1"/>
                 </a:solidFill>
                 <a:latin typeface="+mn-lt"/>
                 <a:ea typeface="+mn-ea"/>
@@ -4149,34 +4155,66 @@
               </a:defRPr>
             </a:pPr>
             <a:r>
-              <a:rPr lang="pl-PL" dirty="0"/>
+              <a:rPr lang="pl-PL" dirty="0">
+                <a:solidFill>
+                  <a:schemeClr val="tx1"/>
+                </a:solidFill>
+              </a:rPr>
               <a:t>Suma wyświetleń</a:t>
             </a:r>
             <a:r>
-              <a:rPr lang="pl-PL" baseline="0" dirty="0"/>
+              <a:rPr lang="pl-PL" baseline="0" dirty="0">
+                <a:solidFill>
+                  <a:schemeClr val="tx1"/>
+                </a:solidFill>
+              </a:rPr>
               <a:t> strony </a:t>
             </a:r>
             <a:r>
-              <a:rPr lang="pl-PL" baseline="0" dirty="0" err="1"/>
+              <a:rPr lang="pl-PL" baseline="0" dirty="0" err="1">
+                <a:solidFill>
+                  <a:schemeClr val="tx1"/>
+                </a:solidFill>
+              </a:rPr>
               <a:t>Freddie</a:t>
             </a:r>
             <a:r>
-              <a:rPr lang="pl-PL" baseline="0" dirty="0"/>
+              <a:rPr lang="pl-PL" baseline="0" dirty="0">
+                <a:solidFill>
+                  <a:schemeClr val="tx1"/>
+                </a:solidFill>
+              </a:rPr>
               <a:t> </a:t>
             </a:r>
             <a:r>
-              <a:rPr lang="pl-PL" baseline="0" dirty="0" err="1"/>
+              <a:rPr lang="pl-PL" baseline="0" dirty="0" err="1">
+                <a:solidFill>
+                  <a:schemeClr val="tx1"/>
+                </a:solidFill>
+              </a:rPr>
               <a:t>Mercury</a:t>
             </a:r>
             <a:r>
-              <a:rPr lang="pl-PL" baseline="0" dirty="0"/>
+              <a:rPr lang="pl-PL" baseline="0" dirty="0">
+                <a:solidFill>
+                  <a:schemeClr val="tx1"/>
+                </a:solidFill>
+              </a:rPr>
               <a:t> </a:t>
             </a:r>
             <a:r>
-              <a:rPr lang="pl-PL" dirty="0"/>
+              <a:rPr lang="pl-PL" dirty="0">
+                <a:solidFill>
+                  <a:schemeClr val="tx1"/>
+                </a:solidFill>
+              </a:rPr>
               <a:t>[tys.][2]</a:t>
             </a:r>
-            <a:endParaRPr lang="en-US" dirty="0"/>
+            <a:endParaRPr lang="en-US" dirty="0">
+              <a:solidFill>
+                <a:schemeClr val="tx1"/>
+              </a:solidFill>
+            </a:endParaRPr>
           </a:p>
         </c:rich>
       </c:tx>
@@ -4195,10 +4233,7 @@
           <a:pPr>
             <a:defRPr sz="1862" b="0" i="0" u="none" strike="noStrike" kern="1200" spc="0" baseline="0">
               <a:solidFill>
-                <a:schemeClr val="tx1">
-                  <a:lumMod val="65000"/>
-                  <a:lumOff val="35000"/>
-                </a:schemeClr>
+                <a:schemeClr val="tx1"/>
               </a:solidFill>
               <a:latin typeface="+mn-lt"/>
               <a:ea typeface="+mn-ea"/>
@@ -4242,7 +4277,7 @@
           <c:spPr>
             <a:ln w="28575" cap="rnd">
               <a:solidFill>
-                <a:schemeClr val="accent1"/>
+                <a:schemeClr val="accent2"/>
               </a:solidFill>
               <a:round/>
             </a:ln>
@@ -4358,10 +4393,7 @@
                 <a:pPr>
                   <a:defRPr sz="1197" b="0" i="0" u="none" strike="noStrike" kern="1200" baseline="0">
                     <a:solidFill>
-                      <a:schemeClr val="dk1">
-                        <a:lumMod val="65000"/>
-                        <a:lumOff val="35000"/>
-                      </a:schemeClr>
+                      <a:schemeClr val="tx2"/>
                     </a:solidFill>
                     <a:latin typeface="+mn-lt"/>
                     <a:ea typeface="+mn-ea"/>
@@ -5060,7 +5092,7 @@
         </c:scaling>
         <c:delete val="0"/>
         <c:axPos val="b"/>
-        <c:numFmt formatCode="m/d/yyyy" sourceLinked="1"/>
+        <c:numFmt formatCode="yyyy" sourceLinked="0"/>
         <c:majorTickMark val="in"/>
         <c:minorTickMark val="none"/>
         <c:tickLblPos val="nextTo"/>
@@ -5084,10 +5116,7 @@
             <a:pPr>
               <a:defRPr sz="1197" b="0" i="0" u="none" strike="noStrike" kern="1200" baseline="0">
                 <a:solidFill>
-                  <a:schemeClr val="tx1">
-                    <a:lumMod val="65000"/>
-                    <a:lumOff val="35000"/>
-                  </a:schemeClr>
+                  <a:schemeClr val="tx2"/>
                 </a:solidFill>
                 <a:latin typeface="+mn-lt"/>
                 <a:ea typeface="+mn-ea"/>
@@ -5102,6 +5131,8 @@
         <c:auto val="1"/>
         <c:lblOffset val="100"/>
         <c:baseTimeUnit val="months"/>
+        <c:majorUnit val="12"/>
+        <c:majorTimeUnit val="months"/>
       </c:dateAx>
       <c:valAx>
         <c:axId val="1473956560"/>
@@ -5128,10 +5159,7 @@
             <a:pPr>
               <a:defRPr sz="1197" b="0" i="0" u="none" strike="noStrike" kern="1200" baseline="0">
                 <a:solidFill>
-                  <a:schemeClr val="tx1">
-                    <a:lumMod val="65000"/>
-                    <a:lumOff val="35000"/>
-                  </a:schemeClr>
+                  <a:schemeClr val="tx2"/>
                 </a:solidFill>
                 <a:latin typeface="+mn-lt"/>
                 <a:ea typeface="+mn-ea"/>
@@ -5169,10 +5197,7 @@
   </c:chart>
   <c:spPr>
     <a:solidFill>
-      <a:schemeClr val="accent1">
-        <a:lumMod val="60000"/>
-        <a:lumOff val="40000"/>
-      </a:schemeClr>
+      <a:schemeClr val="bg2"/>
     </a:solidFill>
     <a:ln>
       <a:noFill/>
@@ -5218,10 +5243,7 @@
             <a:pPr>
               <a:defRPr sz="1862" b="0" i="0" u="none" strike="noStrike" kern="1200" spc="0" baseline="0">
                 <a:solidFill>
-                  <a:schemeClr val="tx1">
-                    <a:lumMod val="65000"/>
-                    <a:lumOff val="35000"/>
-                  </a:schemeClr>
+                  <a:schemeClr val="tx1"/>
                 </a:solidFill>
                 <a:latin typeface="+mn-lt"/>
                 <a:ea typeface="+mn-ea"/>
@@ -5229,18 +5251,34 @@
               </a:defRPr>
             </a:pPr>
             <a:r>
-              <a:rPr lang="pl-PL" dirty="0"/>
+              <a:rPr lang="pl-PL" dirty="0">
+                <a:solidFill>
+                  <a:schemeClr val="tx1"/>
+                </a:solidFill>
+              </a:rPr>
               <a:t>Suma wyświetleń</a:t>
             </a:r>
             <a:r>
-              <a:rPr lang="pl-PL" baseline="0" dirty="0"/>
+              <a:rPr lang="pl-PL" baseline="0" dirty="0">
+                <a:solidFill>
+                  <a:schemeClr val="tx1"/>
+                </a:solidFill>
+              </a:rPr>
               <a:t> stron </a:t>
             </a:r>
             <a:r>
-              <a:rPr lang="pl-PL" dirty="0"/>
+              <a:rPr lang="pl-PL" dirty="0">
+                <a:solidFill>
+                  <a:schemeClr val="tx1"/>
+                </a:solidFill>
+              </a:rPr>
               <a:t>Republika Zielonego Przylądka oraz Curaçao [tys.][2]</a:t>
             </a:r>
-            <a:endParaRPr lang="en-US" dirty="0"/>
+            <a:endParaRPr lang="en-US" dirty="0">
+              <a:solidFill>
+                <a:schemeClr val="tx1"/>
+              </a:solidFill>
+            </a:endParaRPr>
           </a:p>
         </c:rich>
       </c:tx>
@@ -5259,10 +5297,7 @@
           <a:pPr>
             <a:defRPr sz="1862" b="0" i="0" u="none" strike="noStrike" kern="1200" spc="0" baseline="0">
               <a:solidFill>
-                <a:schemeClr val="tx1">
-                  <a:lumMod val="65000"/>
-                  <a:lumOff val="35000"/>
-                </a:schemeClr>
+                <a:schemeClr val="tx1"/>
               </a:solidFill>
               <a:latin typeface="+mn-lt"/>
               <a:ea typeface="+mn-ea"/>
@@ -5306,8 +5341,11 @@
           <c:spPr>
             <a:ln w="28575" cap="rnd">
               <a:solidFill>
-                <a:schemeClr val="accent1"/>
+                <a:schemeClr val="accent4">
+                  <a:lumMod val="50000"/>
+                </a:schemeClr>
               </a:solidFill>
+              <a:prstDash val="solid"/>
               <a:round/>
             </a:ln>
             <a:effectLst/>
@@ -6658,7 +6696,7 @@
         </c:scaling>
         <c:delete val="0"/>
         <c:axPos val="b"/>
-        <c:numFmt formatCode="m/d/yyyy" sourceLinked="1"/>
+        <c:numFmt formatCode="yyyy" sourceLinked="0"/>
         <c:majorTickMark val="in"/>
         <c:minorTickMark val="none"/>
         <c:tickLblPos val="nextTo"/>
@@ -6682,10 +6720,7 @@
             <a:pPr>
               <a:defRPr sz="1197" b="0" i="0" u="none" strike="noStrike" kern="1200" baseline="0">
                 <a:solidFill>
-                  <a:schemeClr val="tx1">
-                    <a:lumMod val="65000"/>
-                    <a:lumOff val="35000"/>
-                  </a:schemeClr>
+                  <a:schemeClr val="tx2"/>
                 </a:solidFill>
                 <a:latin typeface="+mn-lt"/>
                 <a:ea typeface="+mn-ea"/>
@@ -6700,6 +6735,8 @@
         <c:auto val="1"/>
         <c:lblOffset val="100"/>
         <c:baseTimeUnit val="months"/>
+        <c:majorUnit val="12"/>
+        <c:majorTimeUnit val="months"/>
       </c:dateAx>
       <c:valAx>
         <c:axId val="1473956560"/>
@@ -6726,10 +6763,7 @@
             <a:pPr>
               <a:defRPr sz="1197" b="0" i="0" u="none" strike="noStrike" kern="1200" baseline="0">
                 <a:solidFill>
-                  <a:schemeClr val="tx1">
-                    <a:lumMod val="65000"/>
-                    <a:lumOff val="35000"/>
-                  </a:schemeClr>
+                  <a:schemeClr val="tx2"/>
                 </a:solidFill>
                 <a:latin typeface="+mn-lt"/>
                 <a:ea typeface="+mn-ea"/>
@@ -6767,10 +6801,7 @@
   </c:chart>
   <c:spPr>
     <a:solidFill>
-      <a:schemeClr val="accent1">
-        <a:lumMod val="60000"/>
-        <a:lumOff val="40000"/>
-      </a:schemeClr>
+      <a:schemeClr val="bg2"/>
     </a:solidFill>
     <a:ln>
       <a:noFill/>
@@ -6816,10 +6847,7 @@
             <a:pPr>
               <a:defRPr sz="1862" b="0" i="0" u="none" strike="noStrike" kern="1200" spc="0" baseline="0">
                 <a:solidFill>
-                  <a:schemeClr val="tx1">
-                    <a:lumMod val="65000"/>
-                    <a:lumOff val="35000"/>
-                  </a:schemeClr>
+                  <a:schemeClr val="tx1"/>
                 </a:solidFill>
                 <a:latin typeface="+mn-lt"/>
                 <a:ea typeface="+mn-ea"/>
@@ -6827,18 +6855,34 @@
               </a:defRPr>
             </a:pPr>
             <a:r>
-              <a:rPr lang="pl-PL" dirty="0"/>
+              <a:rPr lang="pl-PL" dirty="0">
+                <a:solidFill>
+                  <a:schemeClr val="tx1"/>
+                </a:solidFill>
+              </a:rPr>
               <a:t>Suma wyświetleń</a:t>
             </a:r>
             <a:r>
-              <a:rPr lang="pl-PL" baseline="0" dirty="0"/>
+              <a:rPr lang="pl-PL" baseline="0" dirty="0">
+                <a:solidFill>
+                  <a:schemeClr val="tx1"/>
+                </a:solidFill>
+              </a:rPr>
               <a:t> strony Przedłużanie życia </a:t>
             </a:r>
             <a:r>
-              <a:rPr lang="pl-PL" dirty="0"/>
+              <a:rPr lang="pl-PL" dirty="0">
+                <a:solidFill>
+                  <a:schemeClr val="tx1"/>
+                </a:solidFill>
+              </a:rPr>
               <a:t>[mln][2]</a:t>
             </a:r>
-            <a:endParaRPr lang="en-US" dirty="0"/>
+            <a:endParaRPr lang="en-US" dirty="0">
+              <a:solidFill>
+                <a:schemeClr val="tx1"/>
+              </a:solidFill>
+            </a:endParaRPr>
           </a:p>
         </c:rich>
       </c:tx>
@@ -6857,10 +6901,7 @@
           <a:pPr>
             <a:defRPr sz="1862" b="0" i="0" u="none" strike="noStrike" kern="1200" spc="0" baseline="0">
               <a:solidFill>
-                <a:schemeClr val="tx1">
-                  <a:lumMod val="65000"/>
-                  <a:lumOff val="35000"/>
-                </a:schemeClr>
+                <a:schemeClr val="tx1"/>
               </a:solidFill>
               <a:latin typeface="+mn-lt"/>
               <a:ea typeface="+mn-ea"/>
@@ -6904,7 +6945,7 @@
           <c:spPr>
             <a:ln w="28575" cap="rnd">
               <a:solidFill>
-                <a:schemeClr val="accent1"/>
+                <a:schemeClr val="accent2"/>
               </a:solidFill>
               <a:round/>
             </a:ln>
@@ -7581,7 +7622,7 @@
         </c:scaling>
         <c:delete val="0"/>
         <c:axPos val="b"/>
-        <c:numFmt formatCode="m/d/yyyy" sourceLinked="1"/>
+        <c:numFmt formatCode="yyyy" sourceLinked="0"/>
         <c:majorTickMark val="in"/>
         <c:minorTickMark val="none"/>
         <c:tickLblPos val="nextTo"/>
@@ -7623,6 +7664,8 @@
         <c:auto val="1"/>
         <c:lblOffset val="100"/>
         <c:baseTimeUnit val="months"/>
+        <c:majorUnit val="12"/>
+        <c:majorTimeUnit val="months"/>
       </c:dateAx>
       <c:valAx>
         <c:axId val="1473956560"/>
@@ -7690,10 +7733,7 @@
   </c:chart>
   <c:spPr>
     <a:solidFill>
-      <a:schemeClr val="accent1">
-        <a:lumMod val="60000"/>
-        <a:lumOff val="40000"/>
-      </a:schemeClr>
+      <a:schemeClr val="bg2"/>
     </a:solidFill>
     <a:ln>
       <a:noFill/>
@@ -15186,7 +15226,7 @@
     <p:bg>
       <p:bgPr>
         <a:solidFill>
-          <a:schemeClr val="accent1"/>
+          <a:schemeClr val="bg2"/>
         </a:solidFill>
         <a:effectLst/>
       </p:bgPr>
@@ -15847,7 +15887,11 @@
               <a:buNone/>
             </a:pPr>
             <a:r>
-              <a:rPr lang="pl-PL" sz="1600" dirty="0"/>
+              <a:rPr lang="pl-PL" sz="1600" dirty="0">
+                <a:solidFill>
+                  <a:schemeClr val="tx2"/>
+                </a:solidFill>
+              </a:rPr>
               <a:t>Liczba artykułów w polskiej Wikipedii [7]</a:t>
             </a:r>
           </a:p>
@@ -15896,15 +15940,27 @@
               <a:buNone/>
             </a:pPr>
             <a:r>
-              <a:rPr lang="pl-PL" sz="1600" dirty="0"/>
+              <a:rPr lang="pl-PL" sz="1600" dirty="0">
+                <a:solidFill>
+                  <a:schemeClr val="tx2"/>
+                </a:solidFill>
+              </a:rPr>
               <a:t>Suma wyświetleń przez użytkowników </a:t>
             </a:r>
             <a:br>
-              <a:rPr lang="pl-PL" sz="1600" dirty="0"/>
+              <a:rPr lang="pl-PL" sz="1600" dirty="0">
+                <a:solidFill>
+                  <a:schemeClr val="tx2"/>
+                </a:solidFill>
+              </a:rPr>
             </a:br>
             <a:r>
-              <a:rPr lang="pl-PL" sz="1600" dirty="0"/>
-              <a:t>w ostatnich 8 latach[1]*</a:t>
+              <a:rPr lang="pl-PL" sz="1600" dirty="0">
+                <a:solidFill>
+                  <a:schemeClr val="tx2"/>
+                </a:solidFill>
+              </a:rPr>
+              <a:t>w ostatnich 8 latach[1]</a:t>
             </a:r>
           </a:p>
         </p:txBody>
@@ -16180,7 +16236,11 @@
           <a:lstStyle/>
           <a:p>
             <a:r>
-              <a:rPr lang="pl-PL" sz="1200" dirty="0"/>
+              <a:rPr lang="pl-PL" sz="1200" dirty="0">
+                <a:solidFill>
+                  <a:schemeClr val="tx2"/>
+                </a:solidFill>
+              </a:rPr>
               <a:t> Dane o wyświetleniach przedstawiono dla lat 2018-2025 ze względu na jakość danych historycznych.</a:t>
             </a:r>
           </a:p>
@@ -16200,6 +16260,119 @@
 </file>
 
 <file path=ppt/slides/slide10.xml><?xml version="1.0" encoding="utf-8"?>
+<p:sld xmlns:a="http://schemas.openxmlformats.org/drawingml/2006/main" xmlns:r="http://schemas.openxmlformats.org/officeDocument/2006/relationships" xmlns:p="http://schemas.openxmlformats.org/presentationml/2006/main">
+  <p:cSld>
+    <p:spTree>
+      <p:nvGrpSpPr>
+        <p:cNvPr id="1" name=""/>
+        <p:cNvGrpSpPr/>
+        <p:nvPr/>
+      </p:nvGrpSpPr>
+      <p:grpSpPr>
+        <a:xfrm>
+          <a:off x="0" y="0"/>
+          <a:ext cx="0" cy="0"/>
+          <a:chOff x="0" y="0"/>
+          <a:chExt cx="0" cy="0"/>
+        </a:xfrm>
+      </p:grpSpPr>
+      <p:sp>
+        <p:nvSpPr>
+          <p:cNvPr id="2" name="Tytuł 1">
+            <a:extLst>
+              <a:ext uri="{FF2B5EF4-FFF2-40B4-BE49-F238E27FC236}">
+                <a16:creationId xmlns:a16="http://schemas.microsoft.com/office/drawing/2014/main" id="{9B06FA26-7517-0D14-088B-3B65931650DB}"/>
+              </a:ext>
+            </a:extLst>
+          </p:cNvPr>
+          <p:cNvSpPr>
+            <a:spLocks noGrp="1"/>
+          </p:cNvSpPr>
+          <p:nvPr>
+            <p:ph type="title"/>
+          </p:nvPr>
+        </p:nvSpPr>
+        <p:spPr/>
+        <p:txBody>
+          <a:bodyPr/>
+          <a:lstStyle/>
+          <a:p>
+            <a:r>
+              <a:rPr lang="pl-PL" dirty="0"/>
+              <a:t>Dlaczego otwieramy Wikipedię?</a:t>
+            </a:r>
+          </a:p>
+        </p:txBody>
+      </p:sp>
+      <p:sp>
+        <p:nvSpPr>
+          <p:cNvPr id="3" name="Symbol zastępczy zawartości 2">
+            <a:extLst>
+              <a:ext uri="{FF2B5EF4-FFF2-40B4-BE49-F238E27FC236}">
+                <a16:creationId xmlns:a16="http://schemas.microsoft.com/office/drawing/2014/main" id="{3F912FD5-44F1-B5A4-DB1C-68AEC4C7DD9A}"/>
+              </a:ext>
+            </a:extLst>
+          </p:cNvPr>
+          <p:cNvSpPr>
+            <a:spLocks noGrp="1"/>
+          </p:cNvSpPr>
+          <p:nvPr>
+            <p:ph idx="1"/>
+          </p:nvPr>
+        </p:nvSpPr>
+        <p:spPr/>
+        <p:txBody>
+          <a:bodyPr/>
+          <a:lstStyle/>
+          <a:p>
+            <a:pPr marL="0" indent="0">
+              <a:buNone/>
+            </a:pPr>
+            <a:r>
+              <a:rPr lang="pl-PL" dirty="0"/>
+              <a:t>Analiza powyższych przykładów pokazuje, że Wikipedia nie jest tylko encyklopedią. </a:t>
+            </a:r>
+          </a:p>
+          <a:p>
+            <a:pPr marL="0" indent="0">
+              <a:buNone/>
+            </a:pPr>
+            <a:r>
+              <a:rPr lang="pl-PL" dirty="0"/>
+              <a:t>Jest miejscem do którego udajemy się, by zrozumieć świat wokół nas. By zgłębić wydarzenia wywołujące smutek, strach, ciekawość czy ekscytację.</a:t>
+            </a:r>
+          </a:p>
+          <a:p>
+            <a:pPr marL="0" indent="0">
+              <a:buNone/>
+            </a:pPr>
+            <a:endParaRPr lang="pl-PL" dirty="0"/>
+          </a:p>
+          <a:p>
+            <a:pPr marL="0" indent="0">
+              <a:buNone/>
+            </a:pPr>
+            <a:r>
+              <a:rPr lang="pl-PL" b="1" dirty="0"/>
+              <a:t>Wikipedia odpowiada na nasze emocje. Od 25 lat.</a:t>
+            </a:r>
+          </a:p>
+        </p:txBody>
+      </p:sp>
+    </p:spTree>
+    <p:extLst>
+      <p:ext uri="{BB962C8B-B14F-4D97-AF65-F5344CB8AC3E}">
+        <p14:creationId xmlns:p14="http://schemas.microsoft.com/office/powerpoint/2010/main" val="1392380390"/>
+      </p:ext>
+    </p:extLst>
+  </p:cSld>
+  <p:clrMapOvr>
+    <a:masterClrMapping/>
+  </p:clrMapOvr>
+</p:sld>
+</file>
+
+<file path=ppt/slides/slide11.xml><?xml version="1.0" encoding="utf-8"?>
 <p:sld xmlns:a="http://schemas.openxmlformats.org/drawingml/2006/main" xmlns:r="http://schemas.openxmlformats.org/officeDocument/2006/relationships" xmlns:p="http://schemas.openxmlformats.org/presentationml/2006/main">
   <p:cSld>
     <p:spTree>
@@ -16265,7 +16438,7 @@
 </p:sld>
 </file>
 
-<file path=ppt/slides/slide11.xml><?xml version="1.0" encoding="utf-8"?>
+<file path=ppt/slides/slide12.xml><?xml version="1.0" encoding="utf-8"?>
 <p:sld xmlns:a="http://schemas.openxmlformats.org/drawingml/2006/main" xmlns:r="http://schemas.openxmlformats.org/officeDocument/2006/relationships" xmlns:p="http://schemas.openxmlformats.org/presentationml/2006/main">
   <p:cSld>
     <p:spTree>
@@ -16334,36 +16507,42 @@
           <a:lstStyle/>
           <a:p>
             <a:pPr>
+              <a:lnSpc>
+                <a:spcPct val="100000"/>
+              </a:lnSpc>
+              <a:spcBef>
+                <a:spcPts val="0"/>
+              </a:spcBef>
               <a:spcAft>
                 <a:spcPts val="600"/>
               </a:spcAft>
             </a:pPr>
             <a:r>
-              <a:rPr lang="pl-PL" sz="1200" dirty="0">
+              <a:rPr lang="pl-PL" sz="1400" dirty="0">
                 <a:latin typeface="Aptos" panose="020B0004020202020204" pitchFamily="34" charset="0"/>
               </a:rPr>
               <a:t>[1] </a:t>
             </a:r>
             <a:r>
-              <a:rPr lang="pl-PL" sz="1200" dirty="0" err="1">
+              <a:rPr lang="pl-PL" sz="1400" dirty="0" err="1">
                 <a:latin typeface="Aptos" panose="020B0004020202020204" pitchFamily="34" charset="0"/>
               </a:rPr>
               <a:t>Wikistats</a:t>
             </a:r>
             <a:r>
-              <a:rPr lang="pl-PL" sz="1200" dirty="0">
+              <a:rPr lang="pl-PL" sz="1400" dirty="0">
                 <a:latin typeface="Aptos" panose="020B0004020202020204" pitchFamily="34" charset="0"/>
               </a:rPr>
               <a:t> 2 / </a:t>
             </a:r>
             <a:r>
-              <a:rPr lang="pl-PL" sz="1200" dirty="0" err="1">
+              <a:rPr lang="pl-PL" sz="1400" dirty="0" err="1">
                 <a:latin typeface="Aptos" panose="020B0004020202020204" pitchFamily="34" charset="0"/>
               </a:rPr>
               <a:t>Wikimedia</a:t>
             </a:r>
             <a:r>
-              <a:rPr lang="pl-PL" sz="1200" dirty="0">
+              <a:rPr lang="pl-PL" sz="1400" dirty="0">
                 <a:latin typeface="Aptos" panose="020B0004020202020204" pitchFamily="34" charset="0"/>
               </a:rPr>
               <a:t> Analytics API (AQS) | CC0 1.0 </a:t>
@@ -16371,25 +16550,31 @@
           </a:p>
           <a:p>
             <a:pPr>
+              <a:lnSpc>
+                <a:spcPct val="100000"/>
+              </a:lnSpc>
+              <a:spcBef>
+                <a:spcPts val="0"/>
+              </a:spcBef>
               <a:spcAft>
                 <a:spcPts val="600"/>
               </a:spcAft>
             </a:pPr>
             <a:r>
-              <a:rPr lang="pl-PL" sz="1200" dirty="0">
+              <a:rPr lang="pl-PL" sz="1400" dirty="0">
                 <a:latin typeface="Aptos" panose="020B0004020202020204" pitchFamily="34" charset="0"/>
               </a:rPr>
               <a:t>[2] </a:t>
             </a:r>
             <a:r>
-              <a:rPr lang="pl-PL" sz="1200" dirty="0">
+              <a:rPr lang="pl-PL" sz="1400" dirty="0">
                 <a:latin typeface="Aptos" panose="020B0004020202020204" pitchFamily="34" charset="0"/>
                 <a:hlinkClick r:id="rId2"/>
               </a:rPr>
               <a:t>https://pageviews.wmcloud.org/</a:t>
             </a:r>
             <a:r>
-              <a:rPr lang="pl-PL" sz="1200" dirty="0">
+              <a:rPr lang="pl-PL" sz="1400" dirty="0">
                 <a:latin typeface="Aptos" panose="020B0004020202020204" pitchFamily="34" charset="0"/>
               </a:rPr>
               <a:t>  </a:t>
@@ -16397,25 +16582,31 @@
           </a:p>
           <a:p>
             <a:pPr>
+              <a:lnSpc>
+                <a:spcPct val="100000"/>
+              </a:lnSpc>
+              <a:spcBef>
+                <a:spcPts val="0"/>
+              </a:spcBef>
               <a:spcAft>
                 <a:spcPts val="600"/>
               </a:spcAft>
             </a:pPr>
             <a:r>
-              <a:rPr lang="pl-PL" sz="1200" dirty="0">
+              <a:rPr lang="pl-PL" sz="1400" dirty="0">
                 <a:latin typeface="Aptos" panose="020B0004020202020204" pitchFamily="34" charset="0"/>
               </a:rPr>
               <a:t>[3] </a:t>
             </a:r>
             <a:r>
-              <a:rPr lang="pl-PL" sz="1200" dirty="0">
+              <a:rPr lang="pl-PL" sz="1400" dirty="0">
                 <a:latin typeface="Aptos" panose="020B0004020202020204" pitchFamily="34" charset="0"/>
                 <a:hlinkClick r:id="rId3"/>
               </a:rPr>
               <a:t>https://pl.wikipedia.org/wiki/El%C5%BCbieta_II</a:t>
             </a:r>
             <a:r>
-              <a:rPr lang="pl-PL" sz="1200" dirty="0">
+              <a:rPr lang="pl-PL" sz="1400" dirty="0">
                 <a:latin typeface="Aptos" panose="020B0004020202020204" pitchFamily="34" charset="0"/>
               </a:rPr>
               <a:t> – data pobrania 24.09.2026</a:t>
@@ -16423,12 +16614,18 @@
           </a:p>
           <a:p>
             <a:pPr>
+              <a:lnSpc>
+                <a:spcPct val="100000"/>
+              </a:lnSpc>
+              <a:spcBef>
+                <a:spcPts val="0"/>
+              </a:spcBef>
               <a:spcAft>
                 <a:spcPts val="600"/>
               </a:spcAft>
             </a:pPr>
             <a:r>
-              <a:rPr lang="pl-PL" sz="1200" dirty="0">
+              <a:rPr lang="pl-PL" sz="1400" dirty="0">
                 <a:latin typeface="Aptos" panose="020B0004020202020204" pitchFamily="34" charset="0"/>
               </a:rPr>
               <a:t>[4] Kategorie dopasowane przez model językowy, a następnie ręcznie zweryfikowane, „Śmierć osoby” może dotyczyć osoby z artykułu lub osoby powiązanej. Suma zwiększonych wyświetleń została obliczona jako różnica między liczbą wyświetleń w danym miesiącu danego artykułu, a średnią jego wyświetleń. Dane na podstawie liczby wyświetleń top 1000 artykułów każdego miesiąca [5]. Na potrzeby wykresu zsumowano 200 </a:t>
@@ -16436,24 +16633,30 @@
           </a:p>
           <a:p>
             <a:pPr>
+              <a:lnSpc>
+                <a:spcPct val="100000"/>
+              </a:lnSpc>
+              <a:spcBef>
+                <a:spcPts val="0"/>
+              </a:spcBef>
               <a:spcAft>
                 <a:spcPts val="600"/>
               </a:spcAft>
             </a:pPr>
             <a:r>
-              <a:rPr lang="pl-PL" sz="1200" dirty="0">
+              <a:rPr lang="pl-PL" sz="1400" dirty="0">
                 <a:latin typeface="Aptos" panose="020B0004020202020204" pitchFamily="34" charset="0"/>
               </a:rPr>
               <a:t>[5] Zrzuty „</a:t>
             </a:r>
             <a:r>
-              <a:rPr lang="pl-PL" sz="1200" dirty="0" err="1">
+              <a:rPr lang="pl-PL" sz="1400" dirty="0" err="1">
                 <a:latin typeface="Aptos" panose="020B0004020202020204" pitchFamily="34" charset="0"/>
               </a:rPr>
               <a:t>pageview_complete</a:t>
             </a:r>
             <a:r>
-              <a:rPr lang="pl-PL" sz="1200" dirty="0">
+              <a:rPr lang="pl-PL" sz="1400" dirty="0">
                 <a:latin typeface="Aptos" panose="020B0004020202020204" pitchFamily="34" charset="0"/>
               </a:rPr>
               <a:t>” (dumps.wikimedia.org), uzupełnione o metadane stron polskojęzycznej Wikipedii | CC0 1.0 |</a:t>
@@ -16461,12 +16664,18 @@
           </a:p>
           <a:p>
             <a:pPr>
+              <a:lnSpc>
+                <a:spcPct val="100000"/>
+              </a:lnSpc>
+              <a:spcBef>
+                <a:spcPts val="0"/>
+              </a:spcBef>
               <a:spcAft>
                 <a:spcPts val="600"/>
               </a:spcAft>
             </a:pPr>
             <a:r>
-              <a:rPr lang="pl-PL" sz="1200" dirty="0">
+              <a:rPr lang="pl-PL" sz="1400" dirty="0">
                 <a:latin typeface="Aptos" panose="020B0004020202020204" pitchFamily="34" charset="0"/>
               </a:rPr>
               <a:t>[6] Kategoryzacja w oparciu o model językowy, który przypisał jedną z głównych kategorii Wikipedii do top 100 artykułów i zweryfikowane ręcznie. Najpopularniejszą kategorią polskiej Wikipedii są biografie, pozostałe zdecydowanie odbiegają. Nie sumuję kategorii geografia z Polską, gdyż zawiera ona cały przekrój kategorii.</a:t>
@@ -16474,206 +16683,219 @@
           </a:p>
           <a:p>
             <a:pPr>
+              <a:lnSpc>
+                <a:spcPct val="100000"/>
+              </a:lnSpc>
+              <a:spcBef>
+                <a:spcPts val="0"/>
+              </a:spcBef>
               <a:spcAft>
                 <a:spcPts val="600"/>
               </a:spcAft>
             </a:pPr>
             <a:r>
-              <a:rPr lang="pl-PL" sz="1200" dirty="0">
+              <a:rPr lang="pl-PL" sz="1400" dirty="0">
                 <a:latin typeface="Aptos" panose="020B0004020202020204" pitchFamily="34" charset="0"/>
               </a:rPr>
               <a:t>[7] </a:t>
             </a:r>
             <a:r>
-              <a:rPr lang="pl-PL" sz="1200" dirty="0">
+              <a:rPr lang="pl-PL" sz="1400" dirty="0">
                 <a:latin typeface="Aptos" panose="020B0004020202020204" pitchFamily="34" charset="0"/>
                 <a:hlinkClick r:id="rId4"/>
               </a:rPr>
               <a:t>https://pl.wikipedia.org/wiki/Wikipedia:Liczba_artyku%C5%82%C3%B3w_w_polskoj%C4%99zycznej_Wikipedii</a:t>
             </a:r>
             <a:r>
-              <a:rPr lang="pl-PL" sz="1200" dirty="0">
+              <a:rPr lang="pl-PL" sz="1400" dirty="0">
                 <a:latin typeface="Aptos" panose="020B0004020202020204" pitchFamily="34" charset="0"/>
               </a:rPr>
               <a:t> – data pobrania: 25.09.2026</a:t>
             </a:r>
           </a:p>
           <a:p>
-            <a:pPr lvl="0"/>
+            <a:pPr lvl="0">
+              <a:lnSpc>
+                <a:spcPct val="100000"/>
+              </a:lnSpc>
+              <a:spcBef>
+                <a:spcPts val="0"/>
+              </a:spcBef>
+            </a:pPr>
             <a:r>
-              <a:rPr lang="pl-PL" sz="1200" dirty="0">
+              <a:rPr lang="pl-PL" sz="1400" dirty="0">
                 <a:latin typeface="Aptos" panose="020B0004020202020204" pitchFamily="34" charset="0"/>
               </a:rPr>
               <a:t>[8] Użyte zdjęcia: Robert </a:t>
             </a:r>
             <a:r>
-              <a:rPr lang="pl-PL" sz="1200" dirty="0" err="1">
+              <a:rPr lang="pl-PL" sz="1400" dirty="0" err="1">
                 <a:latin typeface="Aptos" panose="020B0004020202020204" pitchFamily="34" charset="0"/>
               </a:rPr>
               <a:t>Lewadowski</a:t>
             </a:r>
             <a:r>
-              <a:rPr lang="pl-PL" sz="1200" dirty="0">
+              <a:rPr lang="pl-PL" sz="1400" dirty="0">
                 <a:latin typeface="Aptos" panose="020B0004020202020204" pitchFamily="34" charset="0"/>
               </a:rPr>
               <a:t>: </a:t>
             </a:r>
             <a:r>
-              <a:rPr lang="pl-PL" sz="1200" dirty="0">
+              <a:rPr lang="pl-PL" sz="1400" dirty="0">
                 <a:latin typeface="Aptos" panose="020B0004020202020204" pitchFamily="34" charset="0"/>
                 <a:hlinkClick r:id="rId5"/>
               </a:rPr>
               <a:t>CC BY-SA 4.0</a:t>
             </a:r>
             <a:r>
-              <a:rPr lang="pl-PL" sz="1200" dirty="0">
+              <a:rPr lang="pl-PL" sz="1400" dirty="0">
                 <a:latin typeface="Aptos" panose="020B0004020202020204" pitchFamily="34" charset="0"/>
               </a:rPr>
               <a:t>, Plik:2019147183134 2019-05-27 </a:t>
             </a:r>
             <a:r>
-              <a:rPr lang="pl-PL" sz="1200" dirty="0" err="1">
+              <a:rPr lang="pl-PL" sz="1400" dirty="0" err="1">
                 <a:latin typeface="Aptos" panose="020B0004020202020204" pitchFamily="34" charset="0"/>
               </a:rPr>
               <a:t>Fussball</a:t>
             </a:r>
             <a:r>
-              <a:rPr lang="pl-PL" sz="1200" dirty="0">
+              <a:rPr lang="pl-PL" sz="1400" dirty="0">
                 <a:latin typeface="Aptos" panose="020B0004020202020204" pitchFamily="34" charset="0"/>
               </a:rPr>
               <a:t> 1.FC </a:t>
             </a:r>
             <a:r>
-              <a:rPr lang="pl-PL" sz="1200" dirty="0" err="1">
+              <a:rPr lang="pl-PL" sz="1400" dirty="0" err="1">
                 <a:latin typeface="Aptos" panose="020B0004020202020204" pitchFamily="34" charset="0"/>
               </a:rPr>
               <a:t>Kaiserslautern</a:t>
             </a:r>
             <a:r>
-              <a:rPr lang="pl-PL" sz="1200" dirty="0">
+              <a:rPr lang="pl-PL" sz="1400" dirty="0">
                 <a:latin typeface="Aptos" panose="020B0004020202020204" pitchFamily="34" charset="0"/>
               </a:rPr>
               <a:t> vs FC Bayern </a:t>
             </a:r>
             <a:r>
-              <a:rPr lang="pl-PL" sz="1200" dirty="0" err="1">
+              <a:rPr lang="pl-PL" sz="1400" dirty="0" err="1">
                 <a:latin typeface="Aptos" panose="020B0004020202020204" pitchFamily="34" charset="0"/>
               </a:rPr>
               <a:t>München</a:t>
             </a:r>
             <a:r>
-              <a:rPr lang="pl-PL" sz="1200" dirty="0">
+              <a:rPr lang="pl-PL" sz="1400" dirty="0">
                 <a:latin typeface="Aptos" panose="020B0004020202020204" pitchFamily="34" charset="0"/>
               </a:rPr>
               <a:t> - Sven - 1D X MK II - 0228 - B70I8527 (</a:t>
             </a:r>
             <a:r>
-              <a:rPr lang="pl-PL" sz="1200" dirty="0" err="1">
+              <a:rPr lang="pl-PL" sz="1400" dirty="0" err="1">
                 <a:latin typeface="Aptos" panose="020B0004020202020204" pitchFamily="34" charset="0"/>
               </a:rPr>
               <a:t>cropped</a:t>
             </a:r>
             <a:r>
-              <a:rPr lang="pl-PL" sz="1200" dirty="0">
+              <a:rPr lang="pl-PL" sz="1400" dirty="0">
                 <a:latin typeface="Aptos" panose="020B0004020202020204" pitchFamily="34" charset="0"/>
               </a:rPr>
               <a:t> </a:t>
             </a:r>
             <a:r>
-              <a:rPr lang="pl-PL" sz="1200" dirty="0" err="1">
+              <a:rPr lang="pl-PL" sz="1400" dirty="0" err="1">
                 <a:latin typeface="Aptos" panose="020B0004020202020204" pitchFamily="34" charset="0"/>
               </a:rPr>
               <a:t>wider</a:t>
             </a:r>
             <a:r>
-              <a:rPr lang="pl-PL" sz="1200" dirty="0">
+              <a:rPr lang="pl-PL" sz="1400" dirty="0">
                 <a:latin typeface="Aptos" panose="020B0004020202020204" pitchFamily="34" charset="0"/>
               </a:rPr>
               <a:t>).jpg, Utworzony: 27 maja 2019, Przesłany: 31 marca 2026; </a:t>
             </a:r>
             <a:br>
-              <a:rPr lang="pl-PL" sz="1200" dirty="0">
+              <a:rPr lang="pl-PL" sz="1400" dirty="0">
                 <a:latin typeface="Aptos" panose="020B0004020202020204" pitchFamily="34" charset="0"/>
               </a:rPr>
             </a:br>
             <a:r>
-              <a:rPr lang="pl-PL" sz="1200" dirty="0">
+              <a:rPr lang="pl-PL" sz="1400" dirty="0">
                 <a:latin typeface="Aptos" panose="020B0004020202020204" pitchFamily="34" charset="0"/>
               </a:rPr>
               <a:t>Elżbieta II – </a:t>
             </a:r>
             <a:r>
-              <a:rPr lang="pl-PL" sz="1200" dirty="0" err="1">
+              <a:rPr lang="pl-PL" sz="1400" dirty="0" err="1">
                 <a:latin typeface="Aptos" panose="020B0004020202020204" pitchFamily="34" charset="0"/>
               </a:rPr>
               <a:t>domenda</a:t>
             </a:r>
             <a:r>
-              <a:rPr lang="pl-PL" sz="1200" dirty="0">
+              <a:rPr lang="pl-PL" sz="1400" dirty="0">
                 <a:latin typeface="Aptos" panose="020B0004020202020204" pitchFamily="34" charset="0"/>
               </a:rPr>
               <a:t> publiczna, z </a:t>
             </a:r>
             <a:r>
-              <a:rPr lang="pl-PL" sz="1200" dirty="0" err="1">
+              <a:rPr lang="pl-PL" sz="1400" dirty="0" err="1">
                 <a:latin typeface="Aptos" panose="020B0004020202020204" pitchFamily="34" charset="0"/>
               </a:rPr>
               <a:t>Wikimedia</a:t>
             </a:r>
             <a:r>
-              <a:rPr lang="pl-PL" sz="1200" dirty="0">
+              <a:rPr lang="pl-PL" sz="1400" dirty="0">
                 <a:latin typeface="Aptos" panose="020B0004020202020204" pitchFamily="34" charset="0"/>
               </a:rPr>
               <a:t> </a:t>
             </a:r>
             <a:r>
-              <a:rPr lang="pl-PL" sz="1200" dirty="0" err="1">
+              <a:rPr lang="pl-PL" sz="1400" dirty="0" err="1">
                 <a:latin typeface="Aptos" panose="020B0004020202020204" pitchFamily="34" charset="0"/>
               </a:rPr>
               <a:t>Commons</a:t>
             </a:r>
             <a:br>
-              <a:rPr lang="pl-PL" sz="1200" dirty="0">
+              <a:rPr lang="pl-PL" sz="1400" dirty="0">
                 <a:latin typeface="Aptos" panose="020B0004020202020204" pitchFamily="34" charset="0"/>
               </a:rPr>
             </a:br>
             <a:r>
-              <a:rPr lang="pl-PL" sz="1200" dirty="0">
+              <a:rPr lang="pl-PL" sz="1400" dirty="0">
                 <a:latin typeface="Aptos" panose="020B0004020202020204" pitchFamily="34" charset="0"/>
               </a:rPr>
               <a:t>Polska – </a:t>
             </a:r>
             <a:r>
-              <a:rPr lang="pl-PL" sz="1200" dirty="0" err="1">
+              <a:rPr lang="pl-PL" sz="1400" dirty="0" err="1">
                 <a:latin typeface="Aptos" panose="020B0004020202020204" pitchFamily="34" charset="0"/>
               </a:rPr>
               <a:t>domenda</a:t>
             </a:r>
             <a:r>
-              <a:rPr lang="pl-PL" sz="1200" dirty="0">
+              <a:rPr lang="pl-PL" sz="1400" dirty="0">
                 <a:latin typeface="Aptos" panose="020B0004020202020204" pitchFamily="34" charset="0"/>
               </a:rPr>
               <a:t> publiczna, z </a:t>
             </a:r>
             <a:r>
-              <a:rPr lang="pl-PL" sz="1200" dirty="0" err="1">
+              <a:rPr lang="pl-PL" sz="1400" dirty="0" err="1">
                 <a:latin typeface="Aptos" panose="020B0004020202020204" pitchFamily="34" charset="0"/>
               </a:rPr>
               <a:t>Wikimedia</a:t>
             </a:r>
             <a:r>
-              <a:rPr lang="pl-PL" sz="1200" dirty="0">
+              <a:rPr lang="pl-PL" sz="1400" dirty="0">
                 <a:latin typeface="Aptos" panose="020B0004020202020204" pitchFamily="34" charset="0"/>
               </a:rPr>
               <a:t> </a:t>
             </a:r>
             <a:r>
-              <a:rPr lang="pl-PL" sz="1200" dirty="0" err="1">
+              <a:rPr lang="pl-PL" sz="1400" dirty="0" err="1">
                 <a:latin typeface="Aptos" panose="020B0004020202020204" pitchFamily="34" charset="0"/>
               </a:rPr>
               <a:t>Commons</a:t>
             </a:r>
-            <a:endParaRPr lang="pl-PL" sz="1200" dirty="0">
+            <a:endParaRPr lang="pl-PL" sz="1400" dirty="0">
               <a:latin typeface="Aptos" panose="020B0004020202020204" pitchFamily="34" charset="0"/>
             </a:endParaRPr>
           </a:p>
@@ -16683,17 +16905,7 @@
                 <a:spcPts val="600"/>
               </a:spcAft>
             </a:pPr>
-            <a:endParaRPr lang="pl-PL" sz="1200" dirty="0">
-              <a:latin typeface="Aptos" panose="020B0004020202020204" pitchFamily="34" charset="0"/>
-            </a:endParaRPr>
-          </a:p>
-          <a:p>
-            <a:pPr>
-              <a:spcAft>
-                <a:spcPts val="600"/>
-              </a:spcAft>
-            </a:pPr>
-            <a:endParaRPr lang="pl-PL" sz="1200" dirty="0">
+            <a:endParaRPr lang="pl-PL" sz="1400" dirty="0">
               <a:latin typeface="Aptos" panose="020B0004020202020204" pitchFamily="34" charset="0"/>
             </a:endParaRPr>
           </a:p>
@@ -16712,7 +16924,7 @@
 </p:sld>
 </file>
 
-<file path=ppt/slides/slide12.xml><?xml version="1.0" encoding="utf-8"?>
+<file path=ppt/slides/slide13.xml><?xml version="1.0" encoding="utf-8"?>
 <p:sld xmlns:a="http://schemas.openxmlformats.org/drawingml/2006/main" xmlns:r="http://schemas.openxmlformats.org/officeDocument/2006/relationships" xmlns:p="http://schemas.openxmlformats.org/presentationml/2006/main">
   <p:cSld>
     <p:spTree>
@@ -16781,7 +16993,7 @@
             <p:ph idx="1"/>
             <p:extLst>
               <p:ext uri="{D42A27DB-BD31-4B8C-83A1-F6EECF244321}">
-                <p14:modId xmlns:p14="http://schemas.microsoft.com/office/powerpoint/2010/main" val="2493646543"/>
+                <p14:modId xmlns:p14="http://schemas.microsoft.com/office/powerpoint/2010/main" val="1620021444"/>
               </p:ext>
             </p:extLst>
           </p:nvPr>
@@ -17107,7 +17319,7 @@
             <p:ph idx="1"/>
             <p:extLst>
               <p:ext uri="{D42A27DB-BD31-4B8C-83A1-F6EECF244321}">
-                <p14:modId xmlns:p14="http://schemas.microsoft.com/office/powerpoint/2010/main" val="2485637000"/>
+                <p14:modId xmlns:p14="http://schemas.microsoft.com/office/powerpoint/2010/main" val="1176321063"/>
               </p:ext>
             </p:extLst>
           </p:nvPr>
@@ -17151,7 +17363,11 @@
           <a:lstStyle/>
           <a:p>
             <a:r>
-              <a:rPr lang="pl-PL" sz="1200" dirty="0"/>
+              <a:rPr lang="pl-PL" sz="1200" dirty="0">
+                <a:solidFill>
+                  <a:schemeClr val="tx2"/>
+                </a:solidFill>
+              </a:rPr>
               <a:t>Kategoryzacja w oparciu o model językowy, który przypisał jedną z głównych kategorii Wikipedii do top 100 artykułów.</a:t>
             </a:r>
           </a:p>
@@ -17356,7 +17572,11 @@
               <a:buNone/>
             </a:pPr>
             <a:r>
-              <a:rPr lang="pl-PL" sz="1800" dirty="0"/>
+              <a:rPr lang="pl-PL" sz="1800" dirty="0">
+                <a:solidFill>
+                  <a:schemeClr val="tx2"/>
+                </a:solidFill>
+              </a:rPr>
               <a:t>Choć Wikipedia zawiera informacje o niemal każdym aspekcie świata, najbardziej interesują nas inni ludzie. Biografie wyraźnie dominują nad wszystkimi pozostałymi kategoriami, zostawiając daleko w tyle historię, geografię czy kulturę.</a:t>
             </a:r>
           </a:p>
@@ -17436,7 +17656,7 @@
             <p:ph idx="1"/>
             <p:extLst>
               <p:ext uri="{D42A27DB-BD31-4B8C-83A1-F6EECF244321}">
-                <p14:modId xmlns:p14="http://schemas.microsoft.com/office/powerpoint/2010/main" val="743188763"/>
+                <p14:modId xmlns:p14="http://schemas.microsoft.com/office/powerpoint/2010/main" val="2789255478"/>
               </p:ext>
             </p:extLst>
           </p:nvPr>
@@ -17710,7 +17930,11 @@
               <a:buNone/>
             </a:pPr>
             <a:r>
-              <a:rPr lang="pl-PL" sz="1800" dirty="0"/>
+              <a:rPr lang="pl-PL" sz="1800" dirty="0">
+                <a:solidFill>
+                  <a:schemeClr val="tx2"/>
+                </a:solidFill>
+              </a:rPr>
               <a:t>Wśród najpopularniejszych artykułów trudno znaleźć przypadkowe tematy. Dotyczą osób, państw lub wydarzeń, które regularnie pojawiają się w przestrzeni publicznej. [8]</a:t>
             </a:r>
           </a:p>
@@ -17781,6 +18005,132 @@
           <p:cNvPr id="2" name="Tytuł 1">
             <a:extLst>
               <a:ext uri="{FF2B5EF4-FFF2-40B4-BE49-F238E27FC236}">
+                <a16:creationId xmlns:a16="http://schemas.microsoft.com/office/drawing/2014/main" id="{A8C6FF99-3A0C-0F2B-9884-203C3D922B93}"/>
+              </a:ext>
+            </a:extLst>
+          </p:cNvPr>
+          <p:cNvSpPr>
+            <a:spLocks noGrp="1"/>
+          </p:cNvSpPr>
+          <p:nvPr>
+            <p:ph type="title"/>
+          </p:nvPr>
+        </p:nvSpPr>
+        <p:spPr/>
+        <p:txBody>
+          <a:bodyPr/>
+          <a:lstStyle/>
+          <a:p>
+            <a:endParaRPr lang="pl-PL"/>
+          </a:p>
+        </p:txBody>
+      </p:sp>
+      <p:sp>
+        <p:nvSpPr>
+          <p:cNvPr id="3" name="Symbol zastępczy zawartości 2">
+            <a:extLst>
+              <a:ext uri="{FF2B5EF4-FFF2-40B4-BE49-F238E27FC236}">
+                <a16:creationId xmlns:a16="http://schemas.microsoft.com/office/drawing/2014/main" id="{B035FDFD-2CB6-8BE8-CCC2-1079FAF12330}"/>
+              </a:ext>
+            </a:extLst>
+          </p:cNvPr>
+          <p:cNvSpPr>
+            <a:spLocks noGrp="1"/>
+          </p:cNvSpPr>
+          <p:nvPr>
+            <p:ph idx="1"/>
+          </p:nvPr>
+        </p:nvSpPr>
+        <p:spPr/>
+        <p:txBody>
+          <a:bodyPr/>
+          <a:lstStyle/>
+          <a:p>
+            <a:endParaRPr lang="pl-PL"/>
+          </a:p>
+        </p:txBody>
+      </p:sp>
+      <p:sp>
+        <p:nvSpPr>
+          <p:cNvPr id="4" name="Prostokąt 3">
+            <a:extLst>
+              <a:ext uri="{FF2B5EF4-FFF2-40B4-BE49-F238E27FC236}">
+                <a16:creationId xmlns:a16="http://schemas.microsoft.com/office/drawing/2014/main" id="{979DE685-5610-7A26-550A-17E569F80DCB}"/>
+              </a:ext>
+            </a:extLst>
+          </p:cNvPr>
+          <p:cNvSpPr/>
+          <p:nvPr/>
+        </p:nvSpPr>
+        <p:spPr>
+          <a:xfrm>
+            <a:off x="838199" y="1825625"/>
+            <a:ext cx="10515599" cy="4351338"/>
+          </a:xfrm>
+          <a:prstGeom prst="rect">
+            <a:avLst/>
+          </a:prstGeom>
+        </p:spPr>
+        <p:style>
+          <a:lnRef idx="2">
+            <a:schemeClr val="accent1">
+              <a:shade val="15000"/>
+            </a:schemeClr>
+          </a:lnRef>
+          <a:fillRef idx="1">
+            <a:schemeClr val="accent1"/>
+          </a:fillRef>
+          <a:effectRef idx="0">
+            <a:schemeClr val="accent1"/>
+          </a:effectRef>
+          <a:fontRef idx="minor">
+            <a:schemeClr val="lt1"/>
+          </a:fontRef>
+        </p:style>
+        <p:txBody>
+          <a:bodyPr rtlCol="0" anchor="ctr"/>
+          <a:lstStyle/>
+          <a:p>
+            <a:pPr algn="ctr"/>
+            <a:endParaRPr lang="pl-PL"/>
+          </a:p>
+        </p:txBody>
+      </p:sp>
+    </p:spTree>
+    <p:extLst>
+      <p:ext uri="{BB962C8B-B14F-4D97-AF65-F5344CB8AC3E}">
+        <p14:creationId xmlns:p14="http://schemas.microsoft.com/office/powerpoint/2010/main" val="2661574776"/>
+      </p:ext>
+    </p:extLst>
+  </p:cSld>
+  <p:clrMapOvr>
+    <a:masterClrMapping/>
+  </p:clrMapOvr>
+</p:sld>
+</file>
+
+<file path=ppt/slides/slide5.xml><?xml version="1.0" encoding="utf-8"?>
+<p:sld xmlns:a="http://schemas.openxmlformats.org/drawingml/2006/main" xmlns:r="http://schemas.openxmlformats.org/officeDocument/2006/relationships" xmlns:p="http://schemas.openxmlformats.org/presentationml/2006/main">
+  <p:cSld>
+    <p:spTree>
+      <p:nvGrpSpPr>
+        <p:cNvPr id="1" name=""/>
+        <p:cNvGrpSpPr/>
+        <p:nvPr/>
+      </p:nvGrpSpPr>
+      <p:grpSpPr>
+        <a:xfrm>
+          <a:off x="0" y="0"/>
+          <a:ext cx="0" cy="0"/>
+          <a:chOff x="0" y="0"/>
+          <a:chExt cx="0" cy="0"/>
+        </a:xfrm>
+      </p:grpSpPr>
+      <p:sp>
+        <p:nvSpPr>
+          <p:cNvPr id="2" name="Tytuł 1">
+            <a:extLst>
+              <a:ext uri="{FF2B5EF4-FFF2-40B4-BE49-F238E27FC236}">
                 <a16:creationId xmlns:a16="http://schemas.microsoft.com/office/drawing/2014/main" id="{E9460EE4-EA64-CC2B-6927-2112E5725B79}"/>
               </a:ext>
             </a:extLst>
@@ -17819,7 +18169,7 @@
           <p:nvPr>
             <p:extLst>
               <p:ext uri="{D42A27DB-BD31-4B8C-83A1-F6EECF244321}">
-                <p14:modId xmlns:p14="http://schemas.microsoft.com/office/powerpoint/2010/main" val="2680172190"/>
+                <p14:modId xmlns:p14="http://schemas.microsoft.com/office/powerpoint/2010/main" val="1691029741"/>
               </p:ext>
             </p:extLst>
           </p:nvPr>
@@ -17855,7 +18205,7 @@
             <a:avLst/>
           </a:prstGeom>
           <a:solidFill>
-            <a:schemeClr val="accent2"/>
+            <a:schemeClr val="accent5"/>
           </a:solidFill>
         </p:spPr>
         <p:txBody>
@@ -17912,7 +18262,7 @@
             <a:avLst/>
           </a:prstGeom>
           <a:solidFill>
-            <a:schemeClr val="accent5"/>
+            <a:schemeClr val="accent2"/>
           </a:solidFill>
         </p:spPr>
         <p:txBody>
@@ -17954,10 +18304,7 @@
             <a:avLst/>
           </a:prstGeom>
           <a:solidFill>
-            <a:schemeClr val="accent1">
-              <a:lumMod val="60000"/>
-              <a:lumOff val="40000"/>
-            </a:schemeClr>
+            <a:schemeClr val="accent1"/>
           </a:solidFill>
         </p:spPr>
         <p:txBody>
@@ -17987,7 +18334,7 @@
 </p:sld>
 </file>
 
-<file path=ppt/slides/slide5.xml><?xml version="1.0" encoding="utf-8"?>
+<file path=ppt/slides/slide6.xml><?xml version="1.0" encoding="utf-8"?>
 <p:sld xmlns:a="http://schemas.openxmlformats.org/drawingml/2006/main" xmlns:r="http://schemas.openxmlformats.org/officeDocument/2006/relationships" xmlns:p="http://schemas.openxmlformats.org/presentationml/2006/main">
   <p:cSld>
     <p:spTree>
@@ -18033,7 +18380,7 @@
           <a:p>
             <a:r>
               <a:rPr lang="pl-PL" dirty="0"/>
-              <a:t>Elżbieta II - wyszukiwanie</a:t>
+              <a:t>Elżbieta II – śmierć i wesele</a:t>
             </a:r>
           </a:p>
         </p:txBody>
@@ -18052,6 +18399,11 @@
           </p:cNvGraphicFramePr>
           <p:nvPr>
             <p:ph idx="1"/>
+            <p:extLst>
+              <p:ext uri="{D42A27DB-BD31-4B8C-83A1-F6EECF244321}">
+                <p14:modId xmlns:p14="http://schemas.microsoft.com/office/powerpoint/2010/main" val="2998772088"/>
+              </p:ext>
+            </p:extLst>
           </p:nvPr>
         </p:nvGraphicFramePr>
         <p:xfrm>
@@ -18264,23 +18616,43 @@
               <a:buNone/>
             </a:pPr>
             <a:r>
-              <a:rPr lang="pl-PL" sz="1800" dirty="0"/>
+              <a:rPr lang="pl-PL" sz="1800" dirty="0">
+                <a:solidFill>
+                  <a:schemeClr val="tx2"/>
+                </a:solidFill>
+              </a:rPr>
               <a:t>Największe zainteresowanie stroną Elżbiety II wynika z Jej śmierci oraz śmierci Jej męża – Księcia Filipa. Mniejsze, acz znaczące skoki w ruchu generowane są przez tematy medialne, jak obchody rocznicy ślubu czy ślub Księcia Harry’ego z </a:t>
             </a:r>
             <a:r>
-              <a:rPr lang="pl-PL" sz="1800" dirty="0" err="1"/>
+              <a:rPr lang="pl-PL" sz="1800" dirty="0" err="1">
+                <a:solidFill>
+                  <a:schemeClr val="tx2"/>
+                </a:solidFill>
+              </a:rPr>
               <a:t>Meghan</a:t>
             </a:r>
             <a:r>
-              <a:rPr lang="pl-PL" sz="1800" dirty="0"/>
+              <a:rPr lang="pl-PL" sz="1800" dirty="0">
+                <a:solidFill>
+                  <a:schemeClr val="tx2"/>
+                </a:solidFill>
+              </a:rPr>
               <a:t> </a:t>
             </a:r>
             <a:r>
-              <a:rPr lang="pl-PL" sz="1800" dirty="0" err="1"/>
+              <a:rPr lang="pl-PL" sz="1800" dirty="0" err="1">
+                <a:solidFill>
+                  <a:schemeClr val="tx2"/>
+                </a:solidFill>
+              </a:rPr>
               <a:t>Markle</a:t>
             </a:r>
             <a:r>
-              <a:rPr lang="pl-PL" sz="1800" dirty="0"/>
+              <a:rPr lang="pl-PL" sz="1800" dirty="0">
+                <a:solidFill>
+                  <a:schemeClr val="tx2"/>
+                </a:solidFill>
+              </a:rPr>
               <a:t>.</a:t>
             </a:r>
           </a:p>
@@ -18299,7 +18671,7 @@
 </p:sld>
 </file>
 
-<file path=ppt/slides/slide6.xml><?xml version="1.0" encoding="utf-8"?>
+<file path=ppt/slides/slide7.xml><?xml version="1.0" encoding="utf-8"?>
 <p:sld xmlns:a="http://schemas.openxmlformats.org/drawingml/2006/main" xmlns:r="http://schemas.openxmlformats.org/officeDocument/2006/relationships" xmlns:p="http://schemas.openxmlformats.org/presentationml/2006/main">
   <p:cSld>
     <p:spTree>
@@ -18368,7 +18740,7 @@
             <p:ph idx="1"/>
             <p:extLst>
               <p:ext uri="{D42A27DB-BD31-4B8C-83A1-F6EECF244321}">
-                <p14:modId xmlns:p14="http://schemas.microsoft.com/office/powerpoint/2010/main" val="195582739"/>
+                <p14:modId xmlns:p14="http://schemas.microsoft.com/office/powerpoint/2010/main" val="4264124187"/>
               </p:ext>
             </p:extLst>
           </p:nvPr>
@@ -18582,28 +18954,56 @@
               <a:buNone/>
             </a:pPr>
             <a:r>
-              <a:rPr lang="pl-PL" sz="1800" dirty="0"/>
+              <a:rPr lang="pl-PL" sz="1800" dirty="0">
+                <a:solidFill>
+                  <a:schemeClr val="tx2"/>
+                </a:solidFill>
+              </a:rPr>
               <a:t>Pięć największych szczytów wyświetleń strony Igi Świątek pochodzi </a:t>
             </a:r>
             <a:br>
-              <a:rPr lang="pl-PL" sz="1800" dirty="0"/>
+              <a:rPr lang="pl-PL" sz="1800" dirty="0">
+                <a:solidFill>
+                  <a:schemeClr val="tx2"/>
+                </a:solidFill>
+              </a:rPr>
             </a:br>
             <a:r>
-              <a:rPr lang="pl-PL" sz="1800" dirty="0"/>
+              <a:rPr lang="pl-PL" sz="1800" dirty="0">
+                <a:solidFill>
+                  <a:schemeClr val="tx2"/>
+                </a:solidFill>
+              </a:rPr>
               <a:t>z wygranych turniejów wielkoszlemowych – czterech Rolanda Garrosa </a:t>
             </a:r>
             <a:br>
-              <a:rPr lang="pl-PL" sz="1800" dirty="0"/>
+              <a:rPr lang="pl-PL" sz="1800" dirty="0">
+                <a:solidFill>
+                  <a:schemeClr val="tx2"/>
+                </a:solidFill>
+              </a:rPr>
             </a:br>
             <a:r>
-              <a:rPr lang="pl-PL" sz="1800" dirty="0"/>
+              <a:rPr lang="pl-PL" sz="1800" dirty="0">
+                <a:solidFill>
+                  <a:schemeClr val="tx2"/>
+                </a:solidFill>
+              </a:rPr>
               <a:t>i Wimbledonu. Ani spadek </a:t>
             </a:r>
             <a:br>
-              <a:rPr lang="pl-PL" sz="1800" dirty="0"/>
+              <a:rPr lang="pl-PL" sz="1800" dirty="0">
+                <a:solidFill>
+                  <a:schemeClr val="tx2"/>
+                </a:solidFill>
+              </a:rPr>
             </a:br>
             <a:r>
-              <a:rPr lang="pl-PL" sz="1800" dirty="0"/>
+              <a:rPr lang="pl-PL" sz="1800" dirty="0">
+                <a:solidFill>
+                  <a:schemeClr val="tx2"/>
+                </a:solidFill>
+              </a:rPr>
               <a:t>z pierwszego miejsca klasyfikacji WTA, ani pozytywny wynik kontroli antydopingowej nie spowodowały takiego zainteresowania, jak spektakularne wygrane.</a:t>
             </a:r>
           </a:p>
@@ -18622,7 +19022,7 @@
 </p:sld>
 </file>
 
-<file path=ppt/slides/slide7.xml><?xml version="1.0" encoding="utf-8"?>
+<file path=ppt/slides/slide8.xml><?xml version="1.0" encoding="utf-8"?>
 <p:sld xmlns:a="http://schemas.openxmlformats.org/drawingml/2006/main" xmlns:r="http://schemas.openxmlformats.org/officeDocument/2006/relationships" xmlns:p="http://schemas.openxmlformats.org/presentationml/2006/main">
   <p:cSld>
     <p:spTree>
@@ -18661,7 +19061,12 @@
             <p:ph type="title"/>
           </p:nvPr>
         </p:nvSpPr>
-        <p:spPr/>
+        <p:spPr>
+          <a:xfrm>
+            <a:off x="838200" y="365125"/>
+            <a:ext cx="10796080" cy="1325563"/>
+          </a:xfrm>
+        </p:spPr>
         <p:txBody>
           <a:bodyPr>
             <a:normAutofit/>
@@ -18669,8 +19074,12 @@
           <a:lstStyle/>
           <a:p>
             <a:r>
+              <a:rPr lang="pl-PL" dirty="0"/>
+              <a:t>Drugie życie </a:t>
+            </a:r>
+            <a:r>
               <a:rPr lang="pl-PL" dirty="0" err="1"/>
-              <a:t>Freddie</a:t>
+              <a:t>Freddiego</a:t>
             </a:r>
             <a:r>
               <a:rPr lang="pl-PL" dirty="0"/>
@@ -18678,12 +19087,9 @@
             </a:r>
             <a:r>
               <a:rPr lang="pl-PL" dirty="0" err="1"/>
-              <a:t>Mercury</a:t>
+              <a:t>Mercury’ego</a:t>
             </a:r>
-            <a:r>
-              <a:rPr lang="pl-PL" dirty="0"/>
-              <a:t> – film i rocznica</a:t>
-            </a:r>
+            <a:endParaRPr lang="pl-PL" dirty="0"/>
           </a:p>
         </p:txBody>
       </p:sp>
@@ -18703,7 +19109,7 @@
             <p:ph idx="1"/>
             <p:extLst>
               <p:ext uri="{D42A27DB-BD31-4B8C-83A1-F6EECF244321}">
-                <p14:modId xmlns:p14="http://schemas.microsoft.com/office/powerpoint/2010/main" val="2410929887"/>
+                <p14:modId xmlns:p14="http://schemas.microsoft.com/office/powerpoint/2010/main" val="3535259308"/>
               </p:ext>
             </p:extLst>
           </p:nvPr>
@@ -18917,30 +19323,58 @@
               <a:buNone/>
             </a:pPr>
             <a:r>
-              <a:rPr lang="pl-PL" sz="1800" dirty="0"/>
+              <a:rPr lang="pl-PL" sz="1800" dirty="0">
+                <a:solidFill>
+                  <a:schemeClr val="tx2"/>
+                </a:solidFill>
+              </a:rPr>
               <a:t>Historia </a:t>
             </a:r>
             <a:r>
-              <a:rPr lang="pl-PL" sz="1800" dirty="0" err="1"/>
+              <a:rPr lang="pl-PL" sz="1800" dirty="0" err="1">
+                <a:solidFill>
+                  <a:schemeClr val="tx2"/>
+                </a:solidFill>
+              </a:rPr>
               <a:t>Freddiego</a:t>
             </a:r>
             <a:r>
-              <a:rPr lang="pl-PL" sz="1800" dirty="0"/>
+              <a:rPr lang="pl-PL" sz="1800" dirty="0">
+                <a:solidFill>
+                  <a:schemeClr val="tx2"/>
+                </a:solidFill>
+              </a:rPr>
               <a:t> </a:t>
             </a:r>
             <a:r>
-              <a:rPr lang="pl-PL" sz="1800" dirty="0" err="1"/>
+              <a:rPr lang="pl-PL" sz="1800" dirty="0" err="1">
+                <a:solidFill>
+                  <a:schemeClr val="tx2"/>
+                </a:solidFill>
+              </a:rPr>
               <a:t>Mercury'ego</a:t>
             </a:r>
             <a:r>
-              <a:rPr lang="pl-PL" sz="1800" dirty="0"/>
+              <a:rPr lang="pl-PL" sz="1800" dirty="0">
+                <a:solidFill>
+                  <a:schemeClr val="tx2"/>
+                </a:solidFill>
+              </a:rPr>
               <a:t> pokazuje, </a:t>
             </a:r>
             <a:br>
-              <a:rPr lang="pl-PL" sz="1800" dirty="0"/>
+              <a:rPr lang="pl-PL" sz="1800" dirty="0">
+                <a:solidFill>
+                  <a:schemeClr val="tx2"/>
+                </a:solidFill>
+              </a:rPr>
             </a:br>
             <a:r>
-              <a:rPr lang="pl-PL" sz="1800" dirty="0"/>
+              <a:rPr lang="pl-PL" sz="1800" dirty="0">
+                <a:solidFill>
+                  <a:schemeClr val="tx2"/>
+                </a:solidFill>
+              </a:rPr>
               <a:t>że media potrafią nadać drugie życie znanym postaciom. Premierze filmu i okrągłej rocznicy śmierci towarzyszył wyraźny wzrost zainteresowania jego biografią.</a:t>
             </a:r>
           </a:p>
@@ -18959,7 +19393,7 @@
 </p:sld>
 </file>
 
-<file path=ppt/slides/slide8.xml><?xml version="1.0" encoding="utf-8"?>
+<file path=ppt/slides/slide9.xml><?xml version="1.0" encoding="utf-8"?>
 <p:sld xmlns:a="http://schemas.openxmlformats.org/drawingml/2006/main" xmlns:r="http://schemas.openxmlformats.org/officeDocument/2006/relationships" xmlns:p="http://schemas.openxmlformats.org/presentationml/2006/main">
   <p:cSld>
     <p:spTree>
@@ -19022,7 +19456,7 @@
             <p:ph idx="1"/>
             <p:extLst>
               <p:ext uri="{D42A27DB-BD31-4B8C-83A1-F6EECF244321}">
-                <p14:modId xmlns:p14="http://schemas.microsoft.com/office/powerpoint/2010/main" val="3024158751"/>
+                <p14:modId xmlns:p14="http://schemas.microsoft.com/office/powerpoint/2010/main" val="3964021528"/>
               </p:ext>
             </p:extLst>
           </p:nvPr>
@@ -19236,21 +19670,41 @@
               <a:buNone/>
             </a:pPr>
             <a:r>
-              <a:rPr lang="pl-PL" sz="1800" dirty="0"/>
+              <a:rPr lang="pl-PL" sz="1800" dirty="0">
+                <a:solidFill>
+                  <a:schemeClr val="tx2"/>
+                </a:solidFill>
+              </a:rPr>
               <a:t>Duże imprezy sportowe sprawiają również, że chcemy lepiej poznać państwa, o których na co dzień wiemy niewiele. Sporo osób odkryło Curaçao i Republika Zielonego Przylądka dzięki ich pierwszemu udziałowi </a:t>
             </a:r>
             <a:br>
-              <a:rPr lang="pl-PL" sz="1800" dirty="0"/>
+              <a:rPr lang="pl-PL" sz="1800" dirty="0">
+                <a:solidFill>
+                  <a:schemeClr val="tx2"/>
+                </a:solidFill>
+              </a:rPr>
             </a:br>
             <a:r>
-              <a:rPr lang="pl-PL" sz="1800" dirty="0"/>
+              <a:rPr lang="pl-PL" sz="1800" dirty="0">
+                <a:solidFill>
+                  <a:schemeClr val="tx2"/>
+                </a:solidFill>
+              </a:rPr>
               <a:t>w Mistrzostwach Świata </a:t>
             </a:r>
             <a:br>
-              <a:rPr lang="pl-PL" sz="1800" dirty="0"/>
+              <a:rPr lang="pl-PL" sz="1800" dirty="0">
+                <a:solidFill>
+                  <a:schemeClr val="tx2"/>
+                </a:solidFill>
+              </a:rPr>
             </a:br>
             <a:r>
-              <a:rPr lang="pl-PL" sz="1800" dirty="0"/>
+              <a:rPr lang="pl-PL" sz="1800" dirty="0">
+                <a:solidFill>
+                  <a:schemeClr val="tx2"/>
+                </a:solidFill>
+              </a:rPr>
               <a:t>w Piłce Nożnej.</a:t>
             </a:r>
           </a:p>
@@ -19269,123 +19723,10 @@
 </p:sld>
 </file>
 
-<file path=ppt/slides/slide9.xml><?xml version="1.0" encoding="utf-8"?>
-<p:sld xmlns:a="http://schemas.openxmlformats.org/drawingml/2006/main" xmlns:r="http://schemas.openxmlformats.org/officeDocument/2006/relationships" xmlns:p="http://schemas.openxmlformats.org/presentationml/2006/main">
-  <p:cSld>
-    <p:spTree>
-      <p:nvGrpSpPr>
-        <p:cNvPr id="1" name=""/>
-        <p:cNvGrpSpPr/>
-        <p:nvPr/>
-      </p:nvGrpSpPr>
-      <p:grpSpPr>
-        <a:xfrm>
-          <a:off x="0" y="0"/>
-          <a:ext cx="0" cy="0"/>
-          <a:chOff x="0" y="0"/>
-          <a:chExt cx="0" cy="0"/>
-        </a:xfrm>
-      </p:grpSpPr>
-      <p:sp>
-        <p:nvSpPr>
-          <p:cNvPr id="2" name="Tytuł 1">
-            <a:extLst>
-              <a:ext uri="{FF2B5EF4-FFF2-40B4-BE49-F238E27FC236}">
-                <a16:creationId xmlns:a16="http://schemas.microsoft.com/office/drawing/2014/main" id="{9B06FA26-7517-0D14-088B-3B65931650DB}"/>
-              </a:ext>
-            </a:extLst>
-          </p:cNvPr>
-          <p:cNvSpPr>
-            <a:spLocks noGrp="1"/>
-          </p:cNvSpPr>
-          <p:nvPr>
-            <p:ph type="title"/>
-          </p:nvPr>
-        </p:nvSpPr>
-        <p:spPr/>
-        <p:txBody>
-          <a:bodyPr/>
-          <a:lstStyle/>
-          <a:p>
-            <a:r>
-              <a:rPr lang="pl-PL" dirty="0"/>
-              <a:t>Dlaczego otwieramy Wikipedię?</a:t>
-            </a:r>
-          </a:p>
-        </p:txBody>
-      </p:sp>
-      <p:sp>
-        <p:nvSpPr>
-          <p:cNvPr id="3" name="Symbol zastępczy zawartości 2">
-            <a:extLst>
-              <a:ext uri="{FF2B5EF4-FFF2-40B4-BE49-F238E27FC236}">
-                <a16:creationId xmlns:a16="http://schemas.microsoft.com/office/drawing/2014/main" id="{3F912FD5-44F1-B5A4-DB1C-68AEC4C7DD9A}"/>
-              </a:ext>
-            </a:extLst>
-          </p:cNvPr>
-          <p:cNvSpPr>
-            <a:spLocks noGrp="1"/>
-          </p:cNvSpPr>
-          <p:nvPr>
-            <p:ph idx="1"/>
-          </p:nvPr>
-        </p:nvSpPr>
-        <p:spPr/>
-        <p:txBody>
-          <a:bodyPr/>
-          <a:lstStyle/>
-          <a:p>
-            <a:pPr marL="0" indent="0">
-              <a:buNone/>
-            </a:pPr>
-            <a:r>
-              <a:rPr lang="pl-PL" dirty="0"/>
-              <a:t>Analiza powyższych przykładów pokazuje, że Wikipedia nie jest tylko encyklopedią. </a:t>
-            </a:r>
-          </a:p>
-          <a:p>
-            <a:pPr marL="0" indent="0">
-              <a:buNone/>
-            </a:pPr>
-            <a:r>
-              <a:rPr lang="pl-PL" dirty="0"/>
-              <a:t>Jest miejscem do którego udajemy się, by zrozumieć świat wokół nas. By zgłębić wydarzenia wywołujące smutek, strach, ciekawość czy ekscytację.</a:t>
-            </a:r>
-          </a:p>
-          <a:p>
-            <a:pPr marL="0" indent="0">
-              <a:buNone/>
-            </a:pPr>
-            <a:endParaRPr lang="pl-PL" dirty="0"/>
-          </a:p>
-          <a:p>
-            <a:pPr marL="0" indent="0">
-              <a:buNone/>
-            </a:pPr>
-            <a:r>
-              <a:rPr lang="pl-PL" b="1" dirty="0"/>
-              <a:t>Wikipedia odpowiada na nasze emocje. Od 25 lat.</a:t>
-            </a:r>
-          </a:p>
-        </p:txBody>
-      </p:sp>
-    </p:spTree>
-    <p:extLst>
-      <p:ext uri="{BB962C8B-B14F-4D97-AF65-F5344CB8AC3E}">
-        <p14:creationId xmlns:p14="http://schemas.microsoft.com/office/powerpoint/2010/main" val="1392380390"/>
-      </p:ext>
-    </p:extLst>
-  </p:cSld>
-  <p:clrMapOvr>
-    <a:masterClrMapping/>
-  </p:clrMapOvr>
-</p:sld>
-</file>
-
 <file path=ppt/theme/theme1.xml><?xml version="1.0" encoding="utf-8"?>
 <a:theme xmlns:a="http://schemas.openxmlformats.org/drawingml/2006/main" name="Motyw pakietu Office">
   <a:themeElements>
-    <a:clrScheme name="Niestandardowy 2">
+    <a:clrScheme name="Wikimedia_polska">
       <a:dk1>
         <a:srgbClr val="000000"/>
       </a:dk1>
@@ -19393,34 +19734,34 @@
         <a:sysClr val="window" lastClr="FFFFFF"/>
       </a:lt1>
       <a:dk2>
-        <a:srgbClr val="0E2841"/>
+        <a:srgbClr val="404040"/>
       </a:dk2>
       <a:lt2>
-        <a:srgbClr val="E8E8E8"/>
+        <a:srgbClr val="F9F9F0"/>
       </a:lt2>
       <a:accent1>
-        <a:srgbClr val="049DFF"/>
+        <a:srgbClr val="C3D8EF"/>
       </a:accent1>
       <a:accent2>
-        <a:srgbClr val="E97132"/>
+        <a:srgbClr val="0E65C0"/>
       </a:accent2>
       <a:accent3>
-        <a:srgbClr val="196B24"/>
+        <a:srgbClr val="E5C0C0"/>
       </a:accent3>
       <a:accent4>
-        <a:srgbClr val="0F9ED5"/>
+        <a:srgbClr val="CBE0D5"/>
       </a:accent4>
       <a:accent5>
-        <a:srgbClr val="A02B93"/>
+        <a:srgbClr val="EE8019"/>
       </a:accent5>
       <a:accent6>
-        <a:srgbClr val="4EA72E"/>
+        <a:srgbClr val="7F7F7F"/>
       </a:accent6>
       <a:hlink>
-        <a:srgbClr val="467886"/>
+        <a:srgbClr val="0E65C0"/>
       </a:hlink>
       <a:folHlink>
-        <a:srgbClr val="96607D"/>
+        <a:srgbClr val="0E65C0"/>
       </a:folHlink>
     </a:clrScheme>
     <a:fontScheme name="Niestandardowy 2">

--- a/storytelling/Storytelling.pptx
+++ b/storytelling/Storytelling.pptx
@@ -5,22 +5,21 @@
     <p:sldMasterId id="2147483648" r:id="rId1"/>
   </p:sldMasterIdLst>
   <p:notesMasterIdLst>
-    <p:notesMasterId r:id="rId15"/>
+    <p:notesMasterId r:id="rId14"/>
   </p:notesMasterIdLst>
   <p:sldIdLst>
     <p:sldId id="256" r:id="rId2"/>
     <p:sldId id="258" r:id="rId3"/>
     <p:sldId id="257" r:id="rId4"/>
-    <p:sldId id="268" r:id="rId5"/>
-    <p:sldId id="261" r:id="rId6"/>
-    <p:sldId id="262" r:id="rId7"/>
-    <p:sldId id="263" r:id="rId8"/>
-    <p:sldId id="264" r:id="rId9"/>
-    <p:sldId id="260" r:id="rId10"/>
-    <p:sldId id="266" r:id="rId11"/>
-    <p:sldId id="267" r:id="rId12"/>
-    <p:sldId id="259" r:id="rId13"/>
-    <p:sldId id="265" r:id="rId14"/>
+    <p:sldId id="261" r:id="rId5"/>
+    <p:sldId id="262" r:id="rId6"/>
+    <p:sldId id="263" r:id="rId7"/>
+    <p:sldId id="264" r:id="rId8"/>
+    <p:sldId id="260" r:id="rId9"/>
+    <p:sldId id="266" r:id="rId10"/>
+    <p:sldId id="267" r:id="rId11"/>
+    <p:sldId id="259" r:id="rId12"/>
+    <p:sldId id="265" r:id="rId13"/>
   </p:sldIdLst>
   <p:sldSz cx="12192000" cy="6858000"/>
   <p:notesSz cx="6858000" cy="9144000"/>
@@ -127,7 +126,6 @@
             <p14:sldId id="256"/>
             <p14:sldId id="258"/>
             <p14:sldId id="257"/>
-            <p14:sldId id="268"/>
             <p14:sldId id="261"/>
             <p14:sldId id="262"/>
             <p14:sldId id="263"/>
@@ -179,10 +177,17 @@
               </a:defRPr>
             </a:pPr>
             <a:r>
-              <a:rPr lang="pl-PL" dirty="0"/>
-              <a:t>Suma wyświetleń w latach 2018 – 2026 wg kategorii [mln][6]</a:t>
+              <a:rPr lang="pl-PL" sz="1800" dirty="0"/>
+              <a:t>Suma wyświetleń w latach 2018 – 2026 </a:t>
             </a:r>
-            <a:endParaRPr lang="en-US" dirty="0"/>
+            <a:br>
+              <a:rPr lang="pl-PL" sz="1800" dirty="0"/>
+            </a:br>
+            <a:r>
+              <a:rPr lang="pl-PL" sz="1800" dirty="0"/>
+              <a:t>wg kategorii [mln][6]</a:t>
+            </a:r>
+            <a:endParaRPr lang="en-US" sz="1800" dirty="0"/>
           </a:p>
         </c:rich>
       </c:tx>
@@ -518,14 +523,14 @@
               </a:defRPr>
             </a:pPr>
             <a:r>
-              <a:rPr lang="pl-PL" dirty="0">
+              <a:rPr lang="pl-PL" sz="1800" dirty="0">
                 <a:solidFill>
                   <a:schemeClr val="tx1"/>
                 </a:solidFill>
               </a:rPr>
               <a:t>Suma wyświetleń w latach 2018 – 2026 [mln] [2]</a:t>
             </a:r>
-            <a:endParaRPr lang="en-US" dirty="0">
+            <a:endParaRPr lang="en-US" sz="1800" dirty="0">
               <a:solidFill>
                 <a:schemeClr val="tx1"/>
               </a:solidFill>
@@ -566,10 +571,10 @@
           <c:layoutTarget val="inner"/>
           <c:xMode val="edge"/>
           <c:yMode val="edge"/>
-          <c:x val="0.24189380884412409"/>
-          <c:y val="0.18825468321860345"/>
-          <c:w val="0.6796250272249863"/>
-          <c:h val="0.71774755765195564"/>
+          <c:x val="0.28141072314560384"/>
+          <c:y val="0.23752681419249164"/>
+          <c:w val="0.64010815248045794"/>
+          <c:h val="0.71226658501458329"/>
         </c:manualLayout>
       </c:layout>
       <c:barChart>
@@ -1069,7 +1074,7 @@
               </a:defRPr>
             </a:pPr>
             <a:r>
-              <a:rPr lang="en-US" dirty="0">
+              <a:rPr lang="en-US" sz="1800" dirty="0">
                 <a:solidFill>
                   <a:schemeClr val="tx1"/>
                 </a:solidFill>
@@ -1077,7 +1082,7 @@
               <a:t>Suma</a:t>
             </a:r>
             <a:r>
-              <a:rPr lang="pl-PL" dirty="0">
+              <a:rPr lang="pl-PL" sz="1800" dirty="0">
                 <a:solidFill>
                   <a:schemeClr val="tx1"/>
                 </a:solidFill>
@@ -1085,7 +1090,7 @@
               <a:t> wzrostów</a:t>
             </a:r>
             <a:r>
-              <a:rPr lang="pl-PL" baseline="0" dirty="0">
+              <a:rPr lang="pl-PL" sz="1800" baseline="0" dirty="0">
                 <a:solidFill>
                   <a:schemeClr val="tx1"/>
                 </a:solidFill>
@@ -1093,7 +1098,7 @@
               <a:t> odwiedzin stron wg kategorii przyczyn</a:t>
             </a:r>
             <a:r>
-              <a:rPr lang="pl-PL" dirty="0">
+              <a:rPr lang="pl-PL" sz="1800" dirty="0">
                 <a:solidFill>
                   <a:schemeClr val="tx1"/>
                 </a:solidFill>
@@ -1101,7 +1106,7 @@
               <a:t> zwiększonego</a:t>
             </a:r>
             <a:r>
-              <a:rPr lang="pl-PL" baseline="0" dirty="0">
+              <a:rPr lang="pl-PL" sz="1800" baseline="0" dirty="0">
                 <a:solidFill>
                   <a:schemeClr val="tx1"/>
                 </a:solidFill>
@@ -1109,14 +1114,14 @@
               <a:t> ruchu[mln] </a:t>
             </a:r>
             <a:r>
-              <a:rPr lang="pl-PL" dirty="0">
+              <a:rPr lang="pl-PL" sz="1800" dirty="0">
                 <a:solidFill>
                   <a:schemeClr val="tx1"/>
                 </a:solidFill>
               </a:rPr>
               <a:t>[4]</a:t>
             </a:r>
-            <a:endParaRPr lang="en-US" dirty="0">
+            <a:endParaRPr lang="en-US" sz="1800" dirty="0">
               <a:solidFill>
                 <a:schemeClr val="tx1"/>
               </a:solidFill>
@@ -1772,15 +1777,15 @@
               </a:defRPr>
             </a:pPr>
             <a:r>
-              <a:rPr lang="pl-PL" dirty="0">
+              <a:rPr lang="pl-PL" sz="1800" dirty="0">
                 <a:solidFill>
                   <a:schemeClr val="tx1"/>
                 </a:solidFill>
               </a:rPr>
-              <a:t>Suma wyświetleń</a:t>
+              <a:t>Przebieg wyświetleń</a:t>
             </a:r>
             <a:r>
-              <a:rPr lang="pl-PL" baseline="0" dirty="0">
+              <a:rPr lang="pl-PL" sz="1800" baseline="0" dirty="0">
                 <a:solidFill>
                   <a:schemeClr val="tx1"/>
                 </a:solidFill>
@@ -1788,7 +1793,7 @@
               <a:t> strony </a:t>
             </a:r>
             <a:r>
-              <a:rPr lang="en-US" dirty="0">
+              <a:rPr lang="en-US" sz="1800" dirty="0">
                 <a:solidFill>
                   <a:schemeClr val="tx1"/>
                 </a:solidFill>
@@ -1796,14 +1801,14 @@
               <a:t>Elżbieta II</a:t>
             </a:r>
             <a:r>
-              <a:rPr lang="pl-PL" dirty="0">
+              <a:rPr lang="pl-PL" sz="1800" dirty="0">
                 <a:solidFill>
                   <a:schemeClr val="tx1"/>
                 </a:solidFill>
               </a:rPr>
               <a:t> [mln][2][3]</a:t>
             </a:r>
-            <a:endParaRPr lang="en-US" dirty="0">
+            <a:endParaRPr lang="en-US" sz="1800" dirty="0">
               <a:solidFill>
                 <a:schemeClr val="tx1"/>
               </a:solidFill>
@@ -3229,15 +3234,15 @@
               </a:defRPr>
             </a:pPr>
             <a:r>
-              <a:rPr lang="pl-PL" dirty="0">
+              <a:rPr lang="pl-PL" sz="1800" dirty="0">
                 <a:solidFill>
                   <a:schemeClr val="tx1"/>
                 </a:solidFill>
               </a:rPr>
-              <a:t>Suma wyświetleń</a:t>
+              <a:t>Przebieg wyświetleń</a:t>
             </a:r>
             <a:r>
-              <a:rPr lang="pl-PL" baseline="0" dirty="0">
+              <a:rPr lang="pl-PL" sz="1800" baseline="0" dirty="0">
                 <a:solidFill>
                   <a:schemeClr val="tx1"/>
                 </a:solidFill>
@@ -3245,14 +3250,14 @@
               <a:t> strony Iga Świątek</a:t>
             </a:r>
             <a:r>
-              <a:rPr lang="pl-PL" dirty="0">
+              <a:rPr lang="pl-PL" sz="1800" dirty="0">
                 <a:solidFill>
                   <a:schemeClr val="tx1"/>
                 </a:solidFill>
               </a:rPr>
               <a:t> [tys.][2]</a:t>
             </a:r>
-            <a:endParaRPr lang="en-US" dirty="0">
+            <a:endParaRPr lang="en-US" sz="1800" dirty="0">
               <a:solidFill>
                 <a:schemeClr val="tx1"/>
               </a:solidFill>
@@ -4155,15 +4160,15 @@
               </a:defRPr>
             </a:pPr>
             <a:r>
-              <a:rPr lang="pl-PL" dirty="0">
+              <a:rPr lang="pl-PL" sz="1800" dirty="0">
                 <a:solidFill>
                   <a:schemeClr val="tx1"/>
                 </a:solidFill>
               </a:rPr>
-              <a:t>Suma wyświetleń</a:t>
+              <a:t>Przebieg wyświetleń</a:t>
             </a:r>
             <a:r>
-              <a:rPr lang="pl-PL" baseline="0" dirty="0">
+              <a:rPr lang="pl-PL" sz="1800" baseline="0" dirty="0">
                 <a:solidFill>
                   <a:schemeClr val="tx1"/>
                 </a:solidFill>
@@ -4171,7 +4176,7 @@
               <a:t> strony </a:t>
             </a:r>
             <a:r>
-              <a:rPr lang="pl-PL" baseline="0" dirty="0" err="1">
+              <a:rPr lang="pl-PL" sz="1800" baseline="0" dirty="0" err="1">
                 <a:solidFill>
                   <a:schemeClr val="tx1"/>
                 </a:solidFill>
@@ -4179,7 +4184,7 @@
               <a:t>Freddie</a:t>
             </a:r>
             <a:r>
-              <a:rPr lang="pl-PL" baseline="0" dirty="0">
+              <a:rPr lang="pl-PL" sz="1800" baseline="0" dirty="0">
                 <a:solidFill>
                   <a:schemeClr val="tx1"/>
                 </a:solidFill>
@@ -4187,7 +4192,7 @@
               <a:t> </a:t>
             </a:r>
             <a:r>
-              <a:rPr lang="pl-PL" baseline="0" dirty="0" err="1">
+              <a:rPr lang="pl-PL" sz="1800" baseline="0" dirty="0" err="1">
                 <a:solidFill>
                   <a:schemeClr val="tx1"/>
                 </a:solidFill>
@@ -4195,7 +4200,7 @@
               <a:t>Mercury</a:t>
             </a:r>
             <a:r>
-              <a:rPr lang="pl-PL" baseline="0" dirty="0">
+              <a:rPr lang="pl-PL" sz="1800" baseline="0" dirty="0">
                 <a:solidFill>
                   <a:schemeClr val="tx1"/>
                 </a:solidFill>
@@ -4203,14 +4208,14 @@
               <a:t> </a:t>
             </a:r>
             <a:r>
-              <a:rPr lang="pl-PL" dirty="0">
+              <a:rPr lang="pl-PL" sz="1800" dirty="0">
                 <a:solidFill>
                   <a:schemeClr val="tx1"/>
                 </a:solidFill>
               </a:rPr>
               <a:t>[tys.][2]</a:t>
             </a:r>
-            <a:endParaRPr lang="en-US" dirty="0">
+            <a:endParaRPr lang="en-US" sz="1800" dirty="0">
               <a:solidFill>
                 <a:schemeClr val="tx1"/>
               </a:solidFill>
@@ -5251,15 +5256,15 @@
               </a:defRPr>
             </a:pPr>
             <a:r>
-              <a:rPr lang="pl-PL" dirty="0">
+              <a:rPr lang="pl-PL" sz="1800" dirty="0">
                 <a:solidFill>
                   <a:schemeClr val="tx1"/>
                 </a:solidFill>
               </a:rPr>
-              <a:t>Suma wyświetleń</a:t>
+              <a:t>Przebieg wyświetleń</a:t>
             </a:r>
             <a:r>
-              <a:rPr lang="pl-PL" baseline="0" dirty="0">
+              <a:rPr lang="pl-PL" sz="1800" baseline="0" dirty="0">
                 <a:solidFill>
                   <a:schemeClr val="tx1"/>
                 </a:solidFill>
@@ -5267,14 +5272,14 @@
               <a:t> stron </a:t>
             </a:r>
             <a:r>
-              <a:rPr lang="pl-PL" dirty="0">
+              <a:rPr lang="pl-PL" sz="1800" dirty="0">
                 <a:solidFill>
                   <a:schemeClr val="tx1"/>
                 </a:solidFill>
               </a:rPr>
               <a:t>Republika Zielonego Przylądka oraz Curaçao [tys.][2]</a:t>
             </a:r>
-            <a:endParaRPr lang="en-US" dirty="0">
+            <a:endParaRPr lang="en-US" sz="1800" dirty="0">
               <a:solidFill>
                 <a:schemeClr val="tx1"/>
               </a:solidFill>
@@ -5339,11 +5344,9 @@
             </c:strRef>
           </c:tx>
           <c:spPr>
-            <a:ln w="28575" cap="rnd">
+            <a:ln w="25400" cap="rnd">
               <a:solidFill>
-                <a:schemeClr val="accent4">
-                  <a:lumMod val="50000"/>
-                </a:schemeClr>
+                <a:schemeClr val="accent4"/>
               </a:solidFill>
               <a:prstDash val="solid"/>
               <a:round/>
@@ -6017,7 +6020,7 @@
             </c:strRef>
           </c:tx>
           <c:spPr>
-            <a:ln w="28575" cap="rnd">
+            <a:ln w="25400" cap="rnd">
               <a:solidFill>
                 <a:schemeClr val="accent2"/>
               </a:solidFill>
@@ -6845,7 +6848,7 @@
           <a:lstStyle/>
           <a:p>
             <a:pPr>
-              <a:defRPr sz="1862" b="0" i="0" u="none" strike="noStrike" kern="1200" spc="0" baseline="0">
+              <a:defRPr sz="1800" b="0" i="0" u="none" strike="noStrike" kern="1200" spc="0" baseline="0">
                 <a:solidFill>
                   <a:schemeClr val="tx1"/>
                 </a:solidFill>
@@ -6855,15 +6858,15 @@
               </a:defRPr>
             </a:pPr>
             <a:r>
-              <a:rPr lang="pl-PL" dirty="0">
+              <a:rPr lang="pl-PL" sz="1800" dirty="0">
                 <a:solidFill>
                   <a:schemeClr val="tx1"/>
                 </a:solidFill>
               </a:rPr>
-              <a:t>Suma wyświetleń</a:t>
+              <a:t>Przebieg wyświetleń</a:t>
             </a:r>
             <a:r>
-              <a:rPr lang="pl-PL" baseline="0" dirty="0">
+              <a:rPr lang="pl-PL" sz="1800" baseline="0" dirty="0">
                 <a:solidFill>
                   <a:schemeClr val="tx1"/>
                 </a:solidFill>
@@ -6871,14 +6874,14 @@
               <a:t> strony Przedłużanie życia </a:t>
             </a:r>
             <a:r>
-              <a:rPr lang="pl-PL" dirty="0">
+              <a:rPr lang="pl-PL" sz="1800" dirty="0">
                 <a:solidFill>
                   <a:schemeClr val="tx1"/>
                 </a:solidFill>
               </a:rPr>
               <a:t>[mln][2]</a:t>
             </a:r>
-            <a:endParaRPr lang="en-US" dirty="0">
+            <a:endParaRPr lang="en-US" sz="1800" dirty="0">
               <a:solidFill>
                 <a:schemeClr val="tx1"/>
               </a:solidFill>
@@ -6899,7 +6902,7 @@
         <a:lstStyle/>
         <a:p>
           <a:pPr>
-            <a:defRPr sz="1862" b="0" i="0" u="none" strike="noStrike" kern="1200" spc="0" baseline="0">
+            <a:defRPr sz="1800" b="0" i="0" u="none" strike="noStrike" kern="1200" spc="0" baseline="0">
               <a:solidFill>
                 <a:schemeClr val="tx1"/>
               </a:solidFill>
@@ -15515,8 +15518,8 @@
         </p:blipFill>
         <p:spPr>
           <a:xfrm>
-            <a:off x="10716883" y="6140211"/>
-            <a:ext cx="636917" cy="581264"/>
+            <a:off x="10836612" y="6249479"/>
+            <a:ext cx="517187" cy="471996"/>
           </a:xfrm>
           <a:prstGeom prst="rect">
             <a:avLst/>
@@ -16202,7 +16205,7 @@
             </a:pPr>
             <a:r>
               <a:rPr lang="pl-PL" sz="2400" dirty="0"/>
-              <a:t>Przez ostatnie 25 lat zadaliśmy miliardy pytań w polskiej Wikipedii. Sprawdźmy czego dotyczą, kiedy się pojawiają i dlaczego.</a:t>
+              <a:t>Przez ostatnie 25 lat zadaliśmy miliardy pytań w polskiej Wikipedii. Sprawdźmy, czego dotyczą, kiedy się pojawiają i dlaczego.</a:t>
             </a:r>
           </a:p>
         </p:txBody>
@@ -16276,119 +16279,6 @@
           <a:chExt cx="0" cy="0"/>
         </a:xfrm>
       </p:grpSpPr>
-      <p:sp>
-        <p:nvSpPr>
-          <p:cNvPr id="2" name="Tytuł 1">
-            <a:extLst>
-              <a:ext uri="{FF2B5EF4-FFF2-40B4-BE49-F238E27FC236}">
-                <a16:creationId xmlns:a16="http://schemas.microsoft.com/office/drawing/2014/main" id="{9B06FA26-7517-0D14-088B-3B65931650DB}"/>
-              </a:ext>
-            </a:extLst>
-          </p:cNvPr>
-          <p:cNvSpPr>
-            <a:spLocks noGrp="1"/>
-          </p:cNvSpPr>
-          <p:nvPr>
-            <p:ph type="title"/>
-          </p:nvPr>
-        </p:nvSpPr>
-        <p:spPr/>
-        <p:txBody>
-          <a:bodyPr/>
-          <a:lstStyle/>
-          <a:p>
-            <a:r>
-              <a:rPr lang="pl-PL" dirty="0"/>
-              <a:t>Dlaczego otwieramy Wikipedię?</a:t>
-            </a:r>
-          </a:p>
-        </p:txBody>
-      </p:sp>
-      <p:sp>
-        <p:nvSpPr>
-          <p:cNvPr id="3" name="Symbol zastępczy zawartości 2">
-            <a:extLst>
-              <a:ext uri="{FF2B5EF4-FFF2-40B4-BE49-F238E27FC236}">
-                <a16:creationId xmlns:a16="http://schemas.microsoft.com/office/drawing/2014/main" id="{3F912FD5-44F1-B5A4-DB1C-68AEC4C7DD9A}"/>
-              </a:ext>
-            </a:extLst>
-          </p:cNvPr>
-          <p:cNvSpPr>
-            <a:spLocks noGrp="1"/>
-          </p:cNvSpPr>
-          <p:nvPr>
-            <p:ph idx="1"/>
-          </p:nvPr>
-        </p:nvSpPr>
-        <p:spPr/>
-        <p:txBody>
-          <a:bodyPr/>
-          <a:lstStyle/>
-          <a:p>
-            <a:pPr marL="0" indent="0">
-              <a:buNone/>
-            </a:pPr>
-            <a:r>
-              <a:rPr lang="pl-PL" dirty="0"/>
-              <a:t>Analiza powyższych przykładów pokazuje, że Wikipedia nie jest tylko encyklopedią. </a:t>
-            </a:r>
-          </a:p>
-          <a:p>
-            <a:pPr marL="0" indent="0">
-              <a:buNone/>
-            </a:pPr>
-            <a:r>
-              <a:rPr lang="pl-PL" dirty="0"/>
-              <a:t>Jest miejscem do którego udajemy się, by zrozumieć świat wokół nas. By zgłębić wydarzenia wywołujące smutek, strach, ciekawość czy ekscytację.</a:t>
-            </a:r>
-          </a:p>
-          <a:p>
-            <a:pPr marL="0" indent="0">
-              <a:buNone/>
-            </a:pPr>
-            <a:endParaRPr lang="pl-PL" dirty="0"/>
-          </a:p>
-          <a:p>
-            <a:pPr marL="0" indent="0">
-              <a:buNone/>
-            </a:pPr>
-            <a:r>
-              <a:rPr lang="pl-PL" b="1" dirty="0"/>
-              <a:t>Wikipedia odpowiada na nasze emocje. Od 25 lat.</a:t>
-            </a:r>
-          </a:p>
-        </p:txBody>
-      </p:sp>
-    </p:spTree>
-    <p:extLst>
-      <p:ext uri="{BB962C8B-B14F-4D97-AF65-F5344CB8AC3E}">
-        <p14:creationId xmlns:p14="http://schemas.microsoft.com/office/powerpoint/2010/main" val="1392380390"/>
-      </p:ext>
-    </p:extLst>
-  </p:cSld>
-  <p:clrMapOvr>
-    <a:masterClrMapping/>
-  </p:clrMapOvr>
-</p:sld>
-</file>
-
-<file path=ppt/slides/slide11.xml><?xml version="1.0" encoding="utf-8"?>
-<p:sld xmlns:a="http://schemas.openxmlformats.org/drawingml/2006/main" xmlns:r="http://schemas.openxmlformats.org/officeDocument/2006/relationships" xmlns:p="http://schemas.openxmlformats.org/presentationml/2006/main">
-  <p:cSld>
-    <p:spTree>
-      <p:nvGrpSpPr>
-        <p:cNvPr id="1" name=""/>
-        <p:cNvGrpSpPr/>
-        <p:nvPr/>
-      </p:nvGrpSpPr>
-      <p:grpSpPr>
-        <a:xfrm>
-          <a:off x="0" y="0"/>
-          <a:ext cx="0" cy="0"/>
-          <a:chOff x="0" y="0"/>
-          <a:chExt cx="0" cy="0"/>
-        </a:xfrm>
-      </p:grpSpPr>
       <p:pic>
         <p:nvPicPr>
           <p:cNvPr id="5" name="Obraz 4">
@@ -16438,7 +16328,7 @@
 </p:sld>
 </file>
 
-<file path=ppt/slides/slide12.xml><?xml version="1.0" encoding="utf-8"?>
+<file path=ppt/slides/slide11.xml><?xml version="1.0" encoding="utf-8"?>
 <p:sld xmlns:a="http://schemas.openxmlformats.org/drawingml/2006/main" xmlns:r="http://schemas.openxmlformats.org/officeDocument/2006/relationships" xmlns:p="http://schemas.openxmlformats.org/presentationml/2006/main">
   <p:cSld>
     <p:spTree>
@@ -16506,7 +16396,7 @@
           </a:bodyPr>
           <a:lstStyle/>
           <a:p>
-            <a:pPr>
+            <a:pPr marL="0" indent="0">
               <a:lnSpc>
                 <a:spcPct val="100000"/>
               </a:lnSpc>
@@ -16516,6 +16406,7 @@
               <a:spcAft>
                 <a:spcPts val="600"/>
               </a:spcAft>
+              <a:buNone/>
             </a:pPr>
             <a:r>
               <a:rPr lang="pl-PL" sz="1400" dirty="0">
@@ -16549,7 +16440,7 @@
             </a:r>
           </a:p>
           <a:p>
-            <a:pPr>
+            <a:pPr marL="0" indent="0">
               <a:lnSpc>
                 <a:spcPct val="100000"/>
               </a:lnSpc>
@@ -16559,6 +16450,7 @@
               <a:spcAft>
                 <a:spcPts val="600"/>
               </a:spcAft>
+              <a:buNone/>
             </a:pPr>
             <a:r>
               <a:rPr lang="pl-PL" sz="1400" dirty="0">
@@ -16581,7 +16473,7 @@
             </a:r>
           </a:p>
           <a:p>
-            <a:pPr>
+            <a:pPr marL="0" indent="0">
               <a:lnSpc>
                 <a:spcPct val="100000"/>
               </a:lnSpc>
@@ -16591,6 +16483,7 @@
               <a:spcAft>
                 <a:spcPts val="600"/>
               </a:spcAft>
+              <a:buNone/>
             </a:pPr>
             <a:r>
               <a:rPr lang="pl-PL" sz="1400" dirty="0">
@@ -16613,7 +16506,7 @@
             </a:r>
           </a:p>
           <a:p>
-            <a:pPr>
+            <a:pPr marL="0" indent="0">
               <a:lnSpc>
                 <a:spcPct val="100000"/>
               </a:lnSpc>
@@ -16623,6 +16516,7 @@
               <a:spcAft>
                 <a:spcPts val="600"/>
               </a:spcAft>
+              <a:buNone/>
             </a:pPr>
             <a:r>
               <a:rPr lang="pl-PL" sz="1400" dirty="0">
@@ -16632,7 +16526,7 @@
             </a:r>
           </a:p>
           <a:p>
-            <a:pPr>
+            <a:pPr marL="0" indent="0">
               <a:lnSpc>
                 <a:spcPct val="100000"/>
               </a:lnSpc>
@@ -16642,6 +16536,7 @@
               <a:spcAft>
                 <a:spcPts val="600"/>
               </a:spcAft>
+              <a:buNone/>
             </a:pPr>
             <a:r>
               <a:rPr lang="pl-PL" sz="1400" dirty="0">
@@ -16663,7 +16558,7 @@
             </a:r>
           </a:p>
           <a:p>
-            <a:pPr>
+            <a:pPr marL="0" indent="0">
               <a:lnSpc>
                 <a:spcPct val="100000"/>
               </a:lnSpc>
@@ -16673,6 +16568,7 @@
               <a:spcAft>
                 <a:spcPts val="600"/>
               </a:spcAft>
+              <a:buNone/>
             </a:pPr>
             <a:r>
               <a:rPr lang="pl-PL" sz="1400" dirty="0">
@@ -16682,7 +16578,7 @@
             </a:r>
           </a:p>
           <a:p>
-            <a:pPr>
+            <a:pPr marL="0" indent="0">
               <a:lnSpc>
                 <a:spcPct val="100000"/>
               </a:lnSpc>
@@ -16692,6 +16588,7 @@
               <a:spcAft>
                 <a:spcPts val="600"/>
               </a:spcAft>
+              <a:buNone/>
             </a:pPr>
             <a:r>
               <a:rPr lang="pl-PL" sz="1400" dirty="0">
@@ -16714,31 +16611,20 @@
             </a:r>
           </a:p>
           <a:p>
-            <a:pPr lvl="0">
+            <a:pPr marL="0" lvl="0" indent="0">
               <a:lnSpc>
                 <a:spcPct val="100000"/>
               </a:lnSpc>
               <a:spcBef>
                 <a:spcPts val="0"/>
               </a:spcBef>
+              <a:buNone/>
             </a:pPr>
             <a:r>
               <a:rPr lang="pl-PL" sz="1400" dirty="0">
                 <a:latin typeface="Aptos" panose="020B0004020202020204" pitchFamily="34" charset="0"/>
               </a:rPr>
-              <a:t>[8] Użyte zdjęcia: Robert </a:t>
-            </a:r>
-            <a:r>
-              <a:rPr lang="pl-PL" sz="1400" dirty="0" err="1">
-                <a:latin typeface="Aptos" panose="020B0004020202020204" pitchFamily="34" charset="0"/>
-              </a:rPr>
-              <a:t>Lewadowski</a:t>
-            </a:r>
-            <a:r>
-              <a:rPr lang="pl-PL" sz="1400" dirty="0">
-                <a:latin typeface="Aptos" panose="020B0004020202020204" pitchFamily="34" charset="0"/>
-              </a:rPr>
-              <a:t>: </a:t>
+              <a:t>[8] Użyte zdjęcia: Robert Lewandowski: </a:t>
             </a:r>
             <a:r>
               <a:rPr lang="pl-PL" sz="1400" dirty="0">
@@ -16822,19 +16708,7 @@
               <a:rPr lang="pl-PL" sz="1400" dirty="0">
                 <a:latin typeface="Aptos" panose="020B0004020202020204" pitchFamily="34" charset="0"/>
               </a:rPr>
-              <a:t>Elżbieta II – </a:t>
-            </a:r>
-            <a:r>
-              <a:rPr lang="pl-PL" sz="1400" dirty="0" err="1">
-                <a:latin typeface="Aptos" panose="020B0004020202020204" pitchFamily="34" charset="0"/>
-              </a:rPr>
-              <a:t>domenda</a:t>
-            </a:r>
-            <a:r>
-              <a:rPr lang="pl-PL" sz="1400" dirty="0">
-                <a:latin typeface="Aptos" panose="020B0004020202020204" pitchFamily="34" charset="0"/>
-              </a:rPr>
-              <a:t> publiczna, z </a:t>
+              <a:t>Elżbieta II – domena publiczna, z </a:t>
             </a:r>
             <a:r>
               <a:rPr lang="pl-PL" sz="1400" dirty="0" err="1">
@@ -16863,19 +16737,7 @@
               <a:rPr lang="pl-PL" sz="1400" dirty="0">
                 <a:latin typeface="Aptos" panose="020B0004020202020204" pitchFamily="34" charset="0"/>
               </a:rPr>
-              <a:t>Polska – </a:t>
-            </a:r>
-            <a:r>
-              <a:rPr lang="pl-PL" sz="1400" dirty="0" err="1">
-                <a:latin typeface="Aptos" panose="020B0004020202020204" pitchFamily="34" charset="0"/>
-              </a:rPr>
-              <a:t>domenda</a:t>
-            </a:r>
-            <a:r>
-              <a:rPr lang="pl-PL" sz="1400" dirty="0">
-                <a:latin typeface="Aptos" panose="020B0004020202020204" pitchFamily="34" charset="0"/>
-              </a:rPr>
-              <a:t> publiczna, z </a:t>
+              <a:t>Polska – domena publiczna, z </a:t>
             </a:r>
             <a:r>
               <a:rPr lang="pl-PL" sz="1400" dirty="0" err="1">
@@ -16924,7 +16786,7 @@
 </p:sld>
 </file>
 
-<file path=ppt/slides/slide13.xml><?xml version="1.0" encoding="utf-8"?>
+<file path=ppt/slides/slide12.xml><?xml version="1.0" encoding="utf-8"?>
 <p:sld xmlns:a="http://schemas.openxmlformats.org/drawingml/2006/main" xmlns:r="http://schemas.openxmlformats.org/officeDocument/2006/relationships" xmlns:p="http://schemas.openxmlformats.org/presentationml/2006/main">
   <p:cSld>
     <p:spTree>
@@ -16947,6 +16809,37 @@
           <a:chExt cx="0" cy="0"/>
         </a:xfrm>
       </p:grpSpPr>
+      <p:graphicFrame>
+        <p:nvGraphicFramePr>
+          <p:cNvPr id="6" name="Symbol zastępczy zawartości 5">
+            <a:extLst>
+              <a:ext uri="{FF2B5EF4-FFF2-40B4-BE49-F238E27FC236}">
+                <a16:creationId xmlns:a16="http://schemas.microsoft.com/office/drawing/2014/main" id="{B5B9341C-F4A6-EF18-93EF-81A1EE233B74}"/>
+              </a:ext>
+            </a:extLst>
+          </p:cNvPr>
+          <p:cNvGraphicFramePr>
+            <a:graphicFrameLocks noGrp="1"/>
+          </p:cNvGraphicFramePr>
+          <p:nvPr>
+            <p:ph idx="1"/>
+            <p:extLst>
+              <p:ext uri="{D42A27DB-BD31-4B8C-83A1-F6EECF244321}">
+                <p14:modId xmlns:p14="http://schemas.microsoft.com/office/powerpoint/2010/main" val="1181255117"/>
+              </p:ext>
+            </p:extLst>
+          </p:nvPr>
+        </p:nvGraphicFramePr>
+        <p:xfrm>
+          <a:off x="838200" y="1825625"/>
+          <a:ext cx="7062279" cy="4351338"/>
+        </p:xfrm>
+        <a:graphic>
+          <a:graphicData uri="http://schemas.openxmlformats.org/drawingml/2006/chart">
+            <c:chart xmlns:c="http://schemas.openxmlformats.org/drawingml/2006/chart" xmlns:r="http://schemas.openxmlformats.org/officeDocument/2006/relationships" r:id="rId2"/>
+          </a:graphicData>
+        </a:graphic>
+      </p:graphicFrame>
       <p:sp>
         <p:nvSpPr>
           <p:cNvPr id="2" name="Tytuł 1">
@@ -16977,37 +16870,6 @@
           </a:p>
         </p:txBody>
       </p:sp>
-      <p:graphicFrame>
-        <p:nvGraphicFramePr>
-          <p:cNvPr id="6" name="Symbol zastępczy zawartości 5">
-            <a:extLst>
-              <a:ext uri="{FF2B5EF4-FFF2-40B4-BE49-F238E27FC236}">
-                <a16:creationId xmlns:a16="http://schemas.microsoft.com/office/drawing/2014/main" id="{B5B9341C-F4A6-EF18-93EF-81A1EE233B74}"/>
-              </a:ext>
-            </a:extLst>
-          </p:cNvPr>
-          <p:cNvGraphicFramePr>
-            <a:graphicFrameLocks noGrp="1"/>
-          </p:cNvGraphicFramePr>
-          <p:nvPr>
-            <p:ph idx="1"/>
-            <p:extLst>
-              <p:ext uri="{D42A27DB-BD31-4B8C-83A1-F6EECF244321}">
-                <p14:modId xmlns:p14="http://schemas.microsoft.com/office/powerpoint/2010/main" val="1620021444"/>
-              </p:ext>
-            </p:extLst>
-          </p:nvPr>
-        </p:nvGraphicFramePr>
-        <p:xfrm>
-          <a:off x="838200" y="1825625"/>
-          <a:ext cx="7157936" cy="4351338"/>
-        </p:xfrm>
-        <a:graphic>
-          <a:graphicData uri="http://schemas.openxmlformats.org/drawingml/2006/chart">
-            <c:chart xmlns:c="http://schemas.openxmlformats.org/drawingml/2006/chart" xmlns:r="http://schemas.openxmlformats.org/officeDocument/2006/relationships" r:id="rId2"/>
-          </a:graphicData>
-        </a:graphic>
-      </p:graphicFrame>
       <p:sp>
         <p:nvSpPr>
           <p:cNvPr id="8" name="Symbol zastępczy zawartości 4">
@@ -17024,7 +16886,7 @@
         </p:nvSpPr>
         <p:spPr>
           <a:xfrm>
-            <a:off x="8180961" y="1825626"/>
+            <a:off x="7908583" y="1825625"/>
             <a:ext cx="3453319" cy="4008982"/>
           </a:xfrm>
           <a:prstGeom prst="rect">
@@ -17319,14 +17181,14 @@
             <p:ph idx="1"/>
             <p:extLst>
               <p:ext uri="{D42A27DB-BD31-4B8C-83A1-F6EECF244321}">
-                <p14:modId xmlns:p14="http://schemas.microsoft.com/office/powerpoint/2010/main" val="1176321063"/>
+                <p14:modId xmlns:p14="http://schemas.microsoft.com/office/powerpoint/2010/main" val="3772225371"/>
               </p:ext>
             </p:extLst>
           </p:nvPr>
         </p:nvGraphicFramePr>
         <p:xfrm>
-          <a:off x="838199" y="1825627"/>
-          <a:ext cx="7070387" cy="4008982"/>
+          <a:off x="838199" y="1825624"/>
+          <a:ext cx="7070387" cy="4351338"/>
         </p:xfrm>
         <a:graphic>
           <a:graphicData uri="http://schemas.openxmlformats.org/drawingml/2006/chart">
@@ -17389,7 +17251,7 @@
         </p:nvSpPr>
         <p:spPr>
           <a:xfrm>
-            <a:off x="8180961" y="1825626"/>
+            <a:off x="7896426" y="1825623"/>
             <a:ext cx="3453319" cy="4008982"/>
           </a:xfrm>
           <a:prstGeom prst="rect">
@@ -17614,125 +17476,6 @@
       </p:grpSpPr>
       <p:sp>
         <p:nvSpPr>
-          <p:cNvPr id="9" name="Tytuł 8">
-            <a:extLst>
-              <a:ext uri="{FF2B5EF4-FFF2-40B4-BE49-F238E27FC236}">
-                <a16:creationId xmlns:a16="http://schemas.microsoft.com/office/drawing/2014/main" id="{C0DEE201-5A1F-4DAA-DD16-738368DEE7C9}"/>
-              </a:ext>
-            </a:extLst>
-          </p:cNvPr>
-          <p:cNvSpPr>
-            <a:spLocks noGrp="1"/>
-          </p:cNvSpPr>
-          <p:nvPr>
-            <p:ph type="title"/>
-          </p:nvPr>
-        </p:nvSpPr>
-        <p:spPr/>
-        <p:txBody>
-          <a:bodyPr/>
-          <a:lstStyle/>
-          <a:p>
-            <a:r>
-              <a:rPr lang="pl-PL" dirty="0"/>
-              <a:t>Czego szukamy najczęściej</a:t>
-            </a:r>
-          </a:p>
-        </p:txBody>
-      </p:sp>
-      <p:graphicFrame>
-        <p:nvGraphicFramePr>
-          <p:cNvPr id="18" name="Symbol zastępczy zawartości 17">
-            <a:extLst>
-              <a:ext uri="{FF2B5EF4-FFF2-40B4-BE49-F238E27FC236}">
-                <a16:creationId xmlns:a16="http://schemas.microsoft.com/office/drawing/2014/main" id="{1CED35B4-95D4-37AD-597F-EADF4B8D92C4}"/>
-              </a:ext>
-            </a:extLst>
-          </p:cNvPr>
-          <p:cNvGraphicFramePr>
-            <a:graphicFrameLocks noGrp="1"/>
-          </p:cNvGraphicFramePr>
-          <p:nvPr>
-            <p:ph idx="1"/>
-            <p:extLst>
-              <p:ext uri="{D42A27DB-BD31-4B8C-83A1-F6EECF244321}">
-                <p14:modId xmlns:p14="http://schemas.microsoft.com/office/powerpoint/2010/main" val="2789255478"/>
-              </p:ext>
-            </p:extLst>
-          </p:nvPr>
-        </p:nvGraphicFramePr>
-        <p:xfrm>
-          <a:off x="838200" y="1690687"/>
-          <a:ext cx="7731868" cy="3320225"/>
-        </p:xfrm>
-        <a:graphic>
-          <a:graphicData uri="http://schemas.openxmlformats.org/drawingml/2006/chart">
-            <c:chart xmlns:c="http://schemas.openxmlformats.org/drawingml/2006/chart" xmlns:r="http://schemas.openxmlformats.org/officeDocument/2006/relationships" r:id="rId2"/>
-          </a:graphicData>
-        </a:graphic>
-      </p:graphicFrame>
-      <p:pic>
-        <p:nvPicPr>
-          <p:cNvPr id="2" name="Obraz 1" descr="Ilustracja">
-            <a:extLst>
-              <a:ext uri="{FF2B5EF4-FFF2-40B4-BE49-F238E27FC236}">
-                <a16:creationId xmlns:a16="http://schemas.microsoft.com/office/drawing/2014/main" id="{442588CC-D45D-0187-38D5-7C1E4AE77A68}"/>
-              </a:ext>
-            </a:extLst>
-          </p:cNvPr>
-          <p:cNvPicPr>
-            <a:picLocks noChangeAspect="1"/>
-          </p:cNvPicPr>
-          <p:nvPr/>
-        </p:nvPicPr>
-        <p:blipFill>
-          <a:blip r:embed="rId3"/>
-          <a:stretch>
-            <a:fillRect/>
-          </a:stretch>
-        </p:blipFill>
-        <p:spPr>
-          <a:xfrm>
-            <a:off x="9602212" y="4254476"/>
-            <a:ext cx="2194547" cy="1457179"/>
-          </a:xfrm>
-          <a:prstGeom prst="rect">
-            <a:avLst/>
-          </a:prstGeom>
-        </p:spPr>
-      </p:pic>
-      <p:pic>
-        <p:nvPicPr>
-          <p:cNvPr id="21" name="Obraz 20" descr="Ilustracja">
-            <a:extLst>
-              <a:ext uri="{FF2B5EF4-FFF2-40B4-BE49-F238E27FC236}">
-                <a16:creationId xmlns:a16="http://schemas.microsoft.com/office/drawing/2014/main" id="{2AA5B949-D598-B0A1-AE1D-03766D2755F4}"/>
-              </a:ext>
-            </a:extLst>
-          </p:cNvPr>
-          <p:cNvPicPr>
-            <a:picLocks noChangeAspect="1"/>
-          </p:cNvPicPr>
-          <p:nvPr/>
-        </p:nvPicPr>
-        <p:blipFill>
-          <a:blip r:embed="rId4"/>
-          <a:stretch>
-            <a:fillRect/>
-          </a:stretch>
-        </p:blipFill>
-        <p:spPr>
-          <a:xfrm>
-            <a:off x="8891904" y="2835581"/>
-            <a:ext cx="1397343" cy="1861261"/>
-          </a:xfrm>
-          <a:prstGeom prst="rect">
-            <a:avLst/>
-          </a:prstGeom>
-        </p:spPr>
-      </p:pic>
-      <p:sp>
-        <p:nvSpPr>
           <p:cNvPr id="4" name="Symbol zastępczy zawartości 4">
             <a:extLst>
               <a:ext uri="{FF2B5EF4-FFF2-40B4-BE49-F238E27FC236}">
@@ -17747,8 +17490,8 @@
         </p:nvSpPr>
         <p:spPr>
           <a:xfrm>
-            <a:off x="838200" y="5010912"/>
-            <a:ext cx="7731868" cy="1033271"/>
+            <a:off x="838200" y="5214026"/>
+            <a:ext cx="7070386" cy="962936"/>
           </a:xfrm>
           <a:prstGeom prst="rect">
             <a:avLst/>
@@ -17930,7 +17673,7 @@
               <a:buNone/>
             </a:pPr>
             <a:r>
-              <a:rPr lang="pl-PL" sz="1800" dirty="0">
+              <a:rPr lang="pl-PL" sz="1600" dirty="0">
                 <a:solidFill>
                   <a:schemeClr val="tx2"/>
                 </a:solidFill>
@@ -17940,6 +17683,125 @@
           </a:p>
         </p:txBody>
       </p:sp>
+      <p:sp>
+        <p:nvSpPr>
+          <p:cNvPr id="9" name="Tytuł 8">
+            <a:extLst>
+              <a:ext uri="{FF2B5EF4-FFF2-40B4-BE49-F238E27FC236}">
+                <a16:creationId xmlns:a16="http://schemas.microsoft.com/office/drawing/2014/main" id="{C0DEE201-5A1F-4DAA-DD16-738368DEE7C9}"/>
+              </a:ext>
+            </a:extLst>
+          </p:cNvPr>
+          <p:cNvSpPr>
+            <a:spLocks noGrp="1"/>
+          </p:cNvSpPr>
+          <p:nvPr>
+            <p:ph type="title"/>
+          </p:nvPr>
+        </p:nvSpPr>
+        <p:spPr/>
+        <p:txBody>
+          <a:bodyPr/>
+          <a:lstStyle/>
+          <a:p>
+            <a:r>
+              <a:rPr lang="pl-PL" dirty="0"/>
+              <a:t>Czego szukamy najczęściej</a:t>
+            </a:r>
+          </a:p>
+        </p:txBody>
+      </p:sp>
+      <p:graphicFrame>
+        <p:nvGraphicFramePr>
+          <p:cNvPr id="18" name="Symbol zastępczy zawartości 17">
+            <a:extLst>
+              <a:ext uri="{FF2B5EF4-FFF2-40B4-BE49-F238E27FC236}">
+                <a16:creationId xmlns:a16="http://schemas.microsoft.com/office/drawing/2014/main" id="{1CED35B4-95D4-37AD-597F-EADF4B8D92C4}"/>
+              </a:ext>
+            </a:extLst>
+          </p:cNvPr>
+          <p:cNvGraphicFramePr>
+            <a:graphicFrameLocks noGrp="1"/>
+          </p:cNvGraphicFramePr>
+          <p:nvPr>
+            <p:ph idx="1"/>
+            <p:extLst>
+              <p:ext uri="{D42A27DB-BD31-4B8C-83A1-F6EECF244321}">
+                <p14:modId xmlns:p14="http://schemas.microsoft.com/office/powerpoint/2010/main" val="2822161523"/>
+              </p:ext>
+            </p:extLst>
+          </p:nvPr>
+        </p:nvGraphicFramePr>
+        <p:xfrm>
+          <a:off x="838198" y="1820767"/>
+          <a:ext cx="7070388" cy="3393259"/>
+        </p:xfrm>
+        <a:graphic>
+          <a:graphicData uri="http://schemas.openxmlformats.org/drawingml/2006/chart">
+            <c:chart xmlns:c="http://schemas.openxmlformats.org/drawingml/2006/chart" xmlns:r="http://schemas.openxmlformats.org/officeDocument/2006/relationships" r:id="rId2"/>
+          </a:graphicData>
+        </a:graphic>
+      </p:graphicFrame>
+      <p:pic>
+        <p:nvPicPr>
+          <p:cNvPr id="2" name="Obraz 1" descr="Ilustracja">
+            <a:extLst>
+              <a:ext uri="{FF2B5EF4-FFF2-40B4-BE49-F238E27FC236}">
+                <a16:creationId xmlns:a16="http://schemas.microsoft.com/office/drawing/2014/main" id="{442588CC-D45D-0187-38D5-7C1E4AE77A68}"/>
+              </a:ext>
+            </a:extLst>
+          </p:cNvPr>
+          <p:cNvPicPr>
+            <a:picLocks noChangeAspect="1"/>
+          </p:cNvPicPr>
+          <p:nvPr/>
+        </p:nvPicPr>
+        <p:blipFill>
+          <a:blip r:embed="rId3"/>
+          <a:stretch>
+            <a:fillRect/>
+          </a:stretch>
+        </p:blipFill>
+        <p:spPr>
+          <a:xfrm>
+            <a:off x="9096877" y="4200906"/>
+            <a:ext cx="2194547" cy="1457179"/>
+          </a:xfrm>
+          <a:prstGeom prst="rect">
+            <a:avLst/>
+          </a:prstGeom>
+        </p:spPr>
+      </p:pic>
+      <p:pic>
+        <p:nvPicPr>
+          <p:cNvPr id="21" name="Obraz 20" descr="Ilustracja">
+            <a:extLst>
+              <a:ext uri="{FF2B5EF4-FFF2-40B4-BE49-F238E27FC236}">
+                <a16:creationId xmlns:a16="http://schemas.microsoft.com/office/drawing/2014/main" id="{2AA5B949-D598-B0A1-AE1D-03766D2755F4}"/>
+              </a:ext>
+            </a:extLst>
+          </p:cNvPr>
+          <p:cNvPicPr>
+            <a:picLocks noChangeAspect="1"/>
+          </p:cNvPicPr>
+          <p:nvPr/>
+        </p:nvPicPr>
+        <p:blipFill>
+          <a:blip r:embed="rId4"/>
+          <a:stretch>
+            <a:fillRect/>
+          </a:stretch>
+        </p:blipFill>
+        <p:spPr>
+          <a:xfrm>
+            <a:off x="8398206" y="2984053"/>
+            <a:ext cx="1397343" cy="1861261"/>
+          </a:xfrm>
+          <a:prstGeom prst="rect">
+            <a:avLst/>
+          </a:prstGeom>
+        </p:spPr>
+      </p:pic>
       <p:pic>
         <p:nvPicPr>
           <p:cNvPr id="19" name="Obraz 18" descr="Mapa opisywanego kraju">
@@ -17962,7 +17824,7 @@
         </p:blipFill>
         <p:spPr>
           <a:xfrm>
-            <a:off x="10034210" y="1820768"/>
+            <a:off x="9624003" y="1820768"/>
             <a:ext cx="1729796" cy="1861261"/>
           </a:xfrm>
           <a:prstGeom prst="rect">
@@ -18000,132 +17862,36 @@
           <a:chExt cx="0" cy="0"/>
         </a:xfrm>
       </p:grpSpPr>
-      <p:sp>
-        <p:nvSpPr>
-          <p:cNvPr id="2" name="Tytuł 1">
+      <p:graphicFrame>
+        <p:nvGraphicFramePr>
+          <p:cNvPr id="7" name="Wykres 6">
             <a:extLst>
               <a:ext uri="{FF2B5EF4-FFF2-40B4-BE49-F238E27FC236}">
-                <a16:creationId xmlns:a16="http://schemas.microsoft.com/office/drawing/2014/main" id="{A8C6FF99-3A0C-0F2B-9884-203C3D922B93}"/>
+                <a16:creationId xmlns:a16="http://schemas.microsoft.com/office/drawing/2014/main" id="{F6814C3D-6579-8325-76B9-9092EF100786}"/>
               </a:ext>
             </a:extLst>
           </p:cNvPr>
-          <p:cNvSpPr>
-            <a:spLocks noGrp="1"/>
-          </p:cNvSpPr>
+          <p:cNvGraphicFramePr>
+            <a:graphicFrameLocks/>
+          </p:cNvGraphicFramePr>
           <p:nvPr>
-            <p:ph type="title"/>
+            <p:extLst>
+              <p:ext uri="{D42A27DB-BD31-4B8C-83A1-F6EECF244321}">
+                <p14:modId xmlns:p14="http://schemas.microsoft.com/office/powerpoint/2010/main" val="916285554"/>
+              </p:ext>
+            </p:extLst>
           </p:nvPr>
-        </p:nvSpPr>
-        <p:spPr/>
-        <p:txBody>
-          <a:bodyPr/>
-          <a:lstStyle/>
-          <a:p>
-            <a:endParaRPr lang="pl-PL"/>
-          </a:p>
-        </p:txBody>
-      </p:sp>
-      <p:sp>
-        <p:nvSpPr>
-          <p:cNvPr id="3" name="Symbol zastępczy zawartości 2">
-            <a:extLst>
-              <a:ext uri="{FF2B5EF4-FFF2-40B4-BE49-F238E27FC236}">
-                <a16:creationId xmlns:a16="http://schemas.microsoft.com/office/drawing/2014/main" id="{B035FDFD-2CB6-8BE8-CCC2-1079FAF12330}"/>
-              </a:ext>
-            </a:extLst>
-          </p:cNvPr>
-          <p:cNvSpPr>
-            <a:spLocks noGrp="1"/>
-          </p:cNvSpPr>
-          <p:nvPr>
-            <p:ph idx="1"/>
-          </p:nvPr>
-        </p:nvSpPr>
-        <p:spPr/>
-        <p:txBody>
-          <a:bodyPr/>
-          <a:lstStyle/>
-          <a:p>
-            <a:endParaRPr lang="pl-PL"/>
-          </a:p>
-        </p:txBody>
-      </p:sp>
-      <p:sp>
-        <p:nvSpPr>
-          <p:cNvPr id="4" name="Prostokąt 3">
-            <a:extLst>
-              <a:ext uri="{FF2B5EF4-FFF2-40B4-BE49-F238E27FC236}">
-                <a16:creationId xmlns:a16="http://schemas.microsoft.com/office/drawing/2014/main" id="{979DE685-5610-7A26-550A-17E569F80DCB}"/>
-              </a:ext>
-            </a:extLst>
-          </p:cNvPr>
-          <p:cNvSpPr/>
-          <p:nvPr/>
-        </p:nvSpPr>
-        <p:spPr>
-          <a:xfrm>
-            <a:off x="838199" y="1825625"/>
-            <a:ext cx="10515599" cy="4351338"/>
-          </a:xfrm>
-          <a:prstGeom prst="rect">
-            <a:avLst/>
-          </a:prstGeom>
-        </p:spPr>
-        <p:style>
-          <a:lnRef idx="2">
-            <a:schemeClr val="accent1">
-              <a:shade val="15000"/>
-            </a:schemeClr>
-          </a:lnRef>
-          <a:fillRef idx="1">
-            <a:schemeClr val="accent1"/>
-          </a:fillRef>
-          <a:effectRef idx="0">
-            <a:schemeClr val="accent1"/>
-          </a:effectRef>
-          <a:fontRef idx="minor">
-            <a:schemeClr val="lt1"/>
-          </a:fontRef>
-        </p:style>
-        <p:txBody>
-          <a:bodyPr rtlCol="0" anchor="ctr"/>
-          <a:lstStyle/>
-          <a:p>
-            <a:pPr algn="ctr"/>
-            <a:endParaRPr lang="pl-PL"/>
-          </a:p>
-        </p:txBody>
-      </p:sp>
-    </p:spTree>
-    <p:extLst>
-      <p:ext uri="{BB962C8B-B14F-4D97-AF65-F5344CB8AC3E}">
-        <p14:creationId xmlns:p14="http://schemas.microsoft.com/office/powerpoint/2010/main" val="2661574776"/>
-      </p:ext>
-    </p:extLst>
-  </p:cSld>
-  <p:clrMapOvr>
-    <a:masterClrMapping/>
-  </p:clrMapOvr>
-</p:sld>
-</file>
-
-<file path=ppt/slides/slide5.xml><?xml version="1.0" encoding="utf-8"?>
-<p:sld xmlns:a="http://schemas.openxmlformats.org/drawingml/2006/main" xmlns:r="http://schemas.openxmlformats.org/officeDocument/2006/relationships" xmlns:p="http://schemas.openxmlformats.org/presentationml/2006/main">
-  <p:cSld>
-    <p:spTree>
-      <p:nvGrpSpPr>
-        <p:cNvPr id="1" name=""/>
-        <p:cNvGrpSpPr/>
-        <p:nvPr/>
-      </p:nvGrpSpPr>
-      <p:grpSpPr>
-        <a:xfrm>
-          <a:off x="0" y="0"/>
-          <a:ext cx="0" cy="0"/>
-          <a:chOff x="0" y="0"/>
-          <a:chExt cx="0" cy="0"/>
-        </a:xfrm>
-      </p:grpSpPr>
+        </p:nvGraphicFramePr>
+        <p:xfrm>
+          <a:off x="838197" y="1825625"/>
+          <a:ext cx="7070387" cy="4351338"/>
+        </p:xfrm>
+        <a:graphic>
+          <a:graphicData uri="http://schemas.openxmlformats.org/drawingml/2006/chart">
+            <c:chart xmlns:c="http://schemas.openxmlformats.org/drawingml/2006/chart" xmlns:r="http://schemas.openxmlformats.org/officeDocument/2006/relationships" r:id="rId2"/>
+          </a:graphicData>
+        </a:graphic>
+      </p:graphicFrame>
       <p:sp>
         <p:nvSpPr>
           <p:cNvPr id="2" name="Tytuł 1">
@@ -18154,36 +17920,6 @@
           </a:p>
         </p:txBody>
       </p:sp>
-      <p:graphicFrame>
-        <p:nvGraphicFramePr>
-          <p:cNvPr id="7" name="Wykres 6">
-            <a:extLst>
-              <a:ext uri="{FF2B5EF4-FFF2-40B4-BE49-F238E27FC236}">
-                <a16:creationId xmlns:a16="http://schemas.microsoft.com/office/drawing/2014/main" id="{F6814C3D-6579-8325-76B9-9092EF100786}"/>
-              </a:ext>
-            </a:extLst>
-          </p:cNvPr>
-          <p:cNvGraphicFramePr>
-            <a:graphicFrameLocks/>
-          </p:cNvGraphicFramePr>
-          <p:nvPr>
-            <p:extLst>
-              <p:ext uri="{D42A27DB-BD31-4B8C-83A1-F6EECF244321}">
-                <p14:modId xmlns:p14="http://schemas.microsoft.com/office/powerpoint/2010/main" val="1691029741"/>
-              </p:ext>
-            </p:extLst>
-          </p:nvPr>
-        </p:nvGraphicFramePr>
-        <p:xfrm>
-          <a:off x="838200" y="1753616"/>
-          <a:ext cx="7187119" cy="4260607"/>
-        </p:xfrm>
-        <a:graphic>
-          <a:graphicData uri="http://schemas.openxmlformats.org/drawingml/2006/chart">
-            <c:chart xmlns:c="http://schemas.openxmlformats.org/drawingml/2006/chart" xmlns:r="http://schemas.openxmlformats.org/officeDocument/2006/relationships" r:id="rId2"/>
-          </a:graphicData>
-        </a:graphic>
-      </p:graphicFrame>
       <p:sp>
         <p:nvSpPr>
           <p:cNvPr id="11" name="pole tekstowe 10">
@@ -18198,15 +17934,18 @@
         </p:nvSpPr>
         <p:spPr>
           <a:xfrm>
-            <a:off x="8341468" y="1753616"/>
-            <a:ext cx="3536004" cy="1815882"/>
+            <a:off x="7908583" y="1825625"/>
+            <a:ext cx="3445216" cy="1815882"/>
           </a:xfrm>
           <a:prstGeom prst="rect">
             <a:avLst/>
           </a:prstGeom>
-          <a:solidFill>
-            <a:schemeClr val="accent5"/>
-          </a:solidFill>
+          <a:noFill/>
+          <a:ln w="38100">
+            <a:solidFill>
+              <a:schemeClr val="accent5"/>
+            </a:solidFill>
+          </a:ln>
         </p:spPr>
         <p:txBody>
           <a:bodyPr wrap="square" rtlCol="0">
@@ -18218,25 +17957,10 @@
             <a:r>
               <a:rPr lang="pl-PL" sz="1600" dirty="0">
                 <a:solidFill>
-                  <a:schemeClr val="bg1"/>
+                  <a:schemeClr val="tx2"/>
                 </a:solidFill>
               </a:rPr>
-              <a:t>Zwiększenie ruchu na stronach Wikipedii powodują wydarzenia wywołujące różne emocje. Są to zarówno tragedie, jak śmierć, wojna czy katastrofa, jak </a:t>
-            </a:r>
-            <a:br>
-              <a:rPr lang="pl-PL" sz="1600" dirty="0">
-                <a:solidFill>
-                  <a:schemeClr val="bg1"/>
-                </a:solidFill>
-              </a:rPr>
-            </a:br>
-            <a:r>
-              <a:rPr lang="pl-PL" sz="1600" dirty="0">
-                <a:solidFill>
-                  <a:schemeClr val="bg1"/>
-                </a:solidFill>
-              </a:rPr>
-              <a:t>i pozytywne jak sukcesy sportowe.</a:t>
+              <a:t>Zwiększenie ruchu na stronach Wikipedii powodują wydarzenia wywołujące różne emocje. Są to zarówno tragedie – śmierć, wojna czy katastrofa, oraz pozytywne jak sukcesy sportowe.</a:t>
             </a:r>
           </a:p>
         </p:txBody>
@@ -18255,15 +17979,18 @@
         </p:nvSpPr>
         <p:spPr>
           <a:xfrm>
-            <a:off x="8341468" y="3961949"/>
-            <a:ext cx="3536004" cy="1077218"/>
+            <a:off x="7908583" y="4001294"/>
+            <a:ext cx="3445215" cy="1323439"/>
           </a:xfrm>
           <a:prstGeom prst="rect">
             <a:avLst/>
           </a:prstGeom>
-          <a:solidFill>
-            <a:schemeClr val="accent2"/>
-          </a:solidFill>
+          <a:noFill/>
+          <a:ln w="38100">
+            <a:solidFill>
+              <a:schemeClr val="accent2"/>
+            </a:solidFill>
+          </a:ln>
         </p:spPr>
         <p:txBody>
           <a:bodyPr wrap="square" rtlCol="0">
@@ -18275,7 +18002,7 @@
             <a:r>
               <a:rPr lang="pl-PL" sz="1600" dirty="0">
                 <a:solidFill>
-                  <a:schemeClr val="bg1"/>
+                  <a:schemeClr val="tx2"/>
                 </a:solidFill>
               </a:rPr>
               <a:t>Na wzrost wyświetleń wpływają również szeroko komentowane doniesienia medialne oraz nowe produkcje popkultury.</a:t>
@@ -18297,15 +18024,18 @@
         </p:nvSpPr>
         <p:spPr>
           <a:xfrm>
-            <a:off x="8341468" y="5431618"/>
-            <a:ext cx="3536004" cy="584775"/>
+            <a:off x="7908583" y="5592188"/>
+            <a:ext cx="3445215" cy="584775"/>
           </a:xfrm>
           <a:prstGeom prst="rect">
             <a:avLst/>
           </a:prstGeom>
-          <a:solidFill>
-            <a:schemeClr val="accent1"/>
-          </a:solidFill>
+          <a:noFill/>
+          <a:ln w="38100">
+            <a:solidFill>
+              <a:schemeClr val="accent6"/>
+            </a:solidFill>
+          </a:ln>
         </p:spPr>
         <p:txBody>
           <a:bodyPr wrap="square" rtlCol="0">
@@ -18315,7 +18045,11 @@
           <a:p>
             <a:pPr algn="ctr"/>
             <a:r>
-              <a:rPr lang="pl-PL" sz="1600" dirty="0"/>
+              <a:rPr lang="pl-PL" sz="1600" dirty="0">
+                <a:solidFill>
+                  <a:schemeClr val="tx2"/>
+                </a:solidFill>
+              </a:rPr>
               <a:t>Za każdą kategorią kryją się konkretne historie.</a:t>
             </a:r>
           </a:p>
@@ -18334,7 +18068,7 @@
 </p:sld>
 </file>
 
-<file path=ppt/slides/slide6.xml><?xml version="1.0" encoding="utf-8"?>
+<file path=ppt/slides/slide5.xml><?xml version="1.0" encoding="utf-8"?>
 <p:sld xmlns:a="http://schemas.openxmlformats.org/drawingml/2006/main" xmlns:r="http://schemas.openxmlformats.org/officeDocument/2006/relationships" xmlns:p="http://schemas.openxmlformats.org/presentationml/2006/main">
   <p:cSld>
     <p:spTree>
@@ -18357,6 +18091,37 @@
           <a:chExt cx="0" cy="0"/>
         </a:xfrm>
       </p:grpSpPr>
+      <p:graphicFrame>
+        <p:nvGraphicFramePr>
+          <p:cNvPr id="6" name="Symbol zastępczy zawartości 5">
+            <a:extLst>
+              <a:ext uri="{FF2B5EF4-FFF2-40B4-BE49-F238E27FC236}">
+                <a16:creationId xmlns:a16="http://schemas.microsoft.com/office/drawing/2014/main" id="{AEDA1524-37FE-05DD-A0C6-B5A1DD4D5089}"/>
+              </a:ext>
+            </a:extLst>
+          </p:cNvPr>
+          <p:cNvGraphicFramePr>
+            <a:graphicFrameLocks noGrp="1"/>
+          </p:cNvGraphicFramePr>
+          <p:nvPr>
+            <p:ph idx="1"/>
+            <p:extLst>
+              <p:ext uri="{D42A27DB-BD31-4B8C-83A1-F6EECF244321}">
+                <p14:modId xmlns:p14="http://schemas.microsoft.com/office/powerpoint/2010/main" val="2278574776"/>
+              </p:ext>
+            </p:extLst>
+          </p:nvPr>
+        </p:nvGraphicFramePr>
+        <p:xfrm>
+          <a:off x="838200" y="1825625"/>
+          <a:ext cx="7062279" cy="4351338"/>
+        </p:xfrm>
+        <a:graphic>
+          <a:graphicData uri="http://schemas.openxmlformats.org/drawingml/2006/chart">
+            <c:chart xmlns:c="http://schemas.openxmlformats.org/drawingml/2006/chart" xmlns:r="http://schemas.openxmlformats.org/officeDocument/2006/relationships" r:id="rId2"/>
+          </a:graphicData>
+        </a:graphic>
+      </p:graphicFrame>
       <p:sp>
         <p:nvSpPr>
           <p:cNvPr id="2" name="Tytuł 1">
@@ -18385,37 +18150,6 @@
           </a:p>
         </p:txBody>
       </p:sp>
-      <p:graphicFrame>
-        <p:nvGraphicFramePr>
-          <p:cNvPr id="6" name="Symbol zastępczy zawartości 5">
-            <a:extLst>
-              <a:ext uri="{FF2B5EF4-FFF2-40B4-BE49-F238E27FC236}">
-                <a16:creationId xmlns:a16="http://schemas.microsoft.com/office/drawing/2014/main" id="{AEDA1524-37FE-05DD-A0C6-B5A1DD4D5089}"/>
-              </a:ext>
-            </a:extLst>
-          </p:cNvPr>
-          <p:cNvGraphicFramePr>
-            <a:graphicFrameLocks noGrp="1"/>
-          </p:cNvGraphicFramePr>
-          <p:nvPr>
-            <p:ph idx="1"/>
-            <p:extLst>
-              <p:ext uri="{D42A27DB-BD31-4B8C-83A1-F6EECF244321}">
-                <p14:modId xmlns:p14="http://schemas.microsoft.com/office/powerpoint/2010/main" val="2998772088"/>
-              </p:ext>
-            </p:extLst>
-          </p:nvPr>
-        </p:nvGraphicFramePr>
-        <p:xfrm>
-          <a:off x="838200" y="1825625"/>
-          <a:ext cx="7157936" cy="4351338"/>
-        </p:xfrm>
-        <a:graphic>
-          <a:graphicData uri="http://schemas.openxmlformats.org/drawingml/2006/chart">
-            <c:chart xmlns:c="http://schemas.openxmlformats.org/drawingml/2006/chart" xmlns:r="http://schemas.openxmlformats.org/officeDocument/2006/relationships" r:id="rId2"/>
-          </a:graphicData>
-        </a:graphic>
-      </p:graphicFrame>
       <p:sp>
         <p:nvSpPr>
           <p:cNvPr id="8" name="Symbol zastępczy zawartości 4">
@@ -18432,7 +18166,7 @@
         </p:nvSpPr>
         <p:spPr>
           <a:xfrm>
-            <a:off x="8180961" y="1825626"/>
+            <a:off x="7908583" y="1825625"/>
             <a:ext cx="3453319" cy="4008982"/>
           </a:xfrm>
           <a:prstGeom prst="rect">
@@ -18671,7 +18405,7 @@
 </p:sld>
 </file>
 
-<file path=ppt/slides/slide7.xml><?xml version="1.0" encoding="utf-8"?>
+<file path=ppt/slides/slide6.xml><?xml version="1.0" encoding="utf-8"?>
 <p:sld xmlns:a="http://schemas.openxmlformats.org/drawingml/2006/main" xmlns:r="http://schemas.openxmlformats.org/officeDocument/2006/relationships" xmlns:p="http://schemas.openxmlformats.org/presentationml/2006/main">
   <p:cSld>
     <p:spTree>
@@ -18694,6 +18428,37 @@
           <a:chExt cx="0" cy="0"/>
         </a:xfrm>
       </p:grpSpPr>
+      <p:graphicFrame>
+        <p:nvGraphicFramePr>
+          <p:cNvPr id="6" name="Symbol zastępczy zawartości 5">
+            <a:extLst>
+              <a:ext uri="{FF2B5EF4-FFF2-40B4-BE49-F238E27FC236}">
+                <a16:creationId xmlns:a16="http://schemas.microsoft.com/office/drawing/2014/main" id="{09D98903-2D8C-F765-284D-96F1B8D81EE6}"/>
+              </a:ext>
+            </a:extLst>
+          </p:cNvPr>
+          <p:cNvGraphicFramePr>
+            <a:graphicFrameLocks noGrp="1"/>
+          </p:cNvGraphicFramePr>
+          <p:nvPr>
+            <p:ph idx="1"/>
+            <p:extLst>
+              <p:ext uri="{D42A27DB-BD31-4B8C-83A1-F6EECF244321}">
+                <p14:modId xmlns:p14="http://schemas.microsoft.com/office/powerpoint/2010/main" val="3581423173"/>
+              </p:ext>
+            </p:extLst>
+          </p:nvPr>
+        </p:nvGraphicFramePr>
+        <p:xfrm>
+          <a:off x="838199" y="1825625"/>
+          <a:ext cx="7070383" cy="4351338"/>
+        </p:xfrm>
+        <a:graphic>
+          <a:graphicData uri="http://schemas.openxmlformats.org/drawingml/2006/chart">
+            <c:chart xmlns:c="http://schemas.openxmlformats.org/drawingml/2006/chart" xmlns:r="http://schemas.openxmlformats.org/officeDocument/2006/relationships" r:id="rId2"/>
+          </a:graphicData>
+        </a:graphic>
+      </p:graphicFrame>
       <p:sp>
         <p:nvSpPr>
           <p:cNvPr id="2" name="Tytuł 1">
@@ -18724,37 +18489,6 @@
           </a:p>
         </p:txBody>
       </p:sp>
-      <p:graphicFrame>
-        <p:nvGraphicFramePr>
-          <p:cNvPr id="6" name="Symbol zastępczy zawartości 5">
-            <a:extLst>
-              <a:ext uri="{FF2B5EF4-FFF2-40B4-BE49-F238E27FC236}">
-                <a16:creationId xmlns:a16="http://schemas.microsoft.com/office/drawing/2014/main" id="{09D98903-2D8C-F765-284D-96F1B8D81EE6}"/>
-              </a:ext>
-            </a:extLst>
-          </p:cNvPr>
-          <p:cNvGraphicFramePr>
-            <a:graphicFrameLocks noGrp="1"/>
-          </p:cNvGraphicFramePr>
-          <p:nvPr>
-            <p:ph idx="1"/>
-            <p:extLst>
-              <p:ext uri="{D42A27DB-BD31-4B8C-83A1-F6EECF244321}">
-                <p14:modId xmlns:p14="http://schemas.microsoft.com/office/powerpoint/2010/main" val="4264124187"/>
-              </p:ext>
-            </p:extLst>
-          </p:nvPr>
-        </p:nvGraphicFramePr>
-        <p:xfrm>
-          <a:off x="838200" y="1825625"/>
-          <a:ext cx="7157936" cy="4351338"/>
-        </p:xfrm>
-        <a:graphic>
-          <a:graphicData uri="http://schemas.openxmlformats.org/drawingml/2006/chart">
-            <c:chart xmlns:c="http://schemas.openxmlformats.org/drawingml/2006/chart" xmlns:r="http://schemas.openxmlformats.org/officeDocument/2006/relationships" r:id="rId2"/>
-          </a:graphicData>
-        </a:graphic>
-      </p:graphicFrame>
       <p:sp>
         <p:nvSpPr>
           <p:cNvPr id="8" name="Symbol zastępczy zawartości 4">
@@ -18771,8 +18505,8 @@
         </p:nvSpPr>
         <p:spPr>
           <a:xfrm>
-            <a:off x="8180961" y="1825626"/>
-            <a:ext cx="3453319" cy="4008982"/>
+            <a:off x="7904531" y="1825625"/>
+            <a:ext cx="3453319" cy="4351338"/>
           </a:xfrm>
           <a:prstGeom prst="rect">
             <a:avLst/>
@@ -19022,7 +18756,7 @@
 </p:sld>
 </file>
 
-<file path=ppt/slides/slide8.xml><?xml version="1.0" encoding="utf-8"?>
+<file path=ppt/slides/slide7.xml><?xml version="1.0" encoding="utf-8"?>
 <p:sld xmlns:a="http://schemas.openxmlformats.org/drawingml/2006/main" xmlns:r="http://schemas.openxmlformats.org/officeDocument/2006/relationships" xmlns:p="http://schemas.openxmlformats.org/presentationml/2006/main">
   <p:cSld>
     <p:spTree>
@@ -19045,6 +18779,37 @@
           <a:chExt cx="0" cy="0"/>
         </a:xfrm>
       </p:grpSpPr>
+      <p:graphicFrame>
+        <p:nvGraphicFramePr>
+          <p:cNvPr id="6" name="Symbol zastępczy zawartości 5">
+            <a:extLst>
+              <a:ext uri="{FF2B5EF4-FFF2-40B4-BE49-F238E27FC236}">
+                <a16:creationId xmlns:a16="http://schemas.microsoft.com/office/drawing/2014/main" id="{FA18856F-AC8A-DDEF-2221-BFA52CE49F8B}"/>
+              </a:ext>
+            </a:extLst>
+          </p:cNvPr>
+          <p:cNvGraphicFramePr>
+            <a:graphicFrameLocks noGrp="1"/>
+          </p:cNvGraphicFramePr>
+          <p:nvPr>
+            <p:ph idx="1"/>
+            <p:extLst>
+              <p:ext uri="{D42A27DB-BD31-4B8C-83A1-F6EECF244321}">
+                <p14:modId xmlns:p14="http://schemas.microsoft.com/office/powerpoint/2010/main" val="4267503008"/>
+              </p:ext>
+            </p:extLst>
+          </p:nvPr>
+        </p:nvGraphicFramePr>
+        <p:xfrm>
+          <a:off x="838199" y="1825625"/>
+          <a:ext cx="7062279" cy="4351338"/>
+        </p:xfrm>
+        <a:graphic>
+          <a:graphicData uri="http://schemas.openxmlformats.org/drawingml/2006/chart">
+            <c:chart xmlns:c="http://schemas.openxmlformats.org/drawingml/2006/chart" xmlns:r="http://schemas.openxmlformats.org/officeDocument/2006/relationships" r:id="rId2"/>
+          </a:graphicData>
+        </a:graphic>
+      </p:graphicFrame>
       <p:sp>
         <p:nvSpPr>
           <p:cNvPr id="2" name="Tytuł 1">
@@ -19093,37 +18858,6 @@
           </a:p>
         </p:txBody>
       </p:sp>
-      <p:graphicFrame>
-        <p:nvGraphicFramePr>
-          <p:cNvPr id="6" name="Symbol zastępczy zawartości 5">
-            <a:extLst>
-              <a:ext uri="{FF2B5EF4-FFF2-40B4-BE49-F238E27FC236}">
-                <a16:creationId xmlns:a16="http://schemas.microsoft.com/office/drawing/2014/main" id="{FA18856F-AC8A-DDEF-2221-BFA52CE49F8B}"/>
-              </a:ext>
-            </a:extLst>
-          </p:cNvPr>
-          <p:cNvGraphicFramePr>
-            <a:graphicFrameLocks noGrp="1"/>
-          </p:cNvGraphicFramePr>
-          <p:nvPr>
-            <p:ph idx="1"/>
-            <p:extLst>
-              <p:ext uri="{D42A27DB-BD31-4B8C-83A1-F6EECF244321}">
-                <p14:modId xmlns:p14="http://schemas.microsoft.com/office/powerpoint/2010/main" val="3535259308"/>
-              </p:ext>
-            </p:extLst>
-          </p:nvPr>
-        </p:nvGraphicFramePr>
-        <p:xfrm>
-          <a:off x="838200" y="1825625"/>
-          <a:ext cx="7157936" cy="4351338"/>
-        </p:xfrm>
-        <a:graphic>
-          <a:graphicData uri="http://schemas.openxmlformats.org/drawingml/2006/chart">
-            <c:chart xmlns:c="http://schemas.openxmlformats.org/drawingml/2006/chart" xmlns:r="http://schemas.openxmlformats.org/officeDocument/2006/relationships" r:id="rId2"/>
-          </a:graphicData>
-        </a:graphic>
-      </p:graphicFrame>
       <p:sp>
         <p:nvSpPr>
           <p:cNvPr id="8" name="Symbol zastępczy zawartości 4">
@@ -19140,7 +18874,7 @@
         </p:nvSpPr>
         <p:spPr>
           <a:xfrm>
-            <a:off x="8180961" y="1825626"/>
+            <a:off x="7900478" y="1825625"/>
             <a:ext cx="3453319" cy="4008982"/>
           </a:xfrm>
           <a:prstGeom prst="rect">
@@ -19393,7 +19127,7 @@
 </p:sld>
 </file>
 
-<file path=ppt/slides/slide9.xml><?xml version="1.0" encoding="utf-8"?>
+<file path=ppt/slides/slide8.xml><?xml version="1.0" encoding="utf-8"?>
 <p:sld xmlns:a="http://schemas.openxmlformats.org/drawingml/2006/main" xmlns:r="http://schemas.openxmlformats.org/officeDocument/2006/relationships" xmlns:p="http://schemas.openxmlformats.org/presentationml/2006/main">
   <p:cSld>
     <p:spTree>
@@ -19410,6 +19144,37 @@
           <a:chExt cx="0" cy="0"/>
         </a:xfrm>
       </p:grpSpPr>
+      <p:graphicFrame>
+        <p:nvGraphicFramePr>
+          <p:cNvPr id="6" name="Symbol zastępczy zawartości 5">
+            <a:extLst>
+              <a:ext uri="{FF2B5EF4-FFF2-40B4-BE49-F238E27FC236}">
+                <a16:creationId xmlns:a16="http://schemas.microsoft.com/office/drawing/2014/main" id="{4B65AB7F-448F-7A38-A170-C9008F7743E3}"/>
+              </a:ext>
+            </a:extLst>
+          </p:cNvPr>
+          <p:cNvGraphicFramePr>
+            <a:graphicFrameLocks noGrp="1"/>
+          </p:cNvGraphicFramePr>
+          <p:nvPr>
+            <p:ph idx="1"/>
+            <p:extLst>
+              <p:ext uri="{D42A27DB-BD31-4B8C-83A1-F6EECF244321}">
+                <p14:modId xmlns:p14="http://schemas.microsoft.com/office/powerpoint/2010/main" val="1895595041"/>
+              </p:ext>
+            </p:extLst>
+          </p:nvPr>
+        </p:nvGraphicFramePr>
+        <p:xfrm>
+          <a:off x="838199" y="1825625"/>
+          <a:ext cx="7070383" cy="4351338"/>
+        </p:xfrm>
+        <a:graphic>
+          <a:graphicData uri="http://schemas.openxmlformats.org/drawingml/2006/chart">
+            <c:chart xmlns:c="http://schemas.openxmlformats.org/drawingml/2006/chart" xmlns:r="http://schemas.openxmlformats.org/officeDocument/2006/relationships" r:id="rId2"/>
+          </a:graphicData>
+        </a:graphic>
+      </p:graphicFrame>
       <p:sp>
         <p:nvSpPr>
           <p:cNvPr id="2" name="Tytuł 1">
@@ -19440,37 +19205,6 @@
           </a:p>
         </p:txBody>
       </p:sp>
-      <p:graphicFrame>
-        <p:nvGraphicFramePr>
-          <p:cNvPr id="6" name="Symbol zastępczy zawartości 5">
-            <a:extLst>
-              <a:ext uri="{FF2B5EF4-FFF2-40B4-BE49-F238E27FC236}">
-                <a16:creationId xmlns:a16="http://schemas.microsoft.com/office/drawing/2014/main" id="{4B65AB7F-448F-7A38-A170-C9008F7743E3}"/>
-              </a:ext>
-            </a:extLst>
-          </p:cNvPr>
-          <p:cNvGraphicFramePr>
-            <a:graphicFrameLocks noGrp="1"/>
-          </p:cNvGraphicFramePr>
-          <p:nvPr>
-            <p:ph idx="1"/>
-            <p:extLst>
-              <p:ext uri="{D42A27DB-BD31-4B8C-83A1-F6EECF244321}">
-                <p14:modId xmlns:p14="http://schemas.microsoft.com/office/powerpoint/2010/main" val="3964021528"/>
-              </p:ext>
-            </p:extLst>
-          </p:nvPr>
-        </p:nvGraphicFramePr>
-        <p:xfrm>
-          <a:off x="838200" y="1825625"/>
-          <a:ext cx="7157936" cy="4351338"/>
-        </p:xfrm>
-        <a:graphic>
-          <a:graphicData uri="http://schemas.openxmlformats.org/drawingml/2006/chart">
-            <c:chart xmlns:c="http://schemas.openxmlformats.org/drawingml/2006/chart" xmlns:r="http://schemas.openxmlformats.org/officeDocument/2006/relationships" r:id="rId2"/>
-          </a:graphicData>
-        </a:graphic>
-      </p:graphicFrame>
       <p:sp>
         <p:nvSpPr>
           <p:cNvPr id="8" name="Symbol zastępczy zawartości 4">
@@ -19487,7 +19221,7 @@
         </p:nvSpPr>
         <p:spPr>
           <a:xfrm>
-            <a:off x="8180961" y="1825626"/>
+            <a:off x="7904531" y="1825625"/>
             <a:ext cx="3453319" cy="4008982"/>
           </a:xfrm>
           <a:prstGeom prst="rect">
@@ -19723,10 +19457,131 @@
 </p:sld>
 </file>
 
+<file path=ppt/slides/slide9.xml><?xml version="1.0" encoding="utf-8"?>
+<p:sld xmlns:a="http://schemas.openxmlformats.org/drawingml/2006/main" xmlns:r="http://schemas.openxmlformats.org/officeDocument/2006/relationships" xmlns:p="http://schemas.openxmlformats.org/presentationml/2006/main">
+  <p:cSld>
+    <p:spTree>
+      <p:nvGrpSpPr>
+        <p:cNvPr id="1" name=""/>
+        <p:cNvGrpSpPr/>
+        <p:nvPr/>
+      </p:nvGrpSpPr>
+      <p:grpSpPr>
+        <a:xfrm>
+          <a:off x="0" y="0"/>
+          <a:ext cx="0" cy="0"/>
+          <a:chOff x="0" y="0"/>
+          <a:chExt cx="0" cy="0"/>
+        </a:xfrm>
+      </p:grpSpPr>
+      <p:sp>
+        <p:nvSpPr>
+          <p:cNvPr id="2" name="Tytuł 1">
+            <a:extLst>
+              <a:ext uri="{FF2B5EF4-FFF2-40B4-BE49-F238E27FC236}">
+                <a16:creationId xmlns:a16="http://schemas.microsoft.com/office/drawing/2014/main" id="{9B06FA26-7517-0D14-088B-3B65931650DB}"/>
+              </a:ext>
+            </a:extLst>
+          </p:cNvPr>
+          <p:cNvSpPr>
+            <a:spLocks noGrp="1"/>
+          </p:cNvSpPr>
+          <p:nvPr>
+            <p:ph type="title"/>
+          </p:nvPr>
+        </p:nvSpPr>
+        <p:spPr/>
+        <p:txBody>
+          <a:bodyPr/>
+          <a:lstStyle/>
+          <a:p>
+            <a:r>
+              <a:rPr lang="pl-PL" dirty="0"/>
+              <a:t>Dlaczego otwieramy Wikipedię?</a:t>
+            </a:r>
+          </a:p>
+        </p:txBody>
+      </p:sp>
+      <p:sp>
+        <p:nvSpPr>
+          <p:cNvPr id="3" name="Symbol zastępczy zawartości 2">
+            <a:extLst>
+              <a:ext uri="{FF2B5EF4-FFF2-40B4-BE49-F238E27FC236}">
+                <a16:creationId xmlns:a16="http://schemas.microsoft.com/office/drawing/2014/main" id="{3F912FD5-44F1-B5A4-DB1C-68AEC4C7DD9A}"/>
+              </a:ext>
+            </a:extLst>
+          </p:cNvPr>
+          <p:cNvSpPr>
+            <a:spLocks noGrp="1"/>
+          </p:cNvSpPr>
+          <p:nvPr>
+            <p:ph idx="1"/>
+          </p:nvPr>
+        </p:nvSpPr>
+        <p:spPr/>
+        <p:txBody>
+          <a:bodyPr/>
+          <a:lstStyle/>
+          <a:p>
+            <a:pPr marL="0" indent="0">
+              <a:buNone/>
+            </a:pPr>
+            <a:r>
+              <a:rPr lang="pl-PL" dirty="0">
+                <a:solidFill>
+                  <a:schemeClr val="tx2"/>
+                </a:solidFill>
+              </a:rPr>
+              <a:t>Analiza powyższych przykładów pokazuje, że Wikipedia nie jest tylko encyklopedią. </a:t>
+            </a:r>
+          </a:p>
+          <a:p>
+            <a:pPr marL="0" indent="0">
+              <a:buNone/>
+            </a:pPr>
+            <a:r>
+              <a:rPr lang="pl-PL" dirty="0">
+                <a:solidFill>
+                  <a:schemeClr val="tx2"/>
+                </a:solidFill>
+              </a:rPr>
+              <a:t>Jest miejscem do którego udajemy się, by zrozumieć świat wokół nas. By zgłębić wydarzenia wywołujące smutek, strach, ciekawość czy ekscytację.</a:t>
+            </a:r>
+          </a:p>
+          <a:p>
+            <a:pPr marL="0" indent="0">
+              <a:buNone/>
+            </a:pPr>
+            <a:endParaRPr lang="pl-PL" dirty="0"/>
+          </a:p>
+          <a:p>
+            <a:pPr marL="0" indent="0">
+              <a:buNone/>
+            </a:pPr>
+            <a:r>
+              <a:rPr lang="pl-PL" b="1" dirty="0"/>
+              <a:t>Wikipedia odpowiada na nasze emocje. Od 25 lat.</a:t>
+            </a:r>
+          </a:p>
+        </p:txBody>
+      </p:sp>
+    </p:spTree>
+    <p:extLst>
+      <p:ext uri="{BB962C8B-B14F-4D97-AF65-F5344CB8AC3E}">
+        <p14:creationId xmlns:p14="http://schemas.microsoft.com/office/powerpoint/2010/main" val="1392380390"/>
+      </p:ext>
+    </p:extLst>
+  </p:cSld>
+  <p:clrMapOvr>
+    <a:masterClrMapping/>
+  </p:clrMapOvr>
+</p:sld>
+</file>
+
 <file path=ppt/theme/theme1.xml><?xml version="1.0" encoding="utf-8"?>
 <a:theme xmlns:a="http://schemas.openxmlformats.org/drawingml/2006/main" name="Motyw pakietu Office">
   <a:themeElements>
-    <a:clrScheme name="Wikimedia_polska">
+    <a:clrScheme name="Niestandardowy 4">
       <a:dk1>
         <a:srgbClr val="000000"/>
       </a:dk1>
@@ -19749,7 +19604,7 @@
         <a:srgbClr val="E5C0C0"/>
       </a:accent3>
       <a:accent4>
-        <a:srgbClr val="CBE0D5"/>
+        <a:srgbClr val="308557"/>
       </a:accent4>
       <a:accent5>
         <a:srgbClr val="EE8019"/>
